--- a/presentation/wwinters_segmentation.pptx
+++ b/presentation/wwinters_segmentation.pptx
@@ -4,33 +4,1076 @@
   <p:sldMasterIdLst>
     <p:sldMasterId id="2147483648" r:id="rId2"/>
   </p:sldMasterIdLst>
+  <p:notesMasterIdLst>
+    <p:notesMasterId r:id="rId3"/>
+  </p:notesMasterIdLst>
   <p:sldIdLst>
-    <p:sldId id="256" r:id="rId3"/>
-    <p:sldId id="257" r:id="rId4"/>
-    <p:sldId id="258" r:id="rId5"/>
-    <p:sldId id="259" r:id="rId6"/>
-    <p:sldId id="260" r:id="rId7"/>
-    <p:sldId id="261" r:id="rId8"/>
-    <p:sldId id="262" r:id="rId9"/>
-    <p:sldId id="263" r:id="rId10"/>
-    <p:sldId id="264" r:id="rId11"/>
-    <p:sldId id="265" r:id="rId12"/>
-    <p:sldId id="266" r:id="rId13"/>
-    <p:sldId id="267" r:id="rId14"/>
-    <p:sldId id="268" r:id="rId15"/>
-    <p:sldId id="269" r:id="rId16"/>
-    <p:sldId id="270" r:id="rId17"/>
-    <p:sldId id="271" r:id="rId18"/>
-    <p:sldId id="272" r:id="rId19"/>
+    <p:sldId id="256" r:id="rId4"/>
+    <p:sldId id="257" r:id="rId5"/>
+    <p:sldId id="258" r:id="rId6"/>
+    <p:sldId id="259" r:id="rId7"/>
+    <p:sldId id="260" r:id="rId8"/>
+    <p:sldId id="261" r:id="rId9"/>
+    <p:sldId id="262" r:id="rId10"/>
+    <p:sldId id="263" r:id="rId11"/>
+    <p:sldId id="264" r:id="rId12"/>
+    <p:sldId id="265" r:id="rId13"/>
+    <p:sldId id="266" r:id="rId14"/>
+    <p:sldId id="267" r:id="rId15"/>
+    <p:sldId id="268" r:id="rId16"/>
+    <p:sldId id="269" r:id="rId17"/>
+    <p:sldId id="270" r:id="rId18"/>
+    <p:sldId id="271" r:id="rId19"/>
+    <p:sldId id="272" r:id="rId20"/>
   </p:sldIdLst>
   <p:sldSz cx="12192000" cy="6858000"/>
   <p:notesSz cx="7772400" cy="10058400"/>
 </p:presentation>
 </file>
 
+<file path=ppt/notesMasters/notesMaster1.xml><?xml version="1.0" encoding="utf-8"?>
+<p:notesMaster xmlns:a="http://schemas.openxmlformats.org/drawingml/2006/main" xmlns:p="http://schemas.openxmlformats.org/presentationml/2006/main" xmlns:r="http://schemas.openxmlformats.org/officeDocument/2006/relationships" xmlns:p14="http://schemas.microsoft.com/office/powerpoint/2010/main" xmlns:p15="http://schemas.microsoft.com/office/powerpoint/2012/main" xmlns:mc="http://schemas.openxmlformats.org/markup-compatibility/2006">
+  <p:cSld>
+    <p:spTree>
+      <p:nvGrpSpPr>
+        <p:cNvPr id="1" name=""/>
+        <p:cNvGrpSpPr/>
+        <p:nvPr/>
+      </p:nvGrpSpPr>
+      <p:grpSpPr>
+        <a:xfrm>
+          <a:off x="0" y="0"/>
+          <a:ext cx="0" cy="0"/>
+          <a:chOff x="0" y="0"/>
+          <a:chExt cx="0" cy="0"/>
+        </a:xfrm>
+      </p:grpSpPr>
+      <p:sp>
+        <p:nvSpPr>
+          <p:cNvPr id="60" name="PlaceHolder 1"/>
+          <p:cNvSpPr>
+            <a:spLocks noGrp="1"/>
+          </p:cNvSpPr>
+          <p:nvPr>
+            <p:ph type="sldImg"/>
+          </p:nvPr>
+        </p:nvSpPr>
+        <p:spPr>
+          <a:xfrm>
+            <a:off x="0" y="764280"/>
+            <a:ext cx="0" cy="0"/>
+          </a:xfrm>
+          <a:prstGeom prst="rect">
+            <a:avLst/>
+          </a:prstGeom>
+          <a:noFill/>
+          <a:ln w="0">
+            <a:noFill/>
+          </a:ln>
+        </p:spPr>
+        <p:txBody>
+          <a:bodyPr lIns="0" rIns="0" tIns="0" bIns="0" anchor="ctr">
+            <a:noAutofit/>
+          </a:bodyPr>
+          <a:p>
+            <a:pPr algn="ctr"/>
+            <a:r>
+              <a:rPr b="0" lang="en-US" sz="4400" strike="noStrike" u="none">
+                <a:solidFill>
+                  <a:srgbClr val="000000"/>
+                </a:solidFill>
+                <a:effectLst/>
+                <a:uFillTx/>
+                <a:latin typeface="Arial"/>
+              </a:rPr>
+              <a:t>Click to move the slide</a:t>
+            </a:r>
+            <a:endParaRPr b="0" lang="en-US" sz="4400" strike="noStrike" u="none">
+              <a:solidFill>
+                <a:srgbClr val="000000"/>
+              </a:solidFill>
+              <a:effectLst/>
+              <a:uFillTx/>
+              <a:latin typeface="Arial"/>
+            </a:endParaRPr>
+          </a:p>
+        </p:txBody>
+      </p:sp>
+      <p:sp>
+        <p:nvSpPr>
+          <p:cNvPr id="61" name="PlaceHolder 2"/>
+          <p:cNvSpPr>
+            <a:spLocks noGrp="1"/>
+          </p:cNvSpPr>
+          <p:nvPr>
+            <p:ph type="body"/>
+          </p:nvPr>
+        </p:nvSpPr>
+        <p:spPr>
+          <a:xfrm>
+            <a:off x="777240" y="4777560"/>
+            <a:ext cx="6217560" cy="4525920"/>
+          </a:xfrm>
+          <a:prstGeom prst="rect">
+            <a:avLst/>
+          </a:prstGeom>
+          <a:noFill/>
+          <a:ln w="0">
+            <a:noFill/>
+          </a:ln>
+        </p:spPr>
+        <p:txBody>
+          <a:bodyPr lIns="0" rIns="0" tIns="0" bIns="0" anchor="t">
+            <a:noAutofit/>
+          </a:bodyPr>
+          <a:p>
+            <a:pPr indent="0">
+              <a:buNone/>
+            </a:pPr>
+            <a:r>
+              <a:rPr b="0" lang="en-US" sz="2000" strike="noStrike" u="none">
+                <a:solidFill>
+                  <a:srgbClr val="000000"/>
+                </a:solidFill>
+                <a:effectLst/>
+                <a:uFillTx/>
+                <a:latin typeface="Arial"/>
+              </a:rPr>
+              <a:t>Click to edit the notes format</a:t>
+            </a:r>
+            <a:endParaRPr b="0" lang="en-US" sz="2000" strike="noStrike" u="none">
+              <a:solidFill>
+                <a:srgbClr val="000000"/>
+              </a:solidFill>
+              <a:effectLst/>
+              <a:uFillTx/>
+              <a:latin typeface="Arial"/>
+            </a:endParaRPr>
+          </a:p>
+        </p:txBody>
+      </p:sp>
+      <p:sp>
+        <p:nvSpPr>
+          <p:cNvPr id="62" name="PlaceHolder 3"/>
+          <p:cNvSpPr>
+            <a:spLocks noGrp="1"/>
+          </p:cNvSpPr>
+          <p:nvPr>
+            <p:ph type="hdr"/>
+          </p:nvPr>
+        </p:nvSpPr>
+        <p:spPr>
+          <a:xfrm>
+            <a:off x="0" y="0"/>
+            <a:ext cx="3372840" cy="502560"/>
+          </a:xfrm>
+          <a:prstGeom prst="rect">
+            <a:avLst/>
+          </a:prstGeom>
+          <a:noFill/>
+          <a:ln w="0">
+            <a:noFill/>
+          </a:ln>
+        </p:spPr>
+        <p:txBody>
+          <a:bodyPr lIns="0" rIns="0" tIns="0" bIns="0" anchor="t">
+            <a:noAutofit/>
+          </a:bodyPr>
+          <a:p>
+            <a:pPr indent="0">
+              <a:buNone/>
+            </a:pPr>
+            <a:r>
+              <a:rPr b="0" lang="en-US" sz="1400" strike="noStrike" u="none">
+                <a:solidFill>
+                  <a:srgbClr val="000000"/>
+                </a:solidFill>
+                <a:effectLst/>
+                <a:uFillTx/>
+                <a:latin typeface="Times New Roman"/>
+              </a:rPr>
+              <a:t>&lt;header&gt;</a:t>
+            </a:r>
+            <a:endParaRPr b="0" lang="en-US" sz="1400" strike="noStrike" u="none">
+              <a:solidFill>
+                <a:srgbClr val="000000"/>
+              </a:solidFill>
+              <a:effectLst/>
+              <a:uFillTx/>
+              <a:latin typeface="Times New Roman"/>
+            </a:endParaRPr>
+          </a:p>
+        </p:txBody>
+      </p:sp>
+      <p:sp>
+        <p:nvSpPr>
+          <p:cNvPr id="63" name="PlaceHolder 4"/>
+          <p:cNvSpPr>
+            <a:spLocks noGrp="1"/>
+          </p:cNvSpPr>
+          <p:nvPr>
+            <p:ph type="dt" idx="34"/>
+          </p:nvPr>
+        </p:nvSpPr>
+        <p:spPr>
+          <a:xfrm>
+            <a:off x="4399200" y="0"/>
+            <a:ext cx="3372840" cy="502560"/>
+          </a:xfrm>
+          <a:prstGeom prst="rect">
+            <a:avLst/>
+          </a:prstGeom>
+          <a:noFill/>
+          <a:ln w="0">
+            <a:noFill/>
+          </a:ln>
+        </p:spPr>
+        <p:txBody>
+          <a:bodyPr lIns="0" rIns="0" tIns="0" bIns="0" anchor="t">
+            <a:noAutofit/>
+          </a:bodyPr>
+          <a:lstStyle>
+            <a:lvl1pPr indent="0" algn="r">
+              <a:buNone/>
+              <a:defRPr b="0" lang="en-US" sz="1400" strike="noStrike" u="none">
+                <a:solidFill>
+                  <a:srgbClr val="000000"/>
+                </a:solidFill>
+                <a:effectLst/>
+                <a:uFillTx/>
+                <a:latin typeface="Times New Roman"/>
+              </a:defRPr>
+            </a:lvl1pPr>
+          </a:lstStyle>
+          <a:p>
+            <a:pPr indent="0" algn="r">
+              <a:buNone/>
+            </a:pPr>
+            <a:r>
+              <a:rPr b="0" lang="en-US" sz="1400" strike="noStrike" u="none">
+                <a:solidFill>
+                  <a:srgbClr val="000000"/>
+                </a:solidFill>
+                <a:effectLst/>
+                <a:uFillTx/>
+                <a:latin typeface="Times New Roman"/>
+              </a:rPr>
+              <a:t>&lt;date/time&gt;</a:t>
+            </a:r>
+            <a:endParaRPr b="0" lang="en-US" sz="1400" strike="noStrike" u="none">
+              <a:solidFill>
+                <a:srgbClr val="000000"/>
+              </a:solidFill>
+              <a:effectLst/>
+              <a:uFillTx/>
+              <a:latin typeface="Times New Roman"/>
+            </a:endParaRPr>
+          </a:p>
+        </p:txBody>
+      </p:sp>
+      <p:sp>
+        <p:nvSpPr>
+          <p:cNvPr id="64" name="PlaceHolder 5"/>
+          <p:cNvSpPr>
+            <a:spLocks noGrp="1"/>
+          </p:cNvSpPr>
+          <p:nvPr>
+            <p:ph type="ftr" idx="35"/>
+          </p:nvPr>
+        </p:nvSpPr>
+        <p:spPr>
+          <a:xfrm>
+            <a:off x="0" y="9555480"/>
+            <a:ext cx="3372840" cy="502560"/>
+          </a:xfrm>
+          <a:prstGeom prst="rect">
+            <a:avLst/>
+          </a:prstGeom>
+          <a:noFill/>
+          <a:ln w="0">
+            <a:noFill/>
+          </a:ln>
+        </p:spPr>
+        <p:txBody>
+          <a:bodyPr lIns="0" rIns="0" tIns="0" bIns="0" anchor="b">
+            <a:noAutofit/>
+          </a:bodyPr>
+          <a:lstStyle>
+            <a:lvl1pPr indent="0">
+              <a:buNone/>
+              <a:defRPr b="0" lang="en-US" sz="1400" strike="noStrike" u="none">
+                <a:solidFill>
+                  <a:srgbClr val="000000"/>
+                </a:solidFill>
+                <a:effectLst/>
+                <a:uFillTx/>
+                <a:latin typeface="Times New Roman"/>
+              </a:defRPr>
+            </a:lvl1pPr>
+          </a:lstStyle>
+          <a:p>
+            <a:pPr indent="0">
+              <a:buNone/>
+            </a:pPr>
+            <a:r>
+              <a:rPr b="0" lang="en-US" sz="1400" strike="noStrike" u="none">
+                <a:solidFill>
+                  <a:srgbClr val="000000"/>
+                </a:solidFill>
+                <a:effectLst/>
+                <a:uFillTx/>
+                <a:latin typeface="Times New Roman"/>
+              </a:rPr>
+              <a:t>&lt;footer&gt;</a:t>
+            </a:r>
+            <a:endParaRPr b="0" lang="en-US" sz="1400" strike="noStrike" u="none">
+              <a:solidFill>
+                <a:srgbClr val="000000"/>
+              </a:solidFill>
+              <a:effectLst/>
+              <a:uFillTx/>
+              <a:latin typeface="Times New Roman"/>
+            </a:endParaRPr>
+          </a:p>
+        </p:txBody>
+      </p:sp>
+      <p:sp>
+        <p:nvSpPr>
+          <p:cNvPr id="65" name="PlaceHolder 6"/>
+          <p:cNvSpPr>
+            <a:spLocks noGrp="1"/>
+          </p:cNvSpPr>
+          <p:nvPr>
+            <p:ph type="sldNum" idx="36"/>
+          </p:nvPr>
+        </p:nvSpPr>
+        <p:spPr>
+          <a:xfrm>
+            <a:off x="4399200" y="9555480"/>
+            <a:ext cx="3372840" cy="502560"/>
+          </a:xfrm>
+          <a:prstGeom prst="rect">
+            <a:avLst/>
+          </a:prstGeom>
+          <a:noFill/>
+          <a:ln w="0">
+            <a:noFill/>
+          </a:ln>
+        </p:spPr>
+        <p:txBody>
+          <a:bodyPr lIns="0" rIns="0" tIns="0" bIns="0" anchor="b">
+            <a:noAutofit/>
+          </a:bodyPr>
+          <a:lstStyle>
+            <a:lvl1pPr indent="0" algn="r">
+              <a:buNone/>
+              <a:defRPr b="0" lang="en-US" sz="1400" strike="noStrike" u="none">
+                <a:solidFill>
+                  <a:srgbClr val="000000"/>
+                </a:solidFill>
+                <a:effectLst/>
+                <a:uFillTx/>
+                <a:latin typeface="Times New Roman"/>
+              </a:defRPr>
+            </a:lvl1pPr>
+          </a:lstStyle>
+          <a:p>
+            <a:pPr indent="0" algn="r">
+              <a:buNone/>
+            </a:pPr>
+            <a:fld id="{C44A86ED-F2A1-41DF-B33C-C2EAF7F30F79}" type="slidenum">
+              <a:rPr b="0" lang="en-US" sz="1400" strike="noStrike" u="none">
+                <a:solidFill>
+                  <a:srgbClr val="000000"/>
+                </a:solidFill>
+                <a:effectLst/>
+                <a:uFillTx/>
+                <a:latin typeface="Times New Roman"/>
+              </a:rPr>
+              <a:t>&lt;number&gt;</a:t>
+            </a:fld>
+            <a:endParaRPr b="0" lang="en-US" sz="1400" strike="noStrike" u="none">
+              <a:solidFill>
+                <a:srgbClr val="000000"/>
+              </a:solidFill>
+              <a:effectLst/>
+              <a:uFillTx/>
+              <a:latin typeface="Times New Roman"/>
+            </a:endParaRPr>
+          </a:p>
+        </p:txBody>
+      </p:sp>
+    </p:spTree>
+  </p:cSld>
+  <p:clrMap bg1="lt1" bg2="lt2" tx1="dk1" tx2="dk2" accent1="accent1" accent2="accent2" accent3="accent3" accent4="accent4" accent5="accent5" accent6="accent6" hlink="hlink" folHlink="folHlink"/>
+</p:notesMaster>
+</file>
+
+<file path=ppt/notesSlides/notesSlide10.xml><?xml version="1.0" encoding="utf-8"?>
+<p:notes xmlns:a="http://schemas.openxmlformats.org/drawingml/2006/main" xmlns:p="http://schemas.openxmlformats.org/presentationml/2006/main" xmlns:r="http://schemas.openxmlformats.org/officeDocument/2006/relationships" xmlns:p14="http://schemas.microsoft.com/office/powerpoint/2010/main" xmlns:p15="http://schemas.microsoft.com/office/powerpoint/2012/main" xmlns:mc="http://schemas.openxmlformats.org/markup-compatibility/2006">
+  <p:cSld>
+    <p:spTree>
+      <p:nvGrpSpPr>
+        <p:cNvPr id="1" name=""/>
+        <p:cNvGrpSpPr/>
+        <p:nvPr/>
+      </p:nvGrpSpPr>
+      <p:grpSpPr>
+        <a:xfrm>
+          <a:off x="0" y="0"/>
+          <a:ext cx="0" cy="0"/>
+          <a:chOff x="0" y="0"/>
+          <a:chExt cx="0" cy="0"/>
+        </a:xfrm>
+      </p:grpSpPr>
+      <p:sp>
+        <p:nvSpPr>
+          <p:cNvPr id="163" name="PlaceHolder 1"/>
+          <p:cNvSpPr>
+            <a:spLocks noGrp="1"/>
+          </p:cNvSpPr>
+          <p:nvPr>
+            <p:ph type="sldImg"/>
+          </p:nvPr>
+        </p:nvSpPr>
+        <p:spPr>
+          <a:xfrm>
+            <a:off x="533520" y="764280"/>
+            <a:ext cx="6704640" cy="3771360"/>
+          </a:xfrm>
+          <a:prstGeom prst="rect">
+            <a:avLst/>
+          </a:prstGeom>
+          <a:ln w="0">
+            <a:noFill/>
+          </a:ln>
+        </p:spPr>
+      </p:sp>
+      <p:sp>
+        <p:nvSpPr>
+          <p:cNvPr id="164" name="PlaceHolder 2"/>
+          <p:cNvSpPr>
+            <a:spLocks noGrp="1"/>
+          </p:cNvSpPr>
+          <p:nvPr>
+            <p:ph type="body"/>
+          </p:nvPr>
+        </p:nvSpPr>
+        <p:spPr>
+          <a:xfrm>
+            <a:off x="777240" y="4777560"/>
+            <a:ext cx="6217560" cy="4525920"/>
+          </a:xfrm>
+          <a:prstGeom prst="rect">
+            <a:avLst/>
+          </a:prstGeom>
+          <a:noFill/>
+          <a:ln w="0">
+            <a:noFill/>
+          </a:ln>
+        </p:spPr>
+        <p:txBody>
+          <a:bodyPr lIns="0" rIns="0" tIns="0" bIns="0" anchor="t">
+            <a:noAutofit/>
+          </a:bodyPr>
+          <a:p>
+            <a:pPr marL="216000" indent="-216000">
+              <a:buClr>
+                <a:srgbClr val="000000"/>
+              </a:buClr>
+              <a:buSzPct val="45000"/>
+              <a:buFont typeface="Wingdings" charset="2"/>
+              <a:buChar char=""/>
+            </a:pPr>
+            <a:r>
+              <a:rPr b="0" lang="en-US" sz="2000" strike="noStrike" u="none">
+                <a:solidFill>
+                  <a:srgbClr val="000000"/>
+                </a:solidFill>
+                <a:effectLst/>
+                <a:uFillTx/>
+                <a:latin typeface="Arial"/>
+              </a:rPr>
+              <a:t>  Clinical-grate MR Image data is available in two file formats</a:t>
+            </a:r>
+            <a:endParaRPr b="0" lang="en-US" sz="2000" strike="noStrike" u="none">
+              <a:solidFill>
+                <a:srgbClr val="000000"/>
+              </a:solidFill>
+              <a:effectLst/>
+              <a:uFillTx/>
+              <a:latin typeface="Arial"/>
+            </a:endParaRPr>
+          </a:p>
+          <a:p>
+            <a:pPr marL="216000" indent="-216000">
+              <a:buClr>
+                <a:srgbClr val="000000"/>
+              </a:buClr>
+              <a:buSzPct val="45000"/>
+              <a:buFont typeface="Wingdings" charset="2"/>
+              <a:buChar char=""/>
+            </a:pPr>
+            <a:r>
+              <a:rPr b="0" lang="en-US" sz="2000" strike="noStrike" u="none">
+                <a:solidFill>
+                  <a:srgbClr val="000000"/>
+                </a:solidFill>
+                <a:effectLst/>
+                <a:uFillTx/>
+                <a:latin typeface="Arial"/>
+              </a:rPr>
+              <a:t>  NifTI (Neuroimaging Informatics Technology Initative) widely used for storing medical and neuroimaging data especially 3D brain images such as MRI and CT scans</a:t>
+            </a:r>
+            <a:endParaRPr b="0" lang="en-US" sz="2000" strike="noStrike" u="none">
+              <a:solidFill>
+                <a:srgbClr val="000000"/>
+              </a:solidFill>
+              <a:effectLst/>
+              <a:uFillTx/>
+              <a:latin typeface="Arial"/>
+            </a:endParaRPr>
+          </a:p>
+          <a:p>
+            <a:pPr marL="216000" indent="-216000">
+              <a:buClr>
+                <a:srgbClr val="000000"/>
+              </a:buClr>
+              <a:buSzPct val="45000"/>
+              <a:buFont typeface="Wingdings" charset="2"/>
+              <a:buChar char=""/>
+            </a:pPr>
+            <a:r>
+              <a:rPr b="0" lang="en-US" sz="2000" strike="noStrike" u="none">
+                <a:solidFill>
+                  <a:srgbClr val="000000"/>
+                </a:solidFill>
+                <a:effectLst/>
+                <a:uFillTx/>
+                <a:latin typeface="Arial"/>
+              </a:rPr>
+              <a:t>  DICOM (Digital Imaging and Communications in Medicine) is an international standard for storing, exchanging and transmitting medical imaging and related information</a:t>
+            </a:r>
+            <a:endParaRPr b="0" lang="en-US" sz="2000" strike="noStrike" u="none">
+              <a:solidFill>
+                <a:srgbClr val="000000"/>
+              </a:solidFill>
+              <a:effectLst/>
+              <a:uFillTx/>
+              <a:latin typeface="Arial"/>
+            </a:endParaRPr>
+          </a:p>
+        </p:txBody>
+      </p:sp>
+    </p:spTree>
+  </p:cSld>
+</p:notes>
+</file>
+
+<file path=ppt/notesSlides/notesSlide14.xml><?xml version="1.0" encoding="utf-8"?>
+<p:notes xmlns:a="http://schemas.openxmlformats.org/drawingml/2006/main" xmlns:p="http://schemas.openxmlformats.org/presentationml/2006/main" xmlns:r="http://schemas.openxmlformats.org/officeDocument/2006/relationships" xmlns:p14="http://schemas.microsoft.com/office/powerpoint/2010/main" xmlns:p15="http://schemas.microsoft.com/office/powerpoint/2012/main" xmlns:mc="http://schemas.openxmlformats.org/markup-compatibility/2006">
+  <p:cSld>
+    <p:spTree>
+      <p:nvGrpSpPr>
+        <p:cNvPr id="1" name=""/>
+        <p:cNvGrpSpPr/>
+        <p:nvPr/>
+      </p:nvGrpSpPr>
+      <p:grpSpPr>
+        <a:xfrm>
+          <a:off x="0" y="0"/>
+          <a:ext cx="0" cy="0"/>
+          <a:chOff x="0" y="0"/>
+          <a:chExt cx="0" cy="0"/>
+        </a:xfrm>
+      </p:grpSpPr>
+      <p:sp>
+        <p:nvSpPr>
+          <p:cNvPr id="165" name="PlaceHolder 1"/>
+          <p:cNvSpPr>
+            <a:spLocks noGrp="1"/>
+          </p:cNvSpPr>
+          <p:nvPr>
+            <p:ph type="sldImg"/>
+          </p:nvPr>
+        </p:nvSpPr>
+        <p:spPr>
+          <a:xfrm>
+            <a:off x="533520" y="764280"/>
+            <a:ext cx="6704640" cy="3771360"/>
+          </a:xfrm>
+          <a:prstGeom prst="rect">
+            <a:avLst/>
+          </a:prstGeom>
+          <a:ln w="0">
+            <a:noFill/>
+          </a:ln>
+        </p:spPr>
+      </p:sp>
+      <p:sp>
+        <p:nvSpPr>
+          <p:cNvPr id="166" name="PlaceHolder 2"/>
+          <p:cNvSpPr>
+            <a:spLocks noGrp="1"/>
+          </p:cNvSpPr>
+          <p:nvPr>
+            <p:ph type="body"/>
+          </p:nvPr>
+        </p:nvSpPr>
+        <p:spPr>
+          <a:xfrm>
+            <a:off x="777240" y="4777560"/>
+            <a:ext cx="6217560" cy="4525920"/>
+          </a:xfrm>
+          <a:prstGeom prst="rect">
+            <a:avLst/>
+          </a:prstGeom>
+          <a:noFill/>
+          <a:ln w="0">
+            <a:noFill/>
+          </a:ln>
+        </p:spPr>
+        <p:txBody>
+          <a:bodyPr lIns="0" rIns="0" tIns="0" bIns="0" anchor="t">
+            <a:noAutofit/>
+          </a:bodyPr>
+          <a:p>
+            <a:pPr marL="216000" indent="-216000">
+              <a:buClr>
+                <a:srgbClr val="000000"/>
+              </a:buClr>
+              <a:buSzPct val="45000"/>
+              <a:buFont typeface="Wingdings" charset="2"/>
+              <a:buChar char=""/>
+            </a:pPr>
+            <a:r>
+              <a:rPr b="0" lang="en-US" sz="2000" strike="noStrike" u="none">
+                <a:solidFill>
+                  <a:srgbClr val="000000"/>
+                </a:solidFill>
+                <a:effectLst/>
+                <a:uFillTx/>
+                <a:latin typeface="Arial"/>
+              </a:rPr>
+              <a:t>Images used in inference were raw NifTI files without any pre-processing</a:t>
+            </a:r>
+            <a:endParaRPr b="0" lang="en-US" sz="2000" strike="noStrike" u="none">
+              <a:solidFill>
+                <a:srgbClr val="000000"/>
+              </a:solidFill>
+              <a:effectLst/>
+              <a:uFillTx/>
+              <a:latin typeface="Arial"/>
+            </a:endParaRPr>
+          </a:p>
+          <a:p>
+            <a:pPr marL="216000" indent="0">
+              <a:buNone/>
+            </a:pPr>
+            <a:r>
+              <a:rPr b="0" lang="en-US" sz="2000" strike="noStrike" u="none">
+                <a:solidFill>
+                  <a:srgbClr val="000000"/>
+                </a:solidFill>
+                <a:effectLst/>
+                <a:uFillTx/>
+                <a:latin typeface="Arial"/>
+              </a:rPr>
+              <a:t> </a:t>
+            </a:r>
+            <a:endParaRPr b="0" lang="en-US" sz="2000" strike="noStrike" u="none">
+              <a:solidFill>
+                <a:srgbClr val="000000"/>
+              </a:solidFill>
+              <a:effectLst/>
+              <a:uFillTx/>
+              <a:latin typeface="Arial"/>
+            </a:endParaRPr>
+          </a:p>
+        </p:txBody>
+      </p:sp>
+    </p:spTree>
+  </p:cSld>
+</p:notes>
+</file>
+
+<file path=ppt/notesSlides/notesSlide6.xml><?xml version="1.0" encoding="utf-8"?>
+<p:notes xmlns:a="http://schemas.openxmlformats.org/drawingml/2006/main" xmlns:p="http://schemas.openxmlformats.org/presentationml/2006/main" xmlns:r="http://schemas.openxmlformats.org/officeDocument/2006/relationships" xmlns:p14="http://schemas.microsoft.com/office/powerpoint/2010/main" xmlns:p15="http://schemas.microsoft.com/office/powerpoint/2012/main" xmlns:mc="http://schemas.openxmlformats.org/markup-compatibility/2006">
+  <p:cSld>
+    <p:spTree>
+      <p:nvGrpSpPr>
+        <p:cNvPr id="1" name=""/>
+        <p:cNvGrpSpPr/>
+        <p:nvPr/>
+      </p:nvGrpSpPr>
+      <p:grpSpPr>
+        <a:xfrm>
+          <a:off x="0" y="0"/>
+          <a:ext cx="0" cy="0"/>
+          <a:chOff x="0" y="0"/>
+          <a:chExt cx="0" cy="0"/>
+        </a:xfrm>
+      </p:grpSpPr>
+      <p:sp>
+        <p:nvSpPr>
+          <p:cNvPr id="159" name="PlaceHolder 1"/>
+          <p:cNvSpPr>
+            <a:spLocks noGrp="1"/>
+          </p:cNvSpPr>
+          <p:nvPr>
+            <p:ph type="sldImg"/>
+          </p:nvPr>
+        </p:nvSpPr>
+        <p:spPr>
+          <a:xfrm>
+            <a:off x="533520" y="764280"/>
+            <a:ext cx="6704640" cy="3771360"/>
+          </a:xfrm>
+          <a:prstGeom prst="rect">
+            <a:avLst/>
+          </a:prstGeom>
+          <a:ln w="0">
+            <a:noFill/>
+          </a:ln>
+        </p:spPr>
+      </p:sp>
+      <p:sp>
+        <p:nvSpPr>
+          <p:cNvPr id="160" name="PlaceHolder 2"/>
+          <p:cNvSpPr>
+            <a:spLocks noGrp="1"/>
+          </p:cNvSpPr>
+          <p:nvPr>
+            <p:ph type="body"/>
+          </p:nvPr>
+        </p:nvSpPr>
+        <p:spPr>
+          <a:xfrm>
+            <a:off x="777240" y="4777560"/>
+            <a:ext cx="6217560" cy="4525920"/>
+          </a:xfrm>
+          <a:prstGeom prst="rect">
+            <a:avLst/>
+          </a:prstGeom>
+          <a:noFill/>
+          <a:ln w="0">
+            <a:noFill/>
+          </a:ln>
+        </p:spPr>
+        <p:txBody>
+          <a:bodyPr lIns="0" rIns="0" tIns="0" bIns="0" anchor="t">
+            <a:noAutofit/>
+          </a:bodyPr>
+          <a:p>
+            <a:pPr marL="216000" indent="-216000">
+              <a:buClr>
+                <a:srgbClr val="000000"/>
+              </a:buClr>
+              <a:buSzPct val="45000"/>
+              <a:buFont typeface="Wingdings" charset="2"/>
+              <a:buChar char=""/>
+            </a:pPr>
+            <a:r>
+              <a:rPr b="0" lang="en-US" sz="2000" strike="noStrike" u="none">
+                <a:solidFill>
+                  <a:srgbClr val="000000"/>
+                </a:solidFill>
+                <a:effectLst/>
+                <a:uFillTx/>
+                <a:latin typeface="Arial"/>
+              </a:rPr>
+              <a:t>The core tumor is actually part of the non-enhancing region of the segmentation.  </a:t>
+            </a:r>
+            <a:endParaRPr b="0" lang="en-US" sz="2000" strike="noStrike" u="none">
+              <a:solidFill>
+                <a:srgbClr val="000000"/>
+              </a:solidFill>
+              <a:effectLst/>
+              <a:uFillTx/>
+              <a:latin typeface="Arial"/>
+            </a:endParaRPr>
+          </a:p>
+          <a:p>
+            <a:pPr marL="216000" indent="0">
+              <a:buNone/>
+            </a:pPr>
+            <a:endParaRPr b="0" lang="en-US" sz="2000" strike="noStrike" u="none">
+              <a:solidFill>
+                <a:srgbClr val="000000"/>
+              </a:solidFill>
+              <a:effectLst/>
+              <a:uFillTx/>
+              <a:latin typeface="Arial"/>
+            </a:endParaRPr>
+          </a:p>
+          <a:p>
+            <a:pPr marL="216000" indent="-216000">
+              <a:buClr>
+                <a:srgbClr val="000000"/>
+              </a:buClr>
+              <a:buSzPct val="45000"/>
+              <a:buFont typeface="Wingdings" charset="2"/>
+              <a:buChar char=""/>
+            </a:pPr>
+            <a:r>
+              <a:rPr b="0" lang="en-US" sz="2000" strike="noStrike" u="none">
+                <a:solidFill>
+                  <a:srgbClr val="000000"/>
+                </a:solidFill>
+                <a:effectLst/>
+                <a:uFillTx/>
+                <a:latin typeface="Arial"/>
+              </a:rPr>
+              <a:t>Without segmentation it may have been missed or incorrectly diagnosed </a:t>
+            </a:r>
+            <a:endParaRPr b="0" lang="en-US" sz="2000" strike="noStrike" u="none">
+              <a:solidFill>
+                <a:srgbClr val="000000"/>
+              </a:solidFill>
+              <a:effectLst/>
+              <a:uFillTx/>
+              <a:latin typeface="Arial"/>
+            </a:endParaRPr>
+          </a:p>
+        </p:txBody>
+      </p:sp>
+    </p:spTree>
+  </p:cSld>
+</p:notes>
+</file>
+
+<file path=ppt/notesSlides/notesSlide7.xml><?xml version="1.0" encoding="utf-8"?>
+<p:notes xmlns:a="http://schemas.openxmlformats.org/drawingml/2006/main" xmlns:p="http://schemas.openxmlformats.org/presentationml/2006/main" xmlns:r="http://schemas.openxmlformats.org/officeDocument/2006/relationships" xmlns:p14="http://schemas.microsoft.com/office/powerpoint/2010/main" xmlns:p15="http://schemas.microsoft.com/office/powerpoint/2012/main" xmlns:mc="http://schemas.openxmlformats.org/markup-compatibility/2006">
+  <p:cSld>
+    <p:spTree>
+      <p:nvGrpSpPr>
+        <p:cNvPr id="1" name=""/>
+        <p:cNvGrpSpPr/>
+        <p:nvPr/>
+      </p:nvGrpSpPr>
+      <p:grpSpPr>
+        <a:xfrm>
+          <a:off x="0" y="0"/>
+          <a:ext cx="0" cy="0"/>
+          <a:chOff x="0" y="0"/>
+          <a:chExt cx="0" cy="0"/>
+        </a:xfrm>
+      </p:grpSpPr>
+      <p:sp>
+        <p:nvSpPr>
+          <p:cNvPr id="161" name="PlaceHolder 1"/>
+          <p:cNvSpPr>
+            <a:spLocks noGrp="1"/>
+          </p:cNvSpPr>
+          <p:nvPr>
+            <p:ph type="sldImg"/>
+          </p:nvPr>
+        </p:nvSpPr>
+        <p:spPr>
+          <a:xfrm>
+            <a:off x="533520" y="764280"/>
+            <a:ext cx="6704640" cy="3771360"/>
+          </a:xfrm>
+          <a:prstGeom prst="rect">
+            <a:avLst/>
+          </a:prstGeom>
+          <a:ln w="0">
+            <a:noFill/>
+          </a:ln>
+        </p:spPr>
+      </p:sp>
+      <p:sp>
+        <p:nvSpPr>
+          <p:cNvPr id="162" name="PlaceHolder 2"/>
+          <p:cNvSpPr>
+            <a:spLocks noGrp="1"/>
+          </p:cNvSpPr>
+          <p:nvPr>
+            <p:ph type="body"/>
+          </p:nvPr>
+        </p:nvSpPr>
+        <p:spPr>
+          <a:xfrm>
+            <a:off x="777240" y="4777560"/>
+            <a:ext cx="6217560" cy="4525920"/>
+          </a:xfrm>
+          <a:prstGeom prst="rect">
+            <a:avLst/>
+          </a:prstGeom>
+          <a:noFill/>
+          <a:ln w="0">
+            <a:noFill/>
+          </a:ln>
+        </p:spPr>
+        <p:txBody>
+          <a:bodyPr lIns="0" rIns="0" tIns="0" bIns="0" anchor="t">
+            <a:noAutofit/>
+          </a:bodyPr>
+          <a:p>
+            <a:pPr marL="216000" indent="-216000">
+              <a:buClr>
+                <a:srgbClr val="000000"/>
+              </a:buClr>
+              <a:buSzPct val="45000"/>
+              <a:buFont typeface="Wingdings" charset="2"/>
+              <a:buChar char=""/>
+            </a:pPr>
+            <a:r>
+              <a:rPr b="0" lang="en-US" sz="2000" strike="noStrike" u="none">
+                <a:solidFill>
+                  <a:srgbClr val="000000"/>
+                </a:solidFill>
+                <a:effectLst/>
+                <a:uFillTx/>
+                <a:latin typeface="Arial"/>
+              </a:rPr>
+              <a:t>The non-enhancing tumor tissue is in blue</a:t>
+            </a:r>
+            <a:endParaRPr b="0" lang="en-US" sz="2000" strike="noStrike" u="none">
+              <a:solidFill>
+                <a:srgbClr val="000000"/>
+              </a:solidFill>
+              <a:effectLst/>
+              <a:uFillTx/>
+              <a:latin typeface="Arial"/>
+            </a:endParaRPr>
+          </a:p>
+          <a:p>
+            <a:pPr marL="216000" indent="0">
+              <a:buNone/>
+            </a:pPr>
+            <a:endParaRPr b="0" lang="en-US" sz="2000" strike="noStrike" u="none">
+              <a:solidFill>
+                <a:srgbClr val="000000"/>
+              </a:solidFill>
+              <a:effectLst/>
+              <a:uFillTx/>
+              <a:latin typeface="Arial"/>
+            </a:endParaRPr>
+          </a:p>
+          <a:p>
+            <a:pPr marL="216000" indent="-216000">
+              <a:buClr>
+                <a:srgbClr val="000000"/>
+              </a:buClr>
+              <a:buSzPct val="45000"/>
+              <a:buFont typeface="Wingdings" charset="2"/>
+              <a:buChar char=""/>
+            </a:pPr>
+            <a:r>
+              <a:rPr b="0" lang="en-US" sz="2000" strike="noStrike" u="none">
+                <a:solidFill>
+                  <a:srgbClr val="000000"/>
+                </a:solidFill>
+                <a:effectLst/>
+                <a:uFillTx/>
+                <a:latin typeface="Arial"/>
+              </a:rPr>
+              <a:t>Yellow indicates necrotic tissue or disruptions in the brain-blood barrier (BBB)</a:t>
+            </a:r>
+            <a:endParaRPr b="0" lang="en-US" sz="2000" strike="noStrike" u="none">
+              <a:solidFill>
+                <a:srgbClr val="000000"/>
+              </a:solidFill>
+              <a:effectLst/>
+              <a:uFillTx/>
+              <a:latin typeface="Arial"/>
+            </a:endParaRPr>
+          </a:p>
+          <a:p>
+            <a:pPr marL="216000" indent="0">
+              <a:buNone/>
+            </a:pPr>
+            <a:endParaRPr b="0" lang="en-US" sz="2000" strike="noStrike" u="none">
+              <a:solidFill>
+                <a:srgbClr val="000000"/>
+              </a:solidFill>
+              <a:effectLst/>
+              <a:uFillTx/>
+              <a:latin typeface="Arial"/>
+            </a:endParaRPr>
+          </a:p>
+          <a:p>
+            <a:pPr marL="216000" indent="-216000">
+              <a:buClr>
+                <a:srgbClr val="000000"/>
+              </a:buClr>
+              <a:buSzPct val="45000"/>
+              <a:buFont typeface="Wingdings" charset="2"/>
+              <a:buChar char=""/>
+            </a:pPr>
+            <a:r>
+              <a:rPr b="0" lang="en-US" sz="2000" strike="noStrike" u="none">
+                <a:solidFill>
+                  <a:srgbClr val="000000"/>
+                </a:solidFill>
+                <a:effectLst/>
+                <a:uFillTx/>
+                <a:latin typeface="Arial"/>
+              </a:rPr>
+              <a:t>I am not sure why Enhancing Tumor class 4 is not displaying correctly in its plot </a:t>
+            </a:r>
+            <a:endParaRPr b="0" lang="en-US" sz="2000" strike="noStrike" u="none">
+              <a:solidFill>
+                <a:srgbClr val="000000"/>
+              </a:solidFill>
+              <a:effectLst/>
+              <a:uFillTx/>
+              <a:latin typeface="Arial"/>
+            </a:endParaRPr>
+          </a:p>
+          <a:p>
+            <a:pPr marL="216000" indent="0">
+              <a:buNone/>
+            </a:pPr>
+            <a:endParaRPr b="0" lang="en-US" sz="2000" strike="noStrike" u="none">
+              <a:solidFill>
+                <a:srgbClr val="000000"/>
+              </a:solidFill>
+              <a:effectLst/>
+              <a:uFillTx/>
+              <a:latin typeface="Arial"/>
+            </a:endParaRPr>
+          </a:p>
+          <a:p>
+            <a:pPr marL="216000" indent="-216000">
+              <a:buClr>
+                <a:srgbClr val="000000"/>
+              </a:buClr>
+              <a:buSzPct val="45000"/>
+              <a:buFont typeface="Wingdings" charset="2"/>
+              <a:buChar char=""/>
+            </a:pPr>
+            <a:r>
+              <a:rPr b="0" lang="en-US" sz="2000" strike="noStrike" u="none">
+                <a:solidFill>
+                  <a:srgbClr val="000000"/>
+                </a:solidFill>
+                <a:effectLst/>
+                <a:uFillTx/>
+                <a:latin typeface="Arial"/>
+              </a:rPr>
+              <a:t>Green is edema or swelling</a:t>
+            </a:r>
+            <a:endParaRPr b="0" lang="en-US" sz="2000" strike="noStrike" u="none">
+              <a:solidFill>
+                <a:srgbClr val="000000"/>
+              </a:solidFill>
+              <a:effectLst/>
+              <a:uFillTx/>
+              <a:latin typeface="Arial"/>
+            </a:endParaRPr>
+          </a:p>
+        </p:txBody>
+      </p:sp>
+    </p:spTree>
+  </p:cSld>
+</p:notes>
+</file>
+
 <file path=ppt/slideLayouts/slideLayout1.xml><?xml version="1.0" encoding="utf-8"?>
-<p:sldLayout xmlns:a="http://schemas.openxmlformats.org/drawingml/2006/main" xmlns:p="http://schemas.openxmlformats.org/presentationml/2006/main" xmlns:r="http://schemas.openxmlformats.org/officeDocument/2006/relationships" xmlns:p14="http://schemas.microsoft.com/office/powerpoint/2010/main" xmlns:p15="http://schemas.microsoft.com/office/powerpoint/2012/main" xmlns:mc="http://schemas.openxmlformats.org/markup-compatibility/2006" type="blank" preserve="1">
-  <p:cSld name="Picture with Caption">
+<p:sldLayout xmlns:a="http://schemas.openxmlformats.org/drawingml/2006/main" xmlns:p="http://schemas.openxmlformats.org/presentationml/2006/main" xmlns:r="http://schemas.openxmlformats.org/officeDocument/2006/relationships" xmlns:p14="http://schemas.microsoft.com/office/powerpoint/2010/main" xmlns:p15="http://schemas.microsoft.com/office/powerpoint/2012/main" xmlns:mc="http://schemas.openxmlformats.org/markup-compatibility/2006" type="titleOnly" preserve="1">
+  <p:cSld name="Title Only">
     <p:bg>
       <p:bgPr>
         <a:solidFill>
@@ -64,8 +1107,8 @@
         </p:nvSpPr>
         <p:spPr>
           <a:xfrm>
-            <a:off x="839880" y="457200"/>
-            <a:ext cx="3926520" cy="1594440"/>
+            <a:off x="838080" y="365040"/>
+            <a:ext cx="10509480" cy="1319400"/>
           </a:xfrm>
           <a:prstGeom prst="rect">
             <a:avLst/>
@@ -76,7 +1119,7 @@
           </a:ln>
         </p:spPr>
         <p:txBody>
-          <a:bodyPr lIns="91440" rIns="91440" tIns="45720" bIns="45720" anchor="b">
+          <a:bodyPr lIns="91440" rIns="91440" tIns="45720" bIns="45720" anchor="ctr">
             <a:noAutofit/>
           </a:bodyPr>
           <a:p>
@@ -90,7 +1133,7 @@
               </a:tabLst>
             </a:pPr>
             <a:r>
-              <a:rPr b="0" lang="en-US" sz="3200" strike="noStrike" u="none">
+              <a:rPr b="0" lang="en-US" sz="4400" strike="noStrike" u="none">
                 <a:solidFill>
                   <a:schemeClr val="dk1"/>
                 </a:solidFill>
@@ -100,7 +1143,7 @@
               </a:rPr>
               <a:t>Click to edit Master title style</a:t>
             </a:r>
-            <a:endParaRPr b="0" lang="en-US" sz="3200" strike="noStrike" u="none">
+            <a:endParaRPr b="0" lang="en-US" sz="4400" strike="noStrike" u="none">
               <a:solidFill>
                 <a:srgbClr val="000000"/>
               </a:solidFill>
@@ -118,405 +1161,13 @@
             <a:spLocks noGrp="1"/>
           </p:cNvSpPr>
           <p:nvPr>
-            <p:ph type="body"/>
-          </p:nvPr>
-        </p:nvSpPr>
-        <p:spPr>
-          <a:xfrm>
-            <a:off x="5183280" y="987480"/>
-            <a:ext cx="6166440" cy="4867920"/>
-          </a:xfrm>
-          <a:prstGeom prst="rect">
-            <a:avLst/>
-          </a:prstGeom>
-          <a:noFill/>
-          <a:ln w="0">
-            <a:noFill/>
-          </a:ln>
-        </p:spPr>
-        <p:txBody>
-          <a:bodyPr lIns="90000" rIns="90000" tIns="45000" bIns="45000" anchor="t">
-            <a:noAutofit/>
-          </a:bodyPr>
-          <a:p>
-            <a:pPr indent="0" defTabSz="914400">
-              <a:lnSpc>
-                <a:spcPct val="100000"/>
-              </a:lnSpc>
-              <a:buNone/>
-              <a:tabLst>
-                <a:tab algn="l" pos="0"/>
-              </a:tabLst>
-            </a:pPr>
-            <a:r>
-              <a:rPr b="0" lang="en-US" sz="3200" strike="noStrike" u="none">
-                <a:solidFill>
-                  <a:schemeClr val="dk1"/>
-                </a:solidFill>
-                <a:effectLst/>
-                <a:uFillTx/>
-                <a:latin typeface="Calibri"/>
-              </a:rPr>
-              <a:t>Click icon to add picture</a:t>
-            </a:r>
-            <a:endParaRPr b="0" lang="en-US" sz="3200" strike="noStrike" u="none">
-              <a:solidFill>
-                <a:srgbClr val="000000"/>
-              </a:solidFill>
-              <a:effectLst/>
-              <a:uFillTx/>
-              <a:latin typeface="Arial"/>
-            </a:endParaRPr>
-          </a:p>
-        </p:txBody>
-      </p:sp>
-      <p:sp>
-        <p:nvSpPr>
-          <p:cNvPr id="4" name="PlaceHolder 3"/>
-          <p:cNvSpPr>
-            <a:spLocks noGrp="1"/>
-          </p:cNvSpPr>
-          <p:nvPr>
-            <p:ph type="body"/>
-          </p:nvPr>
-        </p:nvSpPr>
-        <p:spPr>
-          <a:xfrm>
-            <a:off x="839880" y="2057400"/>
-            <a:ext cx="3926520" cy="3805920"/>
-          </a:xfrm>
-          <a:prstGeom prst="rect">
-            <a:avLst/>
-          </a:prstGeom>
-          <a:noFill/>
-          <a:ln w="0">
-            <a:noFill/>
-          </a:ln>
-        </p:spPr>
-        <p:txBody>
-          <a:bodyPr lIns="91440" rIns="91440" tIns="45720" bIns="45720" anchor="t">
-            <a:noAutofit/>
-          </a:bodyPr>
-          <a:p>
-            <a:pPr indent="0" defTabSz="914400">
-              <a:lnSpc>
-                <a:spcPct val="90000"/>
-              </a:lnSpc>
-              <a:spcBef>
-                <a:spcPts val="1001"/>
-              </a:spcBef>
-              <a:buNone/>
-              <a:tabLst>
-                <a:tab algn="l" pos="0"/>
-              </a:tabLst>
-            </a:pPr>
-            <a:r>
-              <a:rPr b="0" lang="en-US" sz="1600" strike="noStrike" u="none">
-                <a:solidFill>
-                  <a:schemeClr val="dk1"/>
-                </a:solidFill>
-                <a:effectLst/>
-                <a:uFillTx/>
-                <a:latin typeface="Calibri"/>
-              </a:rPr>
-              <a:t>Click to edit Master text styles</a:t>
-            </a:r>
-            <a:endParaRPr b="0" lang="en-US" sz="1600" strike="noStrike" u="none">
-              <a:solidFill>
-                <a:srgbClr val="000000"/>
-              </a:solidFill>
-              <a:effectLst/>
-              <a:uFillTx/>
-              <a:latin typeface="Arial"/>
-            </a:endParaRPr>
-          </a:p>
-        </p:txBody>
-      </p:sp>
-      <p:sp>
-        <p:nvSpPr>
-          <p:cNvPr id="5" name="PlaceHolder 4"/>
-          <p:cNvSpPr>
-            <a:spLocks noGrp="1"/>
-          </p:cNvSpPr>
-          <p:nvPr>
             <p:ph type="dt" idx="1"/>
           </p:nvPr>
         </p:nvSpPr>
         <p:spPr>
           <a:xfrm>
             <a:off x="838080" y="6356520"/>
-            <a:ext cx="2737440" cy="359280"/>
-          </a:xfrm>
-          <a:prstGeom prst="rect">
-            <a:avLst/>
-          </a:prstGeom>
-          <a:noFill/>
-          <a:ln w="0">
-            <a:noFill/>
-          </a:ln>
-        </p:spPr>
-        <p:txBody>
-          <a:bodyPr lIns="91440" rIns="91440" tIns="45720" bIns="45720" anchor="ctr">
-            <a:noAutofit/>
-          </a:bodyPr>
-          <a:lstStyle>
-            <a:lvl1pPr indent="0" defTabSz="914400">
-              <a:lnSpc>
-                <a:spcPct val="100000"/>
-              </a:lnSpc>
-              <a:buNone/>
-              <a:tabLst>
-                <a:tab algn="l" pos="0"/>
-              </a:tabLst>
-              <a:defRPr b="0" lang="en-US" sz="1200" strike="noStrike" u="none">
-                <a:solidFill>
-                  <a:schemeClr val="dk1">
-                    <a:tint val="75000"/>
-                  </a:schemeClr>
-                </a:solidFill>
-                <a:effectLst/>
-                <a:uFillTx/>
-                <a:latin typeface="Calibri"/>
-              </a:defRPr>
-            </a:lvl1pPr>
-          </a:lstStyle>
-          <a:p>
-            <a:pPr indent="0" defTabSz="914400">
-              <a:lnSpc>
-                <a:spcPct val="100000"/>
-              </a:lnSpc>
-              <a:buNone/>
-              <a:tabLst>
-                <a:tab algn="l" pos="0"/>
-              </a:tabLst>
-            </a:pPr>
-            <a:r>
-              <a:rPr b="0" lang="en-US" sz="1200" strike="noStrike" u="none">
-                <a:solidFill>
-                  <a:schemeClr val="dk1">
-                    <a:tint val="75000"/>
-                  </a:schemeClr>
-                </a:solidFill>
-                <a:effectLst/>
-                <a:uFillTx/>
-                <a:latin typeface="Calibri"/>
-              </a:rPr>
-              <a:t> </a:t>
-            </a:r>
-            <a:endParaRPr b="0" lang="en-US" sz="1200" strike="noStrike" u="none">
-              <a:solidFill>
-                <a:srgbClr val="000000"/>
-              </a:solidFill>
-              <a:effectLst/>
-              <a:uFillTx/>
-              <a:latin typeface="Times New Roman"/>
-            </a:endParaRPr>
-          </a:p>
-        </p:txBody>
-      </p:sp>
-      <p:sp>
-        <p:nvSpPr>
-          <p:cNvPr id="6" name="PlaceHolder 5"/>
-          <p:cNvSpPr>
-            <a:spLocks noGrp="1"/>
-          </p:cNvSpPr>
-          <p:nvPr>
-            <p:ph type="ftr" idx="2"/>
-          </p:nvPr>
-        </p:nvSpPr>
-        <p:spPr>
-          <a:xfrm>
-            <a:off x="4038480" y="6356520"/>
-            <a:ext cx="4109040" cy="359280"/>
-          </a:xfrm>
-          <a:prstGeom prst="rect">
-            <a:avLst/>
-          </a:prstGeom>
-          <a:noFill/>
-          <a:ln w="0">
-            <a:noFill/>
-          </a:ln>
-        </p:spPr>
-        <p:txBody>
-          <a:bodyPr lIns="91440" rIns="91440" tIns="45720" bIns="45720" anchor="ctr">
-            <a:noAutofit/>
-          </a:bodyPr>
-          <a:lstStyle>
-            <a:lvl1pPr indent="0" algn="ctr">
-              <a:lnSpc>
-                <a:spcPct val="100000"/>
-              </a:lnSpc>
-              <a:buNone/>
-              <a:tabLst>
-                <a:tab algn="l" pos="0"/>
-              </a:tabLst>
-              <a:defRPr b="0" lang="en-US" sz="1400" strike="noStrike" u="none">
-                <a:solidFill>
-                  <a:srgbClr val="000000"/>
-                </a:solidFill>
-                <a:effectLst/>
-                <a:uFillTx/>
-                <a:latin typeface="Times New Roman"/>
-              </a:defRPr>
-            </a:lvl1pPr>
-          </a:lstStyle>
-          <a:p>
-            <a:pPr indent="0" algn="ctr">
-              <a:lnSpc>
-                <a:spcPct val="100000"/>
-              </a:lnSpc>
-              <a:buNone/>
-              <a:tabLst>
-                <a:tab algn="l" pos="0"/>
-              </a:tabLst>
-            </a:pPr>
-            <a:r>
-              <a:rPr b="0" lang="en-US" sz="1400" strike="noStrike" u="none">
-                <a:solidFill>
-                  <a:srgbClr val="000000"/>
-                </a:solidFill>
-                <a:effectLst/>
-                <a:uFillTx/>
-                <a:latin typeface="Times New Roman"/>
-              </a:rPr>
-              <a:t> </a:t>
-            </a:r>
-            <a:endParaRPr b="0" lang="en-US" sz="1400" strike="noStrike" u="none">
-              <a:solidFill>
-                <a:srgbClr val="000000"/>
-              </a:solidFill>
-              <a:effectLst/>
-              <a:uFillTx/>
-              <a:latin typeface="Times New Roman"/>
-            </a:endParaRPr>
-          </a:p>
-        </p:txBody>
-      </p:sp>
-      <p:sp>
-        <p:nvSpPr>
-          <p:cNvPr id="7" name="PlaceHolder 6"/>
-          <p:cNvSpPr>
-            <a:spLocks noGrp="1"/>
-          </p:cNvSpPr>
-          <p:nvPr>
-            <p:ph type="sldNum" idx="3"/>
-          </p:nvPr>
-        </p:nvSpPr>
-        <p:spPr>
-          <a:xfrm>
-            <a:off x="8610480" y="6356520"/>
-            <a:ext cx="2737440" cy="359280"/>
-          </a:xfrm>
-          <a:prstGeom prst="rect">
-            <a:avLst/>
-          </a:prstGeom>
-          <a:noFill/>
-          <a:ln w="0">
-            <a:noFill/>
-          </a:ln>
-        </p:spPr>
-        <p:txBody>
-          <a:bodyPr lIns="91440" rIns="91440" tIns="45720" bIns="45720" anchor="ctr">
-            <a:noAutofit/>
-          </a:bodyPr>
-          <a:lstStyle>
-            <a:lvl1pPr indent="0" algn="r" defTabSz="914400">
-              <a:lnSpc>
-                <a:spcPct val="100000"/>
-              </a:lnSpc>
-              <a:buNone/>
-              <a:tabLst>
-                <a:tab algn="l" pos="0"/>
-              </a:tabLst>
-              <a:defRPr b="0" lang="en-US" sz="1200" strike="noStrike" u="none">
-                <a:solidFill>
-                  <a:schemeClr val="dk1">
-                    <a:tint val="75000"/>
-                  </a:schemeClr>
-                </a:solidFill>
-                <a:effectLst/>
-                <a:uFillTx/>
-                <a:latin typeface="Calibri"/>
-              </a:defRPr>
-            </a:lvl1pPr>
-          </a:lstStyle>
-          <a:p>
-            <a:pPr indent="0" algn="r" defTabSz="914400">
-              <a:lnSpc>
-                <a:spcPct val="100000"/>
-              </a:lnSpc>
-              <a:buNone/>
-              <a:tabLst>
-                <a:tab algn="l" pos="0"/>
-              </a:tabLst>
-            </a:pPr>
-            <a:fld id="{4449A0F7-FBB0-4E08-947C-098427273625}" type="slidenum">
-              <a:rPr b="0" lang="en-US" sz="1200" strike="noStrike" u="none">
-                <a:solidFill>
-                  <a:schemeClr val="dk1">
-                    <a:tint val="75000"/>
-                  </a:schemeClr>
-                </a:solidFill>
-                <a:effectLst/>
-                <a:uFillTx/>
-                <a:latin typeface="Calibri"/>
-              </a:rPr>
-              <a:t>6</a:t>
-            </a:fld>
-            <a:endParaRPr b="0" lang="en-US" sz="1200" strike="noStrike" u="none">
-              <a:solidFill>
-                <a:srgbClr val="000000"/>
-              </a:solidFill>
-              <a:effectLst/>
-              <a:uFillTx/>
-              <a:latin typeface="Times New Roman"/>
-            </a:endParaRPr>
-          </a:p>
-        </p:txBody>
-      </p:sp>
-    </p:spTree>
-  </p:cSld>
-</p:sldLayout>
-</file>
-
-<file path=ppt/slideLayouts/slideLayout10.xml><?xml version="1.0" encoding="utf-8"?>
-<p:sldLayout xmlns:a="http://schemas.openxmlformats.org/drawingml/2006/main" xmlns:p="http://schemas.openxmlformats.org/presentationml/2006/main" xmlns:r="http://schemas.openxmlformats.org/officeDocument/2006/relationships" xmlns:p14="http://schemas.microsoft.com/office/powerpoint/2010/main" xmlns:p15="http://schemas.microsoft.com/office/powerpoint/2012/main" xmlns:mc="http://schemas.openxmlformats.org/markup-compatibility/2006" type="blank" preserve="1">
-  <p:cSld name="Blank">
-    <p:bg>
-      <p:bgPr>
-        <a:solidFill>
-          <a:srgbClr val="ffffff"/>
-        </a:solidFill>
-      </p:bgPr>
-    </p:bg>
-    <p:spTree>
-      <p:nvGrpSpPr>
-        <p:cNvPr id="1" name=""/>
-        <p:cNvGrpSpPr/>
-        <p:nvPr/>
-      </p:nvGrpSpPr>
-      <p:grpSpPr>
-        <a:xfrm>
-          <a:off x="0" y="0"/>
-          <a:ext cx="0" cy="0"/>
-          <a:chOff x="0" y="0"/>
-          <a:chExt cx="0" cy="0"/>
-        </a:xfrm>
-      </p:grpSpPr>
-      <p:sp>
-        <p:nvSpPr>
-          <p:cNvPr id="51" name="PlaceHolder 1"/>
-          <p:cNvSpPr>
-            <a:spLocks noGrp="1"/>
-          </p:cNvSpPr>
-          <p:nvPr>
-            <p:ph type="dt" idx="28"/>
-          </p:nvPr>
-        </p:nvSpPr>
-        <p:spPr>
-          <a:xfrm>
-            <a:off x="838080" y="6356520"/>
-            <a:ext cx="2737440" cy="359280"/>
+            <a:ext cx="2737080" cy="358920"/>
           </a:xfrm>
           <a:prstGeom prst="rect">
             <a:avLst/>
@@ -587,18 +1238,18 @@
       </p:sp>
       <p:sp>
         <p:nvSpPr>
-          <p:cNvPr id="52" name="PlaceHolder 2"/>
+          <p:cNvPr id="4" name="PlaceHolder 3"/>
           <p:cNvSpPr>
             <a:spLocks noGrp="1"/>
           </p:cNvSpPr>
           <p:nvPr>
-            <p:ph type="ftr" idx="29"/>
+            <p:ph type="ftr" idx="2"/>
           </p:nvPr>
         </p:nvSpPr>
         <p:spPr>
           <a:xfrm>
             <a:off x="4038480" y="6356520"/>
-            <a:ext cx="4109040" cy="359280"/>
+            <a:ext cx="4108680" cy="358920"/>
           </a:xfrm>
           <a:prstGeom prst="rect">
             <a:avLst/>
@@ -665,18 +1316,18 @@
       </p:sp>
       <p:sp>
         <p:nvSpPr>
-          <p:cNvPr id="53" name="PlaceHolder 3"/>
+          <p:cNvPr id="5" name="PlaceHolder 4"/>
           <p:cNvSpPr>
             <a:spLocks noGrp="1"/>
           </p:cNvSpPr>
           <p:nvPr>
-            <p:ph type="sldNum" idx="30"/>
+            <p:ph type="sldNum" idx="3"/>
           </p:nvPr>
         </p:nvSpPr>
         <p:spPr>
           <a:xfrm>
             <a:off x="8610480" y="6356520"/>
-            <a:ext cx="2737440" cy="359280"/>
+            <a:ext cx="2737080" cy="358920"/>
           </a:xfrm>
           <a:prstGeom prst="rect">
             <a:avLst/>
@@ -721,7 +1372,7 @@
                 <a:tab algn="l" pos="0"/>
               </a:tabLst>
             </a:pPr>
-            <a:fld id="{37498554-642B-4720-B2E3-AF9B2CB68C93}" type="slidenum">
+            <a:fld id="{690F3184-955E-41A9-BCE5-675651929F59}" type="slidenum">
               <a:rPr b="0" lang="en-US" sz="1200" strike="noStrike" u="none">
                 <a:solidFill>
                   <a:schemeClr val="dk1">
@@ -750,9 +1401,9 @@
 </p:sldLayout>
 </file>
 
-<file path=ppt/slideLayouts/slideLayout11.xml><?xml version="1.0" encoding="utf-8"?>
-<p:sldLayout xmlns:a="http://schemas.openxmlformats.org/drawingml/2006/main" xmlns:p="http://schemas.openxmlformats.org/presentationml/2006/main" xmlns:r="http://schemas.openxmlformats.org/officeDocument/2006/relationships" xmlns:p14="http://schemas.microsoft.com/office/powerpoint/2010/main" xmlns:p15="http://schemas.microsoft.com/office/powerpoint/2012/main" xmlns:mc="http://schemas.openxmlformats.org/markup-compatibility/2006" type="blank" preserve="1">
-  <p:cSld name="Content with Caption">
+<file path=ppt/slideLayouts/slideLayout10.xml><?xml version="1.0" encoding="utf-8"?>
+<p:sldLayout xmlns:a="http://schemas.openxmlformats.org/drawingml/2006/main" xmlns:p="http://schemas.openxmlformats.org/presentationml/2006/main" xmlns:r="http://schemas.openxmlformats.org/officeDocument/2006/relationships" xmlns:p14="http://schemas.microsoft.com/office/powerpoint/2010/main" xmlns:p15="http://schemas.microsoft.com/office/powerpoint/2012/main" xmlns:mc="http://schemas.openxmlformats.org/markup-compatibility/2006" type="twoObj" preserve="1">
+  <p:cSld name="Two Content">
     <p:bg>
       <p:bgPr>
         <a:solidFill>
@@ -776,7 +1427,7 @@
       </p:grpSpPr>
       <p:sp>
         <p:nvSpPr>
-          <p:cNvPr id="54" name="PlaceHolder 1"/>
+          <p:cNvPr id="46" name="PlaceHolder 1"/>
           <p:cNvSpPr>
             <a:spLocks noGrp="1"/>
           </p:cNvSpPr>
@@ -786,8 +1437,8 @@
         </p:nvSpPr>
         <p:spPr>
           <a:xfrm>
-            <a:off x="839880" y="457200"/>
-            <a:ext cx="3926520" cy="1594440"/>
+            <a:off x="838080" y="365040"/>
+            <a:ext cx="10509480" cy="1319400"/>
           </a:xfrm>
           <a:prstGeom prst="rect">
             <a:avLst/>
@@ -798,7 +1449,7 @@
           </a:ln>
         </p:spPr>
         <p:txBody>
-          <a:bodyPr lIns="91440" rIns="91440" tIns="45720" bIns="45720" anchor="b">
+          <a:bodyPr lIns="91440" rIns="91440" tIns="45720" bIns="45720" anchor="ctr">
             <a:noAutofit/>
           </a:bodyPr>
           <a:p>
@@ -812,7 +1463,7 @@
               </a:tabLst>
             </a:pPr>
             <a:r>
-              <a:rPr b="0" lang="en-US" sz="3200" strike="noStrike" u="none">
+              <a:rPr b="0" lang="en-US" sz="4400" strike="noStrike" u="none">
                 <a:solidFill>
                   <a:schemeClr val="dk1"/>
                 </a:solidFill>
@@ -822,7 +1473,7 @@
               </a:rPr>
               <a:t>Click to edit Master title style</a:t>
             </a:r>
-            <a:endParaRPr b="0" lang="en-US" sz="3200" strike="noStrike" u="none">
+            <a:endParaRPr b="0" lang="en-US" sz="4400" strike="noStrike" u="none">
               <a:solidFill>
                 <a:srgbClr val="000000"/>
               </a:solidFill>
@@ -835,7 +1486,7 @@
       </p:sp>
       <p:sp>
         <p:nvSpPr>
-          <p:cNvPr id="55" name="PlaceHolder 2"/>
+          <p:cNvPr id="47" name="PlaceHolder 2"/>
           <p:cNvSpPr>
             <a:spLocks noGrp="1"/>
           </p:cNvSpPr>
@@ -845,8 +1496,8 @@
         </p:nvSpPr>
         <p:spPr>
           <a:xfrm>
-            <a:off x="5183280" y="987480"/>
-            <a:ext cx="6166440" cy="4867920"/>
+            <a:off x="838080" y="1825560"/>
+            <a:ext cx="5175360" cy="4345200"/>
           </a:xfrm>
           <a:prstGeom prst="rect">
             <a:avLst/>
@@ -875,7 +1526,7 @@
               <a:buChar char="•"/>
             </a:pPr>
             <a:r>
-              <a:rPr b="0" lang="en-US" sz="3200" strike="noStrike" u="none">
+              <a:rPr b="0" lang="en-US" sz="2800" strike="noStrike" u="none">
                 <a:solidFill>
                   <a:schemeClr val="dk1"/>
                 </a:solidFill>
@@ -885,7 +1536,7 @@
               </a:rPr>
               <a:t>Click to edit Master text styles</a:t>
             </a:r>
-            <a:endParaRPr b="0" lang="en-US" sz="3200" strike="noStrike" u="none">
+            <a:endParaRPr b="0" lang="en-US" sz="2800" strike="noStrike" u="none">
               <a:solidFill>
                 <a:srgbClr val="000000"/>
               </a:solidFill>
@@ -909,7 +1560,7 @@
               <a:buChar char="•"/>
             </a:pPr>
             <a:r>
-              <a:rPr b="0" lang="en-US" sz="2800" strike="noStrike" u="none">
+              <a:rPr b="0" lang="en-US" sz="2400" strike="noStrike" u="none">
                 <a:solidFill>
                   <a:schemeClr val="dk1"/>
                 </a:solidFill>
@@ -919,7 +1570,7 @@
               </a:rPr>
               <a:t>Second level</a:t>
             </a:r>
-            <a:endParaRPr b="0" lang="en-US" sz="2800" strike="noStrike" u="none">
+            <a:endParaRPr b="0" lang="en-US" sz="2400" strike="noStrike" u="none">
               <a:solidFill>
                 <a:srgbClr val="000000"/>
               </a:solidFill>
@@ -943,7 +1594,7 @@
               <a:buChar char="•"/>
             </a:pPr>
             <a:r>
-              <a:rPr b="0" lang="en-US" sz="2400" strike="noStrike" u="none">
+              <a:rPr b="0" lang="en-US" sz="2000" strike="noStrike" u="none">
                 <a:solidFill>
                   <a:schemeClr val="dk1"/>
                 </a:solidFill>
@@ -953,7 +1604,7 @@
               </a:rPr>
               <a:t>Third level</a:t>
             </a:r>
-            <a:endParaRPr b="0" lang="en-US" sz="2400" strike="noStrike" u="none">
+            <a:endParaRPr b="0" lang="en-US" sz="2000" strike="noStrike" u="none">
               <a:solidFill>
                 <a:srgbClr val="000000"/>
               </a:solidFill>
@@ -977,7 +1628,7 @@
               <a:buChar char="•"/>
             </a:pPr>
             <a:r>
-              <a:rPr b="0" lang="en-US" sz="2000" strike="noStrike" u="none">
+              <a:rPr b="0" lang="en-US" sz="1800" strike="noStrike" u="none">
                 <a:solidFill>
                   <a:schemeClr val="dk1"/>
                 </a:solidFill>
@@ -987,7 +1638,7 @@
               </a:rPr>
               <a:t>Fourth level</a:t>
             </a:r>
-            <a:endParaRPr b="0" lang="en-US" sz="2000" strike="noStrike" u="none">
+            <a:endParaRPr b="0" lang="en-US" sz="1800" strike="noStrike" u="none">
               <a:solidFill>
                 <a:srgbClr val="000000"/>
               </a:solidFill>
@@ -1011,7 +1662,7 @@
               <a:buChar char="•"/>
             </a:pPr>
             <a:r>
-              <a:rPr b="0" lang="en-US" sz="2000" strike="noStrike" u="none">
+              <a:rPr b="0" lang="en-US" sz="1800" strike="noStrike" u="none">
                 <a:solidFill>
                   <a:schemeClr val="dk1"/>
                 </a:solidFill>
@@ -1021,7 +1672,7 @@
               </a:rPr>
               <a:t>Fifth level</a:t>
             </a:r>
-            <a:endParaRPr b="0" lang="en-US" sz="2000" strike="noStrike" u="none">
+            <a:endParaRPr b="0" lang="en-US" sz="1800" strike="noStrike" u="none">
               <a:solidFill>
                 <a:srgbClr val="000000"/>
               </a:solidFill>
@@ -1034,7 +1685,7 @@
       </p:sp>
       <p:sp>
         <p:nvSpPr>
-          <p:cNvPr id="56" name="PlaceHolder 3"/>
+          <p:cNvPr id="48" name="PlaceHolder 3"/>
           <p:cNvSpPr>
             <a:spLocks noGrp="1"/>
           </p:cNvSpPr>
@@ -1044,8 +1695,8 @@
         </p:nvSpPr>
         <p:spPr>
           <a:xfrm>
-            <a:off x="839880" y="2057400"/>
-            <a:ext cx="3926520" cy="3805920"/>
+            <a:off x="6172200" y="1825560"/>
+            <a:ext cx="5175360" cy="4345200"/>
           </a:xfrm>
           <a:prstGeom prst="rect">
             <a:avLst/>
@@ -1060,20 +1711,21 @@
             <a:noAutofit/>
           </a:bodyPr>
           <a:p>
-            <a:pPr indent="0" defTabSz="914400">
+            <a:pPr marL="228600" indent="-228600" defTabSz="914400">
               <a:lnSpc>
                 <a:spcPct val="90000"/>
               </a:lnSpc>
               <a:spcBef>
                 <a:spcPts val="1001"/>
               </a:spcBef>
-              <a:buNone/>
-              <a:tabLst>
-                <a:tab algn="l" pos="0"/>
-              </a:tabLst>
+              <a:buClr>
+                <a:srgbClr val="000000"/>
+              </a:buClr>
+              <a:buFont typeface="Arial"/>
+              <a:buChar char="•"/>
             </a:pPr>
             <a:r>
-              <a:rPr b="0" lang="en-US" sz="1600" strike="noStrike" u="none">
+              <a:rPr b="0" lang="en-US" sz="2800" strike="noStrike" u="none">
                 <a:solidFill>
                   <a:schemeClr val="dk1"/>
                 </a:solidFill>
@@ -1083,7 +1735,143 @@
               </a:rPr>
               <a:t>Click to edit Master text styles</a:t>
             </a:r>
-            <a:endParaRPr b="0" lang="en-US" sz="1600" strike="noStrike" u="none">
+            <a:endParaRPr b="0" lang="en-US" sz="2800" strike="noStrike" u="none">
+              <a:solidFill>
+                <a:srgbClr val="000000"/>
+              </a:solidFill>
+              <a:effectLst/>
+              <a:uFillTx/>
+              <a:latin typeface="Arial"/>
+            </a:endParaRPr>
+          </a:p>
+          <a:p>
+            <a:pPr lvl="1" marL="685800" indent="-228600" defTabSz="914400">
+              <a:lnSpc>
+                <a:spcPct val="90000"/>
+              </a:lnSpc>
+              <a:spcBef>
+                <a:spcPts val="499"/>
+              </a:spcBef>
+              <a:buClr>
+                <a:srgbClr val="000000"/>
+              </a:buClr>
+              <a:buFont typeface="Arial"/>
+              <a:buChar char="•"/>
+            </a:pPr>
+            <a:r>
+              <a:rPr b="0" lang="en-US" sz="2400" strike="noStrike" u="none">
+                <a:solidFill>
+                  <a:schemeClr val="dk1"/>
+                </a:solidFill>
+                <a:effectLst/>
+                <a:uFillTx/>
+                <a:latin typeface="Calibri"/>
+              </a:rPr>
+              <a:t>Second level</a:t>
+            </a:r>
+            <a:endParaRPr b="0" lang="en-US" sz="2400" strike="noStrike" u="none">
+              <a:solidFill>
+                <a:srgbClr val="000000"/>
+              </a:solidFill>
+              <a:effectLst/>
+              <a:uFillTx/>
+              <a:latin typeface="Arial"/>
+            </a:endParaRPr>
+          </a:p>
+          <a:p>
+            <a:pPr lvl="2" marL="1143000" indent="-228600" defTabSz="914400">
+              <a:lnSpc>
+                <a:spcPct val="90000"/>
+              </a:lnSpc>
+              <a:spcBef>
+                <a:spcPts val="499"/>
+              </a:spcBef>
+              <a:buClr>
+                <a:srgbClr val="000000"/>
+              </a:buClr>
+              <a:buFont typeface="Arial"/>
+              <a:buChar char="•"/>
+            </a:pPr>
+            <a:r>
+              <a:rPr b="0" lang="en-US" sz="2000" strike="noStrike" u="none">
+                <a:solidFill>
+                  <a:schemeClr val="dk1"/>
+                </a:solidFill>
+                <a:effectLst/>
+                <a:uFillTx/>
+                <a:latin typeface="Calibri"/>
+              </a:rPr>
+              <a:t>Third level</a:t>
+            </a:r>
+            <a:endParaRPr b="0" lang="en-US" sz="2000" strike="noStrike" u="none">
+              <a:solidFill>
+                <a:srgbClr val="000000"/>
+              </a:solidFill>
+              <a:effectLst/>
+              <a:uFillTx/>
+              <a:latin typeface="Arial"/>
+            </a:endParaRPr>
+          </a:p>
+          <a:p>
+            <a:pPr lvl="3" marL="1600200" indent="-228600" defTabSz="914400">
+              <a:lnSpc>
+                <a:spcPct val="90000"/>
+              </a:lnSpc>
+              <a:spcBef>
+                <a:spcPts val="499"/>
+              </a:spcBef>
+              <a:buClr>
+                <a:srgbClr val="000000"/>
+              </a:buClr>
+              <a:buFont typeface="Arial"/>
+              <a:buChar char="•"/>
+            </a:pPr>
+            <a:r>
+              <a:rPr b="0" lang="en-US" sz="1800" strike="noStrike" u="none">
+                <a:solidFill>
+                  <a:schemeClr val="dk1"/>
+                </a:solidFill>
+                <a:effectLst/>
+                <a:uFillTx/>
+                <a:latin typeface="Calibri"/>
+              </a:rPr>
+              <a:t>Fourth level</a:t>
+            </a:r>
+            <a:endParaRPr b="0" lang="en-US" sz="1800" strike="noStrike" u="none">
+              <a:solidFill>
+                <a:srgbClr val="000000"/>
+              </a:solidFill>
+              <a:effectLst/>
+              <a:uFillTx/>
+              <a:latin typeface="Arial"/>
+            </a:endParaRPr>
+          </a:p>
+          <a:p>
+            <a:pPr lvl="4" marL="2057400" indent="-228600" defTabSz="914400">
+              <a:lnSpc>
+                <a:spcPct val="90000"/>
+              </a:lnSpc>
+              <a:spcBef>
+                <a:spcPts val="499"/>
+              </a:spcBef>
+              <a:buClr>
+                <a:srgbClr val="000000"/>
+              </a:buClr>
+              <a:buFont typeface="Arial"/>
+              <a:buChar char="•"/>
+            </a:pPr>
+            <a:r>
+              <a:rPr b="0" lang="en-US" sz="1800" strike="noStrike" u="none">
+                <a:solidFill>
+                  <a:schemeClr val="dk1"/>
+                </a:solidFill>
+                <a:effectLst/>
+                <a:uFillTx/>
+                <a:latin typeface="Calibri"/>
+              </a:rPr>
+              <a:t>Fifth level</a:t>
+            </a:r>
+            <a:endParaRPr b="0" lang="en-US" sz="1800" strike="noStrike" u="none">
               <a:solidFill>
                 <a:srgbClr val="000000"/>
               </a:solidFill>
@@ -1096,18 +1884,18 @@
       </p:sp>
       <p:sp>
         <p:nvSpPr>
-          <p:cNvPr id="57" name="PlaceHolder 4"/>
+          <p:cNvPr id="49" name="PlaceHolder 4"/>
           <p:cNvSpPr>
             <a:spLocks noGrp="1"/>
           </p:cNvSpPr>
           <p:nvPr>
-            <p:ph type="dt" idx="31"/>
+            <p:ph type="dt" idx="28"/>
           </p:nvPr>
         </p:nvSpPr>
         <p:spPr>
           <a:xfrm>
             <a:off x="838080" y="6356520"/>
-            <a:ext cx="2737440" cy="359280"/>
+            <a:ext cx="2737080" cy="358920"/>
           </a:xfrm>
           <a:prstGeom prst="rect">
             <a:avLst/>
@@ -1178,18 +1966,18 @@
       </p:sp>
       <p:sp>
         <p:nvSpPr>
-          <p:cNvPr id="58" name="PlaceHolder 5"/>
+          <p:cNvPr id="50" name="PlaceHolder 5"/>
           <p:cNvSpPr>
             <a:spLocks noGrp="1"/>
           </p:cNvSpPr>
           <p:nvPr>
-            <p:ph type="ftr" idx="32"/>
+            <p:ph type="ftr" idx="29"/>
           </p:nvPr>
         </p:nvSpPr>
         <p:spPr>
           <a:xfrm>
             <a:off x="4038480" y="6356520"/>
-            <a:ext cx="4109040" cy="359280"/>
+            <a:ext cx="4108680" cy="358920"/>
           </a:xfrm>
           <a:prstGeom prst="rect">
             <a:avLst/>
@@ -1256,18 +2044,18 @@
       </p:sp>
       <p:sp>
         <p:nvSpPr>
-          <p:cNvPr id="59" name="PlaceHolder 6"/>
+          <p:cNvPr id="51" name="PlaceHolder 6"/>
           <p:cNvSpPr>
             <a:spLocks noGrp="1"/>
           </p:cNvSpPr>
           <p:nvPr>
-            <p:ph type="sldNum" idx="33"/>
+            <p:ph type="sldNum" idx="30"/>
           </p:nvPr>
         </p:nvSpPr>
         <p:spPr>
           <a:xfrm>
             <a:off x="8610480" y="6356520"/>
-            <a:ext cx="2737440" cy="359280"/>
+            <a:ext cx="2737080" cy="358920"/>
           </a:xfrm>
           <a:prstGeom prst="rect">
             <a:avLst/>
@@ -1312,7 +2100,7 @@
                 <a:tab algn="l" pos="0"/>
               </a:tabLst>
             </a:pPr>
-            <a:fld id="{C6DDF472-585D-4CC8-BF8C-79DE7FDFF232}" type="slidenum">
+            <a:fld id="{E7F88BFB-2D4F-49E8-BE84-1335F938C41D}" type="slidenum">
               <a:rPr b="0" lang="en-US" sz="1200" strike="noStrike" u="none">
                 <a:solidFill>
                   <a:schemeClr val="dk1">
@@ -1341,9 +2129,9 @@
 </p:sldLayout>
 </file>
 
-<file path=ppt/slideLayouts/slideLayout2.xml><?xml version="1.0" encoding="utf-8"?>
-<p:sldLayout xmlns:a="http://schemas.openxmlformats.org/drawingml/2006/main" xmlns:p="http://schemas.openxmlformats.org/presentationml/2006/main" xmlns:r="http://schemas.openxmlformats.org/officeDocument/2006/relationships" xmlns:p14="http://schemas.microsoft.com/office/powerpoint/2010/main" xmlns:p15="http://schemas.microsoft.com/office/powerpoint/2012/main" xmlns:mc="http://schemas.openxmlformats.org/markup-compatibility/2006" type="title" preserve="1">
-  <p:cSld name="Title Slide">
+<file path=ppt/slideLayouts/slideLayout11.xml><?xml version="1.0" encoding="utf-8"?>
+<p:sldLayout xmlns:a="http://schemas.openxmlformats.org/drawingml/2006/main" xmlns:p="http://schemas.openxmlformats.org/presentationml/2006/main" xmlns:r="http://schemas.openxmlformats.org/officeDocument/2006/relationships" xmlns:p14="http://schemas.microsoft.com/office/powerpoint/2010/main" xmlns:p15="http://schemas.microsoft.com/office/powerpoint/2012/main" xmlns:mc="http://schemas.openxmlformats.org/markup-compatibility/2006" type="blank" preserve="1">
+  <p:cSld name="Comparison">
     <p:bg>
       <p:bgPr>
         <a:solidFill>
@@ -1367,7 +2155,7 @@
       </p:grpSpPr>
       <p:sp>
         <p:nvSpPr>
-          <p:cNvPr id="8" name="PlaceHolder 1"/>
+          <p:cNvPr id="52" name="PlaceHolder 1"/>
           <p:cNvSpPr>
             <a:spLocks noGrp="1"/>
           </p:cNvSpPr>
@@ -1377,612 +2165,8 @@
         </p:nvSpPr>
         <p:spPr>
           <a:xfrm>
-            <a:off x="1523880" y="1122480"/>
-            <a:ext cx="9138240" cy="2381760"/>
-          </a:xfrm>
-          <a:prstGeom prst="rect">
-            <a:avLst/>
-          </a:prstGeom>
-          <a:noFill/>
-          <a:ln w="0">
-            <a:noFill/>
-          </a:ln>
-        </p:spPr>
-        <p:txBody>
-          <a:bodyPr lIns="91440" rIns="91440" tIns="45720" bIns="45720" anchor="b">
-            <a:noAutofit/>
-          </a:bodyPr>
-          <a:p>
-            <a:pPr indent="0" algn="ctr" defTabSz="914400">
-              <a:lnSpc>
-                <a:spcPct val="90000"/>
-              </a:lnSpc>
-              <a:buNone/>
-              <a:tabLst>
-                <a:tab algn="l" pos="0"/>
-              </a:tabLst>
-            </a:pPr>
-            <a:r>
-              <a:rPr b="0" lang="en-US" sz="6000" strike="noStrike" u="none">
-                <a:solidFill>
-                  <a:schemeClr val="dk1"/>
-                </a:solidFill>
-                <a:effectLst/>
-                <a:uFillTx/>
-                <a:latin typeface="Calibri Light"/>
-              </a:rPr>
-              <a:t>Click to edit Master title style</a:t>
-            </a:r>
-            <a:endParaRPr b="0" lang="en-US" sz="6000" strike="noStrike" u="none">
-              <a:solidFill>
-                <a:srgbClr val="000000"/>
-              </a:solidFill>
-              <a:effectLst/>
-              <a:uFillTx/>
-              <a:latin typeface="Arial"/>
-            </a:endParaRPr>
-          </a:p>
-        </p:txBody>
-      </p:sp>
-      <p:sp>
-        <p:nvSpPr>
-          <p:cNvPr id="9" name="PlaceHolder 2"/>
-          <p:cNvSpPr>
-            <a:spLocks noGrp="1"/>
-          </p:cNvSpPr>
-          <p:nvPr>
-            <p:ph type="dt" idx="4"/>
-          </p:nvPr>
-        </p:nvSpPr>
-        <p:spPr>
-          <a:xfrm>
-            <a:off x="838080" y="6356520"/>
-            <a:ext cx="2737440" cy="359280"/>
-          </a:xfrm>
-          <a:prstGeom prst="rect">
-            <a:avLst/>
-          </a:prstGeom>
-          <a:noFill/>
-          <a:ln w="0">
-            <a:noFill/>
-          </a:ln>
-        </p:spPr>
-        <p:txBody>
-          <a:bodyPr lIns="91440" rIns="91440" tIns="45720" bIns="45720" anchor="ctr">
-            <a:noAutofit/>
-          </a:bodyPr>
-          <a:lstStyle>
-            <a:lvl1pPr indent="0" defTabSz="914400">
-              <a:lnSpc>
-                <a:spcPct val="100000"/>
-              </a:lnSpc>
-              <a:buNone/>
-              <a:tabLst>
-                <a:tab algn="l" pos="0"/>
-              </a:tabLst>
-              <a:defRPr b="0" lang="en-US" sz="1200" strike="noStrike" u="none">
-                <a:solidFill>
-                  <a:schemeClr val="dk1">
-                    <a:tint val="75000"/>
-                  </a:schemeClr>
-                </a:solidFill>
-                <a:effectLst/>
-                <a:uFillTx/>
-                <a:latin typeface="Calibri"/>
-              </a:defRPr>
-            </a:lvl1pPr>
-          </a:lstStyle>
-          <a:p>
-            <a:pPr indent="0" defTabSz="914400">
-              <a:lnSpc>
-                <a:spcPct val="100000"/>
-              </a:lnSpc>
-              <a:buNone/>
-              <a:tabLst>
-                <a:tab algn="l" pos="0"/>
-              </a:tabLst>
-            </a:pPr>
-            <a:r>
-              <a:rPr b="0" lang="en-US" sz="1200" strike="noStrike" u="none">
-                <a:solidFill>
-                  <a:schemeClr val="dk1">
-                    <a:tint val="75000"/>
-                  </a:schemeClr>
-                </a:solidFill>
-                <a:effectLst/>
-                <a:uFillTx/>
-                <a:latin typeface="Calibri"/>
-              </a:rPr>
-              <a:t> </a:t>
-            </a:r>
-            <a:endParaRPr b="0" lang="en-US" sz="1200" strike="noStrike" u="none">
-              <a:solidFill>
-                <a:srgbClr val="000000"/>
-              </a:solidFill>
-              <a:effectLst/>
-              <a:uFillTx/>
-              <a:latin typeface="Times New Roman"/>
-            </a:endParaRPr>
-          </a:p>
-        </p:txBody>
-      </p:sp>
-      <p:sp>
-        <p:nvSpPr>
-          <p:cNvPr id="10" name="PlaceHolder 3"/>
-          <p:cNvSpPr>
-            <a:spLocks noGrp="1"/>
-          </p:cNvSpPr>
-          <p:nvPr>
-            <p:ph type="ftr" idx="5"/>
-          </p:nvPr>
-        </p:nvSpPr>
-        <p:spPr>
-          <a:xfrm>
-            <a:off x="4038480" y="6356520"/>
-            <a:ext cx="4109040" cy="359280"/>
-          </a:xfrm>
-          <a:prstGeom prst="rect">
-            <a:avLst/>
-          </a:prstGeom>
-          <a:noFill/>
-          <a:ln w="0">
-            <a:noFill/>
-          </a:ln>
-        </p:spPr>
-        <p:txBody>
-          <a:bodyPr lIns="91440" rIns="91440" tIns="45720" bIns="45720" anchor="ctr">
-            <a:noAutofit/>
-          </a:bodyPr>
-          <a:lstStyle>
-            <a:lvl1pPr indent="0" algn="ctr">
-              <a:lnSpc>
-                <a:spcPct val="100000"/>
-              </a:lnSpc>
-              <a:buNone/>
-              <a:tabLst>
-                <a:tab algn="l" pos="0"/>
-              </a:tabLst>
-              <a:defRPr b="0" lang="en-US" sz="1400" strike="noStrike" u="none">
-                <a:solidFill>
-                  <a:srgbClr val="000000"/>
-                </a:solidFill>
-                <a:effectLst/>
-                <a:uFillTx/>
-                <a:latin typeface="Times New Roman"/>
-              </a:defRPr>
-            </a:lvl1pPr>
-          </a:lstStyle>
-          <a:p>
-            <a:pPr indent="0" algn="ctr">
-              <a:lnSpc>
-                <a:spcPct val="100000"/>
-              </a:lnSpc>
-              <a:buNone/>
-              <a:tabLst>
-                <a:tab algn="l" pos="0"/>
-              </a:tabLst>
-            </a:pPr>
-            <a:r>
-              <a:rPr b="0" lang="en-US" sz="1400" strike="noStrike" u="none">
-                <a:solidFill>
-                  <a:srgbClr val="000000"/>
-                </a:solidFill>
-                <a:effectLst/>
-                <a:uFillTx/>
-                <a:latin typeface="Times New Roman"/>
-              </a:rPr>
-              <a:t> </a:t>
-            </a:r>
-            <a:endParaRPr b="0" lang="en-US" sz="1400" strike="noStrike" u="none">
-              <a:solidFill>
-                <a:srgbClr val="000000"/>
-              </a:solidFill>
-              <a:effectLst/>
-              <a:uFillTx/>
-              <a:latin typeface="Times New Roman"/>
-            </a:endParaRPr>
-          </a:p>
-        </p:txBody>
-      </p:sp>
-      <p:sp>
-        <p:nvSpPr>
-          <p:cNvPr id="11" name="PlaceHolder 4"/>
-          <p:cNvSpPr>
-            <a:spLocks noGrp="1"/>
-          </p:cNvSpPr>
-          <p:nvPr>
-            <p:ph type="sldNum" idx="6"/>
-          </p:nvPr>
-        </p:nvSpPr>
-        <p:spPr>
-          <a:xfrm>
-            <a:off x="8610480" y="6356520"/>
-            <a:ext cx="2737440" cy="359280"/>
-          </a:xfrm>
-          <a:prstGeom prst="rect">
-            <a:avLst/>
-          </a:prstGeom>
-          <a:noFill/>
-          <a:ln w="0">
-            <a:noFill/>
-          </a:ln>
-        </p:spPr>
-        <p:txBody>
-          <a:bodyPr lIns="91440" rIns="91440" tIns="45720" bIns="45720" anchor="ctr">
-            <a:noAutofit/>
-          </a:bodyPr>
-          <a:lstStyle>
-            <a:lvl1pPr indent="0" algn="r" defTabSz="914400">
-              <a:lnSpc>
-                <a:spcPct val="100000"/>
-              </a:lnSpc>
-              <a:buNone/>
-              <a:tabLst>
-                <a:tab algn="l" pos="0"/>
-              </a:tabLst>
-              <a:defRPr b="0" lang="en-US" sz="1200" strike="noStrike" u="none">
-                <a:solidFill>
-                  <a:schemeClr val="dk1">
-                    <a:tint val="75000"/>
-                  </a:schemeClr>
-                </a:solidFill>
-                <a:effectLst/>
-                <a:uFillTx/>
-                <a:latin typeface="Calibri"/>
-              </a:defRPr>
-            </a:lvl1pPr>
-          </a:lstStyle>
-          <a:p>
-            <a:pPr indent="0" algn="r" defTabSz="914400">
-              <a:lnSpc>
-                <a:spcPct val="100000"/>
-              </a:lnSpc>
-              <a:buNone/>
-              <a:tabLst>
-                <a:tab algn="l" pos="0"/>
-              </a:tabLst>
-            </a:pPr>
-            <a:fld id="{3B73F91C-7B14-4FCD-8469-0B7FBE4918A8}" type="slidenum">
-              <a:rPr b="0" lang="en-US" sz="1200" strike="noStrike" u="none">
-                <a:solidFill>
-                  <a:schemeClr val="dk1">
-                    <a:tint val="75000"/>
-                  </a:schemeClr>
-                </a:solidFill>
-                <a:effectLst/>
-                <a:uFillTx/>
-                <a:latin typeface="Calibri"/>
-              </a:rPr>
-              <a:t>6</a:t>
-            </a:fld>
-            <a:endParaRPr b="0" lang="en-US" sz="1200" strike="noStrike" u="none">
-              <a:solidFill>
-                <a:srgbClr val="000000"/>
-              </a:solidFill>
-              <a:effectLst/>
-              <a:uFillTx/>
-              <a:latin typeface="Times New Roman"/>
-            </a:endParaRPr>
-          </a:p>
-        </p:txBody>
-      </p:sp>
-      <p:sp>
-        <p:nvSpPr>
-          <p:cNvPr id="12" name="PlaceHolder 5"/>
-          <p:cNvSpPr>
-            <a:spLocks noGrp="1"/>
-          </p:cNvSpPr>
-          <p:nvPr>
-            <p:ph type="body"/>
-          </p:nvPr>
-        </p:nvSpPr>
-        <p:spPr>
-          <a:xfrm>
-            <a:off x="609480" y="1604520"/>
-            <a:ext cx="10967040" cy="3971880"/>
-          </a:xfrm>
-          <a:prstGeom prst="rect">
-            <a:avLst/>
-          </a:prstGeom>
-          <a:noFill/>
-          <a:ln w="0">
-            <a:noFill/>
-          </a:ln>
-        </p:spPr>
-        <p:txBody>
-          <a:bodyPr lIns="0" rIns="0" tIns="0" bIns="0" anchor="t">
-            <a:normAutofit/>
-          </a:bodyPr>
-          <a:p>
-            <a:pPr marL="432000" indent="-324000">
-              <a:lnSpc>
-                <a:spcPct val="90000"/>
-              </a:lnSpc>
-              <a:spcBef>
-                <a:spcPts val="1417"/>
-              </a:spcBef>
-              <a:buClr>
-                <a:srgbClr val="000000"/>
-              </a:buClr>
-              <a:buSzPct val="45000"/>
-              <a:buFont typeface="Wingdings" charset="2"/>
-              <a:buChar char=""/>
-            </a:pPr>
-            <a:r>
-              <a:rPr b="0" lang="en-US" sz="2800" strike="noStrike" u="none">
-                <a:solidFill>
-                  <a:schemeClr val="dk1"/>
-                </a:solidFill>
-                <a:effectLst/>
-                <a:uFillTx/>
-                <a:latin typeface="Calibri"/>
-              </a:rPr>
-              <a:t>Click to edit the outline text format</a:t>
-            </a:r>
-            <a:endParaRPr b="0" lang="en-US" sz="2800" strike="noStrike" u="none">
-              <a:solidFill>
-                <a:srgbClr val="000000"/>
-              </a:solidFill>
-              <a:effectLst/>
-              <a:uFillTx/>
-              <a:latin typeface="Arial"/>
-            </a:endParaRPr>
-          </a:p>
-          <a:p>
-            <a:pPr lvl="1" marL="864000" indent="-324000">
-              <a:lnSpc>
-                <a:spcPct val="90000"/>
-              </a:lnSpc>
-              <a:spcBef>
-                <a:spcPts val="1134"/>
-              </a:spcBef>
-              <a:buClr>
-                <a:srgbClr val="000000"/>
-              </a:buClr>
-              <a:buSzPct val="75000"/>
-              <a:buFont typeface="Symbol" charset="2"/>
-              <a:buChar char=""/>
-            </a:pPr>
-            <a:r>
-              <a:rPr b="0" lang="en-US" sz="2000" strike="noStrike" u="none">
-                <a:solidFill>
-                  <a:schemeClr val="dk1"/>
-                </a:solidFill>
-                <a:effectLst/>
-                <a:uFillTx/>
-                <a:latin typeface="Calibri"/>
-              </a:rPr>
-              <a:t>Second Outline Level</a:t>
-            </a:r>
-            <a:endParaRPr b="0" lang="en-US" sz="2000" strike="noStrike" u="none">
-              <a:solidFill>
-                <a:srgbClr val="000000"/>
-              </a:solidFill>
-              <a:effectLst/>
-              <a:uFillTx/>
-              <a:latin typeface="Arial"/>
-            </a:endParaRPr>
-          </a:p>
-          <a:p>
-            <a:pPr lvl="2" marL="1296000" indent="-288000">
-              <a:lnSpc>
-                <a:spcPct val="90000"/>
-              </a:lnSpc>
-              <a:spcBef>
-                <a:spcPts val="850"/>
-              </a:spcBef>
-              <a:buClr>
-                <a:srgbClr val="000000"/>
-              </a:buClr>
-              <a:buSzPct val="45000"/>
-              <a:buFont typeface="Wingdings" charset="2"/>
-              <a:buChar char=""/>
-            </a:pPr>
-            <a:r>
-              <a:rPr b="0" lang="en-US" sz="1800" strike="noStrike" u="none">
-                <a:solidFill>
-                  <a:schemeClr val="dk1"/>
-                </a:solidFill>
-                <a:effectLst/>
-                <a:uFillTx/>
-                <a:latin typeface="Calibri"/>
-              </a:rPr>
-              <a:t>Third Outline Level</a:t>
-            </a:r>
-            <a:endParaRPr b="0" lang="en-US" sz="1800" strike="noStrike" u="none">
-              <a:solidFill>
-                <a:srgbClr val="000000"/>
-              </a:solidFill>
-              <a:effectLst/>
-              <a:uFillTx/>
-              <a:latin typeface="Arial"/>
-            </a:endParaRPr>
-          </a:p>
-          <a:p>
-            <a:pPr lvl="3" marL="1728000" indent="-216000">
-              <a:lnSpc>
-                <a:spcPct val="90000"/>
-              </a:lnSpc>
-              <a:spcBef>
-                <a:spcPts val="567"/>
-              </a:spcBef>
-              <a:buClr>
-                <a:srgbClr val="000000"/>
-              </a:buClr>
-              <a:buSzPct val="75000"/>
-              <a:buFont typeface="Symbol" charset="2"/>
-              <a:buChar char=""/>
-            </a:pPr>
-            <a:r>
-              <a:rPr b="0" lang="en-US" sz="1800" strike="noStrike" u="none">
-                <a:solidFill>
-                  <a:schemeClr val="dk1"/>
-                </a:solidFill>
-                <a:effectLst/>
-                <a:uFillTx/>
-                <a:latin typeface="Calibri"/>
-              </a:rPr>
-              <a:t>Fourth Outline Level</a:t>
-            </a:r>
-            <a:endParaRPr b="0" lang="en-US" sz="1800" strike="noStrike" u="none">
-              <a:solidFill>
-                <a:srgbClr val="000000"/>
-              </a:solidFill>
-              <a:effectLst/>
-              <a:uFillTx/>
-              <a:latin typeface="Arial"/>
-            </a:endParaRPr>
-          </a:p>
-          <a:p>
-            <a:pPr lvl="4" marL="2160000" indent="-216000">
-              <a:lnSpc>
-                <a:spcPct val="90000"/>
-              </a:lnSpc>
-              <a:spcBef>
-                <a:spcPts val="283"/>
-              </a:spcBef>
-              <a:buClr>
-                <a:srgbClr val="000000"/>
-              </a:buClr>
-              <a:buSzPct val="45000"/>
-              <a:buFont typeface="Wingdings" charset="2"/>
-              <a:buChar char=""/>
-            </a:pPr>
-            <a:r>
-              <a:rPr b="0" lang="en-US" sz="2000" strike="noStrike" u="none">
-                <a:solidFill>
-                  <a:schemeClr val="dk1"/>
-                </a:solidFill>
-                <a:effectLst/>
-                <a:uFillTx/>
-                <a:latin typeface="Calibri"/>
-              </a:rPr>
-              <a:t>Fifth Outline Level</a:t>
-            </a:r>
-            <a:endParaRPr b="0" lang="en-US" sz="2000" strike="noStrike" u="none">
-              <a:solidFill>
-                <a:srgbClr val="000000"/>
-              </a:solidFill>
-              <a:effectLst/>
-              <a:uFillTx/>
-              <a:latin typeface="Arial"/>
-            </a:endParaRPr>
-          </a:p>
-          <a:p>
-            <a:pPr lvl="5" marL="2592000" indent="-216000">
-              <a:lnSpc>
-                <a:spcPct val="90000"/>
-              </a:lnSpc>
-              <a:spcBef>
-                <a:spcPts val="283"/>
-              </a:spcBef>
-              <a:buClr>
-                <a:srgbClr val="000000"/>
-              </a:buClr>
-              <a:buSzPct val="45000"/>
-              <a:buFont typeface="Wingdings" charset="2"/>
-              <a:buChar char=""/>
-            </a:pPr>
-            <a:r>
-              <a:rPr b="0" lang="en-US" sz="2000" strike="noStrike" u="none">
-                <a:solidFill>
-                  <a:schemeClr val="dk1"/>
-                </a:solidFill>
-                <a:effectLst/>
-                <a:uFillTx/>
-                <a:latin typeface="Calibri"/>
-              </a:rPr>
-              <a:t>Sixth Outline Level</a:t>
-            </a:r>
-            <a:endParaRPr b="0" lang="en-US" sz="2000" strike="noStrike" u="none">
-              <a:solidFill>
-                <a:srgbClr val="000000"/>
-              </a:solidFill>
-              <a:effectLst/>
-              <a:uFillTx/>
-              <a:latin typeface="Arial"/>
-            </a:endParaRPr>
-          </a:p>
-          <a:p>
-            <a:pPr lvl="6" marL="3024000" indent="-216000">
-              <a:lnSpc>
-                <a:spcPct val="90000"/>
-              </a:lnSpc>
-              <a:spcBef>
-                <a:spcPts val="283"/>
-              </a:spcBef>
-              <a:buClr>
-                <a:srgbClr val="000000"/>
-              </a:buClr>
-              <a:buSzPct val="45000"/>
-              <a:buFont typeface="Wingdings" charset="2"/>
-              <a:buChar char=""/>
-            </a:pPr>
-            <a:r>
-              <a:rPr b="0" lang="en-US" sz="2000" strike="noStrike" u="none">
-                <a:solidFill>
-                  <a:schemeClr val="dk1"/>
-                </a:solidFill>
-                <a:effectLst/>
-                <a:uFillTx/>
-                <a:latin typeface="Calibri"/>
-              </a:rPr>
-              <a:t>Seventh Outline Level</a:t>
-            </a:r>
-            <a:endParaRPr b="0" lang="en-US" sz="2000" strike="noStrike" u="none">
-              <a:solidFill>
-                <a:srgbClr val="000000"/>
-              </a:solidFill>
-              <a:effectLst/>
-              <a:uFillTx/>
-              <a:latin typeface="Arial"/>
-            </a:endParaRPr>
-          </a:p>
-        </p:txBody>
-      </p:sp>
-    </p:spTree>
-  </p:cSld>
-</p:sldLayout>
-</file>
-
-<file path=ppt/slideLayouts/slideLayout3.xml><?xml version="1.0" encoding="utf-8"?>
-<p:sldLayout xmlns:a="http://schemas.openxmlformats.org/drawingml/2006/main" xmlns:p="http://schemas.openxmlformats.org/presentationml/2006/main" xmlns:r="http://schemas.openxmlformats.org/officeDocument/2006/relationships" xmlns:p14="http://schemas.microsoft.com/office/powerpoint/2010/main" xmlns:p15="http://schemas.microsoft.com/office/powerpoint/2012/main" xmlns:mc="http://schemas.openxmlformats.org/markup-compatibility/2006" type="vertTx" preserve="1">
-  <p:cSld name="Title and Vertical Text">
-    <p:bg>
-      <p:bgPr>
-        <a:solidFill>
-          <a:srgbClr val="ffffff"/>
-        </a:solidFill>
-      </p:bgPr>
-    </p:bg>
-    <p:spTree>
-      <p:nvGrpSpPr>
-        <p:cNvPr id="1" name=""/>
-        <p:cNvGrpSpPr/>
-        <p:nvPr/>
-      </p:nvGrpSpPr>
-      <p:grpSpPr>
-        <a:xfrm>
-          <a:off x="0" y="0"/>
-          <a:ext cx="0" cy="0"/>
-          <a:chOff x="0" y="0"/>
-          <a:chExt cx="0" cy="0"/>
-        </a:xfrm>
-      </p:grpSpPr>
-      <p:sp>
-        <p:nvSpPr>
-          <p:cNvPr id="13" name="PlaceHolder 1"/>
-          <p:cNvSpPr>
-            <a:spLocks noGrp="1"/>
-          </p:cNvSpPr>
-          <p:nvPr>
-            <p:ph type="title"/>
-          </p:nvPr>
-        </p:nvSpPr>
-        <p:spPr>
-          <a:xfrm>
-            <a:off x="838080" y="365040"/>
-            <a:ext cx="10509840" cy="1319760"/>
+            <a:off x="839880" y="365040"/>
+            <a:ext cx="10509480" cy="1319400"/>
           </a:xfrm>
           <a:prstGeom prst="rect">
             <a:avLst/>
@@ -2030,7 +2214,7 @@
       </p:sp>
       <p:sp>
         <p:nvSpPr>
-          <p:cNvPr id="14" name="PlaceHolder 2"/>
+          <p:cNvPr id="53" name="PlaceHolder 2"/>
           <p:cNvSpPr>
             <a:spLocks noGrp="1"/>
           </p:cNvSpPr>
@@ -2040,8 +2224,8 @@
         </p:nvSpPr>
         <p:spPr>
           <a:xfrm>
-            <a:off x="838080" y="1825560"/>
-            <a:ext cx="10509840" cy="4345560"/>
+            <a:off x="839880" y="1681200"/>
+            <a:ext cx="5151600" cy="817920"/>
           </a:xfrm>
           <a:prstGeom prst="rect">
             <a:avLst/>
@@ -2052,7 +2236,69 @@
           </a:ln>
         </p:spPr>
         <p:txBody>
-          <a:bodyPr lIns="91440" rIns="91440" tIns="45720" bIns="45720" anchor="t" vert="eaVert">
+          <a:bodyPr lIns="91440" rIns="91440" tIns="45720" bIns="45720" anchor="b">
+            <a:noAutofit/>
+          </a:bodyPr>
+          <a:p>
+            <a:pPr indent="0" defTabSz="914400">
+              <a:lnSpc>
+                <a:spcPct val="90000"/>
+              </a:lnSpc>
+              <a:spcBef>
+                <a:spcPts val="1001"/>
+              </a:spcBef>
+              <a:buNone/>
+              <a:tabLst>
+                <a:tab algn="l" pos="0"/>
+              </a:tabLst>
+            </a:pPr>
+            <a:r>
+              <a:rPr b="1" lang="en-US" sz="2400" strike="noStrike" u="none">
+                <a:solidFill>
+                  <a:schemeClr val="dk1"/>
+                </a:solidFill>
+                <a:effectLst/>
+                <a:uFillTx/>
+                <a:latin typeface="Calibri"/>
+              </a:rPr>
+              <a:t>Click to edit Master text styles</a:t>
+            </a:r>
+            <a:endParaRPr b="0" lang="en-US" sz="2400" strike="noStrike" u="none">
+              <a:solidFill>
+                <a:srgbClr val="000000"/>
+              </a:solidFill>
+              <a:effectLst/>
+              <a:uFillTx/>
+              <a:latin typeface="Arial"/>
+            </a:endParaRPr>
+          </a:p>
+        </p:txBody>
+      </p:sp>
+      <p:sp>
+        <p:nvSpPr>
+          <p:cNvPr id="54" name="PlaceHolder 3"/>
+          <p:cNvSpPr>
+            <a:spLocks noGrp="1"/>
+          </p:cNvSpPr>
+          <p:nvPr>
+            <p:ph type="body"/>
+          </p:nvPr>
+        </p:nvSpPr>
+        <p:spPr>
+          <a:xfrm>
+            <a:off x="839880" y="2505240"/>
+            <a:ext cx="5151600" cy="3678480"/>
+          </a:xfrm>
+          <a:prstGeom prst="rect">
+            <a:avLst/>
+          </a:prstGeom>
+          <a:noFill/>
+          <a:ln w="0">
+            <a:noFill/>
+          </a:ln>
+        </p:spPr>
+        <p:txBody>
+          <a:bodyPr lIns="91440" rIns="91440" tIns="45720" bIns="45720" anchor="t">
             <a:noAutofit/>
           </a:bodyPr>
           <a:p>
@@ -2229,18 +2475,279 @@
       </p:sp>
       <p:sp>
         <p:nvSpPr>
-          <p:cNvPr id="15" name="PlaceHolder 3"/>
+          <p:cNvPr id="55" name="PlaceHolder 4"/>
           <p:cNvSpPr>
             <a:spLocks noGrp="1"/>
           </p:cNvSpPr>
           <p:nvPr>
-            <p:ph type="dt" idx="7"/>
+            <p:ph type="body"/>
+          </p:nvPr>
+        </p:nvSpPr>
+        <p:spPr>
+          <a:xfrm>
+            <a:off x="6172200" y="1681200"/>
+            <a:ext cx="5177160" cy="817920"/>
+          </a:xfrm>
+          <a:prstGeom prst="rect">
+            <a:avLst/>
+          </a:prstGeom>
+          <a:noFill/>
+          <a:ln w="0">
+            <a:noFill/>
+          </a:ln>
+        </p:spPr>
+        <p:txBody>
+          <a:bodyPr lIns="91440" rIns="91440" tIns="45720" bIns="45720" anchor="b">
+            <a:noAutofit/>
+          </a:bodyPr>
+          <a:p>
+            <a:pPr indent="0" defTabSz="914400">
+              <a:lnSpc>
+                <a:spcPct val="90000"/>
+              </a:lnSpc>
+              <a:spcBef>
+                <a:spcPts val="1001"/>
+              </a:spcBef>
+              <a:buNone/>
+              <a:tabLst>
+                <a:tab algn="l" pos="0"/>
+              </a:tabLst>
+            </a:pPr>
+            <a:r>
+              <a:rPr b="1" lang="en-US" sz="2400" strike="noStrike" u="none">
+                <a:solidFill>
+                  <a:schemeClr val="dk1"/>
+                </a:solidFill>
+                <a:effectLst/>
+                <a:uFillTx/>
+                <a:latin typeface="Calibri"/>
+              </a:rPr>
+              <a:t>Click to edit Master text styles</a:t>
+            </a:r>
+            <a:endParaRPr b="0" lang="en-US" sz="2400" strike="noStrike" u="none">
+              <a:solidFill>
+                <a:srgbClr val="000000"/>
+              </a:solidFill>
+              <a:effectLst/>
+              <a:uFillTx/>
+              <a:latin typeface="Arial"/>
+            </a:endParaRPr>
+          </a:p>
+        </p:txBody>
+      </p:sp>
+      <p:sp>
+        <p:nvSpPr>
+          <p:cNvPr id="56" name="PlaceHolder 5"/>
+          <p:cNvSpPr>
+            <a:spLocks noGrp="1"/>
+          </p:cNvSpPr>
+          <p:nvPr>
+            <p:ph type="body"/>
+          </p:nvPr>
+        </p:nvSpPr>
+        <p:spPr>
+          <a:xfrm>
+            <a:off x="6172200" y="2505240"/>
+            <a:ext cx="5177160" cy="3678480"/>
+          </a:xfrm>
+          <a:prstGeom prst="rect">
+            <a:avLst/>
+          </a:prstGeom>
+          <a:noFill/>
+          <a:ln w="0">
+            <a:noFill/>
+          </a:ln>
+        </p:spPr>
+        <p:txBody>
+          <a:bodyPr lIns="91440" rIns="91440" tIns="45720" bIns="45720" anchor="t">
+            <a:noAutofit/>
+          </a:bodyPr>
+          <a:p>
+            <a:pPr marL="228600" indent="-228600" defTabSz="914400">
+              <a:lnSpc>
+                <a:spcPct val="90000"/>
+              </a:lnSpc>
+              <a:spcBef>
+                <a:spcPts val="1001"/>
+              </a:spcBef>
+              <a:buClr>
+                <a:srgbClr val="000000"/>
+              </a:buClr>
+              <a:buFont typeface="Arial"/>
+              <a:buChar char="•"/>
+            </a:pPr>
+            <a:r>
+              <a:rPr b="0" lang="en-US" sz="2800" strike="noStrike" u="none">
+                <a:solidFill>
+                  <a:schemeClr val="dk1"/>
+                </a:solidFill>
+                <a:effectLst/>
+                <a:uFillTx/>
+                <a:latin typeface="Calibri"/>
+              </a:rPr>
+              <a:t>Click to edit Master text styles</a:t>
+            </a:r>
+            <a:endParaRPr b="0" lang="en-US" sz="2800" strike="noStrike" u="none">
+              <a:solidFill>
+                <a:srgbClr val="000000"/>
+              </a:solidFill>
+              <a:effectLst/>
+              <a:uFillTx/>
+              <a:latin typeface="Arial"/>
+            </a:endParaRPr>
+          </a:p>
+          <a:p>
+            <a:pPr lvl="1" marL="685800" indent="-228600" defTabSz="914400">
+              <a:lnSpc>
+                <a:spcPct val="90000"/>
+              </a:lnSpc>
+              <a:spcBef>
+                <a:spcPts val="499"/>
+              </a:spcBef>
+              <a:buClr>
+                <a:srgbClr val="000000"/>
+              </a:buClr>
+              <a:buFont typeface="Arial"/>
+              <a:buChar char="•"/>
+            </a:pPr>
+            <a:r>
+              <a:rPr b="0" lang="en-US" sz="2400" strike="noStrike" u="none">
+                <a:solidFill>
+                  <a:schemeClr val="dk1"/>
+                </a:solidFill>
+                <a:effectLst/>
+                <a:uFillTx/>
+                <a:latin typeface="Calibri"/>
+              </a:rPr>
+              <a:t>Second level</a:t>
+            </a:r>
+            <a:endParaRPr b="0" lang="en-US" sz="2400" strike="noStrike" u="none">
+              <a:solidFill>
+                <a:srgbClr val="000000"/>
+              </a:solidFill>
+              <a:effectLst/>
+              <a:uFillTx/>
+              <a:latin typeface="Arial"/>
+            </a:endParaRPr>
+          </a:p>
+          <a:p>
+            <a:pPr lvl="2" marL="1143000" indent="-228600" defTabSz="914400">
+              <a:lnSpc>
+                <a:spcPct val="90000"/>
+              </a:lnSpc>
+              <a:spcBef>
+                <a:spcPts val="499"/>
+              </a:spcBef>
+              <a:buClr>
+                <a:srgbClr val="000000"/>
+              </a:buClr>
+              <a:buFont typeface="Arial"/>
+              <a:buChar char="•"/>
+            </a:pPr>
+            <a:r>
+              <a:rPr b="0" lang="en-US" sz="2000" strike="noStrike" u="none">
+                <a:solidFill>
+                  <a:schemeClr val="dk1"/>
+                </a:solidFill>
+                <a:effectLst/>
+                <a:uFillTx/>
+                <a:latin typeface="Calibri"/>
+              </a:rPr>
+              <a:t>Third level</a:t>
+            </a:r>
+            <a:endParaRPr b="0" lang="en-US" sz="2000" strike="noStrike" u="none">
+              <a:solidFill>
+                <a:srgbClr val="000000"/>
+              </a:solidFill>
+              <a:effectLst/>
+              <a:uFillTx/>
+              <a:latin typeface="Arial"/>
+            </a:endParaRPr>
+          </a:p>
+          <a:p>
+            <a:pPr lvl="3" marL="1600200" indent="-228600" defTabSz="914400">
+              <a:lnSpc>
+                <a:spcPct val="90000"/>
+              </a:lnSpc>
+              <a:spcBef>
+                <a:spcPts val="499"/>
+              </a:spcBef>
+              <a:buClr>
+                <a:srgbClr val="000000"/>
+              </a:buClr>
+              <a:buFont typeface="Arial"/>
+              <a:buChar char="•"/>
+            </a:pPr>
+            <a:r>
+              <a:rPr b="0" lang="en-US" sz="1800" strike="noStrike" u="none">
+                <a:solidFill>
+                  <a:schemeClr val="dk1"/>
+                </a:solidFill>
+                <a:effectLst/>
+                <a:uFillTx/>
+                <a:latin typeface="Calibri"/>
+              </a:rPr>
+              <a:t>Fourth level</a:t>
+            </a:r>
+            <a:endParaRPr b="0" lang="en-US" sz="1800" strike="noStrike" u="none">
+              <a:solidFill>
+                <a:srgbClr val="000000"/>
+              </a:solidFill>
+              <a:effectLst/>
+              <a:uFillTx/>
+              <a:latin typeface="Arial"/>
+            </a:endParaRPr>
+          </a:p>
+          <a:p>
+            <a:pPr lvl="4" marL="2057400" indent="-228600" defTabSz="914400">
+              <a:lnSpc>
+                <a:spcPct val="90000"/>
+              </a:lnSpc>
+              <a:spcBef>
+                <a:spcPts val="499"/>
+              </a:spcBef>
+              <a:buClr>
+                <a:srgbClr val="000000"/>
+              </a:buClr>
+              <a:buFont typeface="Arial"/>
+              <a:buChar char="•"/>
+            </a:pPr>
+            <a:r>
+              <a:rPr b="0" lang="en-US" sz="1800" strike="noStrike" u="none">
+                <a:solidFill>
+                  <a:schemeClr val="dk1"/>
+                </a:solidFill>
+                <a:effectLst/>
+                <a:uFillTx/>
+                <a:latin typeface="Calibri"/>
+              </a:rPr>
+              <a:t>Fifth level</a:t>
+            </a:r>
+            <a:endParaRPr b="0" lang="en-US" sz="1800" strike="noStrike" u="none">
+              <a:solidFill>
+                <a:srgbClr val="000000"/>
+              </a:solidFill>
+              <a:effectLst/>
+              <a:uFillTx/>
+              <a:latin typeface="Arial"/>
+            </a:endParaRPr>
+          </a:p>
+        </p:txBody>
+      </p:sp>
+      <p:sp>
+        <p:nvSpPr>
+          <p:cNvPr id="57" name="PlaceHolder 6"/>
+          <p:cNvSpPr>
+            <a:spLocks noGrp="1"/>
+          </p:cNvSpPr>
+          <p:nvPr>
+            <p:ph type="dt" idx="31"/>
           </p:nvPr>
         </p:nvSpPr>
         <p:spPr>
           <a:xfrm>
             <a:off x="838080" y="6356520"/>
-            <a:ext cx="2737440" cy="359280"/>
+            <a:ext cx="2737080" cy="358920"/>
           </a:xfrm>
           <a:prstGeom prst="rect">
             <a:avLst/>
@@ -2311,18 +2818,18 @@
       </p:sp>
       <p:sp>
         <p:nvSpPr>
-          <p:cNvPr id="16" name="PlaceHolder 4"/>
+          <p:cNvPr id="58" name="PlaceHolder 7"/>
           <p:cNvSpPr>
             <a:spLocks noGrp="1"/>
           </p:cNvSpPr>
           <p:nvPr>
-            <p:ph type="ftr" idx="8"/>
+            <p:ph type="ftr" idx="32"/>
           </p:nvPr>
         </p:nvSpPr>
         <p:spPr>
           <a:xfrm>
             <a:off x="4038480" y="6356520"/>
-            <a:ext cx="4109040" cy="359280"/>
+            <a:ext cx="4108680" cy="358920"/>
           </a:xfrm>
           <a:prstGeom prst="rect">
             <a:avLst/>
@@ -2389,18 +2896,18 @@
       </p:sp>
       <p:sp>
         <p:nvSpPr>
-          <p:cNvPr id="17" name="PlaceHolder 5"/>
+          <p:cNvPr id="59" name="PlaceHolder 8"/>
           <p:cNvSpPr>
             <a:spLocks noGrp="1"/>
           </p:cNvSpPr>
           <p:nvPr>
-            <p:ph type="sldNum" idx="9"/>
+            <p:ph type="sldNum" idx="33"/>
           </p:nvPr>
         </p:nvSpPr>
         <p:spPr>
           <a:xfrm>
             <a:off x="8610480" y="6356520"/>
-            <a:ext cx="2737440" cy="359280"/>
+            <a:ext cx="2737080" cy="358920"/>
           </a:xfrm>
           <a:prstGeom prst="rect">
             <a:avLst/>
@@ -2445,7 +2952,7 @@
                 <a:tab algn="l" pos="0"/>
               </a:tabLst>
             </a:pPr>
-            <a:fld id="{00DA8439-0A1D-40FB-B56F-840FA7014CDE}" type="slidenum">
+            <a:fld id="{C83E2023-78A6-49F4-BAF4-48FFCB3B6139}" type="slidenum">
               <a:rPr b="0" lang="en-US" sz="1200" strike="noStrike" u="none">
                 <a:solidFill>
                   <a:schemeClr val="dk1">
@@ -2474,9 +2981,9 @@
 </p:sldLayout>
 </file>
 
-<file path=ppt/slideLayouts/slideLayout4.xml><?xml version="1.0" encoding="utf-8"?>
-<p:sldLayout xmlns:a="http://schemas.openxmlformats.org/drawingml/2006/main" xmlns:p="http://schemas.openxmlformats.org/presentationml/2006/main" xmlns:r="http://schemas.openxmlformats.org/officeDocument/2006/relationships" xmlns:p14="http://schemas.microsoft.com/office/powerpoint/2010/main" xmlns:p15="http://schemas.microsoft.com/office/powerpoint/2012/main" xmlns:mc="http://schemas.openxmlformats.org/markup-compatibility/2006" type="vertTitleAndTx" preserve="1">
-  <p:cSld name="Vertical Title and Text">
+<file path=ppt/slideLayouts/slideLayout2.xml><?xml version="1.0" encoding="utf-8"?>
+<p:sldLayout xmlns:a="http://schemas.openxmlformats.org/drawingml/2006/main" xmlns:p="http://schemas.openxmlformats.org/presentationml/2006/main" xmlns:r="http://schemas.openxmlformats.org/officeDocument/2006/relationships" xmlns:p14="http://schemas.microsoft.com/office/powerpoint/2010/main" xmlns:p15="http://schemas.microsoft.com/office/powerpoint/2012/main" xmlns:mc="http://schemas.openxmlformats.org/markup-compatibility/2006" type="blank" preserve="1">
+  <p:cSld name="Blank">
     <p:bg>
       <p:bgPr>
         <a:solidFill>
@@ -2500,276 +3007,18 @@
       </p:grpSpPr>
       <p:sp>
         <p:nvSpPr>
-          <p:cNvPr id="18" name="PlaceHolder 1"/>
+          <p:cNvPr id="6" name="PlaceHolder 1"/>
           <p:cNvSpPr>
             <a:spLocks noGrp="1"/>
           </p:cNvSpPr>
           <p:nvPr>
-            <p:ph type="title"/>
-          </p:nvPr>
-        </p:nvSpPr>
-        <p:spPr>
-          <a:xfrm>
-            <a:off x="8724960" y="365040"/>
-            <a:ext cx="2623320" cy="5806080"/>
-          </a:xfrm>
-          <a:prstGeom prst="rect">
-            <a:avLst/>
-          </a:prstGeom>
-          <a:noFill/>
-          <a:ln w="0">
-            <a:noFill/>
-          </a:ln>
-        </p:spPr>
-        <p:txBody>
-          <a:bodyPr lIns="91440" rIns="91440" tIns="45720" bIns="45720" anchor="ctr" vert="eaVert">
-            <a:noAutofit/>
-          </a:bodyPr>
-          <a:p>
-            <a:pPr indent="0" defTabSz="914400">
-              <a:lnSpc>
-                <a:spcPct val="90000"/>
-              </a:lnSpc>
-              <a:buNone/>
-              <a:tabLst>
-                <a:tab algn="l" pos="0"/>
-              </a:tabLst>
-            </a:pPr>
-            <a:r>
-              <a:rPr b="0" lang="en-US" sz="4400" strike="noStrike" u="none">
-                <a:solidFill>
-                  <a:schemeClr val="dk1"/>
-                </a:solidFill>
-                <a:effectLst/>
-                <a:uFillTx/>
-                <a:latin typeface="Calibri Light"/>
-              </a:rPr>
-              <a:t>Click to edit Master title style</a:t>
-            </a:r>
-            <a:endParaRPr b="0" lang="en-US" sz="4400" strike="noStrike" u="none">
-              <a:solidFill>
-                <a:srgbClr val="000000"/>
-              </a:solidFill>
-              <a:effectLst/>
-              <a:uFillTx/>
-              <a:latin typeface="Arial"/>
-            </a:endParaRPr>
-          </a:p>
-        </p:txBody>
-      </p:sp>
-      <p:sp>
-        <p:nvSpPr>
-          <p:cNvPr id="19" name="PlaceHolder 2"/>
-          <p:cNvSpPr>
-            <a:spLocks noGrp="1"/>
-          </p:cNvSpPr>
-          <p:nvPr>
-            <p:ph type="body"/>
-          </p:nvPr>
-        </p:nvSpPr>
-        <p:spPr>
-          <a:xfrm>
-            <a:off x="838080" y="365040"/>
-            <a:ext cx="7728480" cy="5806080"/>
-          </a:xfrm>
-          <a:prstGeom prst="rect">
-            <a:avLst/>
-          </a:prstGeom>
-          <a:noFill/>
-          <a:ln w="0">
-            <a:noFill/>
-          </a:ln>
-        </p:spPr>
-        <p:txBody>
-          <a:bodyPr lIns="91440" rIns="91440" tIns="45720" bIns="45720" anchor="t" vert="eaVert">
-            <a:noAutofit/>
-          </a:bodyPr>
-          <a:p>
-            <a:pPr marL="228600" indent="-228600" defTabSz="914400">
-              <a:lnSpc>
-                <a:spcPct val="90000"/>
-              </a:lnSpc>
-              <a:spcBef>
-                <a:spcPts val="1001"/>
-              </a:spcBef>
-              <a:buClr>
-                <a:srgbClr val="000000"/>
-              </a:buClr>
-              <a:buFont typeface="Arial"/>
-              <a:buChar char="•"/>
-            </a:pPr>
-            <a:r>
-              <a:rPr b="0" lang="en-US" sz="2800" strike="noStrike" u="none">
-                <a:solidFill>
-                  <a:schemeClr val="dk1"/>
-                </a:solidFill>
-                <a:effectLst/>
-                <a:uFillTx/>
-                <a:latin typeface="Calibri"/>
-              </a:rPr>
-              <a:t>Click to edit Master text styles</a:t>
-            </a:r>
-            <a:endParaRPr b="0" lang="en-US" sz="2800" strike="noStrike" u="none">
-              <a:solidFill>
-                <a:srgbClr val="000000"/>
-              </a:solidFill>
-              <a:effectLst/>
-              <a:uFillTx/>
-              <a:latin typeface="Arial"/>
-            </a:endParaRPr>
-          </a:p>
-          <a:p>
-            <a:pPr lvl="1" marL="685800" indent="-228600" defTabSz="914400">
-              <a:lnSpc>
-                <a:spcPct val="90000"/>
-              </a:lnSpc>
-              <a:spcBef>
-                <a:spcPts val="499"/>
-              </a:spcBef>
-              <a:buClr>
-                <a:srgbClr val="000000"/>
-              </a:buClr>
-              <a:buFont typeface="Arial"/>
-              <a:buChar char="•"/>
-            </a:pPr>
-            <a:r>
-              <a:rPr b="0" lang="en-US" sz="2400" strike="noStrike" u="none">
-                <a:solidFill>
-                  <a:schemeClr val="dk1"/>
-                </a:solidFill>
-                <a:effectLst/>
-                <a:uFillTx/>
-                <a:latin typeface="Calibri"/>
-              </a:rPr>
-              <a:t>Second level</a:t>
-            </a:r>
-            <a:endParaRPr b="0" lang="en-US" sz="2400" strike="noStrike" u="none">
-              <a:solidFill>
-                <a:srgbClr val="000000"/>
-              </a:solidFill>
-              <a:effectLst/>
-              <a:uFillTx/>
-              <a:latin typeface="Arial"/>
-            </a:endParaRPr>
-          </a:p>
-          <a:p>
-            <a:pPr lvl="2" marL="1143000" indent="-228600" defTabSz="914400">
-              <a:lnSpc>
-                <a:spcPct val="90000"/>
-              </a:lnSpc>
-              <a:spcBef>
-                <a:spcPts val="499"/>
-              </a:spcBef>
-              <a:buClr>
-                <a:srgbClr val="000000"/>
-              </a:buClr>
-              <a:buFont typeface="Arial"/>
-              <a:buChar char="•"/>
-            </a:pPr>
-            <a:r>
-              <a:rPr b="0" lang="en-US" sz="2000" strike="noStrike" u="none">
-                <a:solidFill>
-                  <a:schemeClr val="dk1"/>
-                </a:solidFill>
-                <a:effectLst/>
-                <a:uFillTx/>
-                <a:latin typeface="Calibri"/>
-              </a:rPr>
-              <a:t>Third level</a:t>
-            </a:r>
-            <a:endParaRPr b="0" lang="en-US" sz="2000" strike="noStrike" u="none">
-              <a:solidFill>
-                <a:srgbClr val="000000"/>
-              </a:solidFill>
-              <a:effectLst/>
-              <a:uFillTx/>
-              <a:latin typeface="Arial"/>
-            </a:endParaRPr>
-          </a:p>
-          <a:p>
-            <a:pPr lvl="3" marL="1600200" indent="-228600" defTabSz="914400">
-              <a:lnSpc>
-                <a:spcPct val="90000"/>
-              </a:lnSpc>
-              <a:spcBef>
-                <a:spcPts val="499"/>
-              </a:spcBef>
-              <a:buClr>
-                <a:srgbClr val="000000"/>
-              </a:buClr>
-              <a:buFont typeface="Arial"/>
-              <a:buChar char="•"/>
-            </a:pPr>
-            <a:r>
-              <a:rPr b="0" lang="en-US" sz="1800" strike="noStrike" u="none">
-                <a:solidFill>
-                  <a:schemeClr val="dk1"/>
-                </a:solidFill>
-                <a:effectLst/>
-                <a:uFillTx/>
-                <a:latin typeface="Calibri"/>
-              </a:rPr>
-              <a:t>Fourth level</a:t>
-            </a:r>
-            <a:endParaRPr b="0" lang="en-US" sz="1800" strike="noStrike" u="none">
-              <a:solidFill>
-                <a:srgbClr val="000000"/>
-              </a:solidFill>
-              <a:effectLst/>
-              <a:uFillTx/>
-              <a:latin typeface="Arial"/>
-            </a:endParaRPr>
-          </a:p>
-          <a:p>
-            <a:pPr lvl="4" marL="2057400" indent="-228600" defTabSz="914400">
-              <a:lnSpc>
-                <a:spcPct val="90000"/>
-              </a:lnSpc>
-              <a:spcBef>
-                <a:spcPts val="499"/>
-              </a:spcBef>
-              <a:buClr>
-                <a:srgbClr val="000000"/>
-              </a:buClr>
-              <a:buFont typeface="Arial"/>
-              <a:buChar char="•"/>
-            </a:pPr>
-            <a:r>
-              <a:rPr b="0" lang="en-US" sz="1800" strike="noStrike" u="none">
-                <a:solidFill>
-                  <a:schemeClr val="dk1"/>
-                </a:solidFill>
-                <a:effectLst/>
-                <a:uFillTx/>
-                <a:latin typeface="Calibri"/>
-              </a:rPr>
-              <a:t>Fifth level</a:t>
-            </a:r>
-            <a:endParaRPr b="0" lang="en-US" sz="1800" strike="noStrike" u="none">
-              <a:solidFill>
-                <a:srgbClr val="000000"/>
-              </a:solidFill>
-              <a:effectLst/>
-              <a:uFillTx/>
-              <a:latin typeface="Arial"/>
-            </a:endParaRPr>
-          </a:p>
-        </p:txBody>
-      </p:sp>
-      <p:sp>
-        <p:nvSpPr>
-          <p:cNvPr id="20" name="PlaceHolder 3"/>
-          <p:cNvSpPr>
-            <a:spLocks noGrp="1"/>
-          </p:cNvSpPr>
-          <p:nvPr>
-            <p:ph type="dt" idx="10"/>
+            <p:ph type="dt" idx="4"/>
           </p:nvPr>
         </p:nvSpPr>
         <p:spPr>
           <a:xfrm>
             <a:off x="838080" y="6356520"/>
-            <a:ext cx="2737440" cy="359280"/>
+            <a:ext cx="2737080" cy="358920"/>
           </a:xfrm>
           <a:prstGeom prst="rect">
             <a:avLst/>
@@ -2840,18 +3089,18 @@
       </p:sp>
       <p:sp>
         <p:nvSpPr>
-          <p:cNvPr id="21" name="PlaceHolder 4"/>
+          <p:cNvPr id="7" name="PlaceHolder 2"/>
           <p:cNvSpPr>
             <a:spLocks noGrp="1"/>
           </p:cNvSpPr>
           <p:nvPr>
-            <p:ph type="ftr" idx="11"/>
+            <p:ph type="ftr" idx="5"/>
           </p:nvPr>
         </p:nvSpPr>
         <p:spPr>
           <a:xfrm>
             <a:off x="4038480" y="6356520"/>
-            <a:ext cx="4109040" cy="359280"/>
+            <a:ext cx="4108680" cy="358920"/>
           </a:xfrm>
           <a:prstGeom prst="rect">
             <a:avLst/>
@@ -2918,18 +3167,18 @@
       </p:sp>
       <p:sp>
         <p:nvSpPr>
-          <p:cNvPr id="22" name="PlaceHolder 5"/>
+          <p:cNvPr id="8" name="PlaceHolder 3"/>
           <p:cNvSpPr>
             <a:spLocks noGrp="1"/>
           </p:cNvSpPr>
           <p:nvPr>
-            <p:ph type="sldNum" idx="12"/>
+            <p:ph type="sldNum" idx="6"/>
           </p:nvPr>
         </p:nvSpPr>
         <p:spPr>
           <a:xfrm>
             <a:off x="8610480" y="6356520"/>
-            <a:ext cx="2737440" cy="359280"/>
+            <a:ext cx="2737080" cy="358920"/>
           </a:xfrm>
           <a:prstGeom prst="rect">
             <a:avLst/>
@@ -2974,7 +3223,7 @@
                 <a:tab algn="l" pos="0"/>
               </a:tabLst>
             </a:pPr>
-            <a:fld id="{5E2859E4-129B-4B30-A3D3-6D9F1A8E8CFD}" type="slidenum">
+            <a:fld id="{8CABB161-69E3-40D4-9009-B9E52448A839}" type="slidenum">
               <a:rPr b="0" lang="en-US" sz="1200" strike="noStrike" u="none">
                 <a:solidFill>
                   <a:schemeClr val="dk1">
@@ -3003,9 +3252,9 @@
 </p:sldLayout>
 </file>
 
-<file path=ppt/slideLayouts/slideLayout5.xml><?xml version="1.0" encoding="utf-8"?>
-<p:sldLayout xmlns:a="http://schemas.openxmlformats.org/drawingml/2006/main" xmlns:p="http://schemas.openxmlformats.org/presentationml/2006/main" xmlns:r="http://schemas.openxmlformats.org/officeDocument/2006/relationships" xmlns:p14="http://schemas.microsoft.com/office/powerpoint/2010/main" xmlns:p15="http://schemas.microsoft.com/office/powerpoint/2012/main" xmlns:mc="http://schemas.openxmlformats.org/markup-compatibility/2006" type="obj" preserve="1">
-  <p:cSld name="Title and Content">
+<file path=ppt/slideLayouts/slideLayout3.xml><?xml version="1.0" encoding="utf-8"?>
+<p:sldLayout xmlns:a="http://schemas.openxmlformats.org/drawingml/2006/main" xmlns:p="http://schemas.openxmlformats.org/presentationml/2006/main" xmlns:r="http://schemas.openxmlformats.org/officeDocument/2006/relationships" xmlns:p14="http://schemas.microsoft.com/office/powerpoint/2010/main" xmlns:p15="http://schemas.microsoft.com/office/powerpoint/2012/main" xmlns:mc="http://schemas.openxmlformats.org/markup-compatibility/2006" type="blank" preserve="1">
+  <p:cSld name="Content with Caption">
     <p:bg>
       <p:bgPr>
         <a:solidFill>
@@ -3029,7 +3278,7 @@
       </p:grpSpPr>
       <p:sp>
         <p:nvSpPr>
-          <p:cNvPr id="23" name="PlaceHolder 1"/>
+          <p:cNvPr id="9" name="PlaceHolder 1"/>
           <p:cNvSpPr>
             <a:spLocks noGrp="1"/>
           </p:cNvSpPr>
@@ -3039,8 +3288,8 @@
         </p:nvSpPr>
         <p:spPr>
           <a:xfrm>
-            <a:off x="838080" y="365040"/>
-            <a:ext cx="10509840" cy="1319760"/>
+            <a:off x="839880" y="457200"/>
+            <a:ext cx="3926160" cy="1594080"/>
           </a:xfrm>
           <a:prstGeom prst="rect">
             <a:avLst/>
@@ -3051,7 +3300,7 @@
           </a:ln>
         </p:spPr>
         <p:txBody>
-          <a:bodyPr lIns="91440" rIns="91440" tIns="45720" bIns="45720" anchor="ctr">
+          <a:bodyPr lIns="91440" rIns="91440" tIns="45720" bIns="45720" anchor="b">
             <a:noAutofit/>
           </a:bodyPr>
           <a:p>
@@ -3065,7 +3314,7 @@
               </a:tabLst>
             </a:pPr>
             <a:r>
-              <a:rPr b="0" lang="en-US" sz="4400" strike="noStrike" u="none">
+              <a:rPr b="0" lang="en-US" sz="3200" strike="noStrike" u="none">
                 <a:solidFill>
                   <a:schemeClr val="dk1"/>
                 </a:solidFill>
@@ -3075,7 +3324,7 @@
               </a:rPr>
               <a:t>Click to edit Master title style</a:t>
             </a:r>
-            <a:endParaRPr b="0" lang="en-US" sz="4400" strike="noStrike" u="none">
+            <a:endParaRPr b="0" lang="en-US" sz="3200" strike="noStrike" u="none">
               <a:solidFill>
                 <a:srgbClr val="000000"/>
               </a:solidFill>
@@ -3088,7 +3337,7 @@
       </p:sp>
       <p:sp>
         <p:nvSpPr>
-          <p:cNvPr id="24" name="PlaceHolder 2"/>
+          <p:cNvPr id="10" name="PlaceHolder 2"/>
           <p:cNvSpPr>
             <a:spLocks noGrp="1"/>
           </p:cNvSpPr>
@@ -3098,8 +3347,8 @@
         </p:nvSpPr>
         <p:spPr>
           <a:xfrm>
-            <a:off x="838080" y="1825560"/>
-            <a:ext cx="10509840" cy="4345560"/>
+            <a:off x="5183280" y="987480"/>
+            <a:ext cx="6166080" cy="4867560"/>
           </a:xfrm>
           <a:prstGeom prst="rect">
             <a:avLst/>
@@ -3128,7 +3377,7 @@
               <a:buChar char="•"/>
             </a:pPr>
             <a:r>
-              <a:rPr b="0" lang="en-US" sz="2800" strike="noStrike" u="none">
+              <a:rPr b="0" lang="en-US" sz="3200" strike="noStrike" u="none">
                 <a:solidFill>
                   <a:schemeClr val="dk1"/>
                 </a:solidFill>
@@ -3138,7 +3387,7 @@
               </a:rPr>
               <a:t>Click to edit Master text styles</a:t>
             </a:r>
-            <a:endParaRPr b="0" lang="en-US" sz="2800" strike="noStrike" u="none">
+            <a:endParaRPr b="0" lang="en-US" sz="3200" strike="noStrike" u="none">
               <a:solidFill>
                 <a:srgbClr val="000000"/>
               </a:solidFill>
@@ -3162,7 +3411,7 @@
               <a:buChar char="•"/>
             </a:pPr>
             <a:r>
-              <a:rPr b="0" lang="en-US" sz="2400" strike="noStrike" u="none">
+              <a:rPr b="0" lang="en-US" sz="2800" strike="noStrike" u="none">
                 <a:solidFill>
                   <a:schemeClr val="dk1"/>
                 </a:solidFill>
@@ -3172,7 +3421,7 @@
               </a:rPr>
               <a:t>Second level</a:t>
             </a:r>
-            <a:endParaRPr b="0" lang="en-US" sz="2400" strike="noStrike" u="none">
+            <a:endParaRPr b="0" lang="en-US" sz="2800" strike="noStrike" u="none">
               <a:solidFill>
                 <a:srgbClr val="000000"/>
               </a:solidFill>
@@ -3196,7 +3445,7 @@
               <a:buChar char="•"/>
             </a:pPr>
             <a:r>
-              <a:rPr b="0" lang="en-US" sz="2000" strike="noStrike" u="none">
+              <a:rPr b="0" lang="en-US" sz="2400" strike="noStrike" u="none">
                 <a:solidFill>
                   <a:schemeClr val="dk1"/>
                 </a:solidFill>
@@ -3206,7 +3455,7 @@
               </a:rPr>
               <a:t>Third level</a:t>
             </a:r>
-            <a:endParaRPr b="0" lang="en-US" sz="2000" strike="noStrike" u="none">
+            <a:endParaRPr b="0" lang="en-US" sz="2400" strike="noStrike" u="none">
               <a:solidFill>
                 <a:srgbClr val="000000"/>
               </a:solidFill>
@@ -3230,7 +3479,7 @@
               <a:buChar char="•"/>
             </a:pPr>
             <a:r>
-              <a:rPr b="0" lang="en-US" sz="1800" strike="noStrike" u="none">
+              <a:rPr b="0" lang="en-US" sz="2000" strike="noStrike" u="none">
                 <a:solidFill>
                   <a:schemeClr val="dk1"/>
                 </a:solidFill>
@@ -3240,7 +3489,7 @@
               </a:rPr>
               <a:t>Fourth level</a:t>
             </a:r>
-            <a:endParaRPr b="0" lang="en-US" sz="1800" strike="noStrike" u="none">
+            <a:endParaRPr b="0" lang="en-US" sz="2000" strike="noStrike" u="none">
               <a:solidFill>
                 <a:srgbClr val="000000"/>
               </a:solidFill>
@@ -3264,7 +3513,7 @@
               <a:buChar char="•"/>
             </a:pPr>
             <a:r>
-              <a:rPr b="0" lang="en-US" sz="1800" strike="noStrike" u="none">
+              <a:rPr b="0" lang="en-US" sz="2000" strike="noStrike" u="none">
                 <a:solidFill>
                   <a:schemeClr val="dk1"/>
                 </a:solidFill>
@@ -3274,7 +3523,7 @@
               </a:rPr>
               <a:t>Fifth level</a:t>
             </a:r>
-            <a:endParaRPr b="0" lang="en-US" sz="1800" strike="noStrike" u="none">
+            <a:endParaRPr b="0" lang="en-US" sz="2000" strike="noStrike" u="none">
               <a:solidFill>
                 <a:srgbClr val="000000"/>
               </a:solidFill>
@@ -3287,18 +3536,80 @@
       </p:sp>
       <p:sp>
         <p:nvSpPr>
-          <p:cNvPr id="25" name="PlaceHolder 3"/>
+          <p:cNvPr id="11" name="PlaceHolder 3"/>
           <p:cNvSpPr>
             <a:spLocks noGrp="1"/>
           </p:cNvSpPr>
           <p:nvPr>
-            <p:ph type="dt" idx="13"/>
+            <p:ph type="body"/>
+          </p:nvPr>
+        </p:nvSpPr>
+        <p:spPr>
+          <a:xfrm>
+            <a:off x="839880" y="2057400"/>
+            <a:ext cx="3926160" cy="3805560"/>
+          </a:xfrm>
+          <a:prstGeom prst="rect">
+            <a:avLst/>
+          </a:prstGeom>
+          <a:noFill/>
+          <a:ln w="0">
+            <a:noFill/>
+          </a:ln>
+        </p:spPr>
+        <p:txBody>
+          <a:bodyPr lIns="91440" rIns="91440" tIns="45720" bIns="45720" anchor="t">
+            <a:noAutofit/>
+          </a:bodyPr>
+          <a:p>
+            <a:pPr indent="0" defTabSz="914400">
+              <a:lnSpc>
+                <a:spcPct val="90000"/>
+              </a:lnSpc>
+              <a:spcBef>
+                <a:spcPts val="1001"/>
+              </a:spcBef>
+              <a:buNone/>
+              <a:tabLst>
+                <a:tab algn="l" pos="0"/>
+              </a:tabLst>
+            </a:pPr>
+            <a:r>
+              <a:rPr b="0" lang="en-US" sz="1600" strike="noStrike" u="none">
+                <a:solidFill>
+                  <a:schemeClr val="dk1"/>
+                </a:solidFill>
+                <a:effectLst/>
+                <a:uFillTx/>
+                <a:latin typeface="Calibri"/>
+              </a:rPr>
+              <a:t>Click to edit Master text styles</a:t>
+            </a:r>
+            <a:endParaRPr b="0" lang="en-US" sz="1600" strike="noStrike" u="none">
+              <a:solidFill>
+                <a:srgbClr val="000000"/>
+              </a:solidFill>
+              <a:effectLst/>
+              <a:uFillTx/>
+              <a:latin typeface="Arial"/>
+            </a:endParaRPr>
+          </a:p>
+        </p:txBody>
+      </p:sp>
+      <p:sp>
+        <p:nvSpPr>
+          <p:cNvPr id="12" name="PlaceHolder 4"/>
+          <p:cNvSpPr>
+            <a:spLocks noGrp="1"/>
+          </p:cNvSpPr>
+          <p:nvPr>
+            <p:ph type="dt" idx="7"/>
           </p:nvPr>
         </p:nvSpPr>
         <p:spPr>
           <a:xfrm>
             <a:off x="838080" y="6356520"/>
-            <a:ext cx="2737440" cy="359280"/>
+            <a:ext cx="2737080" cy="358920"/>
           </a:xfrm>
           <a:prstGeom prst="rect">
             <a:avLst/>
@@ -3369,18 +3680,18 @@
       </p:sp>
       <p:sp>
         <p:nvSpPr>
-          <p:cNvPr id="26" name="PlaceHolder 4"/>
+          <p:cNvPr id="13" name="PlaceHolder 5"/>
           <p:cNvSpPr>
             <a:spLocks noGrp="1"/>
           </p:cNvSpPr>
           <p:nvPr>
-            <p:ph type="ftr" idx="14"/>
+            <p:ph type="ftr" idx="8"/>
           </p:nvPr>
         </p:nvSpPr>
         <p:spPr>
           <a:xfrm>
             <a:off x="4038480" y="6356520"/>
-            <a:ext cx="4109040" cy="359280"/>
+            <a:ext cx="4108680" cy="358920"/>
           </a:xfrm>
           <a:prstGeom prst="rect">
             <a:avLst/>
@@ -3447,18 +3758,18 @@
       </p:sp>
       <p:sp>
         <p:nvSpPr>
-          <p:cNvPr id="27" name="PlaceHolder 5"/>
+          <p:cNvPr id="14" name="PlaceHolder 6"/>
           <p:cNvSpPr>
             <a:spLocks noGrp="1"/>
           </p:cNvSpPr>
           <p:nvPr>
-            <p:ph type="sldNum" idx="15"/>
+            <p:ph type="sldNum" idx="9"/>
           </p:nvPr>
         </p:nvSpPr>
         <p:spPr>
           <a:xfrm>
             <a:off x="8610480" y="6356520"/>
-            <a:ext cx="2737440" cy="359280"/>
+            <a:ext cx="2737080" cy="358920"/>
           </a:xfrm>
           <a:prstGeom prst="rect">
             <a:avLst/>
@@ -3503,7 +3814,7 @@
                 <a:tab algn="l" pos="0"/>
               </a:tabLst>
             </a:pPr>
-            <a:fld id="{EF618038-24B8-4872-A236-87499F5E7276}" type="slidenum">
+            <a:fld id="{16424370-12B5-41FE-AE75-FFFDB826D53E}" type="slidenum">
               <a:rPr b="0" lang="en-US" sz="1200" strike="noStrike" u="none">
                 <a:solidFill>
                   <a:schemeClr val="dk1">
@@ -3532,9 +3843,9 @@
 </p:sldLayout>
 </file>
 
-<file path=ppt/slideLayouts/slideLayout6.xml><?xml version="1.0" encoding="utf-8"?>
+<file path=ppt/slideLayouts/slideLayout4.xml><?xml version="1.0" encoding="utf-8"?>
 <p:sldLayout xmlns:a="http://schemas.openxmlformats.org/drawingml/2006/main" xmlns:p="http://schemas.openxmlformats.org/presentationml/2006/main" xmlns:r="http://schemas.openxmlformats.org/officeDocument/2006/relationships" xmlns:p14="http://schemas.microsoft.com/office/powerpoint/2010/main" xmlns:p15="http://schemas.microsoft.com/office/powerpoint/2012/main" xmlns:mc="http://schemas.openxmlformats.org/markup-compatibility/2006" type="blank" preserve="1">
-  <p:cSld name="Section Header">
+  <p:cSld name="Picture with Caption">
     <p:bg>
       <p:bgPr>
         <a:solidFill>
@@ -3558,7 +3869,7 @@
       </p:grpSpPr>
       <p:sp>
         <p:nvSpPr>
-          <p:cNvPr id="28" name="PlaceHolder 1"/>
+          <p:cNvPr id="15" name="PlaceHolder 1"/>
           <p:cNvSpPr>
             <a:spLocks noGrp="1"/>
           </p:cNvSpPr>
@@ -3568,8 +3879,8 @@
         </p:nvSpPr>
         <p:spPr>
           <a:xfrm>
-            <a:off x="831960" y="1709640"/>
-            <a:ext cx="10509840" cy="2846880"/>
+            <a:off x="839880" y="457200"/>
+            <a:ext cx="3926160" cy="1594080"/>
           </a:xfrm>
           <a:prstGeom prst="rect">
             <a:avLst/>
@@ -3594,7 +3905,7 @@
               </a:tabLst>
             </a:pPr>
             <a:r>
-              <a:rPr b="0" lang="en-US" sz="6000" strike="noStrike" u="none">
+              <a:rPr b="0" lang="en-US" sz="3200" strike="noStrike" u="none">
                 <a:solidFill>
                   <a:schemeClr val="dk1"/>
                 </a:solidFill>
@@ -3604,7 +3915,7 @@
               </a:rPr>
               <a:t>Click to edit Master title style</a:t>
             </a:r>
-            <a:endParaRPr b="0" lang="en-US" sz="6000" strike="noStrike" u="none">
+            <a:endParaRPr b="0" lang="en-US" sz="3200" strike="noStrike" u="none">
               <a:solidFill>
                 <a:srgbClr val="000000"/>
               </a:solidFill>
@@ -3617,7 +3928,7 @@
       </p:sp>
       <p:sp>
         <p:nvSpPr>
-          <p:cNvPr id="29" name="PlaceHolder 2"/>
+          <p:cNvPr id="16" name="PlaceHolder 2"/>
           <p:cNvSpPr>
             <a:spLocks noGrp="1"/>
           </p:cNvSpPr>
@@ -3627,8 +3938,67 @@
         </p:nvSpPr>
         <p:spPr>
           <a:xfrm>
-            <a:off x="831960" y="4589640"/>
-            <a:ext cx="10509840" cy="1494360"/>
+            <a:off x="5183280" y="987480"/>
+            <a:ext cx="6166080" cy="4867560"/>
+          </a:xfrm>
+          <a:prstGeom prst="rect">
+            <a:avLst/>
+          </a:prstGeom>
+          <a:noFill/>
+          <a:ln w="0">
+            <a:noFill/>
+          </a:ln>
+        </p:spPr>
+        <p:txBody>
+          <a:bodyPr lIns="90000" rIns="90000" tIns="45000" bIns="45000" anchor="t">
+            <a:noAutofit/>
+          </a:bodyPr>
+          <a:p>
+            <a:pPr indent="0" defTabSz="914400">
+              <a:lnSpc>
+                <a:spcPct val="100000"/>
+              </a:lnSpc>
+              <a:buNone/>
+              <a:tabLst>
+                <a:tab algn="l" pos="0"/>
+              </a:tabLst>
+            </a:pPr>
+            <a:r>
+              <a:rPr b="0" lang="en-US" sz="3200" strike="noStrike" u="none">
+                <a:solidFill>
+                  <a:schemeClr val="dk1"/>
+                </a:solidFill>
+                <a:effectLst/>
+                <a:uFillTx/>
+                <a:latin typeface="Calibri"/>
+              </a:rPr>
+              <a:t>Click icon to add picture</a:t>
+            </a:r>
+            <a:endParaRPr b="0" lang="en-US" sz="3200" strike="noStrike" u="none">
+              <a:solidFill>
+                <a:srgbClr val="000000"/>
+              </a:solidFill>
+              <a:effectLst/>
+              <a:uFillTx/>
+              <a:latin typeface="Arial"/>
+            </a:endParaRPr>
+          </a:p>
+        </p:txBody>
+      </p:sp>
+      <p:sp>
+        <p:nvSpPr>
+          <p:cNvPr id="17" name="PlaceHolder 3"/>
+          <p:cNvSpPr>
+            <a:spLocks noGrp="1"/>
+          </p:cNvSpPr>
+          <p:nvPr>
+            <p:ph type="body"/>
+          </p:nvPr>
+        </p:nvSpPr>
+        <p:spPr>
+          <a:xfrm>
+            <a:off x="839880" y="2057400"/>
+            <a:ext cx="3926160" cy="3805560"/>
           </a:xfrm>
           <a:prstGeom prst="rect">
             <a:avLst/>
@@ -3656,11 +4026,9 @@
               </a:tabLst>
             </a:pPr>
             <a:r>
-              <a:rPr b="0" lang="en-US" sz="2400" strike="noStrike" u="none">
+              <a:rPr b="0" lang="en-US" sz="1600" strike="noStrike" u="none">
                 <a:solidFill>
-                  <a:schemeClr val="dk1">
-                    <a:tint val="75000"/>
-                  </a:schemeClr>
+                  <a:schemeClr val="dk1"/>
                 </a:solidFill>
                 <a:effectLst/>
                 <a:uFillTx/>
@@ -3668,7 +4036,7 @@
               </a:rPr>
               <a:t>Click to edit Master text styles</a:t>
             </a:r>
-            <a:endParaRPr b="0" lang="en-US" sz="2400" strike="noStrike" u="none">
+            <a:endParaRPr b="0" lang="en-US" sz="1600" strike="noStrike" u="none">
               <a:solidFill>
                 <a:srgbClr val="000000"/>
               </a:solidFill>
@@ -3681,18 +4049,18 @@
       </p:sp>
       <p:sp>
         <p:nvSpPr>
-          <p:cNvPr id="30" name="PlaceHolder 3"/>
+          <p:cNvPr id="18" name="PlaceHolder 4"/>
           <p:cNvSpPr>
             <a:spLocks noGrp="1"/>
           </p:cNvSpPr>
           <p:nvPr>
-            <p:ph type="dt" idx="16"/>
+            <p:ph type="dt" idx="10"/>
           </p:nvPr>
         </p:nvSpPr>
         <p:spPr>
           <a:xfrm>
             <a:off x="838080" y="6356520"/>
-            <a:ext cx="2737440" cy="359280"/>
+            <a:ext cx="2737080" cy="358920"/>
           </a:xfrm>
           <a:prstGeom prst="rect">
             <a:avLst/>
@@ -3763,18 +4131,18 @@
       </p:sp>
       <p:sp>
         <p:nvSpPr>
-          <p:cNvPr id="31" name="PlaceHolder 4"/>
+          <p:cNvPr id="19" name="PlaceHolder 5"/>
           <p:cNvSpPr>
             <a:spLocks noGrp="1"/>
           </p:cNvSpPr>
           <p:nvPr>
-            <p:ph type="ftr" idx="17"/>
+            <p:ph type="ftr" idx="11"/>
           </p:nvPr>
         </p:nvSpPr>
         <p:spPr>
           <a:xfrm>
             <a:off x="4038480" y="6356520"/>
-            <a:ext cx="4109040" cy="359280"/>
+            <a:ext cx="4108680" cy="358920"/>
           </a:xfrm>
           <a:prstGeom prst="rect">
             <a:avLst/>
@@ -3841,18 +4209,18 @@
       </p:sp>
       <p:sp>
         <p:nvSpPr>
-          <p:cNvPr id="32" name="PlaceHolder 5"/>
+          <p:cNvPr id="20" name="PlaceHolder 6"/>
           <p:cNvSpPr>
             <a:spLocks noGrp="1"/>
           </p:cNvSpPr>
           <p:nvPr>
-            <p:ph type="sldNum" idx="18"/>
+            <p:ph type="sldNum" idx="12"/>
           </p:nvPr>
         </p:nvSpPr>
         <p:spPr>
           <a:xfrm>
             <a:off x="8610480" y="6356520"/>
-            <a:ext cx="2737440" cy="359280"/>
+            <a:ext cx="2737080" cy="358920"/>
           </a:xfrm>
           <a:prstGeom prst="rect">
             <a:avLst/>
@@ -3897,7 +4265,7 @@
                 <a:tab algn="l" pos="0"/>
               </a:tabLst>
             </a:pPr>
-            <a:fld id="{3133B449-7152-4EC2-93D0-41F7BB3D3E15}" type="slidenum">
+            <a:fld id="{0C929839-D7D8-43BE-B707-D6A15BEB2323}" type="slidenum">
               <a:rPr b="0" lang="en-US" sz="1200" strike="noStrike" u="none">
                 <a:solidFill>
                   <a:schemeClr val="dk1">
@@ -3926,9 +4294,9 @@
 </p:sldLayout>
 </file>
 
-<file path=ppt/slideLayouts/slideLayout7.xml><?xml version="1.0" encoding="utf-8"?>
-<p:sldLayout xmlns:a="http://schemas.openxmlformats.org/drawingml/2006/main" xmlns:p="http://schemas.openxmlformats.org/presentationml/2006/main" xmlns:r="http://schemas.openxmlformats.org/officeDocument/2006/relationships" xmlns:p14="http://schemas.microsoft.com/office/powerpoint/2010/main" xmlns:p15="http://schemas.microsoft.com/office/powerpoint/2012/main" xmlns:mc="http://schemas.openxmlformats.org/markup-compatibility/2006" type="twoObj" preserve="1">
-  <p:cSld name="Two Content">
+<file path=ppt/slideLayouts/slideLayout5.xml><?xml version="1.0" encoding="utf-8"?>
+<p:sldLayout xmlns:a="http://schemas.openxmlformats.org/drawingml/2006/main" xmlns:p="http://schemas.openxmlformats.org/presentationml/2006/main" xmlns:r="http://schemas.openxmlformats.org/officeDocument/2006/relationships" xmlns:p14="http://schemas.microsoft.com/office/powerpoint/2010/main" xmlns:p15="http://schemas.microsoft.com/office/powerpoint/2012/main" xmlns:mc="http://schemas.openxmlformats.org/markup-compatibility/2006" type="title" preserve="1">
+  <p:cSld name="Title Slide">
     <p:bg>
       <p:bgPr>
         <a:solidFill>
@@ -3952,7 +4320,7 @@
       </p:grpSpPr>
       <p:sp>
         <p:nvSpPr>
-          <p:cNvPr id="33" name="PlaceHolder 1"/>
+          <p:cNvPr id="21" name="PlaceHolder 1"/>
           <p:cNvSpPr>
             <a:spLocks noGrp="1"/>
           </p:cNvSpPr>
@@ -3962,8 +4330,8 @@
         </p:nvSpPr>
         <p:spPr>
           <a:xfrm>
-            <a:off x="838080" y="365040"/>
-            <a:ext cx="10509840" cy="1319760"/>
+            <a:off x="1523880" y="1122480"/>
+            <a:ext cx="9137880" cy="2381400"/>
           </a:xfrm>
           <a:prstGeom prst="rect">
             <a:avLst/>
@@ -3974,11 +4342,11 @@
           </a:ln>
         </p:spPr>
         <p:txBody>
-          <a:bodyPr lIns="91440" rIns="91440" tIns="45720" bIns="45720" anchor="ctr">
+          <a:bodyPr lIns="91440" rIns="91440" tIns="45720" bIns="45720" anchor="b">
             <a:noAutofit/>
           </a:bodyPr>
           <a:p>
-            <a:pPr indent="0" defTabSz="914400">
+            <a:pPr indent="0" algn="ctr" defTabSz="914400">
               <a:lnSpc>
                 <a:spcPct val="90000"/>
               </a:lnSpc>
@@ -3988,7 +4356,7 @@
               </a:tabLst>
             </a:pPr>
             <a:r>
-              <a:rPr b="0" lang="en-US" sz="4400" strike="noStrike" u="none">
+              <a:rPr b="0" lang="en-US" sz="6000" strike="noStrike" u="none">
                 <a:solidFill>
                   <a:schemeClr val="dk1"/>
                 </a:solidFill>
@@ -3998,7 +4366,7 @@
               </a:rPr>
               <a:t>Click to edit Master title style</a:t>
             </a:r>
-            <a:endParaRPr b="0" lang="en-US" sz="4400" strike="noStrike" u="none">
+            <a:endParaRPr b="0" lang="en-US" sz="6000" strike="noStrike" u="none">
               <a:solidFill>
                 <a:srgbClr val="000000"/>
               </a:solidFill>
@@ -4011,416 +4379,18 @@
       </p:sp>
       <p:sp>
         <p:nvSpPr>
-          <p:cNvPr id="34" name="PlaceHolder 2"/>
+          <p:cNvPr id="22" name="PlaceHolder 2"/>
           <p:cNvSpPr>
             <a:spLocks noGrp="1"/>
           </p:cNvSpPr>
           <p:nvPr>
-            <p:ph type="body"/>
-          </p:nvPr>
-        </p:nvSpPr>
-        <p:spPr>
-          <a:xfrm>
-            <a:off x="838080" y="1825560"/>
-            <a:ext cx="5175720" cy="4345560"/>
-          </a:xfrm>
-          <a:prstGeom prst="rect">
-            <a:avLst/>
-          </a:prstGeom>
-          <a:noFill/>
-          <a:ln w="0">
-            <a:noFill/>
-          </a:ln>
-        </p:spPr>
-        <p:txBody>
-          <a:bodyPr lIns="91440" rIns="91440" tIns="45720" bIns="45720" anchor="t">
-            <a:noAutofit/>
-          </a:bodyPr>
-          <a:p>
-            <a:pPr marL="228600" indent="-228600" defTabSz="914400">
-              <a:lnSpc>
-                <a:spcPct val="90000"/>
-              </a:lnSpc>
-              <a:spcBef>
-                <a:spcPts val="1001"/>
-              </a:spcBef>
-              <a:buClr>
-                <a:srgbClr val="000000"/>
-              </a:buClr>
-              <a:buFont typeface="Arial"/>
-              <a:buChar char="•"/>
-            </a:pPr>
-            <a:r>
-              <a:rPr b="0" lang="en-US" sz="2800" strike="noStrike" u="none">
-                <a:solidFill>
-                  <a:schemeClr val="dk1"/>
-                </a:solidFill>
-                <a:effectLst/>
-                <a:uFillTx/>
-                <a:latin typeface="Calibri"/>
-              </a:rPr>
-              <a:t>Click to edit Master text styles</a:t>
-            </a:r>
-            <a:endParaRPr b="0" lang="en-US" sz="2800" strike="noStrike" u="none">
-              <a:solidFill>
-                <a:srgbClr val="000000"/>
-              </a:solidFill>
-              <a:effectLst/>
-              <a:uFillTx/>
-              <a:latin typeface="Arial"/>
-            </a:endParaRPr>
-          </a:p>
-          <a:p>
-            <a:pPr lvl="1" marL="685800" indent="-228600" defTabSz="914400">
-              <a:lnSpc>
-                <a:spcPct val="90000"/>
-              </a:lnSpc>
-              <a:spcBef>
-                <a:spcPts val="499"/>
-              </a:spcBef>
-              <a:buClr>
-                <a:srgbClr val="000000"/>
-              </a:buClr>
-              <a:buFont typeface="Arial"/>
-              <a:buChar char="•"/>
-            </a:pPr>
-            <a:r>
-              <a:rPr b="0" lang="en-US" sz="2400" strike="noStrike" u="none">
-                <a:solidFill>
-                  <a:schemeClr val="dk1"/>
-                </a:solidFill>
-                <a:effectLst/>
-                <a:uFillTx/>
-                <a:latin typeface="Calibri"/>
-              </a:rPr>
-              <a:t>Second level</a:t>
-            </a:r>
-            <a:endParaRPr b="0" lang="en-US" sz="2400" strike="noStrike" u="none">
-              <a:solidFill>
-                <a:srgbClr val="000000"/>
-              </a:solidFill>
-              <a:effectLst/>
-              <a:uFillTx/>
-              <a:latin typeface="Arial"/>
-            </a:endParaRPr>
-          </a:p>
-          <a:p>
-            <a:pPr lvl="2" marL="1143000" indent="-228600" defTabSz="914400">
-              <a:lnSpc>
-                <a:spcPct val="90000"/>
-              </a:lnSpc>
-              <a:spcBef>
-                <a:spcPts val="499"/>
-              </a:spcBef>
-              <a:buClr>
-                <a:srgbClr val="000000"/>
-              </a:buClr>
-              <a:buFont typeface="Arial"/>
-              <a:buChar char="•"/>
-            </a:pPr>
-            <a:r>
-              <a:rPr b="0" lang="en-US" sz="2000" strike="noStrike" u="none">
-                <a:solidFill>
-                  <a:schemeClr val="dk1"/>
-                </a:solidFill>
-                <a:effectLst/>
-                <a:uFillTx/>
-                <a:latin typeface="Calibri"/>
-              </a:rPr>
-              <a:t>Third level</a:t>
-            </a:r>
-            <a:endParaRPr b="0" lang="en-US" sz="2000" strike="noStrike" u="none">
-              <a:solidFill>
-                <a:srgbClr val="000000"/>
-              </a:solidFill>
-              <a:effectLst/>
-              <a:uFillTx/>
-              <a:latin typeface="Arial"/>
-            </a:endParaRPr>
-          </a:p>
-          <a:p>
-            <a:pPr lvl="3" marL="1600200" indent="-228600" defTabSz="914400">
-              <a:lnSpc>
-                <a:spcPct val="90000"/>
-              </a:lnSpc>
-              <a:spcBef>
-                <a:spcPts val="499"/>
-              </a:spcBef>
-              <a:buClr>
-                <a:srgbClr val="000000"/>
-              </a:buClr>
-              <a:buFont typeface="Arial"/>
-              <a:buChar char="•"/>
-            </a:pPr>
-            <a:r>
-              <a:rPr b="0" lang="en-US" sz="1800" strike="noStrike" u="none">
-                <a:solidFill>
-                  <a:schemeClr val="dk1"/>
-                </a:solidFill>
-                <a:effectLst/>
-                <a:uFillTx/>
-                <a:latin typeface="Calibri"/>
-              </a:rPr>
-              <a:t>Fourth level</a:t>
-            </a:r>
-            <a:endParaRPr b="0" lang="en-US" sz="1800" strike="noStrike" u="none">
-              <a:solidFill>
-                <a:srgbClr val="000000"/>
-              </a:solidFill>
-              <a:effectLst/>
-              <a:uFillTx/>
-              <a:latin typeface="Arial"/>
-            </a:endParaRPr>
-          </a:p>
-          <a:p>
-            <a:pPr lvl="4" marL="2057400" indent="-228600" defTabSz="914400">
-              <a:lnSpc>
-                <a:spcPct val="90000"/>
-              </a:lnSpc>
-              <a:spcBef>
-                <a:spcPts val="499"/>
-              </a:spcBef>
-              <a:buClr>
-                <a:srgbClr val="000000"/>
-              </a:buClr>
-              <a:buFont typeface="Arial"/>
-              <a:buChar char="•"/>
-            </a:pPr>
-            <a:r>
-              <a:rPr b="0" lang="en-US" sz="1800" strike="noStrike" u="none">
-                <a:solidFill>
-                  <a:schemeClr val="dk1"/>
-                </a:solidFill>
-                <a:effectLst/>
-                <a:uFillTx/>
-                <a:latin typeface="Calibri"/>
-              </a:rPr>
-              <a:t>Fifth level</a:t>
-            </a:r>
-            <a:endParaRPr b="0" lang="en-US" sz="1800" strike="noStrike" u="none">
-              <a:solidFill>
-                <a:srgbClr val="000000"/>
-              </a:solidFill>
-              <a:effectLst/>
-              <a:uFillTx/>
-              <a:latin typeface="Arial"/>
-            </a:endParaRPr>
-          </a:p>
-        </p:txBody>
-      </p:sp>
-      <p:sp>
-        <p:nvSpPr>
-          <p:cNvPr id="35" name="PlaceHolder 3"/>
-          <p:cNvSpPr>
-            <a:spLocks noGrp="1"/>
-          </p:cNvSpPr>
-          <p:nvPr>
-            <p:ph type="body"/>
-          </p:nvPr>
-        </p:nvSpPr>
-        <p:spPr>
-          <a:xfrm>
-            <a:off x="6172200" y="1825560"/>
-            <a:ext cx="5175720" cy="4345560"/>
-          </a:xfrm>
-          <a:prstGeom prst="rect">
-            <a:avLst/>
-          </a:prstGeom>
-          <a:noFill/>
-          <a:ln w="0">
-            <a:noFill/>
-          </a:ln>
-        </p:spPr>
-        <p:txBody>
-          <a:bodyPr lIns="91440" rIns="91440" tIns="45720" bIns="45720" anchor="t">
-            <a:noAutofit/>
-          </a:bodyPr>
-          <a:p>
-            <a:pPr marL="228600" indent="-228600" defTabSz="914400">
-              <a:lnSpc>
-                <a:spcPct val="90000"/>
-              </a:lnSpc>
-              <a:spcBef>
-                <a:spcPts val="1001"/>
-              </a:spcBef>
-              <a:buClr>
-                <a:srgbClr val="000000"/>
-              </a:buClr>
-              <a:buFont typeface="Arial"/>
-              <a:buChar char="•"/>
-            </a:pPr>
-            <a:r>
-              <a:rPr b="0" lang="en-US" sz="2800" strike="noStrike" u="none">
-                <a:solidFill>
-                  <a:schemeClr val="dk1"/>
-                </a:solidFill>
-                <a:effectLst/>
-                <a:uFillTx/>
-                <a:latin typeface="Calibri"/>
-              </a:rPr>
-              <a:t>Click to edit Master text styles</a:t>
-            </a:r>
-            <a:endParaRPr b="0" lang="en-US" sz="2800" strike="noStrike" u="none">
-              <a:solidFill>
-                <a:srgbClr val="000000"/>
-              </a:solidFill>
-              <a:effectLst/>
-              <a:uFillTx/>
-              <a:latin typeface="Arial"/>
-            </a:endParaRPr>
-          </a:p>
-          <a:p>
-            <a:pPr lvl="1" marL="685800" indent="-228600" defTabSz="914400">
-              <a:lnSpc>
-                <a:spcPct val="90000"/>
-              </a:lnSpc>
-              <a:spcBef>
-                <a:spcPts val="499"/>
-              </a:spcBef>
-              <a:buClr>
-                <a:srgbClr val="000000"/>
-              </a:buClr>
-              <a:buFont typeface="Arial"/>
-              <a:buChar char="•"/>
-            </a:pPr>
-            <a:r>
-              <a:rPr b="0" lang="en-US" sz="2400" strike="noStrike" u="none">
-                <a:solidFill>
-                  <a:schemeClr val="dk1"/>
-                </a:solidFill>
-                <a:effectLst/>
-                <a:uFillTx/>
-                <a:latin typeface="Calibri"/>
-              </a:rPr>
-              <a:t>Second level</a:t>
-            </a:r>
-            <a:endParaRPr b="0" lang="en-US" sz="2400" strike="noStrike" u="none">
-              <a:solidFill>
-                <a:srgbClr val="000000"/>
-              </a:solidFill>
-              <a:effectLst/>
-              <a:uFillTx/>
-              <a:latin typeface="Arial"/>
-            </a:endParaRPr>
-          </a:p>
-          <a:p>
-            <a:pPr lvl="2" marL="1143000" indent="-228600" defTabSz="914400">
-              <a:lnSpc>
-                <a:spcPct val="90000"/>
-              </a:lnSpc>
-              <a:spcBef>
-                <a:spcPts val="499"/>
-              </a:spcBef>
-              <a:buClr>
-                <a:srgbClr val="000000"/>
-              </a:buClr>
-              <a:buFont typeface="Arial"/>
-              <a:buChar char="•"/>
-            </a:pPr>
-            <a:r>
-              <a:rPr b="0" lang="en-US" sz="2000" strike="noStrike" u="none">
-                <a:solidFill>
-                  <a:schemeClr val="dk1"/>
-                </a:solidFill>
-                <a:effectLst/>
-                <a:uFillTx/>
-                <a:latin typeface="Calibri"/>
-              </a:rPr>
-              <a:t>Third level</a:t>
-            </a:r>
-            <a:endParaRPr b="0" lang="en-US" sz="2000" strike="noStrike" u="none">
-              <a:solidFill>
-                <a:srgbClr val="000000"/>
-              </a:solidFill>
-              <a:effectLst/>
-              <a:uFillTx/>
-              <a:latin typeface="Arial"/>
-            </a:endParaRPr>
-          </a:p>
-          <a:p>
-            <a:pPr lvl="3" marL="1600200" indent="-228600" defTabSz="914400">
-              <a:lnSpc>
-                <a:spcPct val="90000"/>
-              </a:lnSpc>
-              <a:spcBef>
-                <a:spcPts val="499"/>
-              </a:spcBef>
-              <a:buClr>
-                <a:srgbClr val="000000"/>
-              </a:buClr>
-              <a:buFont typeface="Arial"/>
-              <a:buChar char="•"/>
-            </a:pPr>
-            <a:r>
-              <a:rPr b="0" lang="en-US" sz="1800" strike="noStrike" u="none">
-                <a:solidFill>
-                  <a:schemeClr val="dk1"/>
-                </a:solidFill>
-                <a:effectLst/>
-                <a:uFillTx/>
-                <a:latin typeface="Calibri"/>
-              </a:rPr>
-              <a:t>Fourth level</a:t>
-            </a:r>
-            <a:endParaRPr b="0" lang="en-US" sz="1800" strike="noStrike" u="none">
-              <a:solidFill>
-                <a:srgbClr val="000000"/>
-              </a:solidFill>
-              <a:effectLst/>
-              <a:uFillTx/>
-              <a:latin typeface="Arial"/>
-            </a:endParaRPr>
-          </a:p>
-          <a:p>
-            <a:pPr lvl="4" marL="2057400" indent="-228600" defTabSz="914400">
-              <a:lnSpc>
-                <a:spcPct val="90000"/>
-              </a:lnSpc>
-              <a:spcBef>
-                <a:spcPts val="499"/>
-              </a:spcBef>
-              <a:buClr>
-                <a:srgbClr val="000000"/>
-              </a:buClr>
-              <a:buFont typeface="Arial"/>
-              <a:buChar char="•"/>
-            </a:pPr>
-            <a:r>
-              <a:rPr b="0" lang="en-US" sz="1800" strike="noStrike" u="none">
-                <a:solidFill>
-                  <a:schemeClr val="dk1"/>
-                </a:solidFill>
-                <a:effectLst/>
-                <a:uFillTx/>
-                <a:latin typeface="Calibri"/>
-              </a:rPr>
-              <a:t>Fifth level</a:t>
-            </a:r>
-            <a:endParaRPr b="0" lang="en-US" sz="1800" strike="noStrike" u="none">
-              <a:solidFill>
-                <a:srgbClr val="000000"/>
-              </a:solidFill>
-              <a:effectLst/>
-              <a:uFillTx/>
-              <a:latin typeface="Arial"/>
-            </a:endParaRPr>
-          </a:p>
-        </p:txBody>
-      </p:sp>
-      <p:sp>
-        <p:nvSpPr>
-          <p:cNvPr id="36" name="PlaceHolder 4"/>
-          <p:cNvSpPr>
-            <a:spLocks noGrp="1"/>
-          </p:cNvSpPr>
-          <p:nvPr>
-            <p:ph type="dt" idx="19"/>
+            <p:ph type="dt" idx="13"/>
           </p:nvPr>
         </p:nvSpPr>
         <p:spPr>
           <a:xfrm>
             <a:off x="838080" y="6356520"/>
-            <a:ext cx="2737440" cy="359280"/>
+            <a:ext cx="2737080" cy="358920"/>
           </a:xfrm>
           <a:prstGeom prst="rect">
             <a:avLst/>
@@ -4491,18 +4461,18 @@
       </p:sp>
       <p:sp>
         <p:nvSpPr>
-          <p:cNvPr id="37" name="PlaceHolder 5"/>
+          <p:cNvPr id="23" name="PlaceHolder 3"/>
           <p:cNvSpPr>
             <a:spLocks noGrp="1"/>
           </p:cNvSpPr>
           <p:nvPr>
-            <p:ph type="ftr" idx="20"/>
+            <p:ph type="ftr" idx="14"/>
           </p:nvPr>
         </p:nvSpPr>
         <p:spPr>
           <a:xfrm>
             <a:off x="4038480" y="6356520"/>
-            <a:ext cx="4109040" cy="359280"/>
+            <a:ext cx="4108680" cy="358920"/>
           </a:xfrm>
           <a:prstGeom prst="rect">
             <a:avLst/>
@@ -4569,18 +4539,18 @@
       </p:sp>
       <p:sp>
         <p:nvSpPr>
-          <p:cNvPr id="38" name="PlaceHolder 6"/>
+          <p:cNvPr id="24" name="PlaceHolder 4"/>
           <p:cNvSpPr>
             <a:spLocks noGrp="1"/>
           </p:cNvSpPr>
           <p:nvPr>
-            <p:ph type="sldNum" idx="21"/>
+            <p:ph type="sldNum" idx="15"/>
           </p:nvPr>
         </p:nvSpPr>
         <p:spPr>
           <a:xfrm>
             <a:off x="8610480" y="6356520"/>
-            <a:ext cx="2737440" cy="359280"/>
+            <a:ext cx="2737080" cy="358920"/>
           </a:xfrm>
           <a:prstGeom prst="rect">
             <a:avLst/>
@@ -4625,7 +4595,7 @@
                 <a:tab algn="l" pos="0"/>
               </a:tabLst>
             </a:pPr>
-            <a:fld id="{CDC78F77-C9D4-4BBF-906B-6F951A8BBDDA}" type="slidenum">
+            <a:fld id="{868DE7DE-F305-4331-BB42-FE6628565AAC}" type="slidenum">
               <a:rPr b="0" lang="en-US" sz="1200" strike="noStrike" u="none">
                 <a:solidFill>
                   <a:schemeClr val="dk1">
@@ -4649,14 +4619,288 @@
           </a:p>
         </p:txBody>
       </p:sp>
+      <p:sp>
+        <p:nvSpPr>
+          <p:cNvPr id="25" name="PlaceHolder 5"/>
+          <p:cNvSpPr>
+            <a:spLocks noGrp="1"/>
+          </p:cNvSpPr>
+          <p:nvPr>
+            <p:ph type="body"/>
+          </p:nvPr>
+        </p:nvSpPr>
+        <p:spPr>
+          <a:xfrm>
+            <a:off x="609480" y="1604520"/>
+            <a:ext cx="10966680" cy="3971520"/>
+          </a:xfrm>
+          <a:prstGeom prst="rect">
+            <a:avLst/>
+          </a:prstGeom>
+          <a:noFill/>
+          <a:ln w="0">
+            <a:noFill/>
+          </a:ln>
+        </p:spPr>
+        <p:txBody>
+          <a:bodyPr lIns="0" rIns="0" tIns="0" bIns="0" anchor="t">
+            <a:normAutofit/>
+          </a:bodyPr>
+          <a:p>
+            <a:pPr marL="432000" indent="-324000">
+              <a:lnSpc>
+                <a:spcPct val="90000"/>
+              </a:lnSpc>
+              <a:spcBef>
+                <a:spcPts val="1417"/>
+              </a:spcBef>
+              <a:buClr>
+                <a:srgbClr val="000000"/>
+              </a:buClr>
+              <a:buSzPct val="45000"/>
+              <a:buFont typeface="Wingdings" charset="2"/>
+              <a:buChar char=""/>
+            </a:pPr>
+            <a:r>
+              <a:rPr b="0" lang="en-US" sz="2800" strike="noStrike" u="none">
+                <a:solidFill>
+                  <a:schemeClr val="dk1"/>
+                </a:solidFill>
+                <a:effectLst/>
+                <a:uFillTx/>
+                <a:latin typeface="Calibri"/>
+              </a:rPr>
+              <a:t>Click to edit the outline text format</a:t>
+            </a:r>
+            <a:endParaRPr b="0" lang="en-US" sz="2800" strike="noStrike" u="none">
+              <a:solidFill>
+                <a:srgbClr val="000000"/>
+              </a:solidFill>
+              <a:effectLst/>
+              <a:uFillTx/>
+              <a:latin typeface="Arial"/>
+            </a:endParaRPr>
+          </a:p>
+          <a:p>
+            <a:pPr lvl="1" marL="864000" indent="-324000">
+              <a:lnSpc>
+                <a:spcPct val="90000"/>
+              </a:lnSpc>
+              <a:spcBef>
+                <a:spcPts val="1134"/>
+              </a:spcBef>
+              <a:buClr>
+                <a:srgbClr val="000000"/>
+              </a:buClr>
+              <a:buSzPct val="75000"/>
+              <a:buFont typeface="Symbol" charset="2"/>
+              <a:buChar char=""/>
+            </a:pPr>
+            <a:r>
+              <a:rPr b="0" lang="en-US" sz="2000" strike="noStrike" u="none">
+                <a:solidFill>
+                  <a:schemeClr val="dk1"/>
+                </a:solidFill>
+                <a:effectLst/>
+                <a:uFillTx/>
+                <a:latin typeface="Calibri"/>
+              </a:rPr>
+              <a:t>Second Outline Level</a:t>
+            </a:r>
+            <a:endParaRPr b="0" lang="en-US" sz="2000" strike="noStrike" u="none">
+              <a:solidFill>
+                <a:srgbClr val="000000"/>
+              </a:solidFill>
+              <a:effectLst/>
+              <a:uFillTx/>
+              <a:latin typeface="Arial"/>
+            </a:endParaRPr>
+          </a:p>
+          <a:p>
+            <a:pPr lvl="2" marL="1296000" indent="-288000">
+              <a:lnSpc>
+                <a:spcPct val="90000"/>
+              </a:lnSpc>
+              <a:spcBef>
+                <a:spcPts val="850"/>
+              </a:spcBef>
+              <a:buClr>
+                <a:srgbClr val="000000"/>
+              </a:buClr>
+              <a:buSzPct val="45000"/>
+              <a:buFont typeface="Wingdings" charset="2"/>
+              <a:buChar char=""/>
+            </a:pPr>
+            <a:r>
+              <a:rPr b="0" lang="en-US" sz="1800" strike="noStrike" u="none">
+                <a:solidFill>
+                  <a:schemeClr val="dk1"/>
+                </a:solidFill>
+                <a:effectLst/>
+                <a:uFillTx/>
+                <a:latin typeface="Calibri"/>
+              </a:rPr>
+              <a:t>Third Outline Level</a:t>
+            </a:r>
+            <a:endParaRPr b="0" lang="en-US" sz="1800" strike="noStrike" u="none">
+              <a:solidFill>
+                <a:srgbClr val="000000"/>
+              </a:solidFill>
+              <a:effectLst/>
+              <a:uFillTx/>
+              <a:latin typeface="Arial"/>
+            </a:endParaRPr>
+          </a:p>
+          <a:p>
+            <a:pPr lvl="3" marL="1728000" indent="-216000">
+              <a:lnSpc>
+                <a:spcPct val="90000"/>
+              </a:lnSpc>
+              <a:spcBef>
+                <a:spcPts val="567"/>
+              </a:spcBef>
+              <a:buClr>
+                <a:srgbClr val="000000"/>
+              </a:buClr>
+              <a:buSzPct val="75000"/>
+              <a:buFont typeface="Symbol" charset="2"/>
+              <a:buChar char=""/>
+            </a:pPr>
+            <a:r>
+              <a:rPr b="0" lang="en-US" sz="1800" strike="noStrike" u="none">
+                <a:solidFill>
+                  <a:schemeClr val="dk1"/>
+                </a:solidFill>
+                <a:effectLst/>
+                <a:uFillTx/>
+                <a:latin typeface="Calibri"/>
+              </a:rPr>
+              <a:t>Fourth Outline Level</a:t>
+            </a:r>
+            <a:endParaRPr b="0" lang="en-US" sz="1800" strike="noStrike" u="none">
+              <a:solidFill>
+                <a:srgbClr val="000000"/>
+              </a:solidFill>
+              <a:effectLst/>
+              <a:uFillTx/>
+              <a:latin typeface="Arial"/>
+            </a:endParaRPr>
+          </a:p>
+          <a:p>
+            <a:pPr lvl="4" marL="2160000" indent="-216000">
+              <a:lnSpc>
+                <a:spcPct val="90000"/>
+              </a:lnSpc>
+              <a:spcBef>
+                <a:spcPts val="283"/>
+              </a:spcBef>
+              <a:buClr>
+                <a:srgbClr val="000000"/>
+              </a:buClr>
+              <a:buSzPct val="45000"/>
+              <a:buFont typeface="Wingdings" charset="2"/>
+              <a:buChar char=""/>
+            </a:pPr>
+            <a:r>
+              <a:rPr b="0" lang="en-US" sz="2000" strike="noStrike" u="none">
+                <a:solidFill>
+                  <a:schemeClr val="dk1"/>
+                </a:solidFill>
+                <a:effectLst/>
+                <a:uFillTx/>
+                <a:latin typeface="Calibri"/>
+              </a:rPr>
+              <a:t>Fifth Outline Level</a:t>
+            </a:r>
+            <a:endParaRPr b="0" lang="en-US" sz="2000" strike="noStrike" u="none">
+              <a:solidFill>
+                <a:srgbClr val="000000"/>
+              </a:solidFill>
+              <a:effectLst/>
+              <a:uFillTx/>
+              <a:latin typeface="Arial"/>
+            </a:endParaRPr>
+          </a:p>
+          <a:p>
+            <a:pPr lvl="5" marL="2592000" indent="-216000">
+              <a:lnSpc>
+                <a:spcPct val="90000"/>
+              </a:lnSpc>
+              <a:spcBef>
+                <a:spcPts val="283"/>
+              </a:spcBef>
+              <a:buClr>
+                <a:srgbClr val="000000"/>
+              </a:buClr>
+              <a:buSzPct val="45000"/>
+              <a:buFont typeface="Wingdings" charset="2"/>
+              <a:buChar char=""/>
+            </a:pPr>
+            <a:r>
+              <a:rPr b="0" lang="en-US" sz="2000" strike="noStrike" u="none">
+                <a:solidFill>
+                  <a:schemeClr val="dk1"/>
+                </a:solidFill>
+                <a:effectLst/>
+                <a:uFillTx/>
+                <a:latin typeface="Calibri"/>
+              </a:rPr>
+              <a:t>Sixth Outline Level</a:t>
+            </a:r>
+            <a:endParaRPr b="0" lang="en-US" sz="2000" strike="noStrike" u="none">
+              <a:solidFill>
+                <a:srgbClr val="000000"/>
+              </a:solidFill>
+              <a:effectLst/>
+              <a:uFillTx/>
+              <a:latin typeface="Arial"/>
+            </a:endParaRPr>
+          </a:p>
+          <a:p>
+            <a:pPr lvl="6" marL="3024000" indent="-216000">
+              <a:lnSpc>
+                <a:spcPct val="90000"/>
+              </a:lnSpc>
+              <a:spcBef>
+                <a:spcPts val="283"/>
+              </a:spcBef>
+              <a:buClr>
+                <a:srgbClr val="000000"/>
+              </a:buClr>
+              <a:buSzPct val="45000"/>
+              <a:buFont typeface="Wingdings" charset="2"/>
+              <a:buChar char=""/>
+            </a:pPr>
+            <a:r>
+              <a:rPr b="0" lang="en-US" sz="2000" strike="noStrike" u="none">
+                <a:solidFill>
+                  <a:schemeClr val="dk1"/>
+                </a:solidFill>
+                <a:effectLst/>
+                <a:uFillTx/>
+                <a:latin typeface="Calibri"/>
+              </a:rPr>
+              <a:t>Seventh Outline Level</a:t>
+            </a:r>
+            <a:endParaRPr b="0" lang="en-US" sz="2000" strike="noStrike" u="none">
+              <a:solidFill>
+                <a:srgbClr val="000000"/>
+              </a:solidFill>
+              <a:effectLst/>
+              <a:uFillTx/>
+              <a:latin typeface="Arial"/>
+            </a:endParaRPr>
+          </a:p>
+        </p:txBody>
+      </p:sp>
     </p:spTree>
   </p:cSld>
 </p:sldLayout>
 </file>
 
-<file path=ppt/slideLayouts/slideLayout8.xml><?xml version="1.0" encoding="utf-8"?>
-<p:sldLayout xmlns:a="http://schemas.openxmlformats.org/drawingml/2006/main" xmlns:p="http://schemas.openxmlformats.org/presentationml/2006/main" xmlns:r="http://schemas.openxmlformats.org/officeDocument/2006/relationships" xmlns:p14="http://schemas.microsoft.com/office/powerpoint/2010/main" xmlns:p15="http://schemas.microsoft.com/office/powerpoint/2012/main" xmlns:mc="http://schemas.openxmlformats.org/markup-compatibility/2006" type="blank" preserve="1">
-  <p:cSld name="Comparison">
+<file path=ppt/slideLayouts/slideLayout6.xml><?xml version="1.0" encoding="utf-8"?>
+<p:sldLayout xmlns:a="http://schemas.openxmlformats.org/drawingml/2006/main" xmlns:p="http://schemas.openxmlformats.org/presentationml/2006/main" xmlns:r="http://schemas.openxmlformats.org/officeDocument/2006/relationships" xmlns:p14="http://schemas.microsoft.com/office/powerpoint/2010/main" xmlns:p15="http://schemas.microsoft.com/office/powerpoint/2012/main" xmlns:mc="http://schemas.openxmlformats.org/markup-compatibility/2006" type="vertTx" preserve="1">
+  <p:cSld name="Title and Vertical Text">
     <p:bg>
       <p:bgPr>
         <a:solidFill>
@@ -4680,7 +4924,7 @@
       </p:grpSpPr>
       <p:sp>
         <p:nvSpPr>
-          <p:cNvPr id="39" name="PlaceHolder 1"/>
+          <p:cNvPr id="26" name="PlaceHolder 1"/>
           <p:cNvSpPr>
             <a:spLocks noGrp="1"/>
           </p:cNvSpPr>
@@ -4690,8 +4934,8 @@
         </p:nvSpPr>
         <p:spPr>
           <a:xfrm>
-            <a:off x="839880" y="365040"/>
-            <a:ext cx="10509840" cy="1319760"/>
+            <a:off x="838080" y="365040"/>
+            <a:ext cx="10509480" cy="1319400"/>
           </a:xfrm>
           <a:prstGeom prst="rect">
             <a:avLst/>
@@ -4739,7 +4983,7 @@
       </p:sp>
       <p:sp>
         <p:nvSpPr>
-          <p:cNvPr id="40" name="PlaceHolder 2"/>
+          <p:cNvPr id="27" name="PlaceHolder 2"/>
           <p:cNvSpPr>
             <a:spLocks noGrp="1"/>
           </p:cNvSpPr>
@@ -4749,8 +4993,8 @@
         </p:nvSpPr>
         <p:spPr>
           <a:xfrm>
-            <a:off x="839880" y="1681200"/>
-            <a:ext cx="5151960" cy="818280"/>
+            <a:off x="838080" y="1825560"/>
+            <a:ext cx="10509480" cy="4345200"/>
           </a:xfrm>
           <a:prstGeom prst="rect">
             <a:avLst/>
@@ -4761,69 +5005,7 @@
           </a:ln>
         </p:spPr>
         <p:txBody>
-          <a:bodyPr lIns="91440" rIns="91440" tIns="45720" bIns="45720" anchor="b">
-            <a:noAutofit/>
-          </a:bodyPr>
-          <a:p>
-            <a:pPr indent="0" defTabSz="914400">
-              <a:lnSpc>
-                <a:spcPct val="90000"/>
-              </a:lnSpc>
-              <a:spcBef>
-                <a:spcPts val="1001"/>
-              </a:spcBef>
-              <a:buNone/>
-              <a:tabLst>
-                <a:tab algn="l" pos="0"/>
-              </a:tabLst>
-            </a:pPr>
-            <a:r>
-              <a:rPr b="1" lang="en-US" sz="2400" strike="noStrike" u="none">
-                <a:solidFill>
-                  <a:schemeClr val="dk1"/>
-                </a:solidFill>
-                <a:effectLst/>
-                <a:uFillTx/>
-                <a:latin typeface="Calibri"/>
-              </a:rPr>
-              <a:t>Click to edit Master text styles</a:t>
-            </a:r>
-            <a:endParaRPr b="0" lang="en-US" sz="2400" strike="noStrike" u="none">
-              <a:solidFill>
-                <a:srgbClr val="000000"/>
-              </a:solidFill>
-              <a:effectLst/>
-              <a:uFillTx/>
-              <a:latin typeface="Arial"/>
-            </a:endParaRPr>
-          </a:p>
-        </p:txBody>
-      </p:sp>
-      <p:sp>
-        <p:nvSpPr>
-          <p:cNvPr id="41" name="PlaceHolder 3"/>
-          <p:cNvSpPr>
-            <a:spLocks noGrp="1"/>
-          </p:cNvSpPr>
-          <p:nvPr>
-            <p:ph type="body"/>
-          </p:nvPr>
-        </p:nvSpPr>
-        <p:spPr>
-          <a:xfrm>
-            <a:off x="839880" y="2505240"/>
-            <a:ext cx="5151960" cy="3678840"/>
-          </a:xfrm>
-          <a:prstGeom prst="rect">
-            <a:avLst/>
-          </a:prstGeom>
-          <a:noFill/>
-          <a:ln w="0">
-            <a:noFill/>
-          </a:ln>
-        </p:spPr>
-        <p:txBody>
-          <a:bodyPr lIns="91440" rIns="91440" tIns="45720" bIns="45720" anchor="t">
+          <a:bodyPr lIns="91440" rIns="91440" tIns="45720" bIns="45720" anchor="t" vert="eaVert">
             <a:noAutofit/>
           </a:bodyPr>
           <a:p>
@@ -5000,279 +5182,18 @@
       </p:sp>
       <p:sp>
         <p:nvSpPr>
-          <p:cNvPr id="42" name="PlaceHolder 4"/>
+          <p:cNvPr id="28" name="PlaceHolder 3"/>
           <p:cNvSpPr>
             <a:spLocks noGrp="1"/>
           </p:cNvSpPr>
           <p:nvPr>
-            <p:ph type="body"/>
-          </p:nvPr>
-        </p:nvSpPr>
-        <p:spPr>
-          <a:xfrm>
-            <a:off x="6172200" y="1681200"/>
-            <a:ext cx="5177520" cy="818280"/>
-          </a:xfrm>
-          <a:prstGeom prst="rect">
-            <a:avLst/>
-          </a:prstGeom>
-          <a:noFill/>
-          <a:ln w="0">
-            <a:noFill/>
-          </a:ln>
-        </p:spPr>
-        <p:txBody>
-          <a:bodyPr lIns="91440" rIns="91440" tIns="45720" bIns="45720" anchor="b">
-            <a:noAutofit/>
-          </a:bodyPr>
-          <a:p>
-            <a:pPr indent="0" defTabSz="914400">
-              <a:lnSpc>
-                <a:spcPct val="90000"/>
-              </a:lnSpc>
-              <a:spcBef>
-                <a:spcPts val="1001"/>
-              </a:spcBef>
-              <a:buNone/>
-              <a:tabLst>
-                <a:tab algn="l" pos="0"/>
-              </a:tabLst>
-            </a:pPr>
-            <a:r>
-              <a:rPr b="1" lang="en-US" sz="2400" strike="noStrike" u="none">
-                <a:solidFill>
-                  <a:schemeClr val="dk1"/>
-                </a:solidFill>
-                <a:effectLst/>
-                <a:uFillTx/>
-                <a:latin typeface="Calibri"/>
-              </a:rPr>
-              <a:t>Click to edit Master text styles</a:t>
-            </a:r>
-            <a:endParaRPr b="0" lang="en-US" sz="2400" strike="noStrike" u="none">
-              <a:solidFill>
-                <a:srgbClr val="000000"/>
-              </a:solidFill>
-              <a:effectLst/>
-              <a:uFillTx/>
-              <a:latin typeface="Arial"/>
-            </a:endParaRPr>
-          </a:p>
-        </p:txBody>
-      </p:sp>
-      <p:sp>
-        <p:nvSpPr>
-          <p:cNvPr id="43" name="PlaceHolder 5"/>
-          <p:cNvSpPr>
-            <a:spLocks noGrp="1"/>
-          </p:cNvSpPr>
-          <p:nvPr>
-            <p:ph type="body"/>
-          </p:nvPr>
-        </p:nvSpPr>
-        <p:spPr>
-          <a:xfrm>
-            <a:off x="6172200" y="2505240"/>
-            <a:ext cx="5177520" cy="3678840"/>
-          </a:xfrm>
-          <a:prstGeom prst="rect">
-            <a:avLst/>
-          </a:prstGeom>
-          <a:noFill/>
-          <a:ln w="0">
-            <a:noFill/>
-          </a:ln>
-        </p:spPr>
-        <p:txBody>
-          <a:bodyPr lIns="91440" rIns="91440" tIns="45720" bIns="45720" anchor="t">
-            <a:noAutofit/>
-          </a:bodyPr>
-          <a:p>
-            <a:pPr marL="228600" indent="-228600" defTabSz="914400">
-              <a:lnSpc>
-                <a:spcPct val="90000"/>
-              </a:lnSpc>
-              <a:spcBef>
-                <a:spcPts val="1001"/>
-              </a:spcBef>
-              <a:buClr>
-                <a:srgbClr val="000000"/>
-              </a:buClr>
-              <a:buFont typeface="Arial"/>
-              <a:buChar char="•"/>
-            </a:pPr>
-            <a:r>
-              <a:rPr b="0" lang="en-US" sz="2800" strike="noStrike" u="none">
-                <a:solidFill>
-                  <a:schemeClr val="dk1"/>
-                </a:solidFill>
-                <a:effectLst/>
-                <a:uFillTx/>
-                <a:latin typeface="Calibri"/>
-              </a:rPr>
-              <a:t>Click to edit Master text styles</a:t>
-            </a:r>
-            <a:endParaRPr b="0" lang="en-US" sz="2800" strike="noStrike" u="none">
-              <a:solidFill>
-                <a:srgbClr val="000000"/>
-              </a:solidFill>
-              <a:effectLst/>
-              <a:uFillTx/>
-              <a:latin typeface="Arial"/>
-            </a:endParaRPr>
-          </a:p>
-          <a:p>
-            <a:pPr lvl="1" marL="685800" indent="-228600" defTabSz="914400">
-              <a:lnSpc>
-                <a:spcPct val="90000"/>
-              </a:lnSpc>
-              <a:spcBef>
-                <a:spcPts val="499"/>
-              </a:spcBef>
-              <a:buClr>
-                <a:srgbClr val="000000"/>
-              </a:buClr>
-              <a:buFont typeface="Arial"/>
-              <a:buChar char="•"/>
-            </a:pPr>
-            <a:r>
-              <a:rPr b="0" lang="en-US" sz="2400" strike="noStrike" u="none">
-                <a:solidFill>
-                  <a:schemeClr val="dk1"/>
-                </a:solidFill>
-                <a:effectLst/>
-                <a:uFillTx/>
-                <a:latin typeface="Calibri"/>
-              </a:rPr>
-              <a:t>Second level</a:t>
-            </a:r>
-            <a:endParaRPr b="0" lang="en-US" sz="2400" strike="noStrike" u="none">
-              <a:solidFill>
-                <a:srgbClr val="000000"/>
-              </a:solidFill>
-              <a:effectLst/>
-              <a:uFillTx/>
-              <a:latin typeface="Arial"/>
-            </a:endParaRPr>
-          </a:p>
-          <a:p>
-            <a:pPr lvl="2" marL="1143000" indent="-228600" defTabSz="914400">
-              <a:lnSpc>
-                <a:spcPct val="90000"/>
-              </a:lnSpc>
-              <a:spcBef>
-                <a:spcPts val="499"/>
-              </a:spcBef>
-              <a:buClr>
-                <a:srgbClr val="000000"/>
-              </a:buClr>
-              <a:buFont typeface="Arial"/>
-              <a:buChar char="•"/>
-            </a:pPr>
-            <a:r>
-              <a:rPr b="0" lang="en-US" sz="2000" strike="noStrike" u="none">
-                <a:solidFill>
-                  <a:schemeClr val="dk1"/>
-                </a:solidFill>
-                <a:effectLst/>
-                <a:uFillTx/>
-                <a:latin typeface="Calibri"/>
-              </a:rPr>
-              <a:t>Third level</a:t>
-            </a:r>
-            <a:endParaRPr b="0" lang="en-US" sz="2000" strike="noStrike" u="none">
-              <a:solidFill>
-                <a:srgbClr val="000000"/>
-              </a:solidFill>
-              <a:effectLst/>
-              <a:uFillTx/>
-              <a:latin typeface="Arial"/>
-            </a:endParaRPr>
-          </a:p>
-          <a:p>
-            <a:pPr lvl="3" marL="1600200" indent="-228600" defTabSz="914400">
-              <a:lnSpc>
-                <a:spcPct val="90000"/>
-              </a:lnSpc>
-              <a:spcBef>
-                <a:spcPts val="499"/>
-              </a:spcBef>
-              <a:buClr>
-                <a:srgbClr val="000000"/>
-              </a:buClr>
-              <a:buFont typeface="Arial"/>
-              <a:buChar char="•"/>
-            </a:pPr>
-            <a:r>
-              <a:rPr b="0" lang="en-US" sz="1800" strike="noStrike" u="none">
-                <a:solidFill>
-                  <a:schemeClr val="dk1"/>
-                </a:solidFill>
-                <a:effectLst/>
-                <a:uFillTx/>
-                <a:latin typeface="Calibri"/>
-              </a:rPr>
-              <a:t>Fourth level</a:t>
-            </a:r>
-            <a:endParaRPr b="0" lang="en-US" sz="1800" strike="noStrike" u="none">
-              <a:solidFill>
-                <a:srgbClr val="000000"/>
-              </a:solidFill>
-              <a:effectLst/>
-              <a:uFillTx/>
-              <a:latin typeface="Arial"/>
-            </a:endParaRPr>
-          </a:p>
-          <a:p>
-            <a:pPr lvl="4" marL="2057400" indent="-228600" defTabSz="914400">
-              <a:lnSpc>
-                <a:spcPct val="90000"/>
-              </a:lnSpc>
-              <a:spcBef>
-                <a:spcPts val="499"/>
-              </a:spcBef>
-              <a:buClr>
-                <a:srgbClr val="000000"/>
-              </a:buClr>
-              <a:buFont typeface="Arial"/>
-              <a:buChar char="•"/>
-            </a:pPr>
-            <a:r>
-              <a:rPr b="0" lang="en-US" sz="1800" strike="noStrike" u="none">
-                <a:solidFill>
-                  <a:schemeClr val="dk1"/>
-                </a:solidFill>
-                <a:effectLst/>
-                <a:uFillTx/>
-                <a:latin typeface="Calibri"/>
-              </a:rPr>
-              <a:t>Fifth level</a:t>
-            </a:r>
-            <a:endParaRPr b="0" lang="en-US" sz="1800" strike="noStrike" u="none">
-              <a:solidFill>
-                <a:srgbClr val="000000"/>
-              </a:solidFill>
-              <a:effectLst/>
-              <a:uFillTx/>
-              <a:latin typeface="Arial"/>
-            </a:endParaRPr>
-          </a:p>
-        </p:txBody>
-      </p:sp>
-      <p:sp>
-        <p:nvSpPr>
-          <p:cNvPr id="44" name="PlaceHolder 6"/>
-          <p:cNvSpPr>
-            <a:spLocks noGrp="1"/>
-          </p:cNvSpPr>
-          <p:nvPr>
-            <p:ph type="dt" idx="22"/>
+            <p:ph type="dt" idx="16"/>
           </p:nvPr>
         </p:nvSpPr>
         <p:spPr>
           <a:xfrm>
             <a:off x="838080" y="6356520"/>
-            <a:ext cx="2737440" cy="359280"/>
+            <a:ext cx="2737080" cy="358920"/>
           </a:xfrm>
           <a:prstGeom prst="rect">
             <a:avLst/>
@@ -5343,18 +5264,18 @@
       </p:sp>
       <p:sp>
         <p:nvSpPr>
-          <p:cNvPr id="45" name="PlaceHolder 7"/>
+          <p:cNvPr id="29" name="PlaceHolder 4"/>
           <p:cNvSpPr>
             <a:spLocks noGrp="1"/>
           </p:cNvSpPr>
           <p:nvPr>
-            <p:ph type="ftr" idx="23"/>
+            <p:ph type="ftr" idx="17"/>
           </p:nvPr>
         </p:nvSpPr>
         <p:spPr>
           <a:xfrm>
             <a:off x="4038480" y="6356520"/>
-            <a:ext cx="4109040" cy="359280"/>
+            <a:ext cx="4108680" cy="358920"/>
           </a:xfrm>
           <a:prstGeom prst="rect">
             <a:avLst/>
@@ -5421,18 +5342,18 @@
       </p:sp>
       <p:sp>
         <p:nvSpPr>
-          <p:cNvPr id="46" name="PlaceHolder 8"/>
+          <p:cNvPr id="30" name="PlaceHolder 5"/>
           <p:cNvSpPr>
             <a:spLocks noGrp="1"/>
           </p:cNvSpPr>
           <p:nvPr>
-            <p:ph type="sldNum" idx="24"/>
+            <p:ph type="sldNum" idx="18"/>
           </p:nvPr>
         </p:nvSpPr>
         <p:spPr>
           <a:xfrm>
             <a:off x="8610480" y="6356520"/>
-            <a:ext cx="2737440" cy="359280"/>
+            <a:ext cx="2737080" cy="358920"/>
           </a:xfrm>
           <a:prstGeom prst="rect">
             <a:avLst/>
@@ -5477,7 +5398,7 @@
                 <a:tab algn="l" pos="0"/>
               </a:tabLst>
             </a:pPr>
-            <a:fld id="{95DFA841-1AED-4CB5-9FF9-929303B04254}" type="slidenum">
+            <a:fld id="{EBBC40B6-2F04-4DDC-8D0D-422A73DC5490}" type="slidenum">
               <a:rPr b="0" lang="en-US" sz="1200" strike="noStrike" u="none">
                 <a:solidFill>
                   <a:schemeClr val="dk1">
@@ -5506,9 +5427,9 @@
 </p:sldLayout>
 </file>
 
-<file path=ppt/slideLayouts/slideLayout9.xml><?xml version="1.0" encoding="utf-8"?>
-<p:sldLayout xmlns:a="http://schemas.openxmlformats.org/drawingml/2006/main" xmlns:p="http://schemas.openxmlformats.org/presentationml/2006/main" xmlns:r="http://schemas.openxmlformats.org/officeDocument/2006/relationships" xmlns:p14="http://schemas.microsoft.com/office/powerpoint/2010/main" xmlns:p15="http://schemas.microsoft.com/office/powerpoint/2012/main" xmlns:mc="http://schemas.openxmlformats.org/markup-compatibility/2006" type="titleOnly" preserve="1">
-  <p:cSld name="Title Only">
+<file path=ppt/slideLayouts/slideLayout7.xml><?xml version="1.0" encoding="utf-8"?>
+<p:sldLayout xmlns:a="http://schemas.openxmlformats.org/drawingml/2006/main" xmlns:p="http://schemas.openxmlformats.org/presentationml/2006/main" xmlns:r="http://schemas.openxmlformats.org/officeDocument/2006/relationships" xmlns:p14="http://schemas.microsoft.com/office/powerpoint/2010/main" xmlns:p15="http://schemas.microsoft.com/office/powerpoint/2012/main" xmlns:mc="http://schemas.openxmlformats.org/markup-compatibility/2006" type="vertTitleAndTx" preserve="1">
+  <p:cSld name="Vertical Title and Text">
     <p:bg>
       <p:bgPr>
         <a:solidFill>
@@ -5532,7 +5453,7 @@
       </p:grpSpPr>
       <p:sp>
         <p:nvSpPr>
-          <p:cNvPr id="47" name="PlaceHolder 1"/>
+          <p:cNvPr id="31" name="PlaceHolder 1"/>
           <p:cNvSpPr>
             <a:spLocks noGrp="1"/>
           </p:cNvSpPr>
@@ -5542,8 +5463,8 @@
         </p:nvSpPr>
         <p:spPr>
           <a:xfrm>
-            <a:off x="838080" y="365040"/>
-            <a:ext cx="10509840" cy="1319760"/>
+            <a:off x="8724960" y="365040"/>
+            <a:ext cx="2622960" cy="5805720"/>
           </a:xfrm>
           <a:prstGeom prst="rect">
             <a:avLst/>
@@ -5554,7 +5475,7 @@
           </a:ln>
         </p:spPr>
         <p:txBody>
-          <a:bodyPr lIns="91440" rIns="91440" tIns="45720" bIns="45720" anchor="ctr">
+          <a:bodyPr lIns="91440" rIns="91440" tIns="45720" bIns="45720" anchor="ctr" vert="eaVert">
             <a:noAutofit/>
           </a:bodyPr>
           <a:p>
@@ -5591,18 +5512,217 @@
       </p:sp>
       <p:sp>
         <p:nvSpPr>
-          <p:cNvPr id="48" name="PlaceHolder 2"/>
+          <p:cNvPr id="32" name="PlaceHolder 2"/>
           <p:cNvSpPr>
             <a:spLocks noGrp="1"/>
           </p:cNvSpPr>
           <p:nvPr>
-            <p:ph type="dt" idx="25"/>
+            <p:ph type="body"/>
+          </p:nvPr>
+        </p:nvSpPr>
+        <p:spPr>
+          <a:xfrm>
+            <a:off x="838080" y="365040"/>
+            <a:ext cx="7728120" cy="5805720"/>
+          </a:xfrm>
+          <a:prstGeom prst="rect">
+            <a:avLst/>
+          </a:prstGeom>
+          <a:noFill/>
+          <a:ln w="0">
+            <a:noFill/>
+          </a:ln>
+        </p:spPr>
+        <p:txBody>
+          <a:bodyPr lIns="91440" rIns="91440" tIns="45720" bIns="45720" anchor="t" vert="eaVert">
+            <a:noAutofit/>
+          </a:bodyPr>
+          <a:p>
+            <a:pPr marL="228600" indent="-228600" defTabSz="914400">
+              <a:lnSpc>
+                <a:spcPct val="90000"/>
+              </a:lnSpc>
+              <a:spcBef>
+                <a:spcPts val="1001"/>
+              </a:spcBef>
+              <a:buClr>
+                <a:srgbClr val="000000"/>
+              </a:buClr>
+              <a:buFont typeface="Arial"/>
+              <a:buChar char="•"/>
+            </a:pPr>
+            <a:r>
+              <a:rPr b="0" lang="en-US" sz="2800" strike="noStrike" u="none">
+                <a:solidFill>
+                  <a:schemeClr val="dk1"/>
+                </a:solidFill>
+                <a:effectLst/>
+                <a:uFillTx/>
+                <a:latin typeface="Calibri"/>
+              </a:rPr>
+              <a:t>Click to edit Master text styles</a:t>
+            </a:r>
+            <a:endParaRPr b="0" lang="en-US" sz="2800" strike="noStrike" u="none">
+              <a:solidFill>
+                <a:srgbClr val="000000"/>
+              </a:solidFill>
+              <a:effectLst/>
+              <a:uFillTx/>
+              <a:latin typeface="Arial"/>
+            </a:endParaRPr>
+          </a:p>
+          <a:p>
+            <a:pPr lvl="1" marL="685800" indent="-228600" defTabSz="914400">
+              <a:lnSpc>
+                <a:spcPct val="90000"/>
+              </a:lnSpc>
+              <a:spcBef>
+                <a:spcPts val="499"/>
+              </a:spcBef>
+              <a:buClr>
+                <a:srgbClr val="000000"/>
+              </a:buClr>
+              <a:buFont typeface="Arial"/>
+              <a:buChar char="•"/>
+            </a:pPr>
+            <a:r>
+              <a:rPr b="0" lang="en-US" sz="2400" strike="noStrike" u="none">
+                <a:solidFill>
+                  <a:schemeClr val="dk1"/>
+                </a:solidFill>
+                <a:effectLst/>
+                <a:uFillTx/>
+                <a:latin typeface="Calibri"/>
+              </a:rPr>
+              <a:t>Second level</a:t>
+            </a:r>
+            <a:endParaRPr b="0" lang="en-US" sz="2400" strike="noStrike" u="none">
+              <a:solidFill>
+                <a:srgbClr val="000000"/>
+              </a:solidFill>
+              <a:effectLst/>
+              <a:uFillTx/>
+              <a:latin typeface="Arial"/>
+            </a:endParaRPr>
+          </a:p>
+          <a:p>
+            <a:pPr lvl="2" marL="1143000" indent="-228600" defTabSz="914400">
+              <a:lnSpc>
+                <a:spcPct val="90000"/>
+              </a:lnSpc>
+              <a:spcBef>
+                <a:spcPts val="499"/>
+              </a:spcBef>
+              <a:buClr>
+                <a:srgbClr val="000000"/>
+              </a:buClr>
+              <a:buFont typeface="Arial"/>
+              <a:buChar char="•"/>
+            </a:pPr>
+            <a:r>
+              <a:rPr b="0" lang="en-US" sz="2000" strike="noStrike" u="none">
+                <a:solidFill>
+                  <a:schemeClr val="dk1"/>
+                </a:solidFill>
+                <a:effectLst/>
+                <a:uFillTx/>
+                <a:latin typeface="Calibri"/>
+              </a:rPr>
+              <a:t>Third level</a:t>
+            </a:r>
+            <a:endParaRPr b="0" lang="en-US" sz="2000" strike="noStrike" u="none">
+              <a:solidFill>
+                <a:srgbClr val="000000"/>
+              </a:solidFill>
+              <a:effectLst/>
+              <a:uFillTx/>
+              <a:latin typeface="Arial"/>
+            </a:endParaRPr>
+          </a:p>
+          <a:p>
+            <a:pPr lvl="3" marL="1600200" indent="-228600" defTabSz="914400">
+              <a:lnSpc>
+                <a:spcPct val="90000"/>
+              </a:lnSpc>
+              <a:spcBef>
+                <a:spcPts val="499"/>
+              </a:spcBef>
+              <a:buClr>
+                <a:srgbClr val="000000"/>
+              </a:buClr>
+              <a:buFont typeface="Arial"/>
+              <a:buChar char="•"/>
+            </a:pPr>
+            <a:r>
+              <a:rPr b="0" lang="en-US" sz="1800" strike="noStrike" u="none">
+                <a:solidFill>
+                  <a:schemeClr val="dk1"/>
+                </a:solidFill>
+                <a:effectLst/>
+                <a:uFillTx/>
+                <a:latin typeface="Calibri"/>
+              </a:rPr>
+              <a:t>Fourth level</a:t>
+            </a:r>
+            <a:endParaRPr b="0" lang="en-US" sz="1800" strike="noStrike" u="none">
+              <a:solidFill>
+                <a:srgbClr val="000000"/>
+              </a:solidFill>
+              <a:effectLst/>
+              <a:uFillTx/>
+              <a:latin typeface="Arial"/>
+            </a:endParaRPr>
+          </a:p>
+          <a:p>
+            <a:pPr lvl="4" marL="2057400" indent="-228600" defTabSz="914400">
+              <a:lnSpc>
+                <a:spcPct val="90000"/>
+              </a:lnSpc>
+              <a:spcBef>
+                <a:spcPts val="499"/>
+              </a:spcBef>
+              <a:buClr>
+                <a:srgbClr val="000000"/>
+              </a:buClr>
+              <a:buFont typeface="Arial"/>
+              <a:buChar char="•"/>
+            </a:pPr>
+            <a:r>
+              <a:rPr b="0" lang="en-US" sz="1800" strike="noStrike" u="none">
+                <a:solidFill>
+                  <a:schemeClr val="dk1"/>
+                </a:solidFill>
+                <a:effectLst/>
+                <a:uFillTx/>
+                <a:latin typeface="Calibri"/>
+              </a:rPr>
+              <a:t>Fifth level</a:t>
+            </a:r>
+            <a:endParaRPr b="0" lang="en-US" sz="1800" strike="noStrike" u="none">
+              <a:solidFill>
+                <a:srgbClr val="000000"/>
+              </a:solidFill>
+              <a:effectLst/>
+              <a:uFillTx/>
+              <a:latin typeface="Arial"/>
+            </a:endParaRPr>
+          </a:p>
+        </p:txBody>
+      </p:sp>
+      <p:sp>
+        <p:nvSpPr>
+          <p:cNvPr id="33" name="PlaceHolder 3"/>
+          <p:cNvSpPr>
+            <a:spLocks noGrp="1"/>
+          </p:cNvSpPr>
+          <p:nvPr>
+            <p:ph type="dt" idx="19"/>
           </p:nvPr>
         </p:nvSpPr>
         <p:spPr>
           <a:xfrm>
             <a:off x="838080" y="6356520"/>
-            <a:ext cx="2737440" cy="359280"/>
+            <a:ext cx="2737080" cy="358920"/>
           </a:xfrm>
           <a:prstGeom prst="rect">
             <a:avLst/>
@@ -5673,18 +5793,18 @@
       </p:sp>
       <p:sp>
         <p:nvSpPr>
-          <p:cNvPr id="49" name="PlaceHolder 3"/>
+          <p:cNvPr id="34" name="PlaceHolder 4"/>
           <p:cNvSpPr>
             <a:spLocks noGrp="1"/>
           </p:cNvSpPr>
           <p:nvPr>
-            <p:ph type="ftr" idx="26"/>
+            <p:ph type="ftr" idx="20"/>
           </p:nvPr>
         </p:nvSpPr>
         <p:spPr>
           <a:xfrm>
             <a:off x="4038480" y="6356520"/>
-            <a:ext cx="4109040" cy="359280"/>
+            <a:ext cx="4108680" cy="358920"/>
           </a:xfrm>
           <a:prstGeom prst="rect">
             <a:avLst/>
@@ -5751,18 +5871,18 @@
       </p:sp>
       <p:sp>
         <p:nvSpPr>
-          <p:cNvPr id="50" name="PlaceHolder 4"/>
+          <p:cNvPr id="35" name="PlaceHolder 5"/>
           <p:cNvSpPr>
             <a:spLocks noGrp="1"/>
           </p:cNvSpPr>
           <p:nvPr>
-            <p:ph type="sldNum" idx="27"/>
+            <p:ph type="sldNum" idx="21"/>
           </p:nvPr>
         </p:nvSpPr>
         <p:spPr>
           <a:xfrm>
             <a:off x="8610480" y="6356520"/>
-            <a:ext cx="2737440" cy="359280"/>
+            <a:ext cx="2737080" cy="358920"/>
           </a:xfrm>
           <a:prstGeom prst="rect">
             <a:avLst/>
@@ -5807,7 +5927,930 @@
                 <a:tab algn="l" pos="0"/>
               </a:tabLst>
             </a:pPr>
-            <a:fld id="{634D73F2-00ED-4814-8494-680F03E76482}" type="slidenum">
+            <a:fld id="{71852B1D-7A87-4B2A-A408-8D995B016B54}" type="slidenum">
+              <a:rPr b="0" lang="en-US" sz="1200" strike="noStrike" u="none">
+                <a:solidFill>
+                  <a:schemeClr val="dk1">
+                    <a:tint val="75000"/>
+                  </a:schemeClr>
+                </a:solidFill>
+                <a:effectLst/>
+                <a:uFillTx/>
+                <a:latin typeface="Calibri"/>
+              </a:rPr>
+              <a:t>&lt;number&gt;</a:t>
+            </a:fld>
+            <a:endParaRPr b="0" lang="en-US" sz="1200" strike="noStrike" u="none">
+              <a:solidFill>
+                <a:srgbClr val="000000"/>
+              </a:solidFill>
+              <a:effectLst/>
+              <a:uFillTx/>
+              <a:latin typeface="Times New Roman"/>
+            </a:endParaRPr>
+          </a:p>
+        </p:txBody>
+      </p:sp>
+    </p:spTree>
+  </p:cSld>
+</p:sldLayout>
+</file>
+
+<file path=ppt/slideLayouts/slideLayout8.xml><?xml version="1.0" encoding="utf-8"?>
+<p:sldLayout xmlns:a="http://schemas.openxmlformats.org/drawingml/2006/main" xmlns:p="http://schemas.openxmlformats.org/presentationml/2006/main" xmlns:r="http://schemas.openxmlformats.org/officeDocument/2006/relationships" xmlns:p14="http://schemas.microsoft.com/office/powerpoint/2010/main" xmlns:p15="http://schemas.microsoft.com/office/powerpoint/2012/main" xmlns:mc="http://schemas.openxmlformats.org/markup-compatibility/2006" type="obj" preserve="1">
+  <p:cSld name="Title and Content">
+    <p:bg>
+      <p:bgPr>
+        <a:solidFill>
+          <a:srgbClr val="ffffff"/>
+        </a:solidFill>
+      </p:bgPr>
+    </p:bg>
+    <p:spTree>
+      <p:nvGrpSpPr>
+        <p:cNvPr id="1" name=""/>
+        <p:cNvGrpSpPr/>
+        <p:nvPr/>
+      </p:nvGrpSpPr>
+      <p:grpSpPr>
+        <a:xfrm>
+          <a:off x="0" y="0"/>
+          <a:ext cx="0" cy="0"/>
+          <a:chOff x="0" y="0"/>
+          <a:chExt cx="0" cy="0"/>
+        </a:xfrm>
+      </p:grpSpPr>
+      <p:sp>
+        <p:nvSpPr>
+          <p:cNvPr id="36" name="PlaceHolder 1"/>
+          <p:cNvSpPr>
+            <a:spLocks noGrp="1"/>
+          </p:cNvSpPr>
+          <p:nvPr>
+            <p:ph type="title"/>
+          </p:nvPr>
+        </p:nvSpPr>
+        <p:spPr>
+          <a:xfrm>
+            <a:off x="838080" y="365040"/>
+            <a:ext cx="10509480" cy="1319400"/>
+          </a:xfrm>
+          <a:prstGeom prst="rect">
+            <a:avLst/>
+          </a:prstGeom>
+          <a:noFill/>
+          <a:ln w="0">
+            <a:noFill/>
+          </a:ln>
+        </p:spPr>
+        <p:txBody>
+          <a:bodyPr lIns="91440" rIns="91440" tIns="45720" bIns="45720" anchor="ctr">
+            <a:noAutofit/>
+          </a:bodyPr>
+          <a:p>
+            <a:pPr indent="0" defTabSz="914400">
+              <a:lnSpc>
+                <a:spcPct val="90000"/>
+              </a:lnSpc>
+              <a:buNone/>
+              <a:tabLst>
+                <a:tab algn="l" pos="0"/>
+              </a:tabLst>
+            </a:pPr>
+            <a:r>
+              <a:rPr b="0" lang="en-US" sz="4400" strike="noStrike" u="none">
+                <a:solidFill>
+                  <a:schemeClr val="dk1"/>
+                </a:solidFill>
+                <a:effectLst/>
+                <a:uFillTx/>
+                <a:latin typeface="Calibri Light"/>
+              </a:rPr>
+              <a:t>Click to edit Master title style</a:t>
+            </a:r>
+            <a:endParaRPr b="0" lang="en-US" sz="4400" strike="noStrike" u="none">
+              <a:solidFill>
+                <a:srgbClr val="000000"/>
+              </a:solidFill>
+              <a:effectLst/>
+              <a:uFillTx/>
+              <a:latin typeface="Arial"/>
+            </a:endParaRPr>
+          </a:p>
+        </p:txBody>
+      </p:sp>
+      <p:sp>
+        <p:nvSpPr>
+          <p:cNvPr id="37" name="PlaceHolder 2"/>
+          <p:cNvSpPr>
+            <a:spLocks noGrp="1"/>
+          </p:cNvSpPr>
+          <p:nvPr>
+            <p:ph type="body"/>
+          </p:nvPr>
+        </p:nvSpPr>
+        <p:spPr>
+          <a:xfrm>
+            <a:off x="838080" y="1825560"/>
+            <a:ext cx="10509480" cy="4345200"/>
+          </a:xfrm>
+          <a:prstGeom prst="rect">
+            <a:avLst/>
+          </a:prstGeom>
+          <a:noFill/>
+          <a:ln w="0">
+            <a:noFill/>
+          </a:ln>
+        </p:spPr>
+        <p:txBody>
+          <a:bodyPr lIns="91440" rIns="91440" tIns="45720" bIns="45720" anchor="t">
+            <a:noAutofit/>
+          </a:bodyPr>
+          <a:p>
+            <a:pPr marL="228600" indent="-228600" defTabSz="914400">
+              <a:lnSpc>
+                <a:spcPct val="90000"/>
+              </a:lnSpc>
+              <a:spcBef>
+                <a:spcPts val="1001"/>
+              </a:spcBef>
+              <a:buClr>
+                <a:srgbClr val="000000"/>
+              </a:buClr>
+              <a:buFont typeface="Arial"/>
+              <a:buChar char="•"/>
+            </a:pPr>
+            <a:r>
+              <a:rPr b="0" lang="en-US" sz="2800" strike="noStrike" u="none">
+                <a:solidFill>
+                  <a:schemeClr val="dk1"/>
+                </a:solidFill>
+                <a:effectLst/>
+                <a:uFillTx/>
+                <a:latin typeface="Calibri"/>
+              </a:rPr>
+              <a:t>Click to edit Master text styles</a:t>
+            </a:r>
+            <a:endParaRPr b="0" lang="en-US" sz="2800" strike="noStrike" u="none">
+              <a:solidFill>
+                <a:srgbClr val="000000"/>
+              </a:solidFill>
+              <a:effectLst/>
+              <a:uFillTx/>
+              <a:latin typeface="Arial"/>
+            </a:endParaRPr>
+          </a:p>
+          <a:p>
+            <a:pPr lvl="1" marL="685800" indent="-228600" defTabSz="914400">
+              <a:lnSpc>
+                <a:spcPct val="90000"/>
+              </a:lnSpc>
+              <a:spcBef>
+                <a:spcPts val="499"/>
+              </a:spcBef>
+              <a:buClr>
+                <a:srgbClr val="000000"/>
+              </a:buClr>
+              <a:buFont typeface="Arial"/>
+              <a:buChar char="•"/>
+            </a:pPr>
+            <a:r>
+              <a:rPr b="0" lang="en-US" sz="2400" strike="noStrike" u="none">
+                <a:solidFill>
+                  <a:schemeClr val="dk1"/>
+                </a:solidFill>
+                <a:effectLst/>
+                <a:uFillTx/>
+                <a:latin typeface="Calibri"/>
+              </a:rPr>
+              <a:t>Second level</a:t>
+            </a:r>
+            <a:endParaRPr b="0" lang="en-US" sz="2400" strike="noStrike" u="none">
+              <a:solidFill>
+                <a:srgbClr val="000000"/>
+              </a:solidFill>
+              <a:effectLst/>
+              <a:uFillTx/>
+              <a:latin typeface="Arial"/>
+            </a:endParaRPr>
+          </a:p>
+          <a:p>
+            <a:pPr lvl="2" marL="1143000" indent="-228600" defTabSz="914400">
+              <a:lnSpc>
+                <a:spcPct val="90000"/>
+              </a:lnSpc>
+              <a:spcBef>
+                <a:spcPts val="499"/>
+              </a:spcBef>
+              <a:buClr>
+                <a:srgbClr val="000000"/>
+              </a:buClr>
+              <a:buFont typeface="Arial"/>
+              <a:buChar char="•"/>
+            </a:pPr>
+            <a:r>
+              <a:rPr b="0" lang="en-US" sz="2000" strike="noStrike" u="none">
+                <a:solidFill>
+                  <a:schemeClr val="dk1"/>
+                </a:solidFill>
+                <a:effectLst/>
+                <a:uFillTx/>
+                <a:latin typeface="Calibri"/>
+              </a:rPr>
+              <a:t>Third level</a:t>
+            </a:r>
+            <a:endParaRPr b="0" lang="en-US" sz="2000" strike="noStrike" u="none">
+              <a:solidFill>
+                <a:srgbClr val="000000"/>
+              </a:solidFill>
+              <a:effectLst/>
+              <a:uFillTx/>
+              <a:latin typeface="Arial"/>
+            </a:endParaRPr>
+          </a:p>
+          <a:p>
+            <a:pPr lvl="3" marL="1600200" indent="-228600" defTabSz="914400">
+              <a:lnSpc>
+                <a:spcPct val="90000"/>
+              </a:lnSpc>
+              <a:spcBef>
+                <a:spcPts val="499"/>
+              </a:spcBef>
+              <a:buClr>
+                <a:srgbClr val="000000"/>
+              </a:buClr>
+              <a:buFont typeface="Arial"/>
+              <a:buChar char="•"/>
+            </a:pPr>
+            <a:r>
+              <a:rPr b="0" lang="en-US" sz="1800" strike="noStrike" u="none">
+                <a:solidFill>
+                  <a:schemeClr val="dk1"/>
+                </a:solidFill>
+                <a:effectLst/>
+                <a:uFillTx/>
+                <a:latin typeface="Calibri"/>
+              </a:rPr>
+              <a:t>Fourth level</a:t>
+            </a:r>
+            <a:endParaRPr b="0" lang="en-US" sz="1800" strike="noStrike" u="none">
+              <a:solidFill>
+                <a:srgbClr val="000000"/>
+              </a:solidFill>
+              <a:effectLst/>
+              <a:uFillTx/>
+              <a:latin typeface="Arial"/>
+            </a:endParaRPr>
+          </a:p>
+          <a:p>
+            <a:pPr lvl="4" marL="2057400" indent="-228600" defTabSz="914400">
+              <a:lnSpc>
+                <a:spcPct val="90000"/>
+              </a:lnSpc>
+              <a:spcBef>
+                <a:spcPts val="499"/>
+              </a:spcBef>
+              <a:buClr>
+                <a:srgbClr val="000000"/>
+              </a:buClr>
+              <a:buFont typeface="Arial"/>
+              <a:buChar char="•"/>
+            </a:pPr>
+            <a:r>
+              <a:rPr b="0" lang="en-US" sz="1800" strike="noStrike" u="none">
+                <a:solidFill>
+                  <a:schemeClr val="dk1"/>
+                </a:solidFill>
+                <a:effectLst/>
+                <a:uFillTx/>
+                <a:latin typeface="Calibri"/>
+              </a:rPr>
+              <a:t>Fifth level</a:t>
+            </a:r>
+            <a:endParaRPr b="0" lang="en-US" sz="1800" strike="noStrike" u="none">
+              <a:solidFill>
+                <a:srgbClr val="000000"/>
+              </a:solidFill>
+              <a:effectLst/>
+              <a:uFillTx/>
+              <a:latin typeface="Arial"/>
+            </a:endParaRPr>
+          </a:p>
+        </p:txBody>
+      </p:sp>
+      <p:sp>
+        <p:nvSpPr>
+          <p:cNvPr id="38" name="PlaceHolder 3"/>
+          <p:cNvSpPr>
+            <a:spLocks noGrp="1"/>
+          </p:cNvSpPr>
+          <p:nvPr>
+            <p:ph type="dt" idx="22"/>
+          </p:nvPr>
+        </p:nvSpPr>
+        <p:spPr>
+          <a:xfrm>
+            <a:off x="838080" y="6356520"/>
+            <a:ext cx="2737080" cy="358920"/>
+          </a:xfrm>
+          <a:prstGeom prst="rect">
+            <a:avLst/>
+          </a:prstGeom>
+          <a:noFill/>
+          <a:ln w="0">
+            <a:noFill/>
+          </a:ln>
+        </p:spPr>
+        <p:txBody>
+          <a:bodyPr lIns="91440" rIns="91440" tIns="45720" bIns="45720" anchor="ctr">
+            <a:noAutofit/>
+          </a:bodyPr>
+          <a:lstStyle>
+            <a:lvl1pPr indent="0" defTabSz="914400">
+              <a:lnSpc>
+                <a:spcPct val="100000"/>
+              </a:lnSpc>
+              <a:buNone/>
+              <a:tabLst>
+                <a:tab algn="l" pos="0"/>
+              </a:tabLst>
+              <a:defRPr b="0" lang="en-US" sz="1200" strike="noStrike" u="none">
+                <a:solidFill>
+                  <a:schemeClr val="dk1">
+                    <a:tint val="75000"/>
+                  </a:schemeClr>
+                </a:solidFill>
+                <a:effectLst/>
+                <a:uFillTx/>
+                <a:latin typeface="Calibri"/>
+              </a:defRPr>
+            </a:lvl1pPr>
+          </a:lstStyle>
+          <a:p>
+            <a:pPr indent="0" defTabSz="914400">
+              <a:lnSpc>
+                <a:spcPct val="100000"/>
+              </a:lnSpc>
+              <a:buNone/>
+              <a:tabLst>
+                <a:tab algn="l" pos="0"/>
+              </a:tabLst>
+            </a:pPr>
+            <a:r>
+              <a:rPr b="0" lang="en-US" sz="1200" strike="noStrike" u="none">
+                <a:solidFill>
+                  <a:schemeClr val="dk1">
+                    <a:tint val="75000"/>
+                  </a:schemeClr>
+                </a:solidFill>
+                <a:effectLst/>
+                <a:uFillTx/>
+                <a:latin typeface="Calibri"/>
+              </a:rPr>
+              <a:t>&lt;date/time&gt;</a:t>
+            </a:r>
+            <a:endParaRPr b="0" lang="en-US" sz="1200" strike="noStrike" u="none">
+              <a:solidFill>
+                <a:srgbClr val="000000"/>
+              </a:solidFill>
+              <a:effectLst/>
+              <a:uFillTx/>
+              <a:latin typeface="Times New Roman"/>
+            </a:endParaRPr>
+          </a:p>
+        </p:txBody>
+      </p:sp>
+      <p:sp>
+        <p:nvSpPr>
+          <p:cNvPr id="39" name="PlaceHolder 4"/>
+          <p:cNvSpPr>
+            <a:spLocks noGrp="1"/>
+          </p:cNvSpPr>
+          <p:nvPr>
+            <p:ph type="ftr" idx="23"/>
+          </p:nvPr>
+        </p:nvSpPr>
+        <p:spPr>
+          <a:xfrm>
+            <a:off x="4038480" y="6356520"/>
+            <a:ext cx="4108680" cy="358920"/>
+          </a:xfrm>
+          <a:prstGeom prst="rect">
+            <a:avLst/>
+          </a:prstGeom>
+          <a:noFill/>
+          <a:ln w="0">
+            <a:noFill/>
+          </a:ln>
+        </p:spPr>
+        <p:txBody>
+          <a:bodyPr lIns="91440" rIns="91440" tIns="45720" bIns="45720" anchor="ctr">
+            <a:noAutofit/>
+          </a:bodyPr>
+          <a:lstStyle>
+            <a:lvl1pPr indent="0" algn="ctr">
+              <a:lnSpc>
+                <a:spcPct val="100000"/>
+              </a:lnSpc>
+              <a:buNone/>
+              <a:tabLst>
+                <a:tab algn="l" pos="0"/>
+              </a:tabLst>
+              <a:defRPr b="0" lang="en-US" sz="1400" strike="noStrike" u="none">
+                <a:solidFill>
+                  <a:srgbClr val="000000"/>
+                </a:solidFill>
+                <a:effectLst/>
+                <a:uFillTx/>
+                <a:latin typeface="Times New Roman"/>
+              </a:defRPr>
+            </a:lvl1pPr>
+          </a:lstStyle>
+          <a:p>
+            <a:pPr indent="0" algn="ctr">
+              <a:lnSpc>
+                <a:spcPct val="100000"/>
+              </a:lnSpc>
+              <a:buNone/>
+              <a:tabLst>
+                <a:tab algn="l" pos="0"/>
+              </a:tabLst>
+            </a:pPr>
+            <a:r>
+              <a:rPr b="0" lang="en-US" sz="1400" strike="noStrike" u="none">
+                <a:solidFill>
+                  <a:srgbClr val="000000"/>
+                </a:solidFill>
+                <a:effectLst/>
+                <a:uFillTx/>
+                <a:latin typeface="Times New Roman"/>
+              </a:rPr>
+              <a:t>&lt;footer&gt;</a:t>
+            </a:r>
+            <a:endParaRPr b="0" lang="en-US" sz="1400" strike="noStrike" u="none">
+              <a:solidFill>
+                <a:srgbClr val="000000"/>
+              </a:solidFill>
+              <a:effectLst/>
+              <a:uFillTx/>
+              <a:latin typeface="Times New Roman"/>
+            </a:endParaRPr>
+          </a:p>
+        </p:txBody>
+      </p:sp>
+      <p:sp>
+        <p:nvSpPr>
+          <p:cNvPr id="40" name="PlaceHolder 5"/>
+          <p:cNvSpPr>
+            <a:spLocks noGrp="1"/>
+          </p:cNvSpPr>
+          <p:nvPr>
+            <p:ph type="sldNum" idx="24"/>
+          </p:nvPr>
+        </p:nvSpPr>
+        <p:spPr>
+          <a:xfrm>
+            <a:off x="8610480" y="6356520"/>
+            <a:ext cx="2737080" cy="358920"/>
+          </a:xfrm>
+          <a:prstGeom prst="rect">
+            <a:avLst/>
+          </a:prstGeom>
+          <a:noFill/>
+          <a:ln w="0">
+            <a:noFill/>
+          </a:ln>
+        </p:spPr>
+        <p:txBody>
+          <a:bodyPr lIns="91440" rIns="91440" tIns="45720" bIns="45720" anchor="ctr">
+            <a:noAutofit/>
+          </a:bodyPr>
+          <a:lstStyle>
+            <a:lvl1pPr indent="0" algn="r" defTabSz="914400">
+              <a:lnSpc>
+                <a:spcPct val="100000"/>
+              </a:lnSpc>
+              <a:buNone/>
+              <a:tabLst>
+                <a:tab algn="l" pos="0"/>
+              </a:tabLst>
+              <a:defRPr b="0" lang="en-US" sz="1200" strike="noStrike" u="none">
+                <a:solidFill>
+                  <a:schemeClr val="dk1">
+                    <a:tint val="75000"/>
+                  </a:schemeClr>
+                </a:solidFill>
+                <a:effectLst/>
+                <a:uFillTx/>
+                <a:latin typeface="Calibri"/>
+              </a:defRPr>
+            </a:lvl1pPr>
+          </a:lstStyle>
+          <a:p>
+            <a:pPr indent="0" algn="r" defTabSz="914400">
+              <a:lnSpc>
+                <a:spcPct val="100000"/>
+              </a:lnSpc>
+              <a:buNone/>
+              <a:tabLst>
+                <a:tab algn="l" pos="0"/>
+              </a:tabLst>
+            </a:pPr>
+            <a:fld id="{094F97A0-A47F-4A4B-8AB4-A3ED0725B73F}" type="slidenum">
+              <a:rPr b="0" lang="en-US" sz="1200" strike="noStrike" u="none">
+                <a:solidFill>
+                  <a:schemeClr val="dk1">
+                    <a:tint val="75000"/>
+                  </a:schemeClr>
+                </a:solidFill>
+                <a:effectLst/>
+                <a:uFillTx/>
+                <a:latin typeface="Calibri"/>
+              </a:rPr>
+              <a:t>&lt;number&gt;</a:t>
+            </a:fld>
+            <a:endParaRPr b="0" lang="en-US" sz="1200" strike="noStrike" u="none">
+              <a:solidFill>
+                <a:srgbClr val="000000"/>
+              </a:solidFill>
+              <a:effectLst/>
+              <a:uFillTx/>
+              <a:latin typeface="Times New Roman"/>
+            </a:endParaRPr>
+          </a:p>
+        </p:txBody>
+      </p:sp>
+    </p:spTree>
+  </p:cSld>
+</p:sldLayout>
+</file>
+
+<file path=ppt/slideLayouts/slideLayout9.xml><?xml version="1.0" encoding="utf-8"?>
+<p:sldLayout xmlns:a="http://schemas.openxmlformats.org/drawingml/2006/main" xmlns:p="http://schemas.openxmlformats.org/presentationml/2006/main" xmlns:r="http://schemas.openxmlformats.org/officeDocument/2006/relationships" xmlns:p14="http://schemas.microsoft.com/office/powerpoint/2010/main" xmlns:p15="http://schemas.microsoft.com/office/powerpoint/2012/main" xmlns:mc="http://schemas.openxmlformats.org/markup-compatibility/2006" type="blank" preserve="1">
+  <p:cSld name="Section Header">
+    <p:bg>
+      <p:bgPr>
+        <a:solidFill>
+          <a:srgbClr val="ffffff"/>
+        </a:solidFill>
+      </p:bgPr>
+    </p:bg>
+    <p:spTree>
+      <p:nvGrpSpPr>
+        <p:cNvPr id="1" name=""/>
+        <p:cNvGrpSpPr/>
+        <p:nvPr/>
+      </p:nvGrpSpPr>
+      <p:grpSpPr>
+        <a:xfrm>
+          <a:off x="0" y="0"/>
+          <a:ext cx="0" cy="0"/>
+          <a:chOff x="0" y="0"/>
+          <a:chExt cx="0" cy="0"/>
+        </a:xfrm>
+      </p:grpSpPr>
+      <p:sp>
+        <p:nvSpPr>
+          <p:cNvPr id="41" name="PlaceHolder 1"/>
+          <p:cNvSpPr>
+            <a:spLocks noGrp="1"/>
+          </p:cNvSpPr>
+          <p:nvPr>
+            <p:ph type="title"/>
+          </p:nvPr>
+        </p:nvSpPr>
+        <p:spPr>
+          <a:xfrm>
+            <a:off x="831960" y="1709640"/>
+            <a:ext cx="10509480" cy="2846520"/>
+          </a:xfrm>
+          <a:prstGeom prst="rect">
+            <a:avLst/>
+          </a:prstGeom>
+          <a:noFill/>
+          <a:ln w="0">
+            <a:noFill/>
+          </a:ln>
+        </p:spPr>
+        <p:txBody>
+          <a:bodyPr lIns="91440" rIns="91440" tIns="45720" bIns="45720" anchor="b">
+            <a:noAutofit/>
+          </a:bodyPr>
+          <a:p>
+            <a:pPr indent="0" defTabSz="914400">
+              <a:lnSpc>
+                <a:spcPct val="90000"/>
+              </a:lnSpc>
+              <a:buNone/>
+              <a:tabLst>
+                <a:tab algn="l" pos="0"/>
+              </a:tabLst>
+            </a:pPr>
+            <a:r>
+              <a:rPr b="0" lang="en-US" sz="6000" strike="noStrike" u="none">
+                <a:solidFill>
+                  <a:schemeClr val="dk1"/>
+                </a:solidFill>
+                <a:effectLst/>
+                <a:uFillTx/>
+                <a:latin typeface="Calibri Light"/>
+              </a:rPr>
+              <a:t>Click to edit Master title style</a:t>
+            </a:r>
+            <a:endParaRPr b="0" lang="en-US" sz="6000" strike="noStrike" u="none">
+              <a:solidFill>
+                <a:srgbClr val="000000"/>
+              </a:solidFill>
+              <a:effectLst/>
+              <a:uFillTx/>
+              <a:latin typeface="Arial"/>
+            </a:endParaRPr>
+          </a:p>
+        </p:txBody>
+      </p:sp>
+      <p:sp>
+        <p:nvSpPr>
+          <p:cNvPr id="42" name="PlaceHolder 2"/>
+          <p:cNvSpPr>
+            <a:spLocks noGrp="1"/>
+          </p:cNvSpPr>
+          <p:nvPr>
+            <p:ph type="body"/>
+          </p:nvPr>
+        </p:nvSpPr>
+        <p:spPr>
+          <a:xfrm>
+            <a:off x="831960" y="4589640"/>
+            <a:ext cx="10509480" cy="1494000"/>
+          </a:xfrm>
+          <a:prstGeom prst="rect">
+            <a:avLst/>
+          </a:prstGeom>
+          <a:noFill/>
+          <a:ln w="0">
+            <a:noFill/>
+          </a:ln>
+        </p:spPr>
+        <p:txBody>
+          <a:bodyPr lIns="91440" rIns="91440" tIns="45720" bIns="45720" anchor="t">
+            <a:noAutofit/>
+          </a:bodyPr>
+          <a:p>
+            <a:pPr indent="0" defTabSz="914400">
+              <a:lnSpc>
+                <a:spcPct val="90000"/>
+              </a:lnSpc>
+              <a:spcBef>
+                <a:spcPts val="1001"/>
+              </a:spcBef>
+              <a:buNone/>
+              <a:tabLst>
+                <a:tab algn="l" pos="0"/>
+              </a:tabLst>
+            </a:pPr>
+            <a:r>
+              <a:rPr b="0" lang="en-US" sz="2400" strike="noStrike" u="none">
+                <a:solidFill>
+                  <a:schemeClr val="dk1">
+                    <a:tint val="75000"/>
+                  </a:schemeClr>
+                </a:solidFill>
+                <a:effectLst/>
+                <a:uFillTx/>
+                <a:latin typeface="Calibri"/>
+              </a:rPr>
+              <a:t>Click to edit Master text styles</a:t>
+            </a:r>
+            <a:endParaRPr b="0" lang="en-US" sz="2400" strike="noStrike" u="none">
+              <a:solidFill>
+                <a:srgbClr val="000000"/>
+              </a:solidFill>
+              <a:effectLst/>
+              <a:uFillTx/>
+              <a:latin typeface="Arial"/>
+            </a:endParaRPr>
+          </a:p>
+        </p:txBody>
+      </p:sp>
+      <p:sp>
+        <p:nvSpPr>
+          <p:cNvPr id="43" name="PlaceHolder 3"/>
+          <p:cNvSpPr>
+            <a:spLocks noGrp="1"/>
+          </p:cNvSpPr>
+          <p:nvPr>
+            <p:ph type="dt" idx="25"/>
+          </p:nvPr>
+        </p:nvSpPr>
+        <p:spPr>
+          <a:xfrm>
+            <a:off x="838080" y="6356520"/>
+            <a:ext cx="2737080" cy="358920"/>
+          </a:xfrm>
+          <a:prstGeom prst="rect">
+            <a:avLst/>
+          </a:prstGeom>
+          <a:noFill/>
+          <a:ln w="0">
+            <a:noFill/>
+          </a:ln>
+        </p:spPr>
+        <p:txBody>
+          <a:bodyPr lIns="91440" rIns="91440" tIns="45720" bIns="45720" anchor="ctr">
+            <a:noAutofit/>
+          </a:bodyPr>
+          <a:lstStyle>
+            <a:lvl1pPr indent="0" defTabSz="914400">
+              <a:lnSpc>
+                <a:spcPct val="100000"/>
+              </a:lnSpc>
+              <a:buNone/>
+              <a:tabLst>
+                <a:tab algn="l" pos="0"/>
+              </a:tabLst>
+              <a:defRPr b="0" lang="en-US" sz="1200" strike="noStrike" u="none">
+                <a:solidFill>
+                  <a:schemeClr val="dk1">
+                    <a:tint val="75000"/>
+                  </a:schemeClr>
+                </a:solidFill>
+                <a:effectLst/>
+                <a:uFillTx/>
+                <a:latin typeface="Calibri"/>
+              </a:defRPr>
+            </a:lvl1pPr>
+          </a:lstStyle>
+          <a:p>
+            <a:pPr indent="0" defTabSz="914400">
+              <a:lnSpc>
+                <a:spcPct val="100000"/>
+              </a:lnSpc>
+              <a:buNone/>
+              <a:tabLst>
+                <a:tab algn="l" pos="0"/>
+              </a:tabLst>
+            </a:pPr>
+            <a:r>
+              <a:rPr b="0" lang="en-US" sz="1200" strike="noStrike" u="none">
+                <a:solidFill>
+                  <a:schemeClr val="dk1">
+                    <a:tint val="75000"/>
+                  </a:schemeClr>
+                </a:solidFill>
+                <a:effectLst/>
+                <a:uFillTx/>
+                <a:latin typeface="Calibri"/>
+              </a:rPr>
+              <a:t>&lt;date/time&gt;</a:t>
+            </a:r>
+            <a:endParaRPr b="0" lang="en-US" sz="1200" strike="noStrike" u="none">
+              <a:solidFill>
+                <a:srgbClr val="000000"/>
+              </a:solidFill>
+              <a:effectLst/>
+              <a:uFillTx/>
+              <a:latin typeface="Times New Roman"/>
+            </a:endParaRPr>
+          </a:p>
+        </p:txBody>
+      </p:sp>
+      <p:sp>
+        <p:nvSpPr>
+          <p:cNvPr id="44" name="PlaceHolder 4"/>
+          <p:cNvSpPr>
+            <a:spLocks noGrp="1"/>
+          </p:cNvSpPr>
+          <p:nvPr>
+            <p:ph type="ftr" idx="26"/>
+          </p:nvPr>
+        </p:nvSpPr>
+        <p:spPr>
+          <a:xfrm>
+            <a:off x="4038480" y="6356520"/>
+            <a:ext cx="4108680" cy="358920"/>
+          </a:xfrm>
+          <a:prstGeom prst="rect">
+            <a:avLst/>
+          </a:prstGeom>
+          <a:noFill/>
+          <a:ln w="0">
+            <a:noFill/>
+          </a:ln>
+        </p:spPr>
+        <p:txBody>
+          <a:bodyPr lIns="91440" rIns="91440" tIns="45720" bIns="45720" anchor="ctr">
+            <a:noAutofit/>
+          </a:bodyPr>
+          <a:lstStyle>
+            <a:lvl1pPr indent="0" algn="ctr">
+              <a:lnSpc>
+                <a:spcPct val="100000"/>
+              </a:lnSpc>
+              <a:buNone/>
+              <a:tabLst>
+                <a:tab algn="l" pos="0"/>
+              </a:tabLst>
+              <a:defRPr b="0" lang="en-US" sz="1400" strike="noStrike" u="none">
+                <a:solidFill>
+                  <a:srgbClr val="000000"/>
+                </a:solidFill>
+                <a:effectLst/>
+                <a:uFillTx/>
+                <a:latin typeface="Times New Roman"/>
+              </a:defRPr>
+            </a:lvl1pPr>
+          </a:lstStyle>
+          <a:p>
+            <a:pPr indent="0" algn="ctr">
+              <a:lnSpc>
+                <a:spcPct val="100000"/>
+              </a:lnSpc>
+              <a:buNone/>
+              <a:tabLst>
+                <a:tab algn="l" pos="0"/>
+              </a:tabLst>
+            </a:pPr>
+            <a:r>
+              <a:rPr b="0" lang="en-US" sz="1400" strike="noStrike" u="none">
+                <a:solidFill>
+                  <a:srgbClr val="000000"/>
+                </a:solidFill>
+                <a:effectLst/>
+                <a:uFillTx/>
+                <a:latin typeface="Times New Roman"/>
+              </a:rPr>
+              <a:t>&lt;footer&gt;</a:t>
+            </a:r>
+            <a:endParaRPr b="0" lang="en-US" sz="1400" strike="noStrike" u="none">
+              <a:solidFill>
+                <a:srgbClr val="000000"/>
+              </a:solidFill>
+              <a:effectLst/>
+              <a:uFillTx/>
+              <a:latin typeface="Times New Roman"/>
+            </a:endParaRPr>
+          </a:p>
+        </p:txBody>
+      </p:sp>
+      <p:sp>
+        <p:nvSpPr>
+          <p:cNvPr id="45" name="PlaceHolder 5"/>
+          <p:cNvSpPr>
+            <a:spLocks noGrp="1"/>
+          </p:cNvSpPr>
+          <p:nvPr>
+            <p:ph type="sldNum" idx="27"/>
+          </p:nvPr>
+        </p:nvSpPr>
+        <p:spPr>
+          <a:xfrm>
+            <a:off x="8610480" y="6356520"/>
+            <a:ext cx="2737080" cy="358920"/>
+          </a:xfrm>
+          <a:prstGeom prst="rect">
+            <a:avLst/>
+          </a:prstGeom>
+          <a:noFill/>
+          <a:ln w="0">
+            <a:noFill/>
+          </a:ln>
+        </p:spPr>
+        <p:txBody>
+          <a:bodyPr lIns="91440" rIns="91440" tIns="45720" bIns="45720" anchor="ctr">
+            <a:noAutofit/>
+          </a:bodyPr>
+          <a:lstStyle>
+            <a:lvl1pPr indent="0" algn="r" defTabSz="914400">
+              <a:lnSpc>
+                <a:spcPct val="100000"/>
+              </a:lnSpc>
+              <a:buNone/>
+              <a:tabLst>
+                <a:tab algn="l" pos="0"/>
+              </a:tabLst>
+              <a:defRPr b="0" lang="en-US" sz="1200" strike="noStrike" u="none">
+                <a:solidFill>
+                  <a:schemeClr val="dk1">
+                    <a:tint val="75000"/>
+                  </a:schemeClr>
+                </a:solidFill>
+                <a:effectLst/>
+                <a:uFillTx/>
+                <a:latin typeface="Calibri"/>
+              </a:defRPr>
+            </a:lvl1pPr>
+          </a:lstStyle>
+          <a:p>
+            <a:pPr indent="0" algn="r" defTabSz="914400">
+              <a:lnSpc>
+                <a:spcPct val="100000"/>
+              </a:lnSpc>
+              <a:buNone/>
+              <a:tabLst>
+                <a:tab algn="l" pos="0"/>
+              </a:tabLst>
+            </a:pPr>
+            <a:fld id="{39E1102C-B05D-4900-A952-5E2D7696FD53}" type="slidenum">
               <a:rPr b="0" lang="en-US" sz="1200" strike="noStrike" u="none">
                 <a:solidFill>
                   <a:schemeClr val="dk1">
@@ -5891,7 +6934,7 @@
       </p:grpSpPr>
       <p:sp>
         <p:nvSpPr>
-          <p:cNvPr id="60" name="PlaceHolder 1"/>
+          <p:cNvPr id="66" name="PlaceHolder 1"/>
           <p:cNvSpPr>
             <a:spLocks noGrp="1"/>
           </p:cNvSpPr>
@@ -5902,7 +6945,7 @@
         <p:spPr>
           <a:xfrm>
             <a:off x="1523880" y="1143000"/>
-            <a:ext cx="9138240" cy="2284200"/>
+            <a:ext cx="9137880" cy="2283840"/>
           </a:xfrm>
           <a:prstGeom prst="rect">
             <a:avLst/>
@@ -5951,7 +6994,7 @@
       </p:sp>
       <p:sp>
         <p:nvSpPr>
-          <p:cNvPr id="61" name="PlaceHolder 2"/>
+          <p:cNvPr id="67" name="PlaceHolder 2"/>
           <p:cNvSpPr>
             <a:spLocks noGrp="1"/>
           </p:cNvSpPr>
@@ -5962,7 +7005,7 @@
         <p:spPr>
           <a:xfrm>
             <a:off x="1523880" y="4221360"/>
-            <a:ext cx="9138240" cy="1491840"/>
+            <a:ext cx="9137880" cy="1491480"/>
           </a:xfrm>
           <a:prstGeom prst="rect">
             <a:avLst/>
@@ -6082,7 +7125,7 @@
       </p:sp>
       <p:pic>
         <p:nvPicPr>
-          <p:cNvPr id="62" name="Picture 3" descr="A blue and white logo&#10;&#10;Description automatically generated"/>
+          <p:cNvPr id="68" name="Picture 3" descr="A blue and white logo&#10;&#10;Description automatically generated"/>
           <p:cNvPicPr/>
           <p:nvPr/>
         </p:nvPicPr>
@@ -6093,7 +7136,7 @@
         <p:spPr>
           <a:xfrm>
             <a:off x="10199160" y="282240"/>
-            <a:ext cx="1794600" cy="594360"/>
+            <a:ext cx="1794240" cy="594000"/>
           </a:xfrm>
           <a:prstGeom prst="rect">
             <a:avLst/>
@@ -6143,7 +7186,7 @@
       </p:grpSpPr>
       <p:sp useBgFill="1">
         <p:nvSpPr>
-          <p:cNvPr id="107" name="Rectangle 6">
+          <p:cNvPr id="113" name="Rectangle 6">
             <a:extLst>
               <a:ext uri="{C183D7F6-B498-43B3-948B-1728B52AA6E4}">
                 <adec:decorative xmlns:adec="http://schemas.microsoft.com/office/drawing/2017/decorative" val="1"/>
@@ -6156,7 +7199,7 @@
         <p:spPr>
           <a:xfrm>
             <a:off x="0" y="4680"/>
-            <a:ext cx="12183120" cy="6852240"/>
+            <a:ext cx="12182760" cy="6851880"/>
           </a:xfrm>
           <a:prstGeom prst="rect">
             <a:avLst/>
@@ -6202,7 +7245,7 @@
       </p:sp>
       <p:sp>
         <p:nvSpPr>
-          <p:cNvPr id="108" name="PlaceHolder 1"/>
+          <p:cNvPr id="114" name="PlaceHolder 1"/>
           <p:cNvSpPr>
             <a:spLocks noGrp="1"/>
           </p:cNvSpPr>
@@ -6213,7 +7256,7 @@
         <p:spPr>
           <a:xfrm>
             <a:off x="572400" y="238680"/>
-            <a:ext cx="11012760" cy="1127520"/>
+            <a:ext cx="11012400" cy="1127160"/>
           </a:xfrm>
           <a:prstGeom prst="rect">
             <a:avLst/>
@@ -6261,7 +7304,7 @@
       </p:sp>
       <p:sp>
         <p:nvSpPr>
-          <p:cNvPr id="109" name="sketchy line 7">
+          <p:cNvPr id="115" name="sketchy line 7">
             <a:extLst>
               <a:ext uri="{C183D7F6-B498-43B3-948B-1728B52AA6E4}">
                 <adec:decorative xmlns:adec="http://schemas.microsoft.com/office/drawing/2017/decorative" val="1"/>
@@ -6274,15 +7317,15 @@
         <p:spPr>
           <a:xfrm>
             <a:off x="572400" y="1681560"/>
-            <a:ext cx="10967040" cy="12600"/>
+            <a:ext cx="10966680" cy="12240"/>
           </a:xfrm>
           <a:custGeom>
             <a:avLst/>
             <a:gdLst>
-              <a:gd name="textAreaLeft" fmla="*/ 0 w 10967040"/>
-              <a:gd name="textAreaRight" fmla="*/ 10972800 w 10967040"/>
-              <a:gd name="textAreaTop" fmla="*/ 0 h 12600"/>
-              <a:gd name="textAreaBottom" fmla="*/ 18360 h 12600"/>
+              <a:gd name="textAreaLeft" fmla="*/ 0 w 10966680"/>
+              <a:gd name="textAreaRight" fmla="*/ 10972800 w 10966680"/>
+              <a:gd name="textAreaTop" fmla="*/ 0 h 12240"/>
+              <a:gd name="textAreaBottom" fmla="*/ 18360 h 12240"/>
               <a:gd name="GluePoint1X" fmla="*/ 0 w 10972800"/>
               <a:gd name="GluePoint1Y" fmla="*/ 0 h 18288"/>
               <a:gd name="GluePoint2X" fmla="*/ 356616 w 10972800"/>
@@ -6914,7 +7957,7 @@
       </p:sp>
       <p:pic>
         <p:nvPicPr>
-          <p:cNvPr id="110" name="Picture 10" descr="A blue and white logo&#10;&#10;Description automatically generated"/>
+          <p:cNvPr id="116" name="Picture 10" descr="A blue and white logo&#10;&#10;Description automatically generated"/>
           <p:cNvPicPr/>
           <p:nvPr/>
         </p:nvPicPr>
@@ -6925,7 +7968,7 @@
         <p:spPr>
           <a:xfrm>
             <a:off x="10199520" y="282600"/>
-            <a:ext cx="1794600" cy="594360"/>
+            <a:ext cx="1794240" cy="594000"/>
           </a:xfrm>
           <a:prstGeom prst="rect">
             <a:avLst/>
@@ -6938,14 +7981,14 @@
       </p:pic>
       <p:sp>
         <p:nvSpPr>
-          <p:cNvPr id="111" name="PlaceHolder 11"/>
+          <p:cNvPr id="117" name="PlaceHolder 11"/>
           <p:cNvSpPr/>
           <p:nvPr/>
         </p:nvSpPr>
         <p:spPr>
           <a:xfrm>
             <a:off x="6401520" y="1828800"/>
-            <a:ext cx="5256000" cy="4342320"/>
+            <a:ext cx="5255640" cy="4341960"/>
           </a:xfrm>
           <a:prstGeom prst="rect">
             <a:avLst/>
@@ -7131,7 +8174,7 @@
       </p:sp>
       <p:pic>
         <p:nvPicPr>
-          <p:cNvPr id="112" name="" descr=""/>
+          <p:cNvPr id="118" name="" descr=""/>
           <p:cNvPicPr/>
           <p:nvPr/>
         </p:nvPicPr>
@@ -7142,7 +8185,7 @@
         <p:spPr>
           <a:xfrm>
             <a:off x="549360" y="2017440"/>
-            <a:ext cx="5621400" cy="4153320"/>
+            <a:ext cx="5621040" cy="4152960"/>
           </a:xfrm>
           <a:prstGeom prst="rect">
             <a:avLst/>
@@ -7192,7 +8235,7 @@
       </p:grpSpPr>
       <p:sp useBgFill="1">
         <p:nvSpPr>
-          <p:cNvPr id="113" name="Rectangle 7">
+          <p:cNvPr id="119" name="Rectangle 7">
             <a:extLst>
               <a:ext uri="{C183D7F6-B498-43B3-948B-1728B52AA6E4}">
                 <adec:decorative xmlns:adec="http://schemas.microsoft.com/office/drawing/2017/decorative" val="1"/>
@@ -7205,7 +8248,7 @@
         <p:spPr>
           <a:xfrm>
             <a:off x="0" y="4680"/>
-            <a:ext cx="12183120" cy="6852240"/>
+            <a:ext cx="12182760" cy="6851880"/>
           </a:xfrm>
           <a:prstGeom prst="rect">
             <a:avLst/>
@@ -7251,7 +8294,7 @@
       </p:sp>
       <p:sp>
         <p:nvSpPr>
-          <p:cNvPr id="114" name="PlaceHolder 1"/>
+          <p:cNvPr id="120" name="PlaceHolder 1"/>
           <p:cNvSpPr>
             <a:spLocks noGrp="1"/>
           </p:cNvSpPr>
@@ -7262,7 +8305,7 @@
         <p:spPr>
           <a:xfrm>
             <a:off x="572400" y="238680"/>
-            <a:ext cx="11012760" cy="1127520"/>
+            <a:ext cx="11012400" cy="1127160"/>
           </a:xfrm>
           <a:prstGeom prst="rect">
             <a:avLst/>
@@ -7310,7 +8353,7 @@
       </p:sp>
       <p:sp>
         <p:nvSpPr>
-          <p:cNvPr id="115" name="sketchy line 8">
+          <p:cNvPr id="121" name="sketchy line 8">
             <a:extLst>
               <a:ext uri="{C183D7F6-B498-43B3-948B-1728B52AA6E4}">
                 <adec:decorative xmlns:adec="http://schemas.microsoft.com/office/drawing/2017/decorative" val="1"/>
@@ -7323,15 +8366,15 @@
         <p:spPr>
           <a:xfrm>
             <a:off x="572400" y="1681560"/>
-            <a:ext cx="10967040" cy="12600"/>
+            <a:ext cx="10966680" cy="12240"/>
           </a:xfrm>
           <a:custGeom>
             <a:avLst/>
             <a:gdLst>
-              <a:gd name="textAreaLeft" fmla="*/ 0 w 10967040"/>
-              <a:gd name="textAreaRight" fmla="*/ 10972800 w 10967040"/>
-              <a:gd name="textAreaTop" fmla="*/ 0 h 12600"/>
-              <a:gd name="textAreaBottom" fmla="*/ 18360 h 12600"/>
+              <a:gd name="textAreaLeft" fmla="*/ 0 w 10966680"/>
+              <a:gd name="textAreaRight" fmla="*/ 10972800 w 10966680"/>
+              <a:gd name="textAreaTop" fmla="*/ 0 h 12240"/>
+              <a:gd name="textAreaBottom" fmla="*/ 18360 h 12240"/>
               <a:gd name="GluePoint1X" fmla="*/ 0 w 10972800"/>
               <a:gd name="GluePoint1Y" fmla="*/ 0 h 18288"/>
               <a:gd name="GluePoint2X" fmla="*/ 356616 w 10972800"/>
@@ -7963,7 +9006,7 @@
       </p:sp>
       <p:pic>
         <p:nvPicPr>
-          <p:cNvPr id="116" name="Picture 11" descr="A blue and white logo&#10;&#10;Description automatically generated"/>
+          <p:cNvPr id="122" name="Picture 11" descr="A blue and white logo&#10;&#10;Description automatically generated"/>
           <p:cNvPicPr/>
           <p:nvPr/>
         </p:nvPicPr>
@@ -7974,7 +9017,7 @@
         <p:spPr>
           <a:xfrm>
             <a:off x="10199520" y="282600"/>
-            <a:ext cx="1794600" cy="594360"/>
+            <a:ext cx="1794240" cy="594000"/>
           </a:xfrm>
           <a:prstGeom prst="rect">
             <a:avLst/>
@@ -7987,14 +9030,14 @@
       </p:pic>
       <p:sp>
         <p:nvSpPr>
-          <p:cNvPr id="117" name="PlaceHolder 4"/>
+          <p:cNvPr id="123" name="PlaceHolder 4"/>
           <p:cNvSpPr/>
           <p:nvPr/>
         </p:nvSpPr>
         <p:spPr>
           <a:xfrm>
             <a:off x="457920" y="1970640"/>
-            <a:ext cx="5484600" cy="4342320"/>
+            <a:ext cx="5484240" cy="4341960"/>
           </a:xfrm>
           <a:prstGeom prst="rect">
             <a:avLst/>
@@ -8222,7 +9265,7 @@
       </p:sp>
       <p:pic>
         <p:nvPicPr>
-          <p:cNvPr id="118" name="" descr=""/>
+          <p:cNvPr id="124" name="" descr=""/>
           <p:cNvPicPr/>
           <p:nvPr/>
         </p:nvPicPr>
@@ -8233,7 +9276,7 @@
         <p:spPr>
           <a:xfrm>
             <a:off x="5942880" y="2591640"/>
-            <a:ext cx="5618160" cy="2437200"/>
+            <a:ext cx="5617800" cy="2436840"/>
           </a:xfrm>
           <a:prstGeom prst="rect">
             <a:avLst/>
@@ -8283,7 +9326,7 @@
       </p:grpSpPr>
       <p:sp useBgFill="1">
         <p:nvSpPr>
-          <p:cNvPr id="119" name="Rectangle 8">
+          <p:cNvPr id="125" name="Rectangle 8">
             <a:extLst>
               <a:ext uri="{C183D7F6-B498-43B3-948B-1728B52AA6E4}">
                 <adec:decorative xmlns:adec="http://schemas.microsoft.com/office/drawing/2017/decorative" val="1"/>
@@ -8296,7 +9339,7 @@
         <p:spPr>
           <a:xfrm>
             <a:off x="0" y="4680"/>
-            <a:ext cx="12183120" cy="6852240"/>
+            <a:ext cx="12182760" cy="6851880"/>
           </a:xfrm>
           <a:prstGeom prst="rect">
             <a:avLst/>
@@ -8342,7 +9385,7 @@
       </p:sp>
       <p:sp>
         <p:nvSpPr>
-          <p:cNvPr id="120" name="PlaceHolder 1"/>
+          <p:cNvPr id="126" name="PlaceHolder 1"/>
           <p:cNvSpPr>
             <a:spLocks noGrp="1"/>
           </p:cNvSpPr>
@@ -8353,7 +9396,7 @@
         <p:spPr>
           <a:xfrm>
             <a:off x="572400" y="457200"/>
-            <a:ext cx="11012760" cy="1142640"/>
+            <a:ext cx="11012400" cy="1142280"/>
           </a:xfrm>
           <a:prstGeom prst="rect">
             <a:avLst/>
@@ -8401,7 +9444,7 @@
       </p:sp>
       <p:sp>
         <p:nvSpPr>
-          <p:cNvPr id="121" name="sketchy line 9">
+          <p:cNvPr id="127" name="sketchy line 9">
             <a:extLst>
               <a:ext uri="{C183D7F6-B498-43B3-948B-1728B52AA6E4}">
                 <adec:decorative xmlns:adec="http://schemas.microsoft.com/office/drawing/2017/decorative" val="1"/>
@@ -8414,15 +9457,15 @@
         <p:spPr>
           <a:xfrm>
             <a:off x="572400" y="1681560"/>
-            <a:ext cx="10967040" cy="12600"/>
+            <a:ext cx="10966680" cy="12240"/>
           </a:xfrm>
           <a:custGeom>
             <a:avLst/>
             <a:gdLst>
-              <a:gd name="textAreaLeft" fmla="*/ 0 w 10967040"/>
-              <a:gd name="textAreaRight" fmla="*/ 10972800 w 10967040"/>
-              <a:gd name="textAreaTop" fmla="*/ 0 h 12600"/>
-              <a:gd name="textAreaBottom" fmla="*/ 18360 h 12600"/>
+              <a:gd name="textAreaLeft" fmla="*/ 0 w 10966680"/>
+              <a:gd name="textAreaRight" fmla="*/ 10972800 w 10966680"/>
+              <a:gd name="textAreaTop" fmla="*/ 0 h 12240"/>
+              <a:gd name="textAreaBottom" fmla="*/ 18360 h 12240"/>
               <a:gd name="GluePoint1X" fmla="*/ 0 w 10972800"/>
               <a:gd name="GluePoint1Y" fmla="*/ 0 h 18288"/>
               <a:gd name="GluePoint2X" fmla="*/ 356616 w 10972800"/>
@@ -9054,7 +10097,7 @@
       </p:sp>
       <p:pic>
         <p:nvPicPr>
-          <p:cNvPr id="122" name="Picture 12" descr="A blue and white logo&#10;&#10;Description automatically generated"/>
+          <p:cNvPr id="128" name="Picture 12" descr="A blue and white logo&#10;&#10;Description automatically generated"/>
           <p:cNvPicPr/>
           <p:nvPr/>
         </p:nvPicPr>
@@ -9065,7 +10108,7 @@
         <p:spPr>
           <a:xfrm>
             <a:off x="10199520" y="282600"/>
-            <a:ext cx="1794600" cy="594360"/>
+            <a:ext cx="1794240" cy="594000"/>
           </a:xfrm>
           <a:prstGeom prst="rect">
             <a:avLst/>
@@ -9078,14 +10121,14 @@
       </p:pic>
       <p:sp>
         <p:nvSpPr>
-          <p:cNvPr id="123" name=""/>
+          <p:cNvPr id="129" name=""/>
           <p:cNvSpPr/>
           <p:nvPr/>
         </p:nvSpPr>
         <p:spPr>
           <a:xfrm>
             <a:off x="685800" y="2057400"/>
-            <a:ext cx="5028840" cy="3885840"/>
+            <a:ext cx="5028480" cy="3885480"/>
           </a:xfrm>
           <a:prstGeom prst="rect">
             <a:avLst/>
@@ -9205,7 +10248,7 @@
       </p:sp>
       <p:pic>
         <p:nvPicPr>
-          <p:cNvPr id="124" name="" descr=""/>
+          <p:cNvPr id="130" name="" descr=""/>
           <p:cNvPicPr/>
           <p:nvPr/>
         </p:nvPicPr>
@@ -9216,7 +10259,7 @@
         <p:spPr>
           <a:xfrm>
             <a:off x="5715000" y="2411280"/>
-            <a:ext cx="6171840" cy="3303360"/>
+            <a:ext cx="6171480" cy="3303000"/>
           </a:xfrm>
           <a:prstGeom prst="rect">
             <a:avLst/>
@@ -9266,7 +10309,7 @@
       </p:grpSpPr>
       <p:sp useBgFill="1">
         <p:nvSpPr>
-          <p:cNvPr id="125" name="Rectangle 11">
+          <p:cNvPr id="131" name="Rectangle 11">
             <a:extLst>
               <a:ext uri="{C183D7F6-B498-43B3-948B-1728B52AA6E4}">
                 <adec:decorative xmlns:adec="http://schemas.microsoft.com/office/drawing/2017/decorative" val="1"/>
@@ -9279,7 +10322,7 @@
         <p:spPr>
           <a:xfrm>
             <a:off x="0" y="4680"/>
-            <a:ext cx="12183120" cy="6852240"/>
+            <a:ext cx="12182760" cy="6851880"/>
           </a:xfrm>
           <a:prstGeom prst="rect">
             <a:avLst/>
@@ -9325,7 +10368,7 @@
       </p:sp>
       <p:sp>
         <p:nvSpPr>
-          <p:cNvPr id="126" name="PlaceHolder 1"/>
+          <p:cNvPr id="132" name="PlaceHolder 1"/>
           <p:cNvSpPr>
             <a:spLocks noGrp="1"/>
           </p:cNvSpPr>
@@ -9336,7 +10379,7 @@
         <p:spPr>
           <a:xfrm>
             <a:off x="572400" y="457200"/>
-            <a:ext cx="11012760" cy="1142640"/>
+            <a:ext cx="11012400" cy="1142280"/>
           </a:xfrm>
           <a:prstGeom prst="rect">
             <a:avLst/>
@@ -9384,7 +10427,7 @@
       </p:sp>
       <p:sp>
         <p:nvSpPr>
-          <p:cNvPr id="127" name="sketchy line 12">
+          <p:cNvPr id="133" name="sketchy line 12">
             <a:extLst>
               <a:ext uri="{C183D7F6-B498-43B3-948B-1728B52AA6E4}">
                 <adec:decorative xmlns:adec="http://schemas.microsoft.com/office/drawing/2017/decorative" val="1"/>
@@ -9397,15 +10440,15 @@
         <p:spPr>
           <a:xfrm>
             <a:off x="572400" y="1681560"/>
-            <a:ext cx="10967040" cy="12600"/>
+            <a:ext cx="10966680" cy="12240"/>
           </a:xfrm>
           <a:custGeom>
             <a:avLst/>
             <a:gdLst>
-              <a:gd name="textAreaLeft" fmla="*/ 0 w 10967040"/>
-              <a:gd name="textAreaRight" fmla="*/ 10972800 w 10967040"/>
-              <a:gd name="textAreaTop" fmla="*/ 0 h 12600"/>
-              <a:gd name="textAreaBottom" fmla="*/ 18360 h 12600"/>
+              <a:gd name="textAreaLeft" fmla="*/ 0 w 10966680"/>
+              <a:gd name="textAreaRight" fmla="*/ 10972800 w 10966680"/>
+              <a:gd name="textAreaTop" fmla="*/ 0 h 12240"/>
+              <a:gd name="textAreaBottom" fmla="*/ 18360 h 12240"/>
               <a:gd name="GluePoint1X" fmla="*/ 0 w 10972800"/>
               <a:gd name="GluePoint1Y" fmla="*/ 0 h 18288"/>
               <a:gd name="GluePoint2X" fmla="*/ 356616 w 10972800"/>
@@ -10037,7 +11080,7 @@
       </p:sp>
       <p:pic>
         <p:nvPicPr>
-          <p:cNvPr id="128" name="Picture 15" descr="A blue and white logo&#10;&#10;Description automatically generated"/>
+          <p:cNvPr id="134" name="Picture 15" descr="A blue and white logo&#10;&#10;Description automatically generated"/>
           <p:cNvPicPr/>
           <p:nvPr/>
         </p:nvPicPr>
@@ -10048,7 +11091,7 @@
         <p:spPr>
           <a:xfrm>
             <a:off x="10199520" y="282600"/>
-            <a:ext cx="1794600" cy="594360"/>
+            <a:ext cx="1794240" cy="594000"/>
           </a:xfrm>
           <a:prstGeom prst="rect">
             <a:avLst/>
@@ -10061,14 +11104,14 @@
       </p:pic>
       <p:sp>
         <p:nvSpPr>
-          <p:cNvPr id="129" name=""/>
+          <p:cNvPr id="135" name=""/>
           <p:cNvSpPr/>
           <p:nvPr/>
         </p:nvSpPr>
         <p:spPr>
           <a:xfrm>
             <a:off x="685800" y="2057400"/>
-            <a:ext cx="10972440" cy="939960"/>
+            <a:ext cx="10972080" cy="939600"/>
           </a:xfrm>
           <a:prstGeom prst="rect">
             <a:avLst/>
@@ -10124,7 +11167,7 @@
       </p:sp>
       <p:pic>
         <p:nvPicPr>
-          <p:cNvPr id="130" name="" descr=""/>
+          <p:cNvPr id="136" name="" descr=""/>
           <p:cNvPicPr/>
           <p:nvPr/>
         </p:nvPicPr>
@@ -10135,7 +11178,7 @@
         <p:spPr>
           <a:xfrm>
             <a:off x="685800" y="2971800"/>
-            <a:ext cx="10354320" cy="3450960"/>
+            <a:ext cx="10353960" cy="3450600"/>
           </a:xfrm>
           <a:prstGeom prst="rect">
             <a:avLst/>
@@ -10185,7 +11228,7 @@
       </p:grpSpPr>
       <p:sp useBgFill="1">
         <p:nvSpPr>
-          <p:cNvPr id="131" name="Rectangle 12">
+          <p:cNvPr id="137" name="Rectangle 12">
             <a:extLst>
               <a:ext uri="{C183D7F6-B498-43B3-948B-1728B52AA6E4}">
                 <adec:decorative xmlns:adec="http://schemas.microsoft.com/office/drawing/2017/decorative" val="1"/>
@@ -10198,7 +11241,7 @@
         <p:spPr>
           <a:xfrm>
             <a:off x="8640" y="5400"/>
-            <a:ext cx="12183120" cy="6852240"/>
+            <a:ext cx="12182760" cy="6851880"/>
           </a:xfrm>
           <a:prstGeom prst="rect">
             <a:avLst/>
@@ -10244,7 +11287,7 @@
       </p:sp>
       <p:sp>
         <p:nvSpPr>
-          <p:cNvPr id="132" name="PlaceHolder 1"/>
+          <p:cNvPr id="138" name="PlaceHolder 1"/>
           <p:cNvSpPr>
             <a:spLocks noGrp="1"/>
           </p:cNvSpPr>
@@ -10255,7 +11298,7 @@
         <p:spPr>
           <a:xfrm>
             <a:off x="572400" y="457200"/>
-            <a:ext cx="11012760" cy="1142640"/>
+            <a:ext cx="11012400" cy="1142280"/>
           </a:xfrm>
           <a:prstGeom prst="rect">
             <a:avLst/>
@@ -10303,7 +11346,7 @@
       </p:sp>
       <p:sp>
         <p:nvSpPr>
-          <p:cNvPr id="133" name="sketchy line 13">
+          <p:cNvPr id="139" name="sketchy line 13">
             <a:extLst>
               <a:ext uri="{C183D7F6-B498-43B3-948B-1728B52AA6E4}">
                 <adec:decorative xmlns:adec="http://schemas.microsoft.com/office/drawing/2017/decorative" val="1"/>
@@ -10316,15 +11359,15 @@
         <p:spPr>
           <a:xfrm>
             <a:off x="572400" y="1681560"/>
-            <a:ext cx="10967040" cy="12600"/>
+            <a:ext cx="10966680" cy="12240"/>
           </a:xfrm>
           <a:custGeom>
             <a:avLst/>
             <a:gdLst>
-              <a:gd name="textAreaLeft" fmla="*/ 0 w 10967040"/>
-              <a:gd name="textAreaRight" fmla="*/ 10972800 w 10967040"/>
-              <a:gd name="textAreaTop" fmla="*/ 0 h 12600"/>
-              <a:gd name="textAreaBottom" fmla="*/ 18360 h 12600"/>
+              <a:gd name="textAreaLeft" fmla="*/ 0 w 10966680"/>
+              <a:gd name="textAreaRight" fmla="*/ 10972800 w 10966680"/>
+              <a:gd name="textAreaTop" fmla="*/ 0 h 12240"/>
+              <a:gd name="textAreaBottom" fmla="*/ 18360 h 12240"/>
               <a:gd name="GluePoint1X" fmla="*/ 0 w 10972800"/>
               <a:gd name="GluePoint1Y" fmla="*/ 0 h 18288"/>
               <a:gd name="GluePoint2X" fmla="*/ 356616 w 10972800"/>
@@ -10956,7 +11999,7 @@
       </p:sp>
       <p:pic>
         <p:nvPicPr>
-          <p:cNvPr id="134" name="Picture 16" descr="A blue and white logo&#10;&#10;Description automatically generated"/>
+          <p:cNvPr id="140" name="Picture 16" descr="A blue and white logo&#10;&#10;Description automatically generated"/>
           <p:cNvPicPr/>
           <p:nvPr/>
         </p:nvPicPr>
@@ -10967,7 +12010,7 @@
         <p:spPr>
           <a:xfrm>
             <a:off x="10199520" y="282600"/>
-            <a:ext cx="1794600" cy="594360"/>
+            <a:ext cx="1794240" cy="594000"/>
           </a:xfrm>
           <a:prstGeom prst="rect">
             <a:avLst/>
@@ -10980,14 +12023,14 @@
       </p:pic>
       <p:sp>
         <p:nvSpPr>
-          <p:cNvPr id="135" name=""/>
+          <p:cNvPr id="141" name=""/>
           <p:cNvSpPr/>
           <p:nvPr/>
         </p:nvSpPr>
         <p:spPr>
           <a:xfrm>
             <a:off x="685800" y="1828800"/>
-            <a:ext cx="10972440" cy="939960"/>
+            <a:ext cx="10972080" cy="939600"/>
           </a:xfrm>
           <a:prstGeom prst="rect">
             <a:avLst/>
@@ -11097,7 +12140,7 @@
       </p:sp>
       <p:pic>
         <p:nvPicPr>
-          <p:cNvPr id="136" name="" descr=""/>
+          <p:cNvPr id="142" name="" descr=""/>
           <p:cNvPicPr/>
           <p:nvPr/>
         </p:nvPicPr>
@@ -11108,7 +12151,7 @@
         <p:spPr>
           <a:xfrm>
             <a:off x="1371600" y="4401000"/>
-            <a:ext cx="8915040" cy="2228040"/>
+            <a:ext cx="8914680" cy="2227680"/>
           </a:xfrm>
           <a:prstGeom prst="rect">
             <a:avLst/>
@@ -11121,7 +12164,7 @@
       </p:pic>
       <p:graphicFrame>
         <p:nvGraphicFramePr>
-          <p:cNvPr id="137" name=""/>
+          <p:cNvPr id="143" name=""/>
           <p:cNvGraphicFramePr/>
           <p:nvPr/>
         </p:nvGraphicFramePr>
@@ -11790,7 +12833,7 @@
       </p:grpSpPr>
       <p:sp useBgFill="1">
         <p:nvSpPr>
-          <p:cNvPr id="138" name="Rectangle 14">
+          <p:cNvPr id="144" name="Rectangle 14">
             <a:extLst>
               <a:ext uri="{C183D7F6-B498-43B3-948B-1728B52AA6E4}">
                 <adec:decorative xmlns:adec="http://schemas.microsoft.com/office/drawing/2017/decorative" val="1"/>
@@ -11803,7 +12846,7 @@
         <p:spPr>
           <a:xfrm>
             <a:off x="8640" y="5400"/>
-            <a:ext cx="12183120" cy="6852240"/>
+            <a:ext cx="12182760" cy="6851880"/>
           </a:xfrm>
           <a:prstGeom prst="rect">
             <a:avLst/>
@@ -11849,7 +12892,7 @@
       </p:sp>
       <p:sp>
         <p:nvSpPr>
-          <p:cNvPr id="139" name="PlaceHolder 1"/>
+          <p:cNvPr id="145" name="PlaceHolder 1"/>
           <p:cNvSpPr>
             <a:spLocks noGrp="1"/>
           </p:cNvSpPr>
@@ -11860,7 +12903,7 @@
         <p:spPr>
           <a:xfrm>
             <a:off x="572400" y="457200"/>
-            <a:ext cx="11012760" cy="1142640"/>
+            <a:ext cx="11012400" cy="1142280"/>
           </a:xfrm>
           <a:prstGeom prst="rect">
             <a:avLst/>
@@ -11908,7 +12951,7 @@
       </p:sp>
       <p:sp>
         <p:nvSpPr>
-          <p:cNvPr id="140" name="sketchy line 14">
+          <p:cNvPr id="146" name="sketchy line 14">
             <a:extLst>
               <a:ext uri="{C183D7F6-B498-43B3-948B-1728B52AA6E4}">
                 <adec:decorative xmlns:adec="http://schemas.microsoft.com/office/drawing/2017/decorative" val="1"/>
@@ -11921,15 +12964,15 @@
         <p:spPr>
           <a:xfrm>
             <a:off x="572400" y="1681560"/>
-            <a:ext cx="10967040" cy="12600"/>
+            <a:ext cx="10966680" cy="12240"/>
           </a:xfrm>
           <a:custGeom>
             <a:avLst/>
             <a:gdLst>
-              <a:gd name="textAreaLeft" fmla="*/ 0 w 10967040"/>
-              <a:gd name="textAreaRight" fmla="*/ 10972800 w 10967040"/>
-              <a:gd name="textAreaTop" fmla="*/ 0 h 12600"/>
-              <a:gd name="textAreaBottom" fmla="*/ 18360 h 12600"/>
+              <a:gd name="textAreaLeft" fmla="*/ 0 w 10966680"/>
+              <a:gd name="textAreaRight" fmla="*/ 10972800 w 10966680"/>
+              <a:gd name="textAreaTop" fmla="*/ 0 h 12240"/>
+              <a:gd name="textAreaBottom" fmla="*/ 18360 h 12240"/>
               <a:gd name="GluePoint1X" fmla="*/ 0 w 10972800"/>
               <a:gd name="GluePoint1Y" fmla="*/ 0 h 18288"/>
               <a:gd name="GluePoint2X" fmla="*/ 356616 w 10972800"/>
@@ -12561,7 +13604,7 @@
       </p:sp>
       <p:pic>
         <p:nvPicPr>
-          <p:cNvPr id="141" name="Picture 17" descr="A blue and white logo&#10;&#10;Description automatically generated"/>
+          <p:cNvPr id="147" name="Picture 17" descr="A blue and white logo&#10;&#10;Description automatically generated"/>
           <p:cNvPicPr/>
           <p:nvPr/>
         </p:nvPicPr>
@@ -12572,7 +13615,7 @@
         <p:spPr>
           <a:xfrm>
             <a:off x="10199520" y="282600"/>
-            <a:ext cx="1794600" cy="594360"/>
+            <a:ext cx="1794240" cy="594000"/>
           </a:xfrm>
           <a:prstGeom prst="rect">
             <a:avLst/>
@@ -12585,14 +13628,14 @@
       </p:pic>
       <p:sp>
         <p:nvSpPr>
-          <p:cNvPr id="142" name=""/>
+          <p:cNvPr id="148" name=""/>
           <p:cNvSpPr/>
           <p:nvPr/>
         </p:nvSpPr>
         <p:spPr>
           <a:xfrm>
             <a:off x="685800" y="2057400"/>
-            <a:ext cx="10743840" cy="4464720"/>
+            <a:ext cx="10743480" cy="4464360"/>
           </a:xfrm>
           <a:prstGeom prst="rect">
             <a:avLst/>
@@ -12813,7 +13856,7 @@
       </p:grpSpPr>
       <p:sp useBgFill="1">
         <p:nvSpPr>
-          <p:cNvPr id="143" name="Rectangle 10">
+          <p:cNvPr id="149" name="Rectangle 10">
             <a:extLst>
               <a:ext uri="{C183D7F6-B498-43B3-948B-1728B52AA6E4}">
                 <adec:decorative xmlns:adec="http://schemas.microsoft.com/office/drawing/2017/decorative" val="1"/>
@@ -12826,7 +13869,7 @@
         <p:spPr>
           <a:xfrm>
             <a:off x="0" y="4680"/>
-            <a:ext cx="12183120" cy="6852240"/>
+            <a:ext cx="12182760" cy="6851880"/>
           </a:xfrm>
           <a:prstGeom prst="rect">
             <a:avLst/>
@@ -12872,7 +13915,7 @@
       </p:sp>
       <p:sp>
         <p:nvSpPr>
-          <p:cNvPr id="144" name="PlaceHolder 1"/>
+          <p:cNvPr id="150" name="PlaceHolder 1"/>
           <p:cNvSpPr>
             <a:spLocks noGrp="1"/>
           </p:cNvSpPr>
@@ -12883,7 +13926,7 @@
         <p:spPr>
           <a:xfrm>
             <a:off x="572400" y="238680"/>
-            <a:ext cx="11012760" cy="1127520"/>
+            <a:ext cx="11012400" cy="1127160"/>
           </a:xfrm>
           <a:prstGeom prst="rect">
             <a:avLst/>
@@ -12931,7 +13974,7 @@
       </p:sp>
       <p:sp>
         <p:nvSpPr>
-          <p:cNvPr id="145" name="sketchy line 11">
+          <p:cNvPr id="151" name="sketchy line 11">
             <a:extLst>
               <a:ext uri="{C183D7F6-B498-43B3-948B-1728B52AA6E4}">
                 <adec:decorative xmlns:adec="http://schemas.microsoft.com/office/drawing/2017/decorative" val="1"/>
@@ -12944,15 +13987,15 @@
         <p:spPr>
           <a:xfrm>
             <a:off x="572400" y="1681560"/>
-            <a:ext cx="10967040" cy="12600"/>
+            <a:ext cx="10966680" cy="12240"/>
           </a:xfrm>
           <a:custGeom>
             <a:avLst/>
             <a:gdLst>
-              <a:gd name="textAreaLeft" fmla="*/ 0 w 10967040"/>
-              <a:gd name="textAreaRight" fmla="*/ 10972800 w 10967040"/>
-              <a:gd name="textAreaTop" fmla="*/ 0 h 12600"/>
-              <a:gd name="textAreaBottom" fmla="*/ 18360 h 12600"/>
+              <a:gd name="textAreaLeft" fmla="*/ 0 w 10966680"/>
+              <a:gd name="textAreaRight" fmla="*/ 10972800 w 10966680"/>
+              <a:gd name="textAreaTop" fmla="*/ 0 h 12240"/>
+              <a:gd name="textAreaBottom" fmla="*/ 18360 h 12240"/>
               <a:gd name="GluePoint1X" fmla="*/ 0 w 10972800"/>
               <a:gd name="GluePoint1Y" fmla="*/ 0 h 18288"/>
               <a:gd name="GluePoint2X" fmla="*/ 356616 w 10972800"/>
@@ -13584,7 +14627,7 @@
       </p:sp>
       <p:pic>
         <p:nvPicPr>
-          <p:cNvPr id="146" name="Picture 14" descr="A blue and white logo&#10;&#10;Description automatically generated"/>
+          <p:cNvPr id="152" name="Picture 14" descr="A blue and white logo&#10;&#10;Description automatically generated"/>
           <p:cNvPicPr/>
           <p:nvPr/>
         </p:nvPicPr>
@@ -13595,7 +14638,7 @@
         <p:spPr>
           <a:xfrm>
             <a:off x="10199520" y="282600"/>
-            <a:ext cx="1794600" cy="594360"/>
+            <a:ext cx="1794240" cy="594000"/>
           </a:xfrm>
           <a:prstGeom prst="rect">
             <a:avLst/>
@@ -13608,7 +14651,7 @@
       </p:pic>
       <p:graphicFrame>
         <p:nvGraphicFramePr>
-          <p:cNvPr id="147" name=""/>
+          <p:cNvPr id="153" name=""/>
           <p:cNvGraphicFramePr/>
           <p:nvPr/>
         </p:nvGraphicFramePr>
@@ -14149,7 +15192,7 @@
       </p:grpSpPr>
       <p:sp useBgFill="1">
         <p:nvSpPr>
-          <p:cNvPr id="148" name="Rectangle 9">
+          <p:cNvPr id="154" name="Rectangle 9">
             <a:extLst>
               <a:ext uri="{C183D7F6-B498-43B3-948B-1728B52AA6E4}">
                 <adec:decorative xmlns:adec="http://schemas.microsoft.com/office/drawing/2017/decorative" val="1"/>
@@ -14162,7 +15205,7 @@
         <p:spPr>
           <a:xfrm>
             <a:off x="0" y="4680"/>
-            <a:ext cx="12183120" cy="6852240"/>
+            <a:ext cx="12182760" cy="6851880"/>
           </a:xfrm>
           <a:prstGeom prst="rect">
             <a:avLst/>
@@ -14208,7 +15251,7 @@
       </p:sp>
       <p:sp>
         <p:nvSpPr>
-          <p:cNvPr id="149" name="PlaceHolder 1"/>
+          <p:cNvPr id="155" name="PlaceHolder 1"/>
           <p:cNvSpPr>
             <a:spLocks noGrp="1"/>
           </p:cNvSpPr>
@@ -14219,7 +15262,7 @@
         <p:spPr>
           <a:xfrm>
             <a:off x="572400" y="238680"/>
-            <a:ext cx="11012760" cy="1127520"/>
+            <a:ext cx="11012400" cy="1127160"/>
           </a:xfrm>
           <a:prstGeom prst="rect">
             <a:avLst/>
@@ -14267,7 +15310,7 @@
       </p:sp>
       <p:sp>
         <p:nvSpPr>
-          <p:cNvPr id="150" name="sketchy line 10">
+          <p:cNvPr id="156" name="sketchy line 10">
             <a:extLst>
               <a:ext uri="{C183D7F6-B498-43B3-948B-1728B52AA6E4}">
                 <adec:decorative xmlns:adec="http://schemas.microsoft.com/office/drawing/2017/decorative" val="1"/>
@@ -14280,15 +15323,15 @@
         <p:spPr>
           <a:xfrm>
             <a:off x="572400" y="1681560"/>
-            <a:ext cx="10967040" cy="12600"/>
+            <a:ext cx="10966680" cy="12240"/>
           </a:xfrm>
           <a:custGeom>
             <a:avLst/>
             <a:gdLst>
-              <a:gd name="textAreaLeft" fmla="*/ 0 w 10967040"/>
-              <a:gd name="textAreaRight" fmla="*/ 10972800 w 10967040"/>
-              <a:gd name="textAreaTop" fmla="*/ 0 h 12600"/>
-              <a:gd name="textAreaBottom" fmla="*/ 18360 h 12600"/>
+              <a:gd name="textAreaLeft" fmla="*/ 0 w 10966680"/>
+              <a:gd name="textAreaRight" fmla="*/ 10972800 w 10966680"/>
+              <a:gd name="textAreaTop" fmla="*/ 0 h 12240"/>
+              <a:gd name="textAreaBottom" fmla="*/ 18360 h 12240"/>
               <a:gd name="GluePoint1X" fmla="*/ 0 w 10972800"/>
               <a:gd name="GluePoint1Y" fmla="*/ 0 h 18288"/>
               <a:gd name="GluePoint2X" fmla="*/ 356616 w 10972800"/>
@@ -14920,7 +15963,7 @@
       </p:sp>
       <p:pic>
         <p:nvPicPr>
-          <p:cNvPr id="151" name="Picture 13" descr="A blue and white logo&#10;&#10;Description automatically generated"/>
+          <p:cNvPr id="157" name="Picture 13" descr="A blue and white logo&#10;&#10;Description automatically generated"/>
           <p:cNvPicPr/>
           <p:nvPr/>
         </p:nvPicPr>
@@ -14931,7 +15974,7 @@
         <p:spPr>
           <a:xfrm>
             <a:off x="10199520" y="282600"/>
-            <a:ext cx="1794600" cy="594360"/>
+            <a:ext cx="1794240" cy="594000"/>
           </a:xfrm>
           <a:prstGeom prst="rect">
             <a:avLst/>
@@ -14944,14 +15987,14 @@
       </p:pic>
       <p:sp>
         <p:nvSpPr>
-          <p:cNvPr id="152" name=""/>
+          <p:cNvPr id="158" name=""/>
           <p:cNvSpPr/>
           <p:nvPr/>
         </p:nvSpPr>
         <p:spPr>
           <a:xfrm>
             <a:off x="5257800" y="2971800"/>
-            <a:ext cx="1371240" cy="1452600"/>
+            <a:ext cx="1370880" cy="1452240"/>
           </a:xfrm>
           <a:prstGeom prst="rect">
             <a:avLst/>
@@ -15038,7 +16081,7 @@
       </p:grpSpPr>
       <p:sp>
         <p:nvSpPr>
-          <p:cNvPr id="63" name="PlaceHolder 1"/>
+          <p:cNvPr id="69" name="PlaceHolder 1"/>
           <p:cNvSpPr>
             <a:spLocks noGrp="1"/>
           </p:cNvSpPr>
@@ -15049,7 +16092,7 @@
         <p:spPr>
           <a:xfrm>
             <a:off x="572400" y="238680"/>
-            <a:ext cx="11012760" cy="902520"/>
+            <a:ext cx="11012400" cy="902160"/>
           </a:xfrm>
           <a:prstGeom prst="rect">
             <a:avLst/>
@@ -15098,7 +16141,7 @@
       </p:sp>
       <p:sp>
         <p:nvSpPr>
-          <p:cNvPr id="64" name="sketchy line 2">
+          <p:cNvPr id="70" name="sketchy line 2">
             <a:extLst>
               <a:ext uri="{C183D7F6-B498-43B3-948B-1728B52AA6E4}">
                 <adec:decorative xmlns:adec="http://schemas.microsoft.com/office/drawing/2017/decorative" val="1"/>
@@ -15111,15 +16154,15 @@
         <p:spPr>
           <a:xfrm>
             <a:off x="572400" y="1681560"/>
-            <a:ext cx="10967040" cy="12600"/>
+            <a:ext cx="10966680" cy="12240"/>
           </a:xfrm>
           <a:custGeom>
             <a:avLst/>
             <a:gdLst>
-              <a:gd name="textAreaLeft" fmla="*/ 0 w 10967040"/>
-              <a:gd name="textAreaRight" fmla="*/ 10972800 w 10967040"/>
-              <a:gd name="textAreaTop" fmla="*/ 0 h 12600"/>
-              <a:gd name="textAreaBottom" fmla="*/ 18360 h 12600"/>
+              <a:gd name="textAreaLeft" fmla="*/ 0 w 10966680"/>
+              <a:gd name="textAreaRight" fmla="*/ 10972800 w 10966680"/>
+              <a:gd name="textAreaTop" fmla="*/ 0 h 12240"/>
+              <a:gd name="textAreaBottom" fmla="*/ 18360 h 12240"/>
               <a:gd name="GluePoint1X" fmla="*/ 0 w 10972800"/>
               <a:gd name="GluePoint1Y" fmla="*/ 0 h 18288"/>
               <a:gd name="GluePoint2X" fmla="*/ 356616 w 10972800"/>
@@ -15751,14 +16794,14 @@
       </p:sp>
       <p:sp>
         <p:nvSpPr>
-          <p:cNvPr id="65" name=""/>
+          <p:cNvPr id="71" name=""/>
           <p:cNvSpPr/>
           <p:nvPr/>
         </p:nvSpPr>
         <p:spPr>
           <a:xfrm>
             <a:off x="914400" y="2057400"/>
-            <a:ext cx="10283400" cy="4113000"/>
+            <a:ext cx="10283040" cy="4113000"/>
           </a:xfrm>
           <a:prstGeom prst="rect">
             <a:avLst/>
@@ -15878,7 +16921,7 @@
       </p:sp>
       <p:pic>
         <p:nvPicPr>
-          <p:cNvPr id="66" name="Picture 1" descr="A blue and white logo&#10;&#10;Description automatically generated"/>
+          <p:cNvPr id="72" name="Picture 1" descr="A blue and white logo&#10;&#10;Description automatically generated"/>
           <p:cNvPicPr/>
           <p:nvPr/>
         </p:nvPicPr>
@@ -15889,7 +16932,7 @@
         <p:spPr>
           <a:xfrm>
             <a:off x="10199520" y="282600"/>
-            <a:ext cx="1794600" cy="594360"/>
+            <a:ext cx="1794240" cy="594000"/>
           </a:xfrm>
           <a:prstGeom prst="rect">
             <a:avLst/>
@@ -15939,7 +16982,7 @@
       </p:grpSpPr>
       <p:sp useBgFill="1">
         <p:nvSpPr>
-          <p:cNvPr id="67" name="Rectangle 13">
+          <p:cNvPr id="73" name="Rectangle 13">
             <a:extLst>
               <a:ext uri="{C183D7F6-B498-43B3-948B-1728B52AA6E4}">
                 <adec:decorative xmlns:adec="http://schemas.microsoft.com/office/drawing/2017/decorative" val="1"/>
@@ -15952,7 +16995,7 @@
         <p:spPr>
           <a:xfrm>
             <a:off x="156960" y="0"/>
-            <a:ext cx="12183120" cy="6852240"/>
+            <a:ext cx="12182760" cy="6851880"/>
           </a:xfrm>
           <a:prstGeom prst="rect">
             <a:avLst/>
@@ -15998,7 +17041,7 @@
       </p:sp>
       <p:sp>
         <p:nvSpPr>
-          <p:cNvPr id="68" name="PlaceHolder 1"/>
+          <p:cNvPr id="74" name="PlaceHolder 1"/>
           <p:cNvSpPr>
             <a:spLocks noGrp="1"/>
           </p:cNvSpPr>
@@ -16009,7 +17052,7 @@
         <p:spPr>
           <a:xfrm>
             <a:off x="572400" y="238680"/>
-            <a:ext cx="11012760" cy="1198440"/>
+            <a:ext cx="11012400" cy="1198080"/>
           </a:xfrm>
           <a:prstGeom prst="rect">
             <a:avLst/>
@@ -16058,7 +17101,7 @@
       </p:sp>
       <p:sp>
         <p:nvSpPr>
-          <p:cNvPr id="69" name="sketchy line">
+          <p:cNvPr id="75" name="sketchy line">
             <a:extLst>
               <a:ext uri="{C183D7F6-B498-43B3-948B-1728B52AA6E4}">
                 <adec:decorative xmlns:adec="http://schemas.microsoft.com/office/drawing/2017/decorative" val="1"/>
@@ -16071,15 +17114,15 @@
         <p:spPr>
           <a:xfrm>
             <a:off x="572400" y="1681560"/>
-            <a:ext cx="10967040" cy="12600"/>
+            <a:ext cx="10966680" cy="12240"/>
           </a:xfrm>
           <a:custGeom>
             <a:avLst/>
             <a:gdLst>
-              <a:gd name="textAreaLeft" fmla="*/ 0 w 10967040"/>
-              <a:gd name="textAreaRight" fmla="*/ 10972800 w 10967040"/>
-              <a:gd name="textAreaTop" fmla="*/ 0 h 12600"/>
-              <a:gd name="textAreaBottom" fmla="*/ 18360 h 12600"/>
+              <a:gd name="textAreaLeft" fmla="*/ 0 w 10966680"/>
+              <a:gd name="textAreaRight" fmla="*/ 10972800 w 10966680"/>
+              <a:gd name="textAreaTop" fmla="*/ 0 h 12240"/>
+              <a:gd name="textAreaBottom" fmla="*/ 18360 h 12240"/>
               <a:gd name="GluePoint1X" fmla="*/ 0 w 10972800"/>
               <a:gd name="GluePoint1Y" fmla="*/ 0 h 18288"/>
               <a:gd name="GluePoint2X" fmla="*/ 356616 w 10972800"/>
@@ -16711,7 +17754,7 @@
       </p:sp>
       <p:sp>
         <p:nvSpPr>
-          <p:cNvPr id="70" name="PlaceHolder 2"/>
+          <p:cNvPr id="76" name="PlaceHolder 2"/>
           <p:cNvSpPr>
             <a:spLocks noGrp="1"/>
           </p:cNvSpPr>
@@ -16722,7 +17765,7 @@
         <p:spPr>
           <a:xfrm>
             <a:off x="685800" y="1829520"/>
-            <a:ext cx="10854000" cy="2969640"/>
+            <a:ext cx="10853640" cy="2969280"/>
           </a:xfrm>
           <a:prstGeom prst="rect">
             <a:avLst/>
@@ -16926,7 +17969,7 @@
       </p:sp>
       <p:pic>
         <p:nvPicPr>
-          <p:cNvPr id="71" name="Picture 2" descr="A blue and white logo&#10;&#10;Description automatically generated"/>
+          <p:cNvPr id="77" name="Picture 2" descr="A blue and white logo&#10;&#10;Description automatically generated"/>
           <p:cNvPicPr/>
           <p:nvPr/>
         </p:nvPicPr>
@@ -16937,7 +17980,7 @@
         <p:spPr>
           <a:xfrm>
             <a:off x="10199520" y="282600"/>
-            <a:ext cx="1794600" cy="594360"/>
+            <a:ext cx="1794240" cy="594000"/>
           </a:xfrm>
           <a:prstGeom prst="rect">
             <a:avLst/>
@@ -16987,7 +18030,7 @@
       </p:grpSpPr>
       <p:sp useBgFill="1">
         <p:nvSpPr>
-          <p:cNvPr id="72" name="Rectangle 2">
+          <p:cNvPr id="78" name="Rectangle 2">
             <a:extLst>
               <a:ext uri="{C183D7F6-B498-43B3-948B-1728B52AA6E4}">
                 <adec:decorative xmlns:adec="http://schemas.microsoft.com/office/drawing/2017/decorative" val="1"/>
@@ -17000,7 +18043,7 @@
         <p:spPr>
           <a:xfrm>
             <a:off x="156960" y="0"/>
-            <a:ext cx="12183120" cy="6852240"/>
+            <a:ext cx="12182760" cy="6851880"/>
           </a:xfrm>
           <a:prstGeom prst="rect">
             <a:avLst/>
@@ -17046,7 +18089,7 @@
       </p:sp>
       <p:sp>
         <p:nvSpPr>
-          <p:cNvPr id="73" name="PlaceHolder 1"/>
+          <p:cNvPr id="79" name="PlaceHolder 1"/>
           <p:cNvSpPr>
             <a:spLocks noGrp="1"/>
           </p:cNvSpPr>
@@ -17057,7 +18100,7 @@
         <p:spPr>
           <a:xfrm>
             <a:off x="572400" y="238680"/>
-            <a:ext cx="11012760" cy="1198440"/>
+            <a:ext cx="11012400" cy="1198080"/>
           </a:xfrm>
           <a:prstGeom prst="rect">
             <a:avLst/>
@@ -17106,7 +18149,7 @@
       </p:sp>
       <p:sp>
         <p:nvSpPr>
-          <p:cNvPr id="74" name="sketchy line 3">
+          <p:cNvPr id="80" name="sketchy line 3">
             <a:extLst>
               <a:ext uri="{C183D7F6-B498-43B3-948B-1728B52AA6E4}">
                 <adec:decorative xmlns:adec="http://schemas.microsoft.com/office/drawing/2017/decorative" val="1"/>
@@ -17119,15 +18162,15 @@
         <p:spPr>
           <a:xfrm>
             <a:off x="572400" y="1681560"/>
-            <a:ext cx="10967040" cy="12600"/>
+            <a:ext cx="10966680" cy="12240"/>
           </a:xfrm>
           <a:custGeom>
             <a:avLst/>
             <a:gdLst>
-              <a:gd name="textAreaLeft" fmla="*/ 0 w 10967040"/>
-              <a:gd name="textAreaRight" fmla="*/ 10972800 w 10967040"/>
-              <a:gd name="textAreaTop" fmla="*/ 0 h 12600"/>
-              <a:gd name="textAreaBottom" fmla="*/ 18360 h 12600"/>
+              <a:gd name="textAreaLeft" fmla="*/ 0 w 10966680"/>
+              <a:gd name="textAreaRight" fmla="*/ 10972800 w 10966680"/>
+              <a:gd name="textAreaTop" fmla="*/ 0 h 12240"/>
+              <a:gd name="textAreaBottom" fmla="*/ 18360 h 12240"/>
               <a:gd name="GluePoint1X" fmla="*/ 0 w 10972800"/>
               <a:gd name="GluePoint1Y" fmla="*/ 0 h 18288"/>
               <a:gd name="GluePoint2X" fmla="*/ 356616 w 10972800"/>
@@ -17759,7 +18802,7 @@
       </p:sp>
       <p:sp>
         <p:nvSpPr>
-          <p:cNvPr id="75" name="PlaceHolder 2"/>
+          <p:cNvPr id="81" name="PlaceHolder 2"/>
           <p:cNvSpPr>
             <a:spLocks noGrp="1"/>
           </p:cNvSpPr>
@@ -17770,7 +18813,7 @@
         <p:spPr>
           <a:xfrm>
             <a:off x="685800" y="1829520"/>
-            <a:ext cx="10854000" cy="4112280"/>
+            <a:ext cx="10853640" cy="4111920"/>
           </a:xfrm>
           <a:prstGeom prst="rect">
             <a:avLst/>
@@ -17808,7 +18851,31 @@
                 <a:latin typeface="Arial"/>
                 <a:ea typeface="Calibri"/>
               </a:rPr>
-              <a:t>When segmentation is applied to a brain tumor MR Image it identifies the boundaries of the tumor regions within the brain scan</a:t>
+              <a:t>When segmentation is applied to a brain </a:t>
+            </a:r>
+            <a:r>
+              <a:rPr b="0" lang="en-US" sz="2400" strike="noStrike" u="none">
+                <a:solidFill>
+                  <a:schemeClr val="dk1"/>
+                </a:solidFill>
+                <a:effectLst/>
+                <a:uFillTx/>
+                <a:latin typeface="Arial"/>
+                <a:ea typeface="Calibri"/>
+              </a:rPr>
+              <a:t>tumor MR Image it identifies the boundaries </a:t>
+            </a:r>
+            <a:r>
+              <a:rPr b="0" lang="en-US" sz="2400" strike="noStrike" u="none">
+                <a:solidFill>
+                  <a:schemeClr val="dk1"/>
+                </a:solidFill>
+                <a:effectLst/>
+                <a:uFillTx/>
+                <a:latin typeface="Arial"/>
+                <a:ea typeface="Calibri"/>
+              </a:rPr>
+              <a:t>of the tumor regions within the brain scan</a:t>
             </a:r>
             <a:endParaRPr b="0" lang="en-US" sz="2400" strike="noStrike" u="none">
               <a:solidFill>
@@ -17843,7 +18910,19 @@
                 <a:latin typeface="Arial"/>
                 <a:ea typeface="Calibri"/>
               </a:rPr>
-              <a:t>These boundaries are divided into masks and assigned a label</a:t>
+              <a:t>These boundaries are divided into masks </a:t>
+            </a:r>
+            <a:r>
+              <a:rPr b="0" lang="en-US" sz="2400" strike="noStrike" u="none">
+                <a:solidFill>
+                  <a:schemeClr val="dk1"/>
+                </a:solidFill>
+                <a:effectLst/>
+                <a:uFillTx/>
+                <a:latin typeface="Arial"/>
+                <a:ea typeface="Calibri"/>
+              </a:rPr>
+              <a:t>and assigned a label</a:t>
             </a:r>
             <a:endParaRPr b="0" lang="en-US" sz="2400" strike="noStrike" u="none">
               <a:solidFill>
@@ -17879,7 +18958,19 @@
                 <a:latin typeface="Arial"/>
                 <a:ea typeface="Calibri"/>
               </a:rPr>
-              <a:t>Label 0 – normal brain tissue (non-tumor/background)</a:t>
+              <a:t>Label 0 – normal brain tissue (non-</a:t>
+            </a:r>
+            <a:r>
+              <a:rPr b="0" lang="en-US" sz="2400" strike="noStrike" u="none">
+                <a:solidFill>
+                  <a:schemeClr val="dk1"/>
+                </a:solidFill>
+                <a:effectLst/>
+                <a:uFillTx/>
+                <a:latin typeface="Arial"/>
+                <a:ea typeface="Calibri"/>
+              </a:rPr>
+              <a:t>tumor/background)</a:t>
             </a:r>
             <a:endParaRPr b="0" lang="en-US" sz="2400" strike="noStrike" u="none">
               <a:solidFill>
@@ -17915,7 +19006,19 @@
                 <a:latin typeface="Arial"/>
                 <a:ea typeface="Calibri"/>
               </a:rPr>
-              <a:t>Label 1 – necrotic/non-enhancing tumor core (NCR/NET)</a:t>
+              <a:t>Label 1 – necrotic/non-enhancing </a:t>
+            </a:r>
+            <a:r>
+              <a:rPr b="0" lang="en-US" sz="2400" strike="noStrike" u="none">
+                <a:solidFill>
+                  <a:schemeClr val="dk1"/>
+                </a:solidFill>
+                <a:effectLst/>
+                <a:uFillTx/>
+                <a:latin typeface="Arial"/>
+                <a:ea typeface="Calibri"/>
+              </a:rPr>
+              <a:t>tumor core (NCR/NET)</a:t>
             </a:r>
             <a:endParaRPr b="0" lang="en-US" sz="2400" strike="noStrike" u="none">
               <a:solidFill>
@@ -17987,7 +19090,19 @@
                 <a:latin typeface="Arial"/>
                 <a:ea typeface="Calibri"/>
               </a:rPr>
-              <a:t>Label 3 – is not used to avoid confusion with binary encoders</a:t>
+              <a:t>Label 3 – is not used to avoid </a:t>
+            </a:r>
+            <a:r>
+              <a:rPr b="0" lang="en-US" sz="2400" strike="noStrike" u="none">
+                <a:solidFill>
+                  <a:schemeClr val="dk1"/>
+                </a:solidFill>
+                <a:effectLst/>
+                <a:uFillTx/>
+                <a:latin typeface="Arial"/>
+                <a:ea typeface="Calibri"/>
+              </a:rPr>
+              <a:t>confusion with binary encoders</a:t>
             </a:r>
             <a:endParaRPr b="0" lang="en-US" sz="2400" strike="noStrike" u="none">
               <a:solidFill>
@@ -18038,7 +19153,7 @@
       </p:sp>
       <p:pic>
         <p:nvPicPr>
-          <p:cNvPr id="76" name="Picture 4" descr="A blue and white logo&#10;&#10;Description automatically generated"/>
+          <p:cNvPr id="82" name="Picture 4" descr="A blue and white logo&#10;&#10;Description automatically generated"/>
           <p:cNvPicPr/>
           <p:nvPr/>
         </p:nvPicPr>
@@ -18049,7 +19164,7 @@
         <p:spPr>
           <a:xfrm>
             <a:off x="10199520" y="282600"/>
-            <a:ext cx="1794600" cy="594360"/>
+            <a:ext cx="1794240" cy="594000"/>
           </a:xfrm>
           <a:prstGeom prst="rect">
             <a:avLst/>
@@ -18099,7 +19214,7 @@
       </p:grpSpPr>
       <p:sp useBgFill="1">
         <p:nvSpPr>
-          <p:cNvPr id="77" name="Rectangle 3">
+          <p:cNvPr id="83" name="Rectangle 3">
             <a:extLst>
               <a:ext uri="{C183D7F6-B498-43B3-948B-1728B52AA6E4}">
                 <adec:decorative xmlns:adec="http://schemas.microsoft.com/office/drawing/2017/decorative" val="1"/>
@@ -18112,7 +19227,7 @@
         <p:spPr>
           <a:xfrm>
             <a:off x="156960" y="0"/>
-            <a:ext cx="12183120" cy="6852240"/>
+            <a:ext cx="12182760" cy="6851880"/>
           </a:xfrm>
           <a:prstGeom prst="rect">
             <a:avLst/>
@@ -18158,7 +19273,7 @@
       </p:sp>
       <p:sp>
         <p:nvSpPr>
-          <p:cNvPr id="78" name="PlaceHolder 1"/>
+          <p:cNvPr id="84" name="PlaceHolder 1"/>
           <p:cNvSpPr>
             <a:spLocks noGrp="1"/>
           </p:cNvSpPr>
@@ -18169,7 +19284,7 @@
         <p:spPr>
           <a:xfrm>
             <a:off x="572400" y="238680"/>
-            <a:ext cx="11012760" cy="1198440"/>
+            <a:ext cx="11012400" cy="1198080"/>
           </a:xfrm>
           <a:prstGeom prst="rect">
             <a:avLst/>
@@ -18218,7 +19333,7 @@
       </p:sp>
       <p:sp>
         <p:nvSpPr>
-          <p:cNvPr id="79" name="sketchy line 4">
+          <p:cNvPr id="85" name="sketchy line 4">
             <a:extLst>
               <a:ext uri="{C183D7F6-B498-43B3-948B-1728B52AA6E4}">
                 <adec:decorative xmlns:adec="http://schemas.microsoft.com/office/drawing/2017/decorative" val="1"/>
@@ -18231,15 +19346,15 @@
         <p:spPr>
           <a:xfrm>
             <a:off x="572400" y="1681560"/>
-            <a:ext cx="10967040" cy="12600"/>
+            <a:ext cx="10966680" cy="12240"/>
           </a:xfrm>
           <a:custGeom>
             <a:avLst/>
             <a:gdLst>
-              <a:gd name="textAreaLeft" fmla="*/ 0 w 10967040"/>
-              <a:gd name="textAreaRight" fmla="*/ 10972800 w 10967040"/>
-              <a:gd name="textAreaTop" fmla="*/ 0 h 12600"/>
-              <a:gd name="textAreaBottom" fmla="*/ 18360 h 12600"/>
+              <a:gd name="textAreaLeft" fmla="*/ 0 w 10966680"/>
+              <a:gd name="textAreaRight" fmla="*/ 10972800 w 10966680"/>
+              <a:gd name="textAreaTop" fmla="*/ 0 h 12240"/>
+              <a:gd name="textAreaBottom" fmla="*/ 18360 h 12240"/>
               <a:gd name="GluePoint1X" fmla="*/ 0 w 10972800"/>
               <a:gd name="GluePoint1Y" fmla="*/ 0 h 18288"/>
               <a:gd name="GluePoint2X" fmla="*/ 356616 w 10972800"/>
@@ -18871,7 +19986,7 @@
       </p:sp>
       <p:sp>
         <p:nvSpPr>
-          <p:cNvPr id="80" name="PlaceHolder 2"/>
+          <p:cNvPr id="86" name="PlaceHolder 2"/>
           <p:cNvSpPr>
             <a:spLocks noGrp="1"/>
           </p:cNvSpPr>
@@ -18882,7 +19997,7 @@
         <p:spPr>
           <a:xfrm>
             <a:off x="685800" y="1829520"/>
-            <a:ext cx="10854000" cy="4112280"/>
+            <a:ext cx="10853640" cy="4111920"/>
           </a:xfrm>
           <a:prstGeom prst="rect">
             <a:avLst/>
@@ -19184,7 +20299,7 @@
       </p:sp>
       <p:pic>
         <p:nvPicPr>
-          <p:cNvPr id="81" name="Picture 5" descr="A blue and white logo&#10;&#10;Description automatically generated"/>
+          <p:cNvPr id="87" name="Picture 5" descr="A blue and white logo&#10;&#10;Description automatically generated"/>
           <p:cNvPicPr/>
           <p:nvPr/>
         </p:nvPicPr>
@@ -19195,7 +20310,7 @@
         <p:spPr>
           <a:xfrm>
             <a:off x="10199520" y="282600"/>
-            <a:ext cx="1794600" cy="594360"/>
+            <a:ext cx="1794240" cy="594000"/>
           </a:xfrm>
           <a:prstGeom prst="rect">
             <a:avLst/>
@@ -19245,7 +20360,7 @@
       </p:grpSpPr>
       <p:sp useBgFill="1">
         <p:nvSpPr>
-          <p:cNvPr id="82" name="Rectangle 13">
+          <p:cNvPr id="88" name="Rectangle 13">
             <a:extLst>
               <a:ext uri="{C183D7F6-B498-43B3-948B-1728B52AA6E4}">
                 <adec:decorative xmlns:adec="http://schemas.microsoft.com/office/drawing/2017/decorative" val="1"/>
@@ -19258,7 +20373,7 @@
         <p:spPr>
           <a:xfrm>
             <a:off x="3600" y="0"/>
-            <a:ext cx="12183120" cy="6852240"/>
+            <a:ext cx="12182760" cy="6851880"/>
           </a:xfrm>
           <a:prstGeom prst="rect">
             <a:avLst/>
@@ -19304,7 +20419,7 @@
       </p:sp>
       <p:sp>
         <p:nvSpPr>
-          <p:cNvPr id="83" name="PlaceHolder 1"/>
+          <p:cNvPr id="89" name="PlaceHolder 1"/>
           <p:cNvSpPr>
             <a:spLocks noGrp="1"/>
           </p:cNvSpPr>
@@ -19315,7 +20430,7 @@
         <p:spPr>
           <a:xfrm>
             <a:off x="572400" y="238680"/>
-            <a:ext cx="11012760" cy="1360080"/>
+            <a:ext cx="11012400" cy="1359720"/>
           </a:xfrm>
           <a:prstGeom prst="rect">
             <a:avLst/>
@@ -19363,7 +20478,7 @@
       </p:sp>
       <p:sp>
         <p:nvSpPr>
-          <p:cNvPr id="84" name="sketchy line">
+          <p:cNvPr id="90" name="sketchy line">
             <a:extLst>
               <a:ext uri="{C183D7F6-B498-43B3-948B-1728B52AA6E4}">
                 <adec:decorative xmlns:adec="http://schemas.microsoft.com/office/drawing/2017/decorative" val="1"/>
@@ -19376,15 +20491,15 @@
         <p:spPr>
           <a:xfrm>
             <a:off x="572400" y="1681560"/>
-            <a:ext cx="10967040" cy="12600"/>
+            <a:ext cx="10966680" cy="12240"/>
           </a:xfrm>
           <a:custGeom>
             <a:avLst/>
             <a:gdLst>
-              <a:gd name="textAreaLeft" fmla="*/ 0 w 10967040"/>
-              <a:gd name="textAreaRight" fmla="*/ 10972800 w 10967040"/>
-              <a:gd name="textAreaTop" fmla="*/ 0 h 12600"/>
-              <a:gd name="textAreaBottom" fmla="*/ 18360 h 12600"/>
+              <a:gd name="textAreaLeft" fmla="*/ 0 w 10966680"/>
+              <a:gd name="textAreaRight" fmla="*/ 10972800 w 10966680"/>
+              <a:gd name="textAreaTop" fmla="*/ 0 h 12240"/>
+              <a:gd name="textAreaBottom" fmla="*/ 18360 h 12240"/>
               <a:gd name="GluePoint1X" fmla="*/ 0 w 10972800"/>
               <a:gd name="GluePoint1Y" fmla="*/ 0 h 18288"/>
               <a:gd name="GluePoint2X" fmla="*/ 356616 w 10972800"/>
@@ -20016,7 +21131,7 @@
       </p:sp>
       <p:sp>
         <p:nvSpPr>
-          <p:cNvPr id="85" name="PlaceHolder 2"/>
+          <p:cNvPr id="91" name="PlaceHolder 2"/>
           <p:cNvSpPr>
             <a:spLocks noGrp="1"/>
           </p:cNvSpPr>
@@ -20027,7 +21142,7 @@
         <p:spPr>
           <a:xfrm>
             <a:off x="228600" y="2057400"/>
-            <a:ext cx="5486400" cy="4343400"/>
+            <a:ext cx="5486040" cy="4343040"/>
           </a:xfrm>
           <a:prstGeom prst="rect">
             <a:avLst/>
@@ -20255,7 +21370,7 @@
       </p:sp>
       <p:pic>
         <p:nvPicPr>
-          <p:cNvPr id="86" name="Picture 6" descr="A blue and white logo&#10;&#10;Description automatically generated"/>
+          <p:cNvPr id="92" name="Picture 6" descr="A blue and white logo&#10;&#10;Description automatically generated"/>
           <p:cNvPicPr/>
           <p:nvPr/>
         </p:nvPicPr>
@@ -20266,7 +21381,7 @@
         <p:spPr>
           <a:xfrm>
             <a:off x="10199520" y="282600"/>
-            <a:ext cx="1794600" cy="594360"/>
+            <a:ext cx="1794240" cy="594000"/>
           </a:xfrm>
           <a:prstGeom prst="rect">
             <a:avLst/>
@@ -20279,7 +21394,7 @@
       </p:pic>
       <p:pic>
         <p:nvPicPr>
-          <p:cNvPr id="87" name="" descr=""/>
+          <p:cNvPr id="93" name="" descr=""/>
           <p:cNvPicPr/>
           <p:nvPr/>
         </p:nvPicPr>
@@ -20290,7 +21405,7 @@
         <p:spPr>
           <a:xfrm>
             <a:off x="5715000" y="2514600"/>
-            <a:ext cx="6172200" cy="3150000"/>
+            <a:ext cx="6171840" cy="3149640"/>
           </a:xfrm>
           <a:prstGeom prst="rect">
             <a:avLst/>
@@ -20303,14 +21418,14 @@
       </p:pic>
       <p:sp>
         <p:nvSpPr>
-          <p:cNvPr id="88" name=""/>
-          <p:cNvSpPr txBox="1"/>
+          <p:cNvPr id="94" name=""/>
+          <p:cNvSpPr/>
           <p:nvPr/>
         </p:nvSpPr>
         <p:spPr>
           <a:xfrm>
             <a:off x="6629400" y="5943600"/>
-            <a:ext cx="4114800" cy="457200"/>
+            <a:ext cx="4114440" cy="456840"/>
           </a:xfrm>
           <a:prstGeom prst="rect">
             <a:avLst/>
@@ -20320,11 +21435,22 @@
             <a:noFill/>
           </a:ln>
         </p:spPr>
+        <p:style>
+          <a:lnRef idx="0"/>
+          <a:fillRef idx="0"/>
+          <a:effectRef idx="0"/>
+          <a:fontRef idx="minor"/>
+        </p:style>
         <p:txBody>
           <a:bodyPr lIns="90000" rIns="90000" tIns="45000" bIns="45000" anchor="t">
             <a:spAutoFit/>
           </a:bodyPr>
           <a:p>
+            <a:pPr>
+              <a:lnSpc>
+                <a:spcPct val="100000"/>
+              </a:lnSpc>
+            </a:pPr>
             <a:r>
               <a:rPr b="0" i="1" lang="en-US" sz="1800" strike="noStrike" u="none">
                 <a:solidFill>
@@ -20336,7 +21462,7 @@
               </a:rPr>
               <a:t>Image is from post-treatment dataset</a:t>
             </a:r>
-            <a:endParaRPr b="0" i="1" lang="en-US" sz="1800" strike="noStrike" u="none">
+            <a:endParaRPr b="0" lang="en-US" sz="1800" strike="noStrike" u="none">
               <a:solidFill>
                 <a:srgbClr val="000000"/>
               </a:solidFill>
@@ -20386,7 +21512,7 @@
       </p:grpSpPr>
       <p:sp useBgFill="1">
         <p:nvSpPr>
-          <p:cNvPr id="89" name="Rectangle 1">
+          <p:cNvPr id="95" name="Rectangle 1">
             <a:extLst>
               <a:ext uri="{C183D7F6-B498-43B3-948B-1728B52AA6E4}">
                 <adec:decorative xmlns:adec="http://schemas.microsoft.com/office/drawing/2017/decorative" val="1"/>
@@ -20399,7 +21525,7 @@
         <p:spPr>
           <a:xfrm>
             <a:off x="3600" y="0"/>
-            <a:ext cx="12183120" cy="6852240"/>
+            <a:ext cx="12182760" cy="6851880"/>
           </a:xfrm>
           <a:prstGeom prst="rect">
             <a:avLst/>
@@ -20445,7 +21571,7 @@
       </p:sp>
       <p:sp>
         <p:nvSpPr>
-          <p:cNvPr id="90" name="PlaceHolder 1"/>
+          <p:cNvPr id="96" name="PlaceHolder 1"/>
           <p:cNvSpPr>
             <a:spLocks noGrp="1"/>
           </p:cNvSpPr>
@@ -20456,7 +21582,7 @@
         <p:spPr>
           <a:xfrm>
             <a:off x="572400" y="238680"/>
-            <a:ext cx="11012760" cy="1360080"/>
+            <a:ext cx="11012400" cy="1359720"/>
           </a:xfrm>
           <a:prstGeom prst="rect">
             <a:avLst/>
@@ -20504,7 +21630,7 @@
       </p:sp>
       <p:sp>
         <p:nvSpPr>
-          <p:cNvPr id="91" name="sketchy line 1">
+          <p:cNvPr id="97" name="sketchy line 1">
             <a:extLst>
               <a:ext uri="{C183D7F6-B498-43B3-948B-1728B52AA6E4}">
                 <adec:decorative xmlns:adec="http://schemas.microsoft.com/office/drawing/2017/decorative" val="1"/>
@@ -20517,15 +21643,15 @@
         <p:spPr>
           <a:xfrm>
             <a:off x="572400" y="1681560"/>
-            <a:ext cx="10967040" cy="12600"/>
+            <a:ext cx="10966680" cy="12240"/>
           </a:xfrm>
           <a:custGeom>
             <a:avLst/>
             <a:gdLst>
-              <a:gd name="textAreaLeft" fmla="*/ 0 w 10967040"/>
-              <a:gd name="textAreaRight" fmla="*/ 10972800 w 10967040"/>
-              <a:gd name="textAreaTop" fmla="*/ 0 h 12600"/>
-              <a:gd name="textAreaBottom" fmla="*/ 18360 h 12600"/>
+              <a:gd name="textAreaLeft" fmla="*/ 0 w 10966680"/>
+              <a:gd name="textAreaRight" fmla="*/ 10972800 w 10966680"/>
+              <a:gd name="textAreaTop" fmla="*/ 0 h 12240"/>
+              <a:gd name="textAreaBottom" fmla="*/ 18360 h 12240"/>
               <a:gd name="GluePoint1X" fmla="*/ 0 w 10972800"/>
               <a:gd name="GluePoint1Y" fmla="*/ 0 h 18288"/>
               <a:gd name="GluePoint2X" fmla="*/ 356616 w 10972800"/>
@@ -21157,14 +22283,14 @@
       </p:sp>
       <p:sp>
         <p:nvSpPr>
-          <p:cNvPr id="92" name=""/>
+          <p:cNvPr id="98" name=""/>
           <p:cNvSpPr/>
           <p:nvPr/>
         </p:nvSpPr>
         <p:spPr>
           <a:xfrm>
             <a:off x="685800" y="2057400"/>
-            <a:ext cx="10969920" cy="1918440"/>
+            <a:ext cx="10969560" cy="1918440"/>
           </a:xfrm>
           <a:prstGeom prst="rect">
             <a:avLst/>
@@ -21269,7 +22395,7 @@
                 <a:uFillTx/>
                 <a:latin typeface="Arial"/>
               </a:rPr>
-              <a:t>The red box outlines the residual tumor material</a:t>
+              <a:t>The red box outlines the residual (non-enhancing) tumor material</a:t>
             </a:r>
             <a:endParaRPr b="0" lang="en-US" sz="2400" strike="noStrike" u="none">
               <a:solidFill>
@@ -21284,7 +22410,7 @@
       </p:sp>
       <p:pic>
         <p:nvPicPr>
-          <p:cNvPr id="93" name="" descr=""/>
+          <p:cNvPr id="99" name="" descr=""/>
           <p:cNvPicPr/>
           <p:nvPr/>
         </p:nvPicPr>
@@ -21295,7 +22421,7 @@
         <p:spPr>
           <a:xfrm>
             <a:off x="1418760" y="4343400"/>
-            <a:ext cx="8835840" cy="1807200"/>
+            <a:ext cx="8835480" cy="1806840"/>
           </a:xfrm>
           <a:prstGeom prst="rect">
             <a:avLst/>
@@ -21308,7 +22434,7 @@
       </p:pic>
       <p:pic>
         <p:nvPicPr>
-          <p:cNvPr id="94" name="Picture 7" descr="A blue and white logo&#10;&#10;Description automatically generated"/>
+          <p:cNvPr id="100" name="Picture 7" descr="A blue and white logo&#10;&#10;Description automatically generated"/>
           <p:cNvPicPr/>
           <p:nvPr/>
         </p:nvPicPr>
@@ -21319,7 +22445,7 @@
         <p:spPr>
           <a:xfrm>
             <a:off x="10199520" y="282600"/>
-            <a:ext cx="1794600" cy="594360"/>
+            <a:ext cx="1794240" cy="594000"/>
           </a:xfrm>
           <a:prstGeom prst="rect">
             <a:avLst/>
@@ -21369,7 +22495,7 @@
       </p:grpSpPr>
       <p:sp useBgFill="1">
         <p:nvSpPr>
-          <p:cNvPr id="95" name="Rectangle 4">
+          <p:cNvPr id="101" name="Rectangle 4">
             <a:extLst>
               <a:ext uri="{C183D7F6-B498-43B3-948B-1728B52AA6E4}">
                 <adec:decorative xmlns:adec="http://schemas.microsoft.com/office/drawing/2017/decorative" val="1"/>
@@ -21382,7 +22508,7 @@
         <p:spPr>
           <a:xfrm>
             <a:off x="0" y="0"/>
-            <a:ext cx="12183120" cy="6852240"/>
+            <a:ext cx="12182760" cy="6851880"/>
           </a:xfrm>
           <a:prstGeom prst="rect">
             <a:avLst/>
@@ -21428,7 +22554,7 @@
       </p:sp>
       <p:sp>
         <p:nvSpPr>
-          <p:cNvPr id="96" name="PlaceHolder 1"/>
+          <p:cNvPr id="102" name="PlaceHolder 1"/>
           <p:cNvSpPr>
             <a:spLocks noGrp="1"/>
           </p:cNvSpPr>
@@ -21439,7 +22565,7 @@
         <p:spPr>
           <a:xfrm>
             <a:off x="572400" y="238680"/>
-            <a:ext cx="11012760" cy="1127520"/>
+            <a:ext cx="11012400" cy="1127160"/>
           </a:xfrm>
           <a:prstGeom prst="rect">
             <a:avLst/>
@@ -21487,7 +22613,7 @@
       </p:sp>
       <p:sp>
         <p:nvSpPr>
-          <p:cNvPr id="97" name="sketchy line 5">
+          <p:cNvPr id="103" name="sketchy line 5">
             <a:extLst>
               <a:ext uri="{C183D7F6-B498-43B3-948B-1728B52AA6E4}">
                 <adec:decorative xmlns:adec="http://schemas.microsoft.com/office/drawing/2017/decorative" val="1"/>
@@ -21500,15 +22626,15 @@
         <p:spPr>
           <a:xfrm>
             <a:off x="572400" y="1681560"/>
-            <a:ext cx="10967040" cy="12600"/>
+            <a:ext cx="10966680" cy="12240"/>
           </a:xfrm>
           <a:custGeom>
             <a:avLst/>
             <a:gdLst>
-              <a:gd name="textAreaLeft" fmla="*/ 0 w 10967040"/>
-              <a:gd name="textAreaRight" fmla="*/ 10972800 w 10967040"/>
-              <a:gd name="textAreaTop" fmla="*/ 0 h 12600"/>
-              <a:gd name="textAreaBottom" fmla="*/ 18360 h 12600"/>
+              <a:gd name="textAreaLeft" fmla="*/ 0 w 10966680"/>
+              <a:gd name="textAreaRight" fmla="*/ 10972800 w 10966680"/>
+              <a:gd name="textAreaTop" fmla="*/ 0 h 12240"/>
+              <a:gd name="textAreaBottom" fmla="*/ 18360 h 12240"/>
               <a:gd name="GluePoint1X" fmla="*/ 0 w 10972800"/>
               <a:gd name="GluePoint1Y" fmla="*/ 0 h 18288"/>
               <a:gd name="GluePoint2X" fmla="*/ 356616 w 10972800"/>
@@ -22140,14 +23266,14 @@
       </p:sp>
       <p:sp>
         <p:nvSpPr>
-          <p:cNvPr id="98" name=""/>
+          <p:cNvPr id="104" name=""/>
           <p:cNvSpPr/>
           <p:nvPr/>
         </p:nvSpPr>
         <p:spPr>
           <a:xfrm>
             <a:off x="685800" y="2057400"/>
-            <a:ext cx="10969920" cy="821160"/>
+            <a:ext cx="10969560" cy="821160"/>
           </a:xfrm>
           <a:prstGeom prst="rect">
             <a:avLst/>
@@ -22197,7 +23323,7 @@
       </p:sp>
       <p:graphicFrame>
         <p:nvGraphicFramePr>
-          <p:cNvPr id="99" name=""/>
+          <p:cNvPr id="105" name=""/>
           <p:cNvGraphicFramePr/>
           <p:nvPr/>
         </p:nvGraphicFramePr>
@@ -22356,7 +23482,7 @@
                           <a:uFillTx/>
                           <a:latin typeface="Arial"/>
                         </a:rPr>
-                        <a:t>T1 (Native)</a:t>
+                        <a:t>T1w (Native)</a:t>
                       </a:r>
                       <a:endParaRPr b="0" lang="en-US" sz="1800" strike="noStrike" u="none">
                         <a:solidFill>
@@ -22600,7 +23726,7 @@
                           <a:uFillTx/>
                           <a:latin typeface="Arial"/>
                         </a:rPr>
-                        <a:t>T2</a:t>
+                        <a:t>T2w</a:t>
                       </a:r>
                       <a:endParaRPr b="0" lang="en-US" sz="1800" strike="noStrike" u="none">
                         <a:solidFill>
@@ -22722,7 +23848,7 @@
                           <a:uFillTx/>
                           <a:latin typeface="Arial"/>
                         </a:rPr>
-                        <a:t>FLAIR (T2F)</a:t>
+                        <a:t>FLAIR (T2f)</a:t>
                       </a:r>
                       <a:endParaRPr b="0" lang="en-US" sz="1800" strike="noStrike" u="none">
                         <a:solidFill>
@@ -22829,7 +23955,7 @@
       </p:graphicFrame>
       <p:pic>
         <p:nvPicPr>
-          <p:cNvPr id="100" name="Picture 8" descr="A blue and white logo&#10;&#10;Description automatically generated"/>
+          <p:cNvPr id="106" name="Picture 8" descr="A blue and white logo&#10;&#10;Description automatically generated"/>
           <p:cNvPicPr/>
           <p:nvPr/>
         </p:nvPicPr>
@@ -22840,7 +23966,7 @@
         <p:spPr>
           <a:xfrm>
             <a:off x="10199520" y="282600"/>
-            <a:ext cx="1794600" cy="594360"/>
+            <a:ext cx="1794240" cy="594000"/>
           </a:xfrm>
           <a:prstGeom prst="rect">
             <a:avLst/>
@@ -22890,7 +24016,7 @@
       </p:grpSpPr>
       <p:sp useBgFill="1">
         <p:nvSpPr>
-          <p:cNvPr id="101" name="Rectangle 5">
+          <p:cNvPr id="107" name="Rectangle 5">
             <a:extLst>
               <a:ext uri="{C183D7F6-B498-43B3-948B-1728B52AA6E4}">
                 <adec:decorative xmlns:adec="http://schemas.microsoft.com/office/drawing/2017/decorative" val="1"/>
@@ -22903,7 +24029,7 @@
         <p:spPr>
           <a:xfrm>
             <a:off x="0" y="4320"/>
-            <a:ext cx="12183120" cy="6852240"/>
+            <a:ext cx="12182760" cy="6851880"/>
           </a:xfrm>
           <a:prstGeom prst="rect">
             <a:avLst/>
@@ -22949,7 +24075,7 @@
       </p:sp>
       <p:sp>
         <p:nvSpPr>
-          <p:cNvPr id="102" name="PlaceHolder 1"/>
+          <p:cNvPr id="108" name="PlaceHolder 1"/>
           <p:cNvSpPr>
             <a:spLocks noGrp="1"/>
           </p:cNvSpPr>
@@ -22960,7 +24086,7 @@
         <p:spPr>
           <a:xfrm>
             <a:off x="572400" y="238680"/>
-            <a:ext cx="11012760" cy="1360080"/>
+            <a:ext cx="11012400" cy="1359720"/>
           </a:xfrm>
           <a:prstGeom prst="rect">
             <a:avLst/>
@@ -23008,7 +24134,7 @@
       </p:sp>
       <p:sp>
         <p:nvSpPr>
-          <p:cNvPr id="103" name="sketchy line 6">
+          <p:cNvPr id="109" name="sketchy line 6">
             <a:extLst>
               <a:ext uri="{C183D7F6-B498-43B3-948B-1728B52AA6E4}">
                 <adec:decorative xmlns:adec="http://schemas.microsoft.com/office/drawing/2017/decorative" val="1"/>
@@ -23021,15 +24147,15 @@
         <p:spPr>
           <a:xfrm>
             <a:off x="572400" y="1681560"/>
-            <a:ext cx="10967040" cy="12600"/>
+            <a:ext cx="10966680" cy="12240"/>
           </a:xfrm>
           <a:custGeom>
             <a:avLst/>
             <a:gdLst>
-              <a:gd name="textAreaLeft" fmla="*/ 0 w 10967040"/>
-              <a:gd name="textAreaRight" fmla="*/ 10972800 w 10967040"/>
-              <a:gd name="textAreaTop" fmla="*/ 0 h 12600"/>
-              <a:gd name="textAreaBottom" fmla="*/ 18360 h 12600"/>
+              <a:gd name="textAreaLeft" fmla="*/ 0 w 10966680"/>
+              <a:gd name="textAreaRight" fmla="*/ 10972800 w 10966680"/>
+              <a:gd name="textAreaTop" fmla="*/ 0 h 12240"/>
+              <a:gd name="textAreaBottom" fmla="*/ 18360 h 12240"/>
               <a:gd name="GluePoint1X" fmla="*/ 0 w 10972800"/>
               <a:gd name="GluePoint1Y" fmla="*/ 0 h 18288"/>
               <a:gd name="GluePoint2X" fmla="*/ 356616 w 10972800"/>
@@ -23661,14 +24787,14 @@
       </p:sp>
       <p:sp>
         <p:nvSpPr>
-          <p:cNvPr id="104" name=""/>
+          <p:cNvPr id="110" name=""/>
           <p:cNvSpPr/>
           <p:nvPr/>
         </p:nvSpPr>
         <p:spPr>
           <a:xfrm>
             <a:off x="685800" y="2057400"/>
-            <a:ext cx="10969920" cy="821160"/>
+            <a:ext cx="10969560" cy="821160"/>
           </a:xfrm>
           <a:prstGeom prst="rect">
             <a:avLst/>
@@ -23740,7 +24866,7 @@
       </p:sp>
       <p:pic>
         <p:nvPicPr>
-          <p:cNvPr id="105" name="" descr=""/>
+          <p:cNvPr id="111" name="" descr=""/>
           <p:cNvPicPr/>
           <p:nvPr/>
         </p:nvPicPr>
@@ -23751,7 +24877,7 @@
         <p:spPr>
           <a:xfrm>
             <a:off x="371520" y="3200400"/>
-            <a:ext cx="11285640" cy="2284560"/>
+            <a:ext cx="11285280" cy="2284200"/>
           </a:xfrm>
           <a:prstGeom prst="rect">
             <a:avLst/>
@@ -23764,7 +24890,7 @@
       </p:pic>
       <p:pic>
         <p:nvPicPr>
-          <p:cNvPr id="106" name="Picture 9" descr="A blue and white logo&#10;&#10;Description automatically generated"/>
+          <p:cNvPr id="112" name="Picture 9" descr="A blue and white logo&#10;&#10;Description automatically generated"/>
           <p:cNvPicPr/>
           <p:nvPr/>
         </p:nvPicPr>
@@ -23775,7 +24901,7 @@
         <p:spPr>
           <a:xfrm>
             <a:off x="10199520" y="282600"/>
-            <a:ext cx="1794600" cy="594360"/>
+            <a:ext cx="1794240" cy="594000"/>
           </a:xfrm>
           <a:prstGeom prst="rect">
             <a:avLst/>
@@ -23969,4 +25095,110 @@
     </a:fmtScheme>
   </a:themeElements>
 </a:theme>
+</file>
+
+<file path=ppt/theme/theme12.xml><?xml version="1.0" encoding="utf-8"?>
+<a:theme xmlns:a="http://schemas.openxmlformats.org/drawingml/2006/main" xmlns:r="http://schemas.openxmlformats.org/officeDocument/2006/relationships" name="Office Theme">
+  <a:themeElements>
+    <a:clrScheme name="LibreOffice">
+      <a:dk1>
+        <a:srgbClr val="000000"/>
+      </a:dk1>
+      <a:lt1>
+        <a:srgbClr val="ffffff"/>
+      </a:lt1>
+      <a:dk2>
+        <a:srgbClr val="000000"/>
+      </a:dk2>
+      <a:lt2>
+        <a:srgbClr val="ffffff"/>
+      </a:lt2>
+      <a:accent1>
+        <a:srgbClr val="18a303"/>
+      </a:accent1>
+      <a:accent2>
+        <a:srgbClr val="0369a3"/>
+      </a:accent2>
+      <a:accent3>
+        <a:srgbClr val="a33e03"/>
+      </a:accent3>
+      <a:accent4>
+        <a:srgbClr val="8e03a3"/>
+      </a:accent4>
+      <a:accent5>
+        <a:srgbClr val="c99c00"/>
+      </a:accent5>
+      <a:accent6>
+        <a:srgbClr val="c9211e"/>
+      </a:accent6>
+      <a:hlink>
+        <a:srgbClr val="0000ee"/>
+      </a:hlink>
+      <a:folHlink>
+        <a:srgbClr val="551a8b"/>
+      </a:folHlink>
+    </a:clrScheme>
+    <a:fontScheme name="Office">
+      <a:majorFont>
+        <a:latin typeface="Arial" pitchFamily="0" charset="1"/>
+        <a:ea typeface="DejaVu Sans" pitchFamily="0" charset="1"/>
+        <a:cs typeface="DejaVu Sans" pitchFamily="0" charset="1"/>
+      </a:majorFont>
+      <a:minorFont>
+        <a:latin typeface="Arial" pitchFamily="0" charset="1"/>
+        <a:ea typeface="DejaVu Sans" pitchFamily="0" charset="1"/>
+        <a:cs typeface="DejaVu Sans" pitchFamily="0" charset="1"/>
+      </a:minorFont>
+    </a:fontScheme>
+    <a:fmtScheme>
+      <a:fillStyleLst>
+        <a:solidFill>
+          <a:schemeClr val="phClr"/>
+        </a:solidFill>
+        <a:solidFill>
+          <a:schemeClr val="phClr"/>
+        </a:solidFill>
+        <a:solidFill>
+          <a:schemeClr val="phClr"/>
+        </a:solidFill>
+      </a:fillStyleLst>
+      <a:lnStyleLst>
+        <a:ln w="6350" cap="flat" cmpd="sng" algn="ctr">
+          <a:prstDash val="solid"/>
+          <a:miter/>
+        </a:ln>
+        <a:ln w="6350" cap="flat" cmpd="sng" algn="ctr">
+          <a:prstDash val="solid"/>
+          <a:miter/>
+        </a:ln>
+        <a:ln w="6350" cap="flat" cmpd="sng" algn="ctr">
+          <a:prstDash val="solid"/>
+          <a:miter/>
+        </a:ln>
+      </a:lnStyleLst>
+      <a:effectStyleLst>
+        <a:effectStyle>
+          <a:effectLst/>
+        </a:effectStyle>
+        <a:effectStyle>
+          <a:effectLst/>
+        </a:effectStyle>
+        <a:effectStyle>
+          <a:effectLst/>
+        </a:effectStyle>
+      </a:effectStyleLst>
+      <a:bgFillStyleLst>
+        <a:solidFill>
+          <a:schemeClr val="phClr"/>
+        </a:solidFill>
+        <a:solidFill>
+          <a:schemeClr val="phClr"/>
+        </a:solidFill>
+        <a:solidFill>
+          <a:schemeClr val="phClr"/>
+        </a:solidFill>
+      </a:bgFillStyleLst>
+    </a:fmtScheme>
+  </a:themeElements>
+</a:theme>
 </file>
--- a/presentation/wwinters_segmentation.pptx
+++ b/presentation/wwinters_segmentation.pptx
@@ -381,7 +381,7 @@
             <a:pPr indent="0" algn="r">
               <a:buNone/>
             </a:pPr>
-            <a:fld id="{C44A86ED-F2A1-41DF-B33C-C2EAF7F30F79}" type="slidenum">
+            <a:fld id="{BA39E87D-9156-45D4-B4E1-D91278F7F742}" type="slidenum">
               <a:rPr b="0" lang="en-US" sz="1400" strike="noStrike" u="none">
                 <a:solidFill>
                   <a:srgbClr val="000000"/>
@@ -439,7 +439,7 @@
         <p:spPr>
           <a:xfrm>
             <a:off x="533520" y="764280"/>
-            <a:ext cx="6704640" cy="3771360"/>
+            <a:ext cx="6703920" cy="3770640"/>
           </a:xfrm>
           <a:prstGeom prst="rect">
             <a:avLst/>
@@ -462,7 +462,7 @@
         <p:spPr>
           <a:xfrm>
             <a:off x="777240" y="4777560"/>
-            <a:ext cx="6217560" cy="4525920"/>
+            <a:ext cx="6216840" cy="4525200"/>
           </a:xfrm>
           <a:prstGeom prst="rect">
             <a:avLst/>
@@ -478,6 +478,9 @@
           </a:bodyPr>
           <a:p>
             <a:pPr marL="216000" indent="-216000">
+              <a:lnSpc>
+                <a:spcPct val="100000"/>
+              </a:lnSpc>
               <a:buClr>
                 <a:srgbClr val="000000"/>
               </a:buClr>
@@ -507,6 +510,9 @@
           </a:p>
           <a:p>
             <a:pPr marL="216000" indent="-216000">
+              <a:lnSpc>
+                <a:spcPct val="100000"/>
+              </a:lnSpc>
               <a:buClr>
                 <a:srgbClr val="000000"/>
               </a:buClr>
@@ -536,6 +542,9 @@
           </a:p>
           <a:p>
             <a:pPr marL="216000" indent="-216000">
+              <a:lnSpc>
+                <a:spcPct val="100000"/>
+              </a:lnSpc>
               <a:buClr>
                 <a:srgbClr val="000000"/>
               </a:buClr>
@@ -600,7 +609,7 @@
         <p:spPr>
           <a:xfrm>
             <a:off x="533520" y="764280"/>
-            <a:ext cx="6704640" cy="3771360"/>
+            <a:ext cx="6703920" cy="3770640"/>
           </a:xfrm>
           <a:prstGeom prst="rect">
             <a:avLst/>
@@ -623,7 +632,7 @@
         <p:spPr>
           <a:xfrm>
             <a:off x="777240" y="4777560"/>
-            <a:ext cx="6217560" cy="4525920"/>
+            <a:ext cx="6216840" cy="4525200"/>
           </a:xfrm>
           <a:prstGeom prst="rect">
             <a:avLst/>
@@ -639,6 +648,9 @@
           </a:bodyPr>
           <a:p>
             <a:pPr marL="216000" indent="-216000">
+              <a:lnSpc>
+                <a:spcPct val="100000"/>
+              </a:lnSpc>
               <a:buClr>
                 <a:srgbClr val="000000"/>
               </a:buClr>
@@ -668,7 +680,13 @@
           </a:p>
           <a:p>
             <a:pPr marL="216000" indent="0">
+              <a:lnSpc>
+                <a:spcPct val="100000"/>
+              </a:lnSpc>
               <a:buNone/>
+              <a:tabLst>
+                <a:tab algn="l" pos="0"/>
+              </a:tabLst>
             </a:pPr>
             <a:r>
               <a:rPr b="0" lang="en-US" sz="2000" strike="noStrike" u="none">
@@ -727,7 +745,7 @@
         <p:spPr>
           <a:xfrm>
             <a:off x="533520" y="764280"/>
-            <a:ext cx="6704640" cy="3771360"/>
+            <a:ext cx="6703920" cy="3770640"/>
           </a:xfrm>
           <a:prstGeom prst="rect">
             <a:avLst/>
@@ -750,7 +768,7 @@
         <p:spPr>
           <a:xfrm>
             <a:off x="777240" y="4777560"/>
-            <a:ext cx="6217560" cy="4525920"/>
+            <a:ext cx="6216840" cy="4525200"/>
           </a:xfrm>
           <a:prstGeom prst="rect">
             <a:avLst/>
@@ -766,6 +784,9 @@
           </a:bodyPr>
           <a:p>
             <a:pPr marL="216000" indent="-216000">
+              <a:lnSpc>
+                <a:spcPct val="100000"/>
+              </a:lnSpc>
               <a:buClr>
                 <a:srgbClr val="000000"/>
               </a:buClr>
@@ -795,7 +816,13 @@
           </a:p>
           <a:p>
             <a:pPr marL="216000" indent="0">
+              <a:lnSpc>
+                <a:spcPct val="100000"/>
+              </a:lnSpc>
               <a:buNone/>
+              <a:tabLst>
+                <a:tab algn="l" pos="0"/>
+              </a:tabLst>
             </a:pPr>
             <a:endParaRPr b="0" lang="en-US" sz="2000" strike="noStrike" u="none">
               <a:solidFill>
@@ -808,12 +835,18 @@
           </a:p>
           <a:p>
             <a:pPr marL="216000" indent="-216000">
+              <a:lnSpc>
+                <a:spcPct val="100000"/>
+              </a:lnSpc>
               <a:buClr>
                 <a:srgbClr val="000000"/>
               </a:buClr>
               <a:buSzPct val="45000"/>
               <a:buFont typeface="Wingdings" charset="2"/>
               <a:buChar char=""/>
+              <a:tabLst>
+                <a:tab algn="l" pos="0"/>
+              </a:tabLst>
             </a:pPr>
             <a:r>
               <a:rPr b="0" lang="en-US" sz="2000" strike="noStrike" u="none">
@@ -872,7 +905,7 @@
         <p:spPr>
           <a:xfrm>
             <a:off x="533520" y="764280"/>
-            <a:ext cx="6704640" cy="3771360"/>
+            <a:ext cx="6703920" cy="3770640"/>
           </a:xfrm>
           <a:prstGeom prst="rect">
             <a:avLst/>
@@ -895,7 +928,7 @@
         <p:spPr>
           <a:xfrm>
             <a:off x="777240" y="4777560"/>
-            <a:ext cx="6217560" cy="4525920"/>
+            <a:ext cx="6216840" cy="4525200"/>
           </a:xfrm>
           <a:prstGeom prst="rect">
             <a:avLst/>
@@ -911,6 +944,9 @@
           </a:bodyPr>
           <a:p>
             <a:pPr marL="216000" indent="-216000">
+              <a:lnSpc>
+                <a:spcPct val="100000"/>
+              </a:lnSpc>
               <a:buClr>
                 <a:srgbClr val="000000"/>
               </a:buClr>
@@ -940,7 +976,13 @@
           </a:p>
           <a:p>
             <a:pPr marL="216000" indent="0">
+              <a:lnSpc>
+                <a:spcPct val="100000"/>
+              </a:lnSpc>
               <a:buNone/>
+              <a:tabLst>
+                <a:tab algn="l" pos="0"/>
+              </a:tabLst>
             </a:pPr>
             <a:endParaRPr b="0" lang="en-US" sz="2000" strike="noStrike" u="none">
               <a:solidFill>
@@ -953,12 +995,18 @@
           </a:p>
           <a:p>
             <a:pPr marL="216000" indent="-216000">
+              <a:lnSpc>
+                <a:spcPct val="100000"/>
+              </a:lnSpc>
               <a:buClr>
                 <a:srgbClr val="000000"/>
               </a:buClr>
               <a:buSzPct val="45000"/>
               <a:buFont typeface="Wingdings" charset="2"/>
               <a:buChar char=""/>
+              <a:tabLst>
+                <a:tab algn="l" pos="0"/>
+              </a:tabLst>
             </a:pPr>
             <a:r>
               <a:rPr b="0" lang="en-US" sz="2000" strike="noStrike" u="none">
@@ -982,7 +1030,13 @@
           </a:p>
           <a:p>
             <a:pPr marL="216000" indent="0">
+              <a:lnSpc>
+                <a:spcPct val="100000"/>
+              </a:lnSpc>
               <a:buNone/>
+              <a:tabLst>
+                <a:tab algn="l" pos="0"/>
+              </a:tabLst>
             </a:pPr>
             <a:endParaRPr b="0" lang="en-US" sz="2000" strike="noStrike" u="none">
               <a:solidFill>
@@ -995,12 +1049,18 @@
           </a:p>
           <a:p>
             <a:pPr marL="216000" indent="-216000">
+              <a:lnSpc>
+                <a:spcPct val="100000"/>
+              </a:lnSpc>
               <a:buClr>
                 <a:srgbClr val="000000"/>
               </a:buClr>
               <a:buSzPct val="45000"/>
               <a:buFont typeface="Wingdings" charset="2"/>
               <a:buChar char=""/>
+              <a:tabLst>
+                <a:tab algn="l" pos="0"/>
+              </a:tabLst>
             </a:pPr>
             <a:r>
               <a:rPr b="0" lang="en-US" sz="2000" strike="noStrike" u="none">
@@ -1024,7 +1084,13 @@
           </a:p>
           <a:p>
             <a:pPr marL="216000" indent="0">
+              <a:lnSpc>
+                <a:spcPct val="100000"/>
+              </a:lnSpc>
               <a:buNone/>
+              <a:tabLst>
+                <a:tab algn="l" pos="0"/>
+              </a:tabLst>
             </a:pPr>
             <a:endParaRPr b="0" lang="en-US" sz="2000" strike="noStrike" u="none">
               <a:solidFill>
@@ -1037,12 +1103,18 @@
           </a:p>
           <a:p>
             <a:pPr marL="216000" indent="-216000">
+              <a:lnSpc>
+                <a:spcPct val="100000"/>
+              </a:lnSpc>
               <a:buClr>
                 <a:srgbClr val="000000"/>
               </a:buClr>
               <a:buSzPct val="45000"/>
               <a:buFont typeface="Wingdings" charset="2"/>
               <a:buChar char=""/>
+              <a:tabLst>
+                <a:tab algn="l" pos="0"/>
+              </a:tabLst>
             </a:pPr>
             <a:r>
               <a:rPr b="0" lang="en-US" sz="2000" strike="noStrike" u="none">
@@ -1072,8 +1144,8 @@
 </file>
 
 <file path=ppt/slideLayouts/slideLayout1.xml><?xml version="1.0" encoding="utf-8"?>
-<p:sldLayout xmlns:a="http://schemas.openxmlformats.org/drawingml/2006/main" xmlns:p="http://schemas.openxmlformats.org/presentationml/2006/main" xmlns:r="http://schemas.openxmlformats.org/officeDocument/2006/relationships" xmlns:p14="http://schemas.microsoft.com/office/powerpoint/2010/main" xmlns:p15="http://schemas.microsoft.com/office/powerpoint/2012/main" xmlns:mc="http://schemas.openxmlformats.org/markup-compatibility/2006" type="titleOnly" preserve="1">
-  <p:cSld name="Title Only">
+<p:sldLayout xmlns:a="http://schemas.openxmlformats.org/drawingml/2006/main" xmlns:p="http://schemas.openxmlformats.org/presentationml/2006/main" xmlns:r="http://schemas.openxmlformats.org/officeDocument/2006/relationships" xmlns:p14="http://schemas.microsoft.com/office/powerpoint/2010/main" xmlns:p15="http://schemas.microsoft.com/office/powerpoint/2012/main" xmlns:mc="http://schemas.openxmlformats.org/markup-compatibility/2006" type="vertTx" preserve="1">
+  <p:cSld name="Title and Vertical Text">
     <p:bg>
       <p:bgPr>
         <a:solidFill>
@@ -1108,7 +1180,7 @@
         <p:spPr>
           <a:xfrm>
             <a:off x="838080" y="365040"/>
-            <a:ext cx="10509480" cy="1319400"/>
+            <a:ext cx="10508760" cy="1318680"/>
           </a:xfrm>
           <a:prstGeom prst="rect">
             <a:avLst/>
@@ -1161,13 +1233,212 @@
             <a:spLocks noGrp="1"/>
           </p:cNvSpPr>
           <p:nvPr>
+            <p:ph type="body"/>
+          </p:nvPr>
+        </p:nvSpPr>
+        <p:spPr>
+          <a:xfrm>
+            <a:off x="838080" y="1825560"/>
+            <a:ext cx="10508760" cy="4344480"/>
+          </a:xfrm>
+          <a:prstGeom prst="rect">
+            <a:avLst/>
+          </a:prstGeom>
+          <a:noFill/>
+          <a:ln w="0">
+            <a:noFill/>
+          </a:ln>
+        </p:spPr>
+        <p:txBody>
+          <a:bodyPr lIns="91440" rIns="91440" tIns="45720" bIns="45720" anchor="t" vert="eaVert">
+            <a:noAutofit/>
+          </a:bodyPr>
+          <a:p>
+            <a:pPr marL="228600" indent="-228600" defTabSz="914400">
+              <a:lnSpc>
+                <a:spcPct val="90000"/>
+              </a:lnSpc>
+              <a:spcBef>
+                <a:spcPts val="1001"/>
+              </a:spcBef>
+              <a:buClr>
+                <a:srgbClr val="000000"/>
+              </a:buClr>
+              <a:buFont typeface="Arial"/>
+              <a:buChar char="•"/>
+            </a:pPr>
+            <a:r>
+              <a:rPr b="0" lang="en-US" sz="2800" strike="noStrike" u="none">
+                <a:solidFill>
+                  <a:schemeClr val="dk1"/>
+                </a:solidFill>
+                <a:effectLst/>
+                <a:uFillTx/>
+                <a:latin typeface="Calibri"/>
+              </a:rPr>
+              <a:t>Click to edit Master text styles</a:t>
+            </a:r>
+            <a:endParaRPr b="0" lang="en-US" sz="2800" strike="noStrike" u="none">
+              <a:solidFill>
+                <a:srgbClr val="000000"/>
+              </a:solidFill>
+              <a:effectLst/>
+              <a:uFillTx/>
+              <a:latin typeface="Arial"/>
+            </a:endParaRPr>
+          </a:p>
+          <a:p>
+            <a:pPr lvl="1" marL="685800" indent="-228600" defTabSz="914400">
+              <a:lnSpc>
+                <a:spcPct val="90000"/>
+              </a:lnSpc>
+              <a:spcBef>
+                <a:spcPts val="499"/>
+              </a:spcBef>
+              <a:buClr>
+                <a:srgbClr val="000000"/>
+              </a:buClr>
+              <a:buFont typeface="Arial"/>
+              <a:buChar char="•"/>
+            </a:pPr>
+            <a:r>
+              <a:rPr b="0" lang="en-US" sz="2400" strike="noStrike" u="none">
+                <a:solidFill>
+                  <a:schemeClr val="dk1"/>
+                </a:solidFill>
+                <a:effectLst/>
+                <a:uFillTx/>
+                <a:latin typeface="Calibri"/>
+              </a:rPr>
+              <a:t>Second level</a:t>
+            </a:r>
+            <a:endParaRPr b="0" lang="en-US" sz="2400" strike="noStrike" u="none">
+              <a:solidFill>
+                <a:srgbClr val="000000"/>
+              </a:solidFill>
+              <a:effectLst/>
+              <a:uFillTx/>
+              <a:latin typeface="Arial"/>
+            </a:endParaRPr>
+          </a:p>
+          <a:p>
+            <a:pPr lvl="2" marL="1143000" indent="-228600" defTabSz="914400">
+              <a:lnSpc>
+                <a:spcPct val="90000"/>
+              </a:lnSpc>
+              <a:spcBef>
+                <a:spcPts val="499"/>
+              </a:spcBef>
+              <a:buClr>
+                <a:srgbClr val="000000"/>
+              </a:buClr>
+              <a:buFont typeface="Arial"/>
+              <a:buChar char="•"/>
+            </a:pPr>
+            <a:r>
+              <a:rPr b="0" lang="en-US" sz="2000" strike="noStrike" u="none">
+                <a:solidFill>
+                  <a:schemeClr val="dk1"/>
+                </a:solidFill>
+                <a:effectLst/>
+                <a:uFillTx/>
+                <a:latin typeface="Calibri"/>
+              </a:rPr>
+              <a:t>Third level</a:t>
+            </a:r>
+            <a:endParaRPr b="0" lang="en-US" sz="2000" strike="noStrike" u="none">
+              <a:solidFill>
+                <a:srgbClr val="000000"/>
+              </a:solidFill>
+              <a:effectLst/>
+              <a:uFillTx/>
+              <a:latin typeface="Arial"/>
+            </a:endParaRPr>
+          </a:p>
+          <a:p>
+            <a:pPr lvl="3" marL="1600200" indent="-228600" defTabSz="914400">
+              <a:lnSpc>
+                <a:spcPct val="90000"/>
+              </a:lnSpc>
+              <a:spcBef>
+                <a:spcPts val="499"/>
+              </a:spcBef>
+              <a:buClr>
+                <a:srgbClr val="000000"/>
+              </a:buClr>
+              <a:buFont typeface="Arial"/>
+              <a:buChar char="•"/>
+            </a:pPr>
+            <a:r>
+              <a:rPr b="0" lang="en-US" sz="1800" strike="noStrike" u="none">
+                <a:solidFill>
+                  <a:schemeClr val="dk1"/>
+                </a:solidFill>
+                <a:effectLst/>
+                <a:uFillTx/>
+                <a:latin typeface="Calibri"/>
+              </a:rPr>
+              <a:t>Fourth level</a:t>
+            </a:r>
+            <a:endParaRPr b="0" lang="en-US" sz="1800" strike="noStrike" u="none">
+              <a:solidFill>
+                <a:srgbClr val="000000"/>
+              </a:solidFill>
+              <a:effectLst/>
+              <a:uFillTx/>
+              <a:latin typeface="Arial"/>
+            </a:endParaRPr>
+          </a:p>
+          <a:p>
+            <a:pPr lvl="4" marL="2057400" indent="-228600" defTabSz="914400">
+              <a:lnSpc>
+                <a:spcPct val="90000"/>
+              </a:lnSpc>
+              <a:spcBef>
+                <a:spcPts val="499"/>
+              </a:spcBef>
+              <a:buClr>
+                <a:srgbClr val="000000"/>
+              </a:buClr>
+              <a:buFont typeface="Arial"/>
+              <a:buChar char="•"/>
+            </a:pPr>
+            <a:r>
+              <a:rPr b="0" lang="en-US" sz="1800" strike="noStrike" u="none">
+                <a:solidFill>
+                  <a:schemeClr val="dk1"/>
+                </a:solidFill>
+                <a:effectLst/>
+                <a:uFillTx/>
+                <a:latin typeface="Calibri"/>
+              </a:rPr>
+              <a:t>Fifth level</a:t>
+            </a:r>
+            <a:endParaRPr b="0" lang="en-US" sz="1800" strike="noStrike" u="none">
+              <a:solidFill>
+                <a:srgbClr val="000000"/>
+              </a:solidFill>
+              <a:effectLst/>
+              <a:uFillTx/>
+              <a:latin typeface="Arial"/>
+            </a:endParaRPr>
+          </a:p>
+        </p:txBody>
+      </p:sp>
+      <p:sp>
+        <p:nvSpPr>
+          <p:cNvPr id="4" name="PlaceHolder 3"/>
+          <p:cNvSpPr>
+            <a:spLocks noGrp="1"/>
+          </p:cNvSpPr>
+          <p:nvPr>
             <p:ph type="dt" idx="1"/>
           </p:nvPr>
         </p:nvSpPr>
         <p:spPr>
           <a:xfrm>
             <a:off x="838080" y="6356520"/>
-            <a:ext cx="2737080" cy="358920"/>
+            <a:ext cx="2736360" cy="358200"/>
           </a:xfrm>
           <a:prstGeom prst="rect">
             <a:avLst/>
@@ -1223,7 +1494,7 @@
                 <a:uFillTx/>
                 <a:latin typeface="Calibri"/>
               </a:rPr>
-              <a:t>&lt;date/time&gt;</a:t>
+              <a:t> </a:t>
             </a:r>
             <a:endParaRPr b="0" lang="en-US" sz="1200" strike="noStrike" u="none">
               <a:solidFill>
@@ -1238,7 +1509,7 @@
       </p:sp>
       <p:sp>
         <p:nvSpPr>
-          <p:cNvPr id="4" name="PlaceHolder 3"/>
+          <p:cNvPr id="5" name="PlaceHolder 4"/>
           <p:cNvSpPr>
             <a:spLocks noGrp="1"/>
           </p:cNvSpPr>
@@ -1249,7 +1520,7 @@
         <p:spPr>
           <a:xfrm>
             <a:off x="4038480" y="6356520"/>
-            <a:ext cx="4108680" cy="358920"/>
+            <a:ext cx="4107960" cy="358200"/>
           </a:xfrm>
           <a:prstGeom prst="rect">
             <a:avLst/>
@@ -1301,7 +1572,7 @@
                 <a:uFillTx/>
                 <a:latin typeface="Times New Roman"/>
               </a:rPr>
-              <a:t>&lt;footer&gt;</a:t>
+              <a:t> </a:t>
             </a:r>
             <a:endParaRPr b="0" lang="en-US" sz="1400" strike="noStrike" u="none">
               <a:solidFill>
@@ -1316,7 +1587,7 @@
       </p:sp>
       <p:sp>
         <p:nvSpPr>
-          <p:cNvPr id="5" name="PlaceHolder 4"/>
+          <p:cNvPr id="6" name="PlaceHolder 5"/>
           <p:cNvSpPr>
             <a:spLocks noGrp="1"/>
           </p:cNvSpPr>
@@ -1327,7 +1598,7 @@
         <p:spPr>
           <a:xfrm>
             <a:off x="8610480" y="6356520"/>
-            <a:ext cx="2737080" cy="358920"/>
+            <a:ext cx="2736360" cy="358200"/>
           </a:xfrm>
           <a:prstGeom prst="rect">
             <a:avLst/>
@@ -1372,7 +1643,7 @@
                 <a:tab algn="l" pos="0"/>
               </a:tabLst>
             </a:pPr>
-            <a:fld id="{690F3184-955E-41A9-BCE5-675651929F59}" type="slidenum">
+            <a:fld id="{CC6F3855-E836-4295-9477-7B170431B101}" type="slidenum">
               <a:rPr b="0" lang="en-US" sz="1200" strike="noStrike" u="none">
                 <a:solidFill>
                   <a:schemeClr val="dk1">
@@ -1383,7 +1654,7 @@
                 <a:uFillTx/>
                 <a:latin typeface="Calibri"/>
               </a:rPr>
-              <a:t>&lt;number&gt;</a:t>
+              <a:t>14</a:t>
             </a:fld>
             <a:endParaRPr b="0" lang="en-US" sz="1200" strike="noStrike" u="none">
               <a:solidFill>
@@ -1402,8 +1673,8 @@
 </file>
 
 <file path=ppt/slideLayouts/slideLayout10.xml><?xml version="1.0" encoding="utf-8"?>
-<p:sldLayout xmlns:a="http://schemas.openxmlformats.org/drawingml/2006/main" xmlns:p="http://schemas.openxmlformats.org/presentationml/2006/main" xmlns:r="http://schemas.openxmlformats.org/officeDocument/2006/relationships" xmlns:p14="http://schemas.microsoft.com/office/powerpoint/2010/main" xmlns:p15="http://schemas.microsoft.com/office/powerpoint/2012/main" xmlns:mc="http://schemas.openxmlformats.org/markup-compatibility/2006" type="twoObj" preserve="1">
-  <p:cSld name="Two Content">
+<p:sldLayout xmlns:a="http://schemas.openxmlformats.org/drawingml/2006/main" xmlns:p="http://schemas.openxmlformats.org/presentationml/2006/main" xmlns:r="http://schemas.openxmlformats.org/officeDocument/2006/relationships" xmlns:p14="http://schemas.microsoft.com/office/powerpoint/2010/main" xmlns:p15="http://schemas.microsoft.com/office/powerpoint/2012/main" xmlns:mc="http://schemas.openxmlformats.org/markup-compatibility/2006" type="blank" preserve="1">
+  <p:cSld name="Picture with Caption">
     <p:bg>
       <p:bgPr>
         <a:solidFill>
@@ -1427,7 +1698,7 @@
       </p:grpSpPr>
       <p:sp>
         <p:nvSpPr>
-          <p:cNvPr id="46" name="PlaceHolder 1"/>
+          <p:cNvPr id="49" name="PlaceHolder 1"/>
           <p:cNvSpPr>
             <a:spLocks noGrp="1"/>
           </p:cNvSpPr>
@@ -1437,8 +1708,8 @@
         </p:nvSpPr>
         <p:spPr>
           <a:xfrm>
-            <a:off x="838080" y="365040"/>
-            <a:ext cx="10509480" cy="1319400"/>
+            <a:off x="839880" y="457200"/>
+            <a:ext cx="3925440" cy="1593360"/>
           </a:xfrm>
           <a:prstGeom prst="rect">
             <a:avLst/>
@@ -1449,7 +1720,7 @@
           </a:ln>
         </p:spPr>
         <p:txBody>
-          <a:bodyPr lIns="91440" rIns="91440" tIns="45720" bIns="45720" anchor="ctr">
+          <a:bodyPr lIns="91440" rIns="91440" tIns="45720" bIns="45720" anchor="b">
             <a:noAutofit/>
           </a:bodyPr>
           <a:p>
@@ -1463,7 +1734,7 @@
               </a:tabLst>
             </a:pPr>
             <a:r>
-              <a:rPr b="0" lang="en-US" sz="4400" strike="noStrike" u="none">
+              <a:rPr b="0" lang="en-US" sz="3200" strike="noStrike" u="none">
                 <a:solidFill>
                   <a:schemeClr val="dk1"/>
                 </a:solidFill>
@@ -1473,7 +1744,7 @@
               </a:rPr>
               <a:t>Click to edit Master title style</a:t>
             </a:r>
-            <a:endParaRPr b="0" lang="en-US" sz="4400" strike="noStrike" u="none">
+            <a:endParaRPr b="0" lang="en-US" sz="3200" strike="noStrike" u="none">
               <a:solidFill>
                 <a:srgbClr val="000000"/>
               </a:solidFill>
@@ -1486,7 +1757,7 @@
       </p:sp>
       <p:sp>
         <p:nvSpPr>
-          <p:cNvPr id="47" name="PlaceHolder 2"/>
+          <p:cNvPr id="50" name="PlaceHolder 2"/>
           <p:cNvSpPr>
             <a:spLocks noGrp="1"/>
           </p:cNvSpPr>
@@ -1496,8 +1767,67 @@
         </p:nvSpPr>
         <p:spPr>
           <a:xfrm>
-            <a:off x="838080" y="1825560"/>
-            <a:ext cx="5175360" cy="4345200"/>
+            <a:off x="5183280" y="987480"/>
+            <a:ext cx="6165360" cy="4866840"/>
+          </a:xfrm>
+          <a:prstGeom prst="rect">
+            <a:avLst/>
+          </a:prstGeom>
+          <a:noFill/>
+          <a:ln w="0">
+            <a:noFill/>
+          </a:ln>
+        </p:spPr>
+        <p:txBody>
+          <a:bodyPr lIns="90000" rIns="90000" tIns="45000" bIns="45000" anchor="t">
+            <a:noAutofit/>
+          </a:bodyPr>
+          <a:p>
+            <a:pPr indent="0" defTabSz="914400">
+              <a:lnSpc>
+                <a:spcPct val="100000"/>
+              </a:lnSpc>
+              <a:buNone/>
+              <a:tabLst>
+                <a:tab algn="l" pos="0"/>
+              </a:tabLst>
+            </a:pPr>
+            <a:r>
+              <a:rPr b="0" lang="en-US" sz="3200" strike="noStrike" u="none">
+                <a:solidFill>
+                  <a:schemeClr val="dk1"/>
+                </a:solidFill>
+                <a:effectLst/>
+                <a:uFillTx/>
+                <a:latin typeface="Calibri"/>
+              </a:rPr>
+              <a:t>Click icon to add picture</a:t>
+            </a:r>
+            <a:endParaRPr b="0" lang="en-US" sz="3200" strike="noStrike" u="none">
+              <a:solidFill>
+                <a:srgbClr val="000000"/>
+              </a:solidFill>
+              <a:effectLst/>
+              <a:uFillTx/>
+              <a:latin typeface="Arial"/>
+            </a:endParaRPr>
+          </a:p>
+        </p:txBody>
+      </p:sp>
+      <p:sp>
+        <p:nvSpPr>
+          <p:cNvPr id="51" name="PlaceHolder 3"/>
+          <p:cNvSpPr>
+            <a:spLocks noGrp="1"/>
+          </p:cNvSpPr>
+          <p:nvPr>
+            <p:ph type="body"/>
+          </p:nvPr>
+        </p:nvSpPr>
+        <p:spPr>
+          <a:xfrm>
+            <a:off x="839880" y="2057400"/>
+            <a:ext cx="3925440" cy="3804840"/>
           </a:xfrm>
           <a:prstGeom prst="rect">
             <a:avLst/>
@@ -1512,21 +1842,20 @@
             <a:noAutofit/>
           </a:bodyPr>
           <a:p>
-            <a:pPr marL="228600" indent="-228600" defTabSz="914400">
+            <a:pPr indent="0" defTabSz="914400">
               <a:lnSpc>
                 <a:spcPct val="90000"/>
               </a:lnSpc>
               <a:spcBef>
                 <a:spcPts val="1001"/>
               </a:spcBef>
-              <a:buClr>
-                <a:srgbClr val="000000"/>
-              </a:buClr>
-              <a:buFont typeface="Arial"/>
-              <a:buChar char="•"/>
+              <a:buNone/>
+              <a:tabLst>
+                <a:tab algn="l" pos="0"/>
+              </a:tabLst>
             </a:pPr>
             <a:r>
-              <a:rPr b="0" lang="en-US" sz="2800" strike="noStrike" u="none">
+              <a:rPr b="0" lang="en-US" sz="1600" strike="noStrike" u="none">
                 <a:solidFill>
                   <a:schemeClr val="dk1"/>
                 </a:solidFill>
@@ -1536,143 +1865,7 @@
               </a:rPr>
               <a:t>Click to edit Master text styles</a:t>
             </a:r>
-            <a:endParaRPr b="0" lang="en-US" sz="2800" strike="noStrike" u="none">
-              <a:solidFill>
-                <a:srgbClr val="000000"/>
-              </a:solidFill>
-              <a:effectLst/>
-              <a:uFillTx/>
-              <a:latin typeface="Arial"/>
-            </a:endParaRPr>
-          </a:p>
-          <a:p>
-            <a:pPr lvl="1" marL="685800" indent="-228600" defTabSz="914400">
-              <a:lnSpc>
-                <a:spcPct val="90000"/>
-              </a:lnSpc>
-              <a:spcBef>
-                <a:spcPts val="499"/>
-              </a:spcBef>
-              <a:buClr>
-                <a:srgbClr val="000000"/>
-              </a:buClr>
-              <a:buFont typeface="Arial"/>
-              <a:buChar char="•"/>
-            </a:pPr>
-            <a:r>
-              <a:rPr b="0" lang="en-US" sz="2400" strike="noStrike" u="none">
-                <a:solidFill>
-                  <a:schemeClr val="dk1"/>
-                </a:solidFill>
-                <a:effectLst/>
-                <a:uFillTx/>
-                <a:latin typeface="Calibri"/>
-              </a:rPr>
-              <a:t>Second level</a:t>
-            </a:r>
-            <a:endParaRPr b="0" lang="en-US" sz="2400" strike="noStrike" u="none">
-              <a:solidFill>
-                <a:srgbClr val="000000"/>
-              </a:solidFill>
-              <a:effectLst/>
-              <a:uFillTx/>
-              <a:latin typeface="Arial"/>
-            </a:endParaRPr>
-          </a:p>
-          <a:p>
-            <a:pPr lvl="2" marL="1143000" indent="-228600" defTabSz="914400">
-              <a:lnSpc>
-                <a:spcPct val="90000"/>
-              </a:lnSpc>
-              <a:spcBef>
-                <a:spcPts val="499"/>
-              </a:spcBef>
-              <a:buClr>
-                <a:srgbClr val="000000"/>
-              </a:buClr>
-              <a:buFont typeface="Arial"/>
-              <a:buChar char="•"/>
-            </a:pPr>
-            <a:r>
-              <a:rPr b="0" lang="en-US" sz="2000" strike="noStrike" u="none">
-                <a:solidFill>
-                  <a:schemeClr val="dk1"/>
-                </a:solidFill>
-                <a:effectLst/>
-                <a:uFillTx/>
-                <a:latin typeface="Calibri"/>
-              </a:rPr>
-              <a:t>Third level</a:t>
-            </a:r>
-            <a:endParaRPr b="0" lang="en-US" sz="2000" strike="noStrike" u="none">
-              <a:solidFill>
-                <a:srgbClr val="000000"/>
-              </a:solidFill>
-              <a:effectLst/>
-              <a:uFillTx/>
-              <a:latin typeface="Arial"/>
-            </a:endParaRPr>
-          </a:p>
-          <a:p>
-            <a:pPr lvl="3" marL="1600200" indent="-228600" defTabSz="914400">
-              <a:lnSpc>
-                <a:spcPct val="90000"/>
-              </a:lnSpc>
-              <a:spcBef>
-                <a:spcPts val="499"/>
-              </a:spcBef>
-              <a:buClr>
-                <a:srgbClr val="000000"/>
-              </a:buClr>
-              <a:buFont typeface="Arial"/>
-              <a:buChar char="•"/>
-            </a:pPr>
-            <a:r>
-              <a:rPr b="0" lang="en-US" sz="1800" strike="noStrike" u="none">
-                <a:solidFill>
-                  <a:schemeClr val="dk1"/>
-                </a:solidFill>
-                <a:effectLst/>
-                <a:uFillTx/>
-                <a:latin typeface="Calibri"/>
-              </a:rPr>
-              <a:t>Fourth level</a:t>
-            </a:r>
-            <a:endParaRPr b="0" lang="en-US" sz="1800" strike="noStrike" u="none">
-              <a:solidFill>
-                <a:srgbClr val="000000"/>
-              </a:solidFill>
-              <a:effectLst/>
-              <a:uFillTx/>
-              <a:latin typeface="Arial"/>
-            </a:endParaRPr>
-          </a:p>
-          <a:p>
-            <a:pPr lvl="4" marL="2057400" indent="-228600" defTabSz="914400">
-              <a:lnSpc>
-                <a:spcPct val="90000"/>
-              </a:lnSpc>
-              <a:spcBef>
-                <a:spcPts val="499"/>
-              </a:spcBef>
-              <a:buClr>
-                <a:srgbClr val="000000"/>
-              </a:buClr>
-              <a:buFont typeface="Arial"/>
-              <a:buChar char="•"/>
-            </a:pPr>
-            <a:r>
-              <a:rPr b="0" lang="en-US" sz="1800" strike="noStrike" u="none">
-                <a:solidFill>
-                  <a:schemeClr val="dk1"/>
-                </a:solidFill>
-                <a:effectLst/>
-                <a:uFillTx/>
-                <a:latin typeface="Calibri"/>
-              </a:rPr>
-              <a:t>Fifth level</a:t>
-            </a:r>
-            <a:endParaRPr b="0" lang="en-US" sz="1800" strike="noStrike" u="none">
+            <a:endParaRPr b="0" lang="en-US" sz="1600" strike="noStrike" u="none">
               <a:solidFill>
                 <a:srgbClr val="000000"/>
               </a:solidFill>
@@ -1685,206 +1878,7 @@
       </p:sp>
       <p:sp>
         <p:nvSpPr>
-          <p:cNvPr id="48" name="PlaceHolder 3"/>
-          <p:cNvSpPr>
-            <a:spLocks noGrp="1"/>
-          </p:cNvSpPr>
-          <p:nvPr>
-            <p:ph type="body"/>
-          </p:nvPr>
-        </p:nvSpPr>
-        <p:spPr>
-          <a:xfrm>
-            <a:off x="6172200" y="1825560"/>
-            <a:ext cx="5175360" cy="4345200"/>
-          </a:xfrm>
-          <a:prstGeom prst="rect">
-            <a:avLst/>
-          </a:prstGeom>
-          <a:noFill/>
-          <a:ln w="0">
-            <a:noFill/>
-          </a:ln>
-        </p:spPr>
-        <p:txBody>
-          <a:bodyPr lIns="91440" rIns="91440" tIns="45720" bIns="45720" anchor="t">
-            <a:noAutofit/>
-          </a:bodyPr>
-          <a:p>
-            <a:pPr marL="228600" indent="-228600" defTabSz="914400">
-              <a:lnSpc>
-                <a:spcPct val="90000"/>
-              </a:lnSpc>
-              <a:spcBef>
-                <a:spcPts val="1001"/>
-              </a:spcBef>
-              <a:buClr>
-                <a:srgbClr val="000000"/>
-              </a:buClr>
-              <a:buFont typeface="Arial"/>
-              <a:buChar char="•"/>
-            </a:pPr>
-            <a:r>
-              <a:rPr b="0" lang="en-US" sz="2800" strike="noStrike" u="none">
-                <a:solidFill>
-                  <a:schemeClr val="dk1"/>
-                </a:solidFill>
-                <a:effectLst/>
-                <a:uFillTx/>
-                <a:latin typeface="Calibri"/>
-              </a:rPr>
-              <a:t>Click to edit Master text styles</a:t>
-            </a:r>
-            <a:endParaRPr b="0" lang="en-US" sz="2800" strike="noStrike" u="none">
-              <a:solidFill>
-                <a:srgbClr val="000000"/>
-              </a:solidFill>
-              <a:effectLst/>
-              <a:uFillTx/>
-              <a:latin typeface="Arial"/>
-            </a:endParaRPr>
-          </a:p>
-          <a:p>
-            <a:pPr lvl="1" marL="685800" indent="-228600" defTabSz="914400">
-              <a:lnSpc>
-                <a:spcPct val="90000"/>
-              </a:lnSpc>
-              <a:spcBef>
-                <a:spcPts val="499"/>
-              </a:spcBef>
-              <a:buClr>
-                <a:srgbClr val="000000"/>
-              </a:buClr>
-              <a:buFont typeface="Arial"/>
-              <a:buChar char="•"/>
-            </a:pPr>
-            <a:r>
-              <a:rPr b="0" lang="en-US" sz="2400" strike="noStrike" u="none">
-                <a:solidFill>
-                  <a:schemeClr val="dk1"/>
-                </a:solidFill>
-                <a:effectLst/>
-                <a:uFillTx/>
-                <a:latin typeface="Calibri"/>
-              </a:rPr>
-              <a:t>Second level</a:t>
-            </a:r>
-            <a:endParaRPr b="0" lang="en-US" sz="2400" strike="noStrike" u="none">
-              <a:solidFill>
-                <a:srgbClr val="000000"/>
-              </a:solidFill>
-              <a:effectLst/>
-              <a:uFillTx/>
-              <a:latin typeface="Arial"/>
-            </a:endParaRPr>
-          </a:p>
-          <a:p>
-            <a:pPr lvl="2" marL="1143000" indent="-228600" defTabSz="914400">
-              <a:lnSpc>
-                <a:spcPct val="90000"/>
-              </a:lnSpc>
-              <a:spcBef>
-                <a:spcPts val="499"/>
-              </a:spcBef>
-              <a:buClr>
-                <a:srgbClr val="000000"/>
-              </a:buClr>
-              <a:buFont typeface="Arial"/>
-              <a:buChar char="•"/>
-            </a:pPr>
-            <a:r>
-              <a:rPr b="0" lang="en-US" sz="2000" strike="noStrike" u="none">
-                <a:solidFill>
-                  <a:schemeClr val="dk1"/>
-                </a:solidFill>
-                <a:effectLst/>
-                <a:uFillTx/>
-                <a:latin typeface="Calibri"/>
-              </a:rPr>
-              <a:t>Third level</a:t>
-            </a:r>
-            <a:endParaRPr b="0" lang="en-US" sz="2000" strike="noStrike" u="none">
-              <a:solidFill>
-                <a:srgbClr val="000000"/>
-              </a:solidFill>
-              <a:effectLst/>
-              <a:uFillTx/>
-              <a:latin typeface="Arial"/>
-            </a:endParaRPr>
-          </a:p>
-          <a:p>
-            <a:pPr lvl="3" marL="1600200" indent="-228600" defTabSz="914400">
-              <a:lnSpc>
-                <a:spcPct val="90000"/>
-              </a:lnSpc>
-              <a:spcBef>
-                <a:spcPts val="499"/>
-              </a:spcBef>
-              <a:buClr>
-                <a:srgbClr val="000000"/>
-              </a:buClr>
-              <a:buFont typeface="Arial"/>
-              <a:buChar char="•"/>
-            </a:pPr>
-            <a:r>
-              <a:rPr b="0" lang="en-US" sz="1800" strike="noStrike" u="none">
-                <a:solidFill>
-                  <a:schemeClr val="dk1"/>
-                </a:solidFill>
-                <a:effectLst/>
-                <a:uFillTx/>
-                <a:latin typeface="Calibri"/>
-              </a:rPr>
-              <a:t>Fourth level</a:t>
-            </a:r>
-            <a:endParaRPr b="0" lang="en-US" sz="1800" strike="noStrike" u="none">
-              <a:solidFill>
-                <a:srgbClr val="000000"/>
-              </a:solidFill>
-              <a:effectLst/>
-              <a:uFillTx/>
-              <a:latin typeface="Arial"/>
-            </a:endParaRPr>
-          </a:p>
-          <a:p>
-            <a:pPr lvl="4" marL="2057400" indent="-228600" defTabSz="914400">
-              <a:lnSpc>
-                <a:spcPct val="90000"/>
-              </a:lnSpc>
-              <a:spcBef>
-                <a:spcPts val="499"/>
-              </a:spcBef>
-              <a:buClr>
-                <a:srgbClr val="000000"/>
-              </a:buClr>
-              <a:buFont typeface="Arial"/>
-              <a:buChar char="•"/>
-            </a:pPr>
-            <a:r>
-              <a:rPr b="0" lang="en-US" sz="1800" strike="noStrike" u="none">
-                <a:solidFill>
-                  <a:schemeClr val="dk1"/>
-                </a:solidFill>
-                <a:effectLst/>
-                <a:uFillTx/>
-                <a:latin typeface="Calibri"/>
-              </a:rPr>
-              <a:t>Fifth level</a:t>
-            </a:r>
-            <a:endParaRPr b="0" lang="en-US" sz="1800" strike="noStrike" u="none">
-              <a:solidFill>
-                <a:srgbClr val="000000"/>
-              </a:solidFill>
-              <a:effectLst/>
-              <a:uFillTx/>
-              <a:latin typeface="Arial"/>
-            </a:endParaRPr>
-          </a:p>
-        </p:txBody>
-      </p:sp>
-      <p:sp>
-        <p:nvSpPr>
-          <p:cNvPr id="49" name="PlaceHolder 4"/>
+          <p:cNvPr id="52" name="PlaceHolder 4"/>
           <p:cNvSpPr>
             <a:spLocks noGrp="1"/>
           </p:cNvSpPr>
@@ -1895,7 +1889,7 @@
         <p:spPr>
           <a:xfrm>
             <a:off x="838080" y="6356520"/>
-            <a:ext cx="2737080" cy="358920"/>
+            <a:ext cx="2736360" cy="358200"/>
           </a:xfrm>
           <a:prstGeom prst="rect">
             <a:avLst/>
@@ -1951,7 +1945,7 @@
                 <a:uFillTx/>
                 <a:latin typeface="Calibri"/>
               </a:rPr>
-              <a:t>&lt;date/time&gt;</a:t>
+              <a:t> </a:t>
             </a:r>
             <a:endParaRPr b="0" lang="en-US" sz="1200" strike="noStrike" u="none">
               <a:solidFill>
@@ -1966,7 +1960,7 @@
       </p:sp>
       <p:sp>
         <p:nvSpPr>
-          <p:cNvPr id="50" name="PlaceHolder 5"/>
+          <p:cNvPr id="53" name="PlaceHolder 5"/>
           <p:cNvSpPr>
             <a:spLocks noGrp="1"/>
           </p:cNvSpPr>
@@ -1977,7 +1971,7 @@
         <p:spPr>
           <a:xfrm>
             <a:off x="4038480" y="6356520"/>
-            <a:ext cx="4108680" cy="358920"/>
+            <a:ext cx="4107960" cy="358200"/>
           </a:xfrm>
           <a:prstGeom prst="rect">
             <a:avLst/>
@@ -2029,7 +2023,7 @@
                 <a:uFillTx/>
                 <a:latin typeface="Times New Roman"/>
               </a:rPr>
-              <a:t>&lt;footer&gt;</a:t>
+              <a:t> </a:t>
             </a:r>
             <a:endParaRPr b="0" lang="en-US" sz="1400" strike="noStrike" u="none">
               <a:solidFill>
@@ -2044,7 +2038,7 @@
       </p:sp>
       <p:sp>
         <p:nvSpPr>
-          <p:cNvPr id="51" name="PlaceHolder 6"/>
+          <p:cNvPr id="54" name="PlaceHolder 6"/>
           <p:cNvSpPr>
             <a:spLocks noGrp="1"/>
           </p:cNvSpPr>
@@ -2055,7 +2049,7 @@
         <p:spPr>
           <a:xfrm>
             <a:off x="8610480" y="6356520"/>
-            <a:ext cx="2737080" cy="358920"/>
+            <a:ext cx="2736360" cy="358200"/>
           </a:xfrm>
           <a:prstGeom prst="rect">
             <a:avLst/>
@@ -2100,7 +2094,7 @@
                 <a:tab algn="l" pos="0"/>
               </a:tabLst>
             </a:pPr>
-            <a:fld id="{E7F88BFB-2D4F-49E8-BE84-1335F938C41D}" type="slidenum">
+            <a:fld id="{A79F4E83-8ED5-4AC2-B760-0189D37C9A5A}" type="slidenum">
               <a:rPr b="0" lang="en-US" sz="1200" strike="noStrike" u="none">
                 <a:solidFill>
                   <a:schemeClr val="dk1">
@@ -2111,7 +2105,7 @@
                 <a:uFillTx/>
                 <a:latin typeface="Calibri"/>
               </a:rPr>
-              <a:t>&lt;number&gt;</a:t>
+              <a:t>14</a:t>
             </a:fld>
             <a:endParaRPr b="0" lang="en-US" sz="1200" strike="noStrike" u="none">
               <a:solidFill>
@@ -2130,8 +2124,8 @@
 </file>
 
 <file path=ppt/slideLayouts/slideLayout11.xml><?xml version="1.0" encoding="utf-8"?>
-<p:sldLayout xmlns:a="http://schemas.openxmlformats.org/drawingml/2006/main" xmlns:p="http://schemas.openxmlformats.org/presentationml/2006/main" xmlns:r="http://schemas.openxmlformats.org/officeDocument/2006/relationships" xmlns:p14="http://schemas.microsoft.com/office/powerpoint/2010/main" xmlns:p15="http://schemas.microsoft.com/office/powerpoint/2012/main" xmlns:mc="http://schemas.openxmlformats.org/markup-compatibility/2006" type="blank" preserve="1">
-  <p:cSld name="Comparison">
+<p:sldLayout xmlns:a="http://schemas.openxmlformats.org/drawingml/2006/main" xmlns:p="http://schemas.openxmlformats.org/presentationml/2006/main" xmlns:r="http://schemas.openxmlformats.org/officeDocument/2006/relationships" xmlns:p14="http://schemas.microsoft.com/office/powerpoint/2010/main" xmlns:p15="http://schemas.microsoft.com/office/powerpoint/2012/main" xmlns:mc="http://schemas.openxmlformats.org/markup-compatibility/2006" type="title" preserve="1">
+  <p:cSld name="Title Slide">
     <p:bg>
       <p:bgPr>
         <a:solidFill>
@@ -2155,7 +2149,7 @@
       </p:grpSpPr>
       <p:sp>
         <p:nvSpPr>
-          <p:cNvPr id="52" name="PlaceHolder 1"/>
+          <p:cNvPr id="55" name="PlaceHolder 1"/>
           <p:cNvSpPr>
             <a:spLocks noGrp="1"/>
           </p:cNvSpPr>
@@ -2165,67 +2159,8 @@
         </p:nvSpPr>
         <p:spPr>
           <a:xfrm>
-            <a:off x="839880" y="365040"/>
-            <a:ext cx="10509480" cy="1319400"/>
-          </a:xfrm>
-          <a:prstGeom prst="rect">
-            <a:avLst/>
-          </a:prstGeom>
-          <a:noFill/>
-          <a:ln w="0">
-            <a:noFill/>
-          </a:ln>
-        </p:spPr>
-        <p:txBody>
-          <a:bodyPr lIns="91440" rIns="91440" tIns="45720" bIns="45720" anchor="ctr">
-            <a:noAutofit/>
-          </a:bodyPr>
-          <a:p>
-            <a:pPr indent="0" defTabSz="914400">
-              <a:lnSpc>
-                <a:spcPct val="90000"/>
-              </a:lnSpc>
-              <a:buNone/>
-              <a:tabLst>
-                <a:tab algn="l" pos="0"/>
-              </a:tabLst>
-            </a:pPr>
-            <a:r>
-              <a:rPr b="0" lang="en-US" sz="4400" strike="noStrike" u="none">
-                <a:solidFill>
-                  <a:schemeClr val="dk1"/>
-                </a:solidFill>
-                <a:effectLst/>
-                <a:uFillTx/>
-                <a:latin typeface="Calibri Light"/>
-              </a:rPr>
-              <a:t>Click to edit Master title style</a:t>
-            </a:r>
-            <a:endParaRPr b="0" lang="en-US" sz="4400" strike="noStrike" u="none">
-              <a:solidFill>
-                <a:srgbClr val="000000"/>
-              </a:solidFill>
-              <a:effectLst/>
-              <a:uFillTx/>
-              <a:latin typeface="Arial"/>
-            </a:endParaRPr>
-          </a:p>
-        </p:txBody>
-      </p:sp>
-      <p:sp>
-        <p:nvSpPr>
-          <p:cNvPr id="53" name="PlaceHolder 2"/>
-          <p:cNvSpPr>
-            <a:spLocks noGrp="1"/>
-          </p:cNvSpPr>
-          <p:nvPr>
-            <p:ph type="body"/>
-          </p:nvPr>
-        </p:nvSpPr>
-        <p:spPr>
-          <a:xfrm>
-            <a:off x="839880" y="1681200"/>
-            <a:ext cx="5151600" cy="817920"/>
+            <a:off x="1523880" y="1122480"/>
+            <a:ext cx="9137160" cy="2380680"/>
           </a:xfrm>
           <a:prstGeom prst="rect">
             <a:avLst/>
@@ -2240,30 +2175,27 @@
             <a:noAutofit/>
           </a:bodyPr>
           <a:p>
-            <a:pPr indent="0" defTabSz="914400">
+            <a:pPr indent="0" algn="ctr" defTabSz="914400">
               <a:lnSpc>
                 <a:spcPct val="90000"/>
               </a:lnSpc>
-              <a:spcBef>
-                <a:spcPts val="1001"/>
-              </a:spcBef>
               <a:buNone/>
               <a:tabLst>
                 <a:tab algn="l" pos="0"/>
               </a:tabLst>
             </a:pPr>
             <a:r>
-              <a:rPr b="1" lang="en-US" sz="2400" strike="noStrike" u="none">
+              <a:rPr b="0" lang="en-US" sz="6000" strike="noStrike" u="none">
                 <a:solidFill>
                   <a:schemeClr val="dk1"/>
                 </a:solidFill>
                 <a:effectLst/>
                 <a:uFillTx/>
-                <a:latin typeface="Calibri"/>
+                <a:latin typeface="Calibri Light"/>
               </a:rPr>
-              <a:t>Click to edit Master text styles</a:t>
+              <a:t>Click to edit Master title style</a:t>
             </a:r>
-            <a:endParaRPr b="0" lang="en-US" sz="2400" strike="noStrike" u="none">
+            <a:endParaRPr b="0" lang="en-US" sz="6000" strike="noStrike" u="none">
               <a:solidFill>
                 <a:srgbClr val="000000"/>
               </a:solidFill>
@@ -2276,467 +2208,7 @@
       </p:sp>
       <p:sp>
         <p:nvSpPr>
-          <p:cNvPr id="54" name="PlaceHolder 3"/>
-          <p:cNvSpPr>
-            <a:spLocks noGrp="1"/>
-          </p:cNvSpPr>
-          <p:nvPr>
-            <p:ph type="body"/>
-          </p:nvPr>
-        </p:nvSpPr>
-        <p:spPr>
-          <a:xfrm>
-            <a:off x="839880" y="2505240"/>
-            <a:ext cx="5151600" cy="3678480"/>
-          </a:xfrm>
-          <a:prstGeom prst="rect">
-            <a:avLst/>
-          </a:prstGeom>
-          <a:noFill/>
-          <a:ln w="0">
-            <a:noFill/>
-          </a:ln>
-        </p:spPr>
-        <p:txBody>
-          <a:bodyPr lIns="91440" rIns="91440" tIns="45720" bIns="45720" anchor="t">
-            <a:noAutofit/>
-          </a:bodyPr>
-          <a:p>
-            <a:pPr marL="228600" indent="-228600" defTabSz="914400">
-              <a:lnSpc>
-                <a:spcPct val="90000"/>
-              </a:lnSpc>
-              <a:spcBef>
-                <a:spcPts val="1001"/>
-              </a:spcBef>
-              <a:buClr>
-                <a:srgbClr val="000000"/>
-              </a:buClr>
-              <a:buFont typeface="Arial"/>
-              <a:buChar char="•"/>
-            </a:pPr>
-            <a:r>
-              <a:rPr b="0" lang="en-US" sz="2800" strike="noStrike" u="none">
-                <a:solidFill>
-                  <a:schemeClr val="dk1"/>
-                </a:solidFill>
-                <a:effectLst/>
-                <a:uFillTx/>
-                <a:latin typeface="Calibri"/>
-              </a:rPr>
-              <a:t>Click to edit Master text styles</a:t>
-            </a:r>
-            <a:endParaRPr b="0" lang="en-US" sz="2800" strike="noStrike" u="none">
-              <a:solidFill>
-                <a:srgbClr val="000000"/>
-              </a:solidFill>
-              <a:effectLst/>
-              <a:uFillTx/>
-              <a:latin typeface="Arial"/>
-            </a:endParaRPr>
-          </a:p>
-          <a:p>
-            <a:pPr lvl="1" marL="685800" indent="-228600" defTabSz="914400">
-              <a:lnSpc>
-                <a:spcPct val="90000"/>
-              </a:lnSpc>
-              <a:spcBef>
-                <a:spcPts val="499"/>
-              </a:spcBef>
-              <a:buClr>
-                <a:srgbClr val="000000"/>
-              </a:buClr>
-              <a:buFont typeface="Arial"/>
-              <a:buChar char="•"/>
-            </a:pPr>
-            <a:r>
-              <a:rPr b="0" lang="en-US" sz="2400" strike="noStrike" u="none">
-                <a:solidFill>
-                  <a:schemeClr val="dk1"/>
-                </a:solidFill>
-                <a:effectLst/>
-                <a:uFillTx/>
-                <a:latin typeface="Calibri"/>
-              </a:rPr>
-              <a:t>Second level</a:t>
-            </a:r>
-            <a:endParaRPr b="0" lang="en-US" sz="2400" strike="noStrike" u="none">
-              <a:solidFill>
-                <a:srgbClr val="000000"/>
-              </a:solidFill>
-              <a:effectLst/>
-              <a:uFillTx/>
-              <a:latin typeface="Arial"/>
-            </a:endParaRPr>
-          </a:p>
-          <a:p>
-            <a:pPr lvl="2" marL="1143000" indent="-228600" defTabSz="914400">
-              <a:lnSpc>
-                <a:spcPct val="90000"/>
-              </a:lnSpc>
-              <a:spcBef>
-                <a:spcPts val="499"/>
-              </a:spcBef>
-              <a:buClr>
-                <a:srgbClr val="000000"/>
-              </a:buClr>
-              <a:buFont typeface="Arial"/>
-              <a:buChar char="•"/>
-            </a:pPr>
-            <a:r>
-              <a:rPr b="0" lang="en-US" sz="2000" strike="noStrike" u="none">
-                <a:solidFill>
-                  <a:schemeClr val="dk1"/>
-                </a:solidFill>
-                <a:effectLst/>
-                <a:uFillTx/>
-                <a:latin typeface="Calibri"/>
-              </a:rPr>
-              <a:t>Third level</a:t>
-            </a:r>
-            <a:endParaRPr b="0" lang="en-US" sz="2000" strike="noStrike" u="none">
-              <a:solidFill>
-                <a:srgbClr val="000000"/>
-              </a:solidFill>
-              <a:effectLst/>
-              <a:uFillTx/>
-              <a:latin typeface="Arial"/>
-            </a:endParaRPr>
-          </a:p>
-          <a:p>
-            <a:pPr lvl="3" marL="1600200" indent="-228600" defTabSz="914400">
-              <a:lnSpc>
-                <a:spcPct val="90000"/>
-              </a:lnSpc>
-              <a:spcBef>
-                <a:spcPts val="499"/>
-              </a:spcBef>
-              <a:buClr>
-                <a:srgbClr val="000000"/>
-              </a:buClr>
-              <a:buFont typeface="Arial"/>
-              <a:buChar char="•"/>
-            </a:pPr>
-            <a:r>
-              <a:rPr b="0" lang="en-US" sz="1800" strike="noStrike" u="none">
-                <a:solidFill>
-                  <a:schemeClr val="dk1"/>
-                </a:solidFill>
-                <a:effectLst/>
-                <a:uFillTx/>
-                <a:latin typeface="Calibri"/>
-              </a:rPr>
-              <a:t>Fourth level</a:t>
-            </a:r>
-            <a:endParaRPr b="0" lang="en-US" sz="1800" strike="noStrike" u="none">
-              <a:solidFill>
-                <a:srgbClr val="000000"/>
-              </a:solidFill>
-              <a:effectLst/>
-              <a:uFillTx/>
-              <a:latin typeface="Arial"/>
-            </a:endParaRPr>
-          </a:p>
-          <a:p>
-            <a:pPr lvl="4" marL="2057400" indent="-228600" defTabSz="914400">
-              <a:lnSpc>
-                <a:spcPct val="90000"/>
-              </a:lnSpc>
-              <a:spcBef>
-                <a:spcPts val="499"/>
-              </a:spcBef>
-              <a:buClr>
-                <a:srgbClr val="000000"/>
-              </a:buClr>
-              <a:buFont typeface="Arial"/>
-              <a:buChar char="•"/>
-            </a:pPr>
-            <a:r>
-              <a:rPr b="0" lang="en-US" sz="1800" strike="noStrike" u="none">
-                <a:solidFill>
-                  <a:schemeClr val="dk1"/>
-                </a:solidFill>
-                <a:effectLst/>
-                <a:uFillTx/>
-                <a:latin typeface="Calibri"/>
-              </a:rPr>
-              <a:t>Fifth level</a:t>
-            </a:r>
-            <a:endParaRPr b="0" lang="en-US" sz="1800" strike="noStrike" u="none">
-              <a:solidFill>
-                <a:srgbClr val="000000"/>
-              </a:solidFill>
-              <a:effectLst/>
-              <a:uFillTx/>
-              <a:latin typeface="Arial"/>
-            </a:endParaRPr>
-          </a:p>
-        </p:txBody>
-      </p:sp>
-      <p:sp>
-        <p:nvSpPr>
-          <p:cNvPr id="55" name="PlaceHolder 4"/>
-          <p:cNvSpPr>
-            <a:spLocks noGrp="1"/>
-          </p:cNvSpPr>
-          <p:nvPr>
-            <p:ph type="body"/>
-          </p:nvPr>
-        </p:nvSpPr>
-        <p:spPr>
-          <a:xfrm>
-            <a:off x="6172200" y="1681200"/>
-            <a:ext cx="5177160" cy="817920"/>
-          </a:xfrm>
-          <a:prstGeom prst="rect">
-            <a:avLst/>
-          </a:prstGeom>
-          <a:noFill/>
-          <a:ln w="0">
-            <a:noFill/>
-          </a:ln>
-        </p:spPr>
-        <p:txBody>
-          <a:bodyPr lIns="91440" rIns="91440" tIns="45720" bIns="45720" anchor="b">
-            <a:noAutofit/>
-          </a:bodyPr>
-          <a:p>
-            <a:pPr indent="0" defTabSz="914400">
-              <a:lnSpc>
-                <a:spcPct val="90000"/>
-              </a:lnSpc>
-              <a:spcBef>
-                <a:spcPts val="1001"/>
-              </a:spcBef>
-              <a:buNone/>
-              <a:tabLst>
-                <a:tab algn="l" pos="0"/>
-              </a:tabLst>
-            </a:pPr>
-            <a:r>
-              <a:rPr b="1" lang="en-US" sz="2400" strike="noStrike" u="none">
-                <a:solidFill>
-                  <a:schemeClr val="dk1"/>
-                </a:solidFill>
-                <a:effectLst/>
-                <a:uFillTx/>
-                <a:latin typeface="Calibri"/>
-              </a:rPr>
-              <a:t>Click to edit Master text styles</a:t>
-            </a:r>
-            <a:endParaRPr b="0" lang="en-US" sz="2400" strike="noStrike" u="none">
-              <a:solidFill>
-                <a:srgbClr val="000000"/>
-              </a:solidFill>
-              <a:effectLst/>
-              <a:uFillTx/>
-              <a:latin typeface="Arial"/>
-            </a:endParaRPr>
-          </a:p>
-        </p:txBody>
-      </p:sp>
-      <p:sp>
-        <p:nvSpPr>
-          <p:cNvPr id="56" name="PlaceHolder 5"/>
-          <p:cNvSpPr>
-            <a:spLocks noGrp="1"/>
-          </p:cNvSpPr>
-          <p:nvPr>
-            <p:ph type="body"/>
-          </p:nvPr>
-        </p:nvSpPr>
-        <p:spPr>
-          <a:xfrm>
-            <a:off x="6172200" y="2505240"/>
-            <a:ext cx="5177160" cy="3678480"/>
-          </a:xfrm>
-          <a:prstGeom prst="rect">
-            <a:avLst/>
-          </a:prstGeom>
-          <a:noFill/>
-          <a:ln w="0">
-            <a:noFill/>
-          </a:ln>
-        </p:spPr>
-        <p:txBody>
-          <a:bodyPr lIns="91440" rIns="91440" tIns="45720" bIns="45720" anchor="t">
-            <a:noAutofit/>
-          </a:bodyPr>
-          <a:p>
-            <a:pPr marL="228600" indent="-228600" defTabSz="914400">
-              <a:lnSpc>
-                <a:spcPct val="90000"/>
-              </a:lnSpc>
-              <a:spcBef>
-                <a:spcPts val="1001"/>
-              </a:spcBef>
-              <a:buClr>
-                <a:srgbClr val="000000"/>
-              </a:buClr>
-              <a:buFont typeface="Arial"/>
-              <a:buChar char="•"/>
-            </a:pPr>
-            <a:r>
-              <a:rPr b="0" lang="en-US" sz="2800" strike="noStrike" u="none">
-                <a:solidFill>
-                  <a:schemeClr val="dk1"/>
-                </a:solidFill>
-                <a:effectLst/>
-                <a:uFillTx/>
-                <a:latin typeface="Calibri"/>
-              </a:rPr>
-              <a:t>Click to edit Master text styles</a:t>
-            </a:r>
-            <a:endParaRPr b="0" lang="en-US" sz="2800" strike="noStrike" u="none">
-              <a:solidFill>
-                <a:srgbClr val="000000"/>
-              </a:solidFill>
-              <a:effectLst/>
-              <a:uFillTx/>
-              <a:latin typeface="Arial"/>
-            </a:endParaRPr>
-          </a:p>
-          <a:p>
-            <a:pPr lvl="1" marL="685800" indent="-228600" defTabSz="914400">
-              <a:lnSpc>
-                <a:spcPct val="90000"/>
-              </a:lnSpc>
-              <a:spcBef>
-                <a:spcPts val="499"/>
-              </a:spcBef>
-              <a:buClr>
-                <a:srgbClr val="000000"/>
-              </a:buClr>
-              <a:buFont typeface="Arial"/>
-              <a:buChar char="•"/>
-            </a:pPr>
-            <a:r>
-              <a:rPr b="0" lang="en-US" sz="2400" strike="noStrike" u="none">
-                <a:solidFill>
-                  <a:schemeClr val="dk1"/>
-                </a:solidFill>
-                <a:effectLst/>
-                <a:uFillTx/>
-                <a:latin typeface="Calibri"/>
-              </a:rPr>
-              <a:t>Second level</a:t>
-            </a:r>
-            <a:endParaRPr b="0" lang="en-US" sz="2400" strike="noStrike" u="none">
-              <a:solidFill>
-                <a:srgbClr val="000000"/>
-              </a:solidFill>
-              <a:effectLst/>
-              <a:uFillTx/>
-              <a:latin typeface="Arial"/>
-            </a:endParaRPr>
-          </a:p>
-          <a:p>
-            <a:pPr lvl="2" marL="1143000" indent="-228600" defTabSz="914400">
-              <a:lnSpc>
-                <a:spcPct val="90000"/>
-              </a:lnSpc>
-              <a:spcBef>
-                <a:spcPts val="499"/>
-              </a:spcBef>
-              <a:buClr>
-                <a:srgbClr val="000000"/>
-              </a:buClr>
-              <a:buFont typeface="Arial"/>
-              <a:buChar char="•"/>
-            </a:pPr>
-            <a:r>
-              <a:rPr b="0" lang="en-US" sz="2000" strike="noStrike" u="none">
-                <a:solidFill>
-                  <a:schemeClr val="dk1"/>
-                </a:solidFill>
-                <a:effectLst/>
-                <a:uFillTx/>
-                <a:latin typeface="Calibri"/>
-              </a:rPr>
-              <a:t>Third level</a:t>
-            </a:r>
-            <a:endParaRPr b="0" lang="en-US" sz="2000" strike="noStrike" u="none">
-              <a:solidFill>
-                <a:srgbClr val="000000"/>
-              </a:solidFill>
-              <a:effectLst/>
-              <a:uFillTx/>
-              <a:latin typeface="Arial"/>
-            </a:endParaRPr>
-          </a:p>
-          <a:p>
-            <a:pPr lvl="3" marL="1600200" indent="-228600" defTabSz="914400">
-              <a:lnSpc>
-                <a:spcPct val="90000"/>
-              </a:lnSpc>
-              <a:spcBef>
-                <a:spcPts val="499"/>
-              </a:spcBef>
-              <a:buClr>
-                <a:srgbClr val="000000"/>
-              </a:buClr>
-              <a:buFont typeface="Arial"/>
-              <a:buChar char="•"/>
-            </a:pPr>
-            <a:r>
-              <a:rPr b="0" lang="en-US" sz="1800" strike="noStrike" u="none">
-                <a:solidFill>
-                  <a:schemeClr val="dk1"/>
-                </a:solidFill>
-                <a:effectLst/>
-                <a:uFillTx/>
-                <a:latin typeface="Calibri"/>
-              </a:rPr>
-              <a:t>Fourth level</a:t>
-            </a:r>
-            <a:endParaRPr b="0" lang="en-US" sz="1800" strike="noStrike" u="none">
-              <a:solidFill>
-                <a:srgbClr val="000000"/>
-              </a:solidFill>
-              <a:effectLst/>
-              <a:uFillTx/>
-              <a:latin typeface="Arial"/>
-            </a:endParaRPr>
-          </a:p>
-          <a:p>
-            <a:pPr lvl="4" marL="2057400" indent="-228600" defTabSz="914400">
-              <a:lnSpc>
-                <a:spcPct val="90000"/>
-              </a:lnSpc>
-              <a:spcBef>
-                <a:spcPts val="499"/>
-              </a:spcBef>
-              <a:buClr>
-                <a:srgbClr val="000000"/>
-              </a:buClr>
-              <a:buFont typeface="Arial"/>
-              <a:buChar char="•"/>
-            </a:pPr>
-            <a:r>
-              <a:rPr b="0" lang="en-US" sz="1800" strike="noStrike" u="none">
-                <a:solidFill>
-                  <a:schemeClr val="dk1"/>
-                </a:solidFill>
-                <a:effectLst/>
-                <a:uFillTx/>
-                <a:latin typeface="Calibri"/>
-              </a:rPr>
-              <a:t>Fifth level</a:t>
-            </a:r>
-            <a:endParaRPr b="0" lang="en-US" sz="1800" strike="noStrike" u="none">
-              <a:solidFill>
-                <a:srgbClr val="000000"/>
-              </a:solidFill>
-              <a:effectLst/>
-              <a:uFillTx/>
-              <a:latin typeface="Arial"/>
-            </a:endParaRPr>
-          </a:p>
-        </p:txBody>
-      </p:sp>
-      <p:sp>
-        <p:nvSpPr>
-          <p:cNvPr id="57" name="PlaceHolder 6"/>
+          <p:cNvPr id="56" name="PlaceHolder 2"/>
           <p:cNvSpPr>
             <a:spLocks noGrp="1"/>
           </p:cNvSpPr>
@@ -2747,7 +2219,7 @@
         <p:spPr>
           <a:xfrm>
             <a:off x="838080" y="6356520"/>
-            <a:ext cx="2737080" cy="358920"/>
+            <a:ext cx="2736360" cy="358200"/>
           </a:xfrm>
           <a:prstGeom prst="rect">
             <a:avLst/>
@@ -2803,7 +2275,7 @@
                 <a:uFillTx/>
                 <a:latin typeface="Calibri"/>
               </a:rPr>
-              <a:t>&lt;date/time&gt;</a:t>
+              <a:t> </a:t>
             </a:r>
             <a:endParaRPr b="0" lang="en-US" sz="1200" strike="noStrike" u="none">
               <a:solidFill>
@@ -2818,7 +2290,7 @@
       </p:sp>
       <p:sp>
         <p:nvSpPr>
-          <p:cNvPr id="58" name="PlaceHolder 7"/>
+          <p:cNvPr id="57" name="PlaceHolder 3"/>
           <p:cNvSpPr>
             <a:spLocks noGrp="1"/>
           </p:cNvSpPr>
@@ -2829,7 +2301,7 @@
         <p:spPr>
           <a:xfrm>
             <a:off x="4038480" y="6356520"/>
-            <a:ext cx="4108680" cy="358920"/>
+            <a:ext cx="4107960" cy="358200"/>
           </a:xfrm>
           <a:prstGeom prst="rect">
             <a:avLst/>
@@ -2881,7 +2353,7 @@
                 <a:uFillTx/>
                 <a:latin typeface="Times New Roman"/>
               </a:rPr>
-              <a:t>&lt;footer&gt;</a:t>
+              <a:t> </a:t>
             </a:r>
             <a:endParaRPr b="0" lang="en-US" sz="1400" strike="noStrike" u="none">
               <a:solidFill>
@@ -2896,7 +2368,7 @@
       </p:sp>
       <p:sp>
         <p:nvSpPr>
-          <p:cNvPr id="59" name="PlaceHolder 8"/>
+          <p:cNvPr id="58" name="PlaceHolder 4"/>
           <p:cNvSpPr>
             <a:spLocks noGrp="1"/>
           </p:cNvSpPr>
@@ -2907,7 +2379,7 @@
         <p:spPr>
           <a:xfrm>
             <a:off x="8610480" y="6356520"/>
-            <a:ext cx="2737080" cy="358920"/>
+            <a:ext cx="2736360" cy="358200"/>
           </a:xfrm>
           <a:prstGeom prst="rect">
             <a:avLst/>
@@ -2952,7 +2424,7 @@
                 <a:tab algn="l" pos="0"/>
               </a:tabLst>
             </a:pPr>
-            <a:fld id="{C83E2023-78A6-49F4-BAF4-48FFCB3B6139}" type="slidenum">
+            <a:fld id="{88BFFE7B-F513-4288-8225-7560A2CC3444}" type="slidenum">
               <a:rPr b="0" lang="en-US" sz="1200" strike="noStrike" u="none">
                 <a:solidFill>
                   <a:schemeClr val="dk1">
@@ -2963,7 +2435,7 @@
                 <a:uFillTx/>
                 <a:latin typeface="Calibri"/>
               </a:rPr>
-              <a:t>&lt;number&gt;</a:t>
+              <a:t>14</a:t>
             </a:fld>
             <a:endParaRPr b="0" lang="en-US" sz="1200" strike="noStrike" u="none">
               <a:solidFill>
@@ -2972,6 +2444,280 @@
               <a:effectLst/>
               <a:uFillTx/>
               <a:latin typeface="Times New Roman"/>
+            </a:endParaRPr>
+          </a:p>
+        </p:txBody>
+      </p:sp>
+      <p:sp>
+        <p:nvSpPr>
+          <p:cNvPr id="59" name="PlaceHolder 5"/>
+          <p:cNvSpPr>
+            <a:spLocks noGrp="1"/>
+          </p:cNvSpPr>
+          <p:nvPr>
+            <p:ph type="body"/>
+          </p:nvPr>
+        </p:nvSpPr>
+        <p:spPr>
+          <a:xfrm>
+            <a:off x="609480" y="1604520"/>
+            <a:ext cx="10965960" cy="3970800"/>
+          </a:xfrm>
+          <a:prstGeom prst="rect">
+            <a:avLst/>
+          </a:prstGeom>
+          <a:noFill/>
+          <a:ln w="0">
+            <a:noFill/>
+          </a:ln>
+        </p:spPr>
+        <p:txBody>
+          <a:bodyPr lIns="0" rIns="0" tIns="0" bIns="0" anchor="t">
+            <a:normAutofit/>
+          </a:bodyPr>
+          <a:p>
+            <a:pPr marL="432000" indent="-324000">
+              <a:lnSpc>
+                <a:spcPct val="90000"/>
+              </a:lnSpc>
+              <a:spcBef>
+                <a:spcPts val="1417"/>
+              </a:spcBef>
+              <a:buClr>
+                <a:srgbClr val="000000"/>
+              </a:buClr>
+              <a:buSzPct val="45000"/>
+              <a:buFont typeface="Wingdings" charset="2"/>
+              <a:buChar char=""/>
+            </a:pPr>
+            <a:r>
+              <a:rPr b="0" lang="en-US" sz="2800" strike="noStrike" u="none">
+                <a:solidFill>
+                  <a:schemeClr val="dk1"/>
+                </a:solidFill>
+                <a:effectLst/>
+                <a:uFillTx/>
+                <a:latin typeface="Calibri"/>
+              </a:rPr>
+              <a:t>Click to edit the outline text format</a:t>
+            </a:r>
+            <a:endParaRPr b="0" lang="en-US" sz="2800" strike="noStrike" u="none">
+              <a:solidFill>
+                <a:srgbClr val="000000"/>
+              </a:solidFill>
+              <a:effectLst/>
+              <a:uFillTx/>
+              <a:latin typeface="Arial"/>
+            </a:endParaRPr>
+          </a:p>
+          <a:p>
+            <a:pPr lvl="1" marL="864000" indent="-324000">
+              <a:lnSpc>
+                <a:spcPct val="90000"/>
+              </a:lnSpc>
+              <a:spcBef>
+                <a:spcPts val="1134"/>
+              </a:spcBef>
+              <a:buClr>
+                <a:srgbClr val="000000"/>
+              </a:buClr>
+              <a:buSzPct val="75000"/>
+              <a:buFont typeface="Symbol" charset="2"/>
+              <a:buChar char=""/>
+            </a:pPr>
+            <a:r>
+              <a:rPr b="0" lang="en-US" sz="2000" strike="noStrike" u="none">
+                <a:solidFill>
+                  <a:schemeClr val="dk1"/>
+                </a:solidFill>
+                <a:effectLst/>
+                <a:uFillTx/>
+                <a:latin typeface="Calibri"/>
+              </a:rPr>
+              <a:t>Second Outline Level</a:t>
+            </a:r>
+            <a:endParaRPr b="0" lang="en-US" sz="2000" strike="noStrike" u="none">
+              <a:solidFill>
+                <a:srgbClr val="000000"/>
+              </a:solidFill>
+              <a:effectLst/>
+              <a:uFillTx/>
+              <a:latin typeface="Arial"/>
+            </a:endParaRPr>
+          </a:p>
+          <a:p>
+            <a:pPr lvl="2" marL="1296000" indent="-288000">
+              <a:lnSpc>
+                <a:spcPct val="90000"/>
+              </a:lnSpc>
+              <a:spcBef>
+                <a:spcPts val="850"/>
+              </a:spcBef>
+              <a:buClr>
+                <a:srgbClr val="000000"/>
+              </a:buClr>
+              <a:buSzPct val="45000"/>
+              <a:buFont typeface="Wingdings" charset="2"/>
+              <a:buChar char=""/>
+            </a:pPr>
+            <a:r>
+              <a:rPr b="0" lang="en-US" sz="1800" strike="noStrike" u="none">
+                <a:solidFill>
+                  <a:schemeClr val="dk1"/>
+                </a:solidFill>
+                <a:effectLst/>
+                <a:uFillTx/>
+                <a:latin typeface="Calibri"/>
+              </a:rPr>
+              <a:t>Third Outline Level</a:t>
+            </a:r>
+            <a:endParaRPr b="0" lang="en-US" sz="1800" strike="noStrike" u="none">
+              <a:solidFill>
+                <a:srgbClr val="000000"/>
+              </a:solidFill>
+              <a:effectLst/>
+              <a:uFillTx/>
+              <a:latin typeface="Arial"/>
+            </a:endParaRPr>
+          </a:p>
+          <a:p>
+            <a:pPr lvl="3" marL="1728000" indent="-216000">
+              <a:lnSpc>
+                <a:spcPct val="90000"/>
+              </a:lnSpc>
+              <a:spcBef>
+                <a:spcPts val="567"/>
+              </a:spcBef>
+              <a:buClr>
+                <a:srgbClr val="000000"/>
+              </a:buClr>
+              <a:buSzPct val="75000"/>
+              <a:buFont typeface="Symbol" charset="2"/>
+              <a:buChar char=""/>
+            </a:pPr>
+            <a:r>
+              <a:rPr b="0" lang="en-US" sz="1800" strike="noStrike" u="none">
+                <a:solidFill>
+                  <a:schemeClr val="dk1"/>
+                </a:solidFill>
+                <a:effectLst/>
+                <a:uFillTx/>
+                <a:latin typeface="Calibri"/>
+              </a:rPr>
+              <a:t>Fourth Outline Level</a:t>
+            </a:r>
+            <a:endParaRPr b="0" lang="en-US" sz="1800" strike="noStrike" u="none">
+              <a:solidFill>
+                <a:srgbClr val="000000"/>
+              </a:solidFill>
+              <a:effectLst/>
+              <a:uFillTx/>
+              <a:latin typeface="Arial"/>
+            </a:endParaRPr>
+          </a:p>
+          <a:p>
+            <a:pPr lvl="4" marL="2160000" indent="-216000">
+              <a:lnSpc>
+                <a:spcPct val="90000"/>
+              </a:lnSpc>
+              <a:spcBef>
+                <a:spcPts val="283"/>
+              </a:spcBef>
+              <a:buClr>
+                <a:srgbClr val="000000"/>
+              </a:buClr>
+              <a:buSzPct val="45000"/>
+              <a:buFont typeface="Wingdings" charset="2"/>
+              <a:buChar char=""/>
+            </a:pPr>
+            <a:r>
+              <a:rPr b="0" lang="en-US" sz="2000" strike="noStrike" u="none">
+                <a:solidFill>
+                  <a:schemeClr val="dk1"/>
+                </a:solidFill>
+                <a:effectLst/>
+                <a:uFillTx/>
+                <a:latin typeface="Calibri"/>
+              </a:rPr>
+              <a:t>Fifth Outline Level</a:t>
+            </a:r>
+            <a:endParaRPr b="0" lang="en-US" sz="2000" strike="noStrike" u="none">
+              <a:solidFill>
+                <a:srgbClr val="000000"/>
+              </a:solidFill>
+              <a:effectLst/>
+              <a:uFillTx/>
+              <a:latin typeface="Arial"/>
+            </a:endParaRPr>
+          </a:p>
+          <a:p>
+            <a:pPr lvl="5" marL="2592000" indent="-216000">
+              <a:lnSpc>
+                <a:spcPct val="90000"/>
+              </a:lnSpc>
+              <a:spcBef>
+                <a:spcPts val="283"/>
+              </a:spcBef>
+              <a:buClr>
+                <a:srgbClr val="000000"/>
+              </a:buClr>
+              <a:buSzPct val="45000"/>
+              <a:buFont typeface="Wingdings" charset="2"/>
+              <a:buChar char=""/>
+            </a:pPr>
+            <a:r>
+              <a:rPr b="0" lang="en-US" sz="2000" strike="noStrike" u="none">
+                <a:solidFill>
+                  <a:schemeClr val="dk1"/>
+                </a:solidFill>
+                <a:effectLst/>
+                <a:uFillTx/>
+                <a:latin typeface="Calibri"/>
+              </a:rPr>
+              <a:t>Sixth Outline Level</a:t>
+            </a:r>
+            <a:endParaRPr b="0" lang="en-US" sz="2000" strike="noStrike" u="none">
+              <a:solidFill>
+                <a:srgbClr val="000000"/>
+              </a:solidFill>
+              <a:effectLst/>
+              <a:uFillTx/>
+              <a:latin typeface="Arial"/>
+            </a:endParaRPr>
+          </a:p>
+          <a:p>
+            <a:pPr lvl="6" marL="3024000" indent="-216000">
+              <a:lnSpc>
+                <a:spcPct val="90000"/>
+              </a:lnSpc>
+              <a:spcBef>
+                <a:spcPts val="283"/>
+              </a:spcBef>
+              <a:buClr>
+                <a:srgbClr val="000000"/>
+              </a:buClr>
+              <a:buSzPct val="45000"/>
+              <a:buFont typeface="Wingdings" charset="2"/>
+              <a:buChar char=""/>
+            </a:pPr>
+            <a:r>
+              <a:rPr b="0" lang="en-US" sz="2000" strike="noStrike" u="none">
+                <a:solidFill>
+                  <a:schemeClr val="dk1"/>
+                </a:solidFill>
+                <a:effectLst/>
+                <a:uFillTx/>
+                <a:latin typeface="Calibri"/>
+              </a:rPr>
+              <a:t>Seventh Outline Level</a:t>
+            </a:r>
+            <a:endParaRPr b="0" lang="en-US" sz="2000" strike="noStrike" u="none">
+              <a:solidFill>
+                <a:srgbClr val="000000"/>
+              </a:solidFill>
+              <a:effectLst/>
+              <a:uFillTx/>
+              <a:latin typeface="Arial"/>
             </a:endParaRPr>
           </a:p>
         </p:txBody>
@@ -2982,8 +2728,8 @@
 </file>
 
 <file path=ppt/slideLayouts/slideLayout2.xml><?xml version="1.0" encoding="utf-8"?>
-<p:sldLayout xmlns:a="http://schemas.openxmlformats.org/drawingml/2006/main" xmlns:p="http://schemas.openxmlformats.org/presentationml/2006/main" xmlns:r="http://schemas.openxmlformats.org/officeDocument/2006/relationships" xmlns:p14="http://schemas.microsoft.com/office/powerpoint/2010/main" xmlns:p15="http://schemas.microsoft.com/office/powerpoint/2012/main" xmlns:mc="http://schemas.openxmlformats.org/markup-compatibility/2006" type="blank" preserve="1">
-  <p:cSld name="Blank">
+<p:sldLayout xmlns:a="http://schemas.openxmlformats.org/drawingml/2006/main" xmlns:p="http://schemas.openxmlformats.org/presentationml/2006/main" xmlns:r="http://schemas.openxmlformats.org/officeDocument/2006/relationships" xmlns:p14="http://schemas.microsoft.com/office/powerpoint/2010/main" xmlns:p15="http://schemas.microsoft.com/office/powerpoint/2012/main" xmlns:mc="http://schemas.openxmlformats.org/markup-compatibility/2006" type="vertTitleAndTx" preserve="1">
+  <p:cSld name="Vertical Title and Text">
     <p:bg>
       <p:bgPr>
         <a:solidFill>
@@ -3007,7 +2753,265 @@
       </p:grpSpPr>
       <p:sp>
         <p:nvSpPr>
-          <p:cNvPr id="6" name="PlaceHolder 1"/>
+          <p:cNvPr id="7" name="PlaceHolder 1"/>
+          <p:cNvSpPr>
+            <a:spLocks noGrp="1"/>
+          </p:cNvSpPr>
+          <p:nvPr>
+            <p:ph type="title"/>
+          </p:nvPr>
+        </p:nvSpPr>
+        <p:spPr>
+          <a:xfrm>
+            <a:off x="8724960" y="365040"/>
+            <a:ext cx="2622240" cy="5805000"/>
+          </a:xfrm>
+          <a:prstGeom prst="rect">
+            <a:avLst/>
+          </a:prstGeom>
+          <a:noFill/>
+          <a:ln w="0">
+            <a:noFill/>
+          </a:ln>
+        </p:spPr>
+        <p:txBody>
+          <a:bodyPr lIns="91440" rIns="91440" tIns="45720" bIns="45720" anchor="ctr" vert="eaVert">
+            <a:noAutofit/>
+          </a:bodyPr>
+          <a:p>
+            <a:pPr indent="0" defTabSz="914400">
+              <a:lnSpc>
+                <a:spcPct val="90000"/>
+              </a:lnSpc>
+              <a:buNone/>
+              <a:tabLst>
+                <a:tab algn="l" pos="0"/>
+              </a:tabLst>
+            </a:pPr>
+            <a:r>
+              <a:rPr b="0" lang="en-US" sz="4400" strike="noStrike" u="none">
+                <a:solidFill>
+                  <a:schemeClr val="dk1"/>
+                </a:solidFill>
+                <a:effectLst/>
+                <a:uFillTx/>
+                <a:latin typeface="Calibri Light"/>
+              </a:rPr>
+              <a:t>Click to edit Master title style</a:t>
+            </a:r>
+            <a:endParaRPr b="0" lang="en-US" sz="4400" strike="noStrike" u="none">
+              <a:solidFill>
+                <a:srgbClr val="000000"/>
+              </a:solidFill>
+              <a:effectLst/>
+              <a:uFillTx/>
+              <a:latin typeface="Arial"/>
+            </a:endParaRPr>
+          </a:p>
+        </p:txBody>
+      </p:sp>
+      <p:sp>
+        <p:nvSpPr>
+          <p:cNvPr id="8" name="PlaceHolder 2"/>
+          <p:cNvSpPr>
+            <a:spLocks noGrp="1"/>
+          </p:cNvSpPr>
+          <p:nvPr>
+            <p:ph type="body"/>
+          </p:nvPr>
+        </p:nvSpPr>
+        <p:spPr>
+          <a:xfrm>
+            <a:off x="838080" y="365040"/>
+            <a:ext cx="7727400" cy="5805000"/>
+          </a:xfrm>
+          <a:prstGeom prst="rect">
+            <a:avLst/>
+          </a:prstGeom>
+          <a:noFill/>
+          <a:ln w="0">
+            <a:noFill/>
+          </a:ln>
+        </p:spPr>
+        <p:txBody>
+          <a:bodyPr lIns="91440" rIns="91440" tIns="45720" bIns="45720" anchor="t" vert="eaVert">
+            <a:noAutofit/>
+          </a:bodyPr>
+          <a:p>
+            <a:pPr marL="228600" indent="-228600" defTabSz="914400">
+              <a:lnSpc>
+                <a:spcPct val="90000"/>
+              </a:lnSpc>
+              <a:spcBef>
+                <a:spcPts val="1001"/>
+              </a:spcBef>
+              <a:buClr>
+                <a:srgbClr val="000000"/>
+              </a:buClr>
+              <a:buFont typeface="Arial"/>
+              <a:buChar char="•"/>
+            </a:pPr>
+            <a:r>
+              <a:rPr b="0" lang="en-US" sz="2800" strike="noStrike" u="none">
+                <a:solidFill>
+                  <a:schemeClr val="dk1"/>
+                </a:solidFill>
+                <a:effectLst/>
+                <a:uFillTx/>
+                <a:latin typeface="Calibri"/>
+              </a:rPr>
+              <a:t>Click to edit Master text styles</a:t>
+            </a:r>
+            <a:endParaRPr b="0" lang="en-US" sz="2800" strike="noStrike" u="none">
+              <a:solidFill>
+                <a:srgbClr val="000000"/>
+              </a:solidFill>
+              <a:effectLst/>
+              <a:uFillTx/>
+              <a:latin typeface="Arial"/>
+            </a:endParaRPr>
+          </a:p>
+          <a:p>
+            <a:pPr lvl="1" marL="685800" indent="-228600" defTabSz="914400">
+              <a:lnSpc>
+                <a:spcPct val="90000"/>
+              </a:lnSpc>
+              <a:spcBef>
+                <a:spcPts val="499"/>
+              </a:spcBef>
+              <a:buClr>
+                <a:srgbClr val="000000"/>
+              </a:buClr>
+              <a:buFont typeface="Arial"/>
+              <a:buChar char="•"/>
+            </a:pPr>
+            <a:r>
+              <a:rPr b="0" lang="en-US" sz="2400" strike="noStrike" u="none">
+                <a:solidFill>
+                  <a:schemeClr val="dk1"/>
+                </a:solidFill>
+                <a:effectLst/>
+                <a:uFillTx/>
+                <a:latin typeface="Calibri"/>
+              </a:rPr>
+              <a:t>Second level</a:t>
+            </a:r>
+            <a:endParaRPr b="0" lang="en-US" sz="2400" strike="noStrike" u="none">
+              <a:solidFill>
+                <a:srgbClr val="000000"/>
+              </a:solidFill>
+              <a:effectLst/>
+              <a:uFillTx/>
+              <a:latin typeface="Arial"/>
+            </a:endParaRPr>
+          </a:p>
+          <a:p>
+            <a:pPr lvl="2" marL="1143000" indent="-228600" defTabSz="914400">
+              <a:lnSpc>
+                <a:spcPct val="90000"/>
+              </a:lnSpc>
+              <a:spcBef>
+                <a:spcPts val="499"/>
+              </a:spcBef>
+              <a:buClr>
+                <a:srgbClr val="000000"/>
+              </a:buClr>
+              <a:buFont typeface="Arial"/>
+              <a:buChar char="•"/>
+            </a:pPr>
+            <a:r>
+              <a:rPr b="0" lang="en-US" sz="2000" strike="noStrike" u="none">
+                <a:solidFill>
+                  <a:schemeClr val="dk1"/>
+                </a:solidFill>
+                <a:effectLst/>
+                <a:uFillTx/>
+                <a:latin typeface="Calibri"/>
+              </a:rPr>
+              <a:t>Third level</a:t>
+            </a:r>
+            <a:endParaRPr b="0" lang="en-US" sz="2000" strike="noStrike" u="none">
+              <a:solidFill>
+                <a:srgbClr val="000000"/>
+              </a:solidFill>
+              <a:effectLst/>
+              <a:uFillTx/>
+              <a:latin typeface="Arial"/>
+            </a:endParaRPr>
+          </a:p>
+          <a:p>
+            <a:pPr lvl="3" marL="1600200" indent="-228600" defTabSz="914400">
+              <a:lnSpc>
+                <a:spcPct val="90000"/>
+              </a:lnSpc>
+              <a:spcBef>
+                <a:spcPts val="499"/>
+              </a:spcBef>
+              <a:buClr>
+                <a:srgbClr val="000000"/>
+              </a:buClr>
+              <a:buFont typeface="Arial"/>
+              <a:buChar char="•"/>
+            </a:pPr>
+            <a:r>
+              <a:rPr b="0" lang="en-US" sz="1800" strike="noStrike" u="none">
+                <a:solidFill>
+                  <a:schemeClr val="dk1"/>
+                </a:solidFill>
+                <a:effectLst/>
+                <a:uFillTx/>
+                <a:latin typeface="Calibri"/>
+              </a:rPr>
+              <a:t>Fourth level</a:t>
+            </a:r>
+            <a:endParaRPr b="0" lang="en-US" sz="1800" strike="noStrike" u="none">
+              <a:solidFill>
+                <a:srgbClr val="000000"/>
+              </a:solidFill>
+              <a:effectLst/>
+              <a:uFillTx/>
+              <a:latin typeface="Arial"/>
+            </a:endParaRPr>
+          </a:p>
+          <a:p>
+            <a:pPr lvl="4" marL="2057400" indent="-228600" defTabSz="914400">
+              <a:lnSpc>
+                <a:spcPct val="90000"/>
+              </a:lnSpc>
+              <a:spcBef>
+                <a:spcPts val="499"/>
+              </a:spcBef>
+              <a:buClr>
+                <a:srgbClr val="000000"/>
+              </a:buClr>
+              <a:buFont typeface="Arial"/>
+              <a:buChar char="•"/>
+            </a:pPr>
+            <a:r>
+              <a:rPr b="0" lang="en-US" sz="1800" strike="noStrike" u="none">
+                <a:solidFill>
+                  <a:schemeClr val="dk1"/>
+                </a:solidFill>
+                <a:effectLst/>
+                <a:uFillTx/>
+                <a:latin typeface="Calibri"/>
+              </a:rPr>
+              <a:t>Fifth level</a:t>
+            </a:r>
+            <a:endParaRPr b="0" lang="en-US" sz="1800" strike="noStrike" u="none">
+              <a:solidFill>
+                <a:srgbClr val="000000"/>
+              </a:solidFill>
+              <a:effectLst/>
+              <a:uFillTx/>
+              <a:latin typeface="Arial"/>
+            </a:endParaRPr>
+          </a:p>
+        </p:txBody>
+      </p:sp>
+      <p:sp>
+        <p:nvSpPr>
+          <p:cNvPr id="9" name="PlaceHolder 3"/>
           <p:cNvSpPr>
             <a:spLocks noGrp="1"/>
           </p:cNvSpPr>
@@ -3018,7 +3022,7 @@
         <p:spPr>
           <a:xfrm>
             <a:off x="838080" y="6356520"/>
-            <a:ext cx="2737080" cy="358920"/>
+            <a:ext cx="2736360" cy="358200"/>
           </a:xfrm>
           <a:prstGeom prst="rect">
             <a:avLst/>
@@ -3074,7 +3078,7 @@
                 <a:uFillTx/>
                 <a:latin typeface="Calibri"/>
               </a:rPr>
-              <a:t>&lt;date/time&gt;</a:t>
+              <a:t> </a:t>
             </a:r>
             <a:endParaRPr b="0" lang="en-US" sz="1200" strike="noStrike" u="none">
               <a:solidFill>
@@ -3089,7 +3093,7 @@
       </p:sp>
       <p:sp>
         <p:nvSpPr>
-          <p:cNvPr id="7" name="PlaceHolder 2"/>
+          <p:cNvPr id="10" name="PlaceHolder 4"/>
           <p:cNvSpPr>
             <a:spLocks noGrp="1"/>
           </p:cNvSpPr>
@@ -3100,7 +3104,7 @@
         <p:spPr>
           <a:xfrm>
             <a:off x="4038480" y="6356520"/>
-            <a:ext cx="4108680" cy="358920"/>
+            <a:ext cx="4107960" cy="358200"/>
           </a:xfrm>
           <a:prstGeom prst="rect">
             <a:avLst/>
@@ -3152,7 +3156,7 @@
                 <a:uFillTx/>
                 <a:latin typeface="Times New Roman"/>
               </a:rPr>
-              <a:t>&lt;footer&gt;</a:t>
+              <a:t> </a:t>
             </a:r>
             <a:endParaRPr b="0" lang="en-US" sz="1400" strike="noStrike" u="none">
               <a:solidFill>
@@ -3167,7 +3171,7 @@
       </p:sp>
       <p:sp>
         <p:nvSpPr>
-          <p:cNvPr id="8" name="PlaceHolder 3"/>
+          <p:cNvPr id="11" name="PlaceHolder 5"/>
           <p:cNvSpPr>
             <a:spLocks noGrp="1"/>
           </p:cNvSpPr>
@@ -3178,7 +3182,7 @@
         <p:spPr>
           <a:xfrm>
             <a:off x="8610480" y="6356520"/>
-            <a:ext cx="2737080" cy="358920"/>
+            <a:ext cx="2736360" cy="358200"/>
           </a:xfrm>
           <a:prstGeom prst="rect">
             <a:avLst/>
@@ -3223,7 +3227,7 @@
                 <a:tab algn="l" pos="0"/>
               </a:tabLst>
             </a:pPr>
-            <a:fld id="{8CABB161-69E3-40D4-9009-B9E52448A839}" type="slidenum">
+            <a:fld id="{D8FC2F9B-E2E9-4321-933A-DA92ACBB5DE2}" type="slidenum">
               <a:rPr b="0" lang="en-US" sz="1200" strike="noStrike" u="none">
                 <a:solidFill>
                   <a:schemeClr val="dk1">
@@ -3234,7 +3238,7 @@
                 <a:uFillTx/>
                 <a:latin typeface="Calibri"/>
               </a:rPr>
-              <a:t>&lt;number&gt;</a:t>
+              <a:t>14</a:t>
             </a:fld>
             <a:endParaRPr b="0" lang="en-US" sz="1200" strike="noStrike" u="none">
               <a:solidFill>
@@ -3253,8 +3257,8 @@
 </file>
 
 <file path=ppt/slideLayouts/slideLayout3.xml><?xml version="1.0" encoding="utf-8"?>
-<p:sldLayout xmlns:a="http://schemas.openxmlformats.org/drawingml/2006/main" xmlns:p="http://schemas.openxmlformats.org/presentationml/2006/main" xmlns:r="http://schemas.openxmlformats.org/officeDocument/2006/relationships" xmlns:p14="http://schemas.microsoft.com/office/powerpoint/2010/main" xmlns:p15="http://schemas.microsoft.com/office/powerpoint/2012/main" xmlns:mc="http://schemas.openxmlformats.org/markup-compatibility/2006" type="blank" preserve="1">
-  <p:cSld name="Content with Caption">
+<p:sldLayout xmlns:a="http://schemas.openxmlformats.org/drawingml/2006/main" xmlns:p="http://schemas.openxmlformats.org/presentationml/2006/main" xmlns:r="http://schemas.openxmlformats.org/officeDocument/2006/relationships" xmlns:p14="http://schemas.microsoft.com/office/powerpoint/2010/main" xmlns:p15="http://schemas.microsoft.com/office/powerpoint/2012/main" xmlns:mc="http://schemas.openxmlformats.org/markup-compatibility/2006" type="obj" preserve="1">
+  <p:cSld name="Title and Content">
     <p:bg>
       <p:bgPr>
         <a:solidFill>
@@ -3278,7 +3282,7 @@
       </p:grpSpPr>
       <p:sp>
         <p:nvSpPr>
-          <p:cNvPr id="9" name="PlaceHolder 1"/>
+          <p:cNvPr id="12" name="PlaceHolder 1"/>
           <p:cNvSpPr>
             <a:spLocks noGrp="1"/>
           </p:cNvSpPr>
@@ -3288,8 +3292,8 @@
         </p:nvSpPr>
         <p:spPr>
           <a:xfrm>
-            <a:off x="839880" y="457200"/>
-            <a:ext cx="3926160" cy="1594080"/>
+            <a:off x="838080" y="365040"/>
+            <a:ext cx="10508760" cy="1318680"/>
           </a:xfrm>
           <a:prstGeom prst="rect">
             <a:avLst/>
@@ -3300,7 +3304,7 @@
           </a:ln>
         </p:spPr>
         <p:txBody>
-          <a:bodyPr lIns="91440" rIns="91440" tIns="45720" bIns="45720" anchor="b">
+          <a:bodyPr lIns="91440" rIns="91440" tIns="45720" bIns="45720" anchor="ctr">
             <a:noAutofit/>
           </a:bodyPr>
           <a:p>
@@ -3314,7 +3318,7 @@
               </a:tabLst>
             </a:pPr>
             <a:r>
-              <a:rPr b="0" lang="en-US" sz="3200" strike="noStrike" u="none">
+              <a:rPr b="0" lang="en-US" sz="4400" strike="noStrike" u="none">
                 <a:solidFill>
                   <a:schemeClr val="dk1"/>
                 </a:solidFill>
@@ -3324,7 +3328,7 @@
               </a:rPr>
               <a:t>Click to edit Master title style</a:t>
             </a:r>
-            <a:endParaRPr b="0" lang="en-US" sz="3200" strike="noStrike" u="none">
+            <a:endParaRPr b="0" lang="en-US" sz="4400" strike="noStrike" u="none">
               <a:solidFill>
                 <a:srgbClr val="000000"/>
               </a:solidFill>
@@ -3337,7 +3341,7 @@
       </p:sp>
       <p:sp>
         <p:nvSpPr>
-          <p:cNvPr id="10" name="PlaceHolder 2"/>
+          <p:cNvPr id="13" name="PlaceHolder 2"/>
           <p:cNvSpPr>
             <a:spLocks noGrp="1"/>
           </p:cNvSpPr>
@@ -3347,8 +3351,8 @@
         </p:nvSpPr>
         <p:spPr>
           <a:xfrm>
-            <a:off x="5183280" y="987480"/>
-            <a:ext cx="6166080" cy="4867560"/>
+            <a:off x="838080" y="1825560"/>
+            <a:ext cx="10508760" cy="4344480"/>
           </a:xfrm>
           <a:prstGeom prst="rect">
             <a:avLst/>
@@ -3377,7 +3381,7 @@
               <a:buChar char="•"/>
             </a:pPr>
             <a:r>
-              <a:rPr b="0" lang="en-US" sz="3200" strike="noStrike" u="none">
+              <a:rPr b="0" lang="en-US" sz="2800" strike="noStrike" u="none">
                 <a:solidFill>
                   <a:schemeClr val="dk1"/>
                 </a:solidFill>
@@ -3387,7 +3391,7 @@
               </a:rPr>
               <a:t>Click to edit Master text styles</a:t>
             </a:r>
-            <a:endParaRPr b="0" lang="en-US" sz="3200" strike="noStrike" u="none">
+            <a:endParaRPr b="0" lang="en-US" sz="2800" strike="noStrike" u="none">
               <a:solidFill>
                 <a:srgbClr val="000000"/>
               </a:solidFill>
@@ -3411,7 +3415,7 @@
               <a:buChar char="•"/>
             </a:pPr>
             <a:r>
-              <a:rPr b="0" lang="en-US" sz="2800" strike="noStrike" u="none">
+              <a:rPr b="0" lang="en-US" sz="2400" strike="noStrike" u="none">
                 <a:solidFill>
                   <a:schemeClr val="dk1"/>
                 </a:solidFill>
@@ -3421,7 +3425,7 @@
               </a:rPr>
               <a:t>Second level</a:t>
             </a:r>
-            <a:endParaRPr b="0" lang="en-US" sz="2800" strike="noStrike" u="none">
+            <a:endParaRPr b="0" lang="en-US" sz="2400" strike="noStrike" u="none">
               <a:solidFill>
                 <a:srgbClr val="000000"/>
               </a:solidFill>
@@ -3445,7 +3449,7 @@
               <a:buChar char="•"/>
             </a:pPr>
             <a:r>
-              <a:rPr b="0" lang="en-US" sz="2400" strike="noStrike" u="none">
+              <a:rPr b="0" lang="en-US" sz="2000" strike="noStrike" u="none">
                 <a:solidFill>
                   <a:schemeClr val="dk1"/>
                 </a:solidFill>
@@ -3455,7 +3459,7 @@
               </a:rPr>
               <a:t>Third level</a:t>
             </a:r>
-            <a:endParaRPr b="0" lang="en-US" sz="2400" strike="noStrike" u="none">
+            <a:endParaRPr b="0" lang="en-US" sz="2000" strike="noStrike" u="none">
               <a:solidFill>
                 <a:srgbClr val="000000"/>
               </a:solidFill>
@@ -3479,7 +3483,7 @@
               <a:buChar char="•"/>
             </a:pPr>
             <a:r>
-              <a:rPr b="0" lang="en-US" sz="2000" strike="noStrike" u="none">
+              <a:rPr b="0" lang="en-US" sz="1800" strike="noStrike" u="none">
                 <a:solidFill>
                   <a:schemeClr val="dk1"/>
                 </a:solidFill>
@@ -3489,7 +3493,7 @@
               </a:rPr>
               <a:t>Fourth level</a:t>
             </a:r>
-            <a:endParaRPr b="0" lang="en-US" sz="2000" strike="noStrike" u="none">
+            <a:endParaRPr b="0" lang="en-US" sz="1800" strike="noStrike" u="none">
               <a:solidFill>
                 <a:srgbClr val="000000"/>
               </a:solidFill>
@@ -3513,7 +3517,7 @@
               <a:buChar char="•"/>
             </a:pPr>
             <a:r>
-              <a:rPr b="0" lang="en-US" sz="2000" strike="noStrike" u="none">
+              <a:rPr b="0" lang="en-US" sz="1800" strike="noStrike" u="none">
                 <a:solidFill>
                   <a:schemeClr val="dk1"/>
                 </a:solidFill>
@@ -3523,7 +3527,7 @@
               </a:rPr>
               <a:t>Fifth level</a:t>
             </a:r>
-            <a:endParaRPr b="0" lang="en-US" sz="2000" strike="noStrike" u="none">
+            <a:endParaRPr b="0" lang="en-US" sz="1800" strike="noStrike" u="none">
               <a:solidFill>
                 <a:srgbClr val="000000"/>
               </a:solidFill>
@@ -3536,69 +3540,7 @@
       </p:sp>
       <p:sp>
         <p:nvSpPr>
-          <p:cNvPr id="11" name="PlaceHolder 3"/>
-          <p:cNvSpPr>
-            <a:spLocks noGrp="1"/>
-          </p:cNvSpPr>
-          <p:nvPr>
-            <p:ph type="body"/>
-          </p:nvPr>
-        </p:nvSpPr>
-        <p:spPr>
-          <a:xfrm>
-            <a:off x="839880" y="2057400"/>
-            <a:ext cx="3926160" cy="3805560"/>
-          </a:xfrm>
-          <a:prstGeom prst="rect">
-            <a:avLst/>
-          </a:prstGeom>
-          <a:noFill/>
-          <a:ln w="0">
-            <a:noFill/>
-          </a:ln>
-        </p:spPr>
-        <p:txBody>
-          <a:bodyPr lIns="91440" rIns="91440" tIns="45720" bIns="45720" anchor="t">
-            <a:noAutofit/>
-          </a:bodyPr>
-          <a:p>
-            <a:pPr indent="0" defTabSz="914400">
-              <a:lnSpc>
-                <a:spcPct val="90000"/>
-              </a:lnSpc>
-              <a:spcBef>
-                <a:spcPts val="1001"/>
-              </a:spcBef>
-              <a:buNone/>
-              <a:tabLst>
-                <a:tab algn="l" pos="0"/>
-              </a:tabLst>
-            </a:pPr>
-            <a:r>
-              <a:rPr b="0" lang="en-US" sz="1600" strike="noStrike" u="none">
-                <a:solidFill>
-                  <a:schemeClr val="dk1"/>
-                </a:solidFill>
-                <a:effectLst/>
-                <a:uFillTx/>
-                <a:latin typeface="Calibri"/>
-              </a:rPr>
-              <a:t>Click to edit Master text styles</a:t>
-            </a:r>
-            <a:endParaRPr b="0" lang="en-US" sz="1600" strike="noStrike" u="none">
-              <a:solidFill>
-                <a:srgbClr val="000000"/>
-              </a:solidFill>
-              <a:effectLst/>
-              <a:uFillTx/>
-              <a:latin typeface="Arial"/>
-            </a:endParaRPr>
-          </a:p>
-        </p:txBody>
-      </p:sp>
-      <p:sp>
-        <p:nvSpPr>
-          <p:cNvPr id="12" name="PlaceHolder 4"/>
+          <p:cNvPr id="14" name="PlaceHolder 3"/>
           <p:cNvSpPr>
             <a:spLocks noGrp="1"/>
           </p:cNvSpPr>
@@ -3609,7 +3551,7 @@
         <p:spPr>
           <a:xfrm>
             <a:off x="838080" y="6356520"/>
-            <a:ext cx="2737080" cy="358920"/>
+            <a:ext cx="2736360" cy="358200"/>
           </a:xfrm>
           <a:prstGeom prst="rect">
             <a:avLst/>
@@ -3665,7 +3607,7 @@
                 <a:uFillTx/>
                 <a:latin typeface="Calibri"/>
               </a:rPr>
-              <a:t>&lt;date/time&gt;</a:t>
+              <a:t> </a:t>
             </a:r>
             <a:endParaRPr b="0" lang="en-US" sz="1200" strike="noStrike" u="none">
               <a:solidFill>
@@ -3680,7 +3622,7 @@
       </p:sp>
       <p:sp>
         <p:nvSpPr>
-          <p:cNvPr id="13" name="PlaceHolder 5"/>
+          <p:cNvPr id="15" name="PlaceHolder 4"/>
           <p:cNvSpPr>
             <a:spLocks noGrp="1"/>
           </p:cNvSpPr>
@@ -3691,7 +3633,7 @@
         <p:spPr>
           <a:xfrm>
             <a:off x="4038480" y="6356520"/>
-            <a:ext cx="4108680" cy="358920"/>
+            <a:ext cx="4107960" cy="358200"/>
           </a:xfrm>
           <a:prstGeom prst="rect">
             <a:avLst/>
@@ -3743,7 +3685,7 @@
                 <a:uFillTx/>
                 <a:latin typeface="Times New Roman"/>
               </a:rPr>
-              <a:t>&lt;footer&gt;</a:t>
+              <a:t> </a:t>
             </a:r>
             <a:endParaRPr b="0" lang="en-US" sz="1400" strike="noStrike" u="none">
               <a:solidFill>
@@ -3758,7 +3700,7 @@
       </p:sp>
       <p:sp>
         <p:nvSpPr>
-          <p:cNvPr id="14" name="PlaceHolder 6"/>
+          <p:cNvPr id="16" name="PlaceHolder 5"/>
           <p:cNvSpPr>
             <a:spLocks noGrp="1"/>
           </p:cNvSpPr>
@@ -3769,7 +3711,7 @@
         <p:spPr>
           <a:xfrm>
             <a:off x="8610480" y="6356520"/>
-            <a:ext cx="2737080" cy="358920"/>
+            <a:ext cx="2736360" cy="358200"/>
           </a:xfrm>
           <a:prstGeom prst="rect">
             <a:avLst/>
@@ -3814,7 +3756,7 @@
                 <a:tab algn="l" pos="0"/>
               </a:tabLst>
             </a:pPr>
-            <a:fld id="{16424370-12B5-41FE-AE75-FFFDB826D53E}" type="slidenum">
+            <a:fld id="{653B6CB0-C142-4DA4-B4BD-7F8311667C4D}" type="slidenum">
               <a:rPr b="0" lang="en-US" sz="1200" strike="noStrike" u="none">
                 <a:solidFill>
                   <a:schemeClr val="dk1">
@@ -3825,7 +3767,7 @@
                 <a:uFillTx/>
                 <a:latin typeface="Calibri"/>
               </a:rPr>
-              <a:t>&lt;number&gt;</a:t>
+              <a:t>14</a:t>
             </a:fld>
             <a:endParaRPr b="0" lang="en-US" sz="1200" strike="noStrike" u="none">
               <a:solidFill>
@@ -3845,7 +3787,7 @@
 
 <file path=ppt/slideLayouts/slideLayout4.xml><?xml version="1.0" encoding="utf-8"?>
 <p:sldLayout xmlns:a="http://schemas.openxmlformats.org/drawingml/2006/main" xmlns:p="http://schemas.openxmlformats.org/presentationml/2006/main" xmlns:r="http://schemas.openxmlformats.org/officeDocument/2006/relationships" xmlns:p14="http://schemas.microsoft.com/office/powerpoint/2010/main" xmlns:p15="http://schemas.microsoft.com/office/powerpoint/2012/main" xmlns:mc="http://schemas.openxmlformats.org/markup-compatibility/2006" type="blank" preserve="1">
-  <p:cSld name="Picture with Caption">
+  <p:cSld name="Section Header">
     <p:bg>
       <p:bgPr>
         <a:solidFill>
@@ -3869,7 +3811,7 @@
       </p:grpSpPr>
       <p:sp>
         <p:nvSpPr>
-          <p:cNvPr id="15" name="PlaceHolder 1"/>
+          <p:cNvPr id="17" name="PlaceHolder 1"/>
           <p:cNvSpPr>
             <a:spLocks noGrp="1"/>
           </p:cNvSpPr>
@@ -3879,8 +3821,8 @@
         </p:nvSpPr>
         <p:spPr>
           <a:xfrm>
-            <a:off x="839880" y="457200"/>
-            <a:ext cx="3926160" cy="1594080"/>
+            <a:off x="831960" y="1709640"/>
+            <a:ext cx="10508760" cy="2845800"/>
           </a:xfrm>
           <a:prstGeom prst="rect">
             <a:avLst/>
@@ -3905,7 +3847,7 @@
               </a:tabLst>
             </a:pPr>
             <a:r>
-              <a:rPr b="0" lang="en-US" sz="3200" strike="noStrike" u="none">
+              <a:rPr b="0" lang="en-US" sz="6000" strike="noStrike" u="none">
                 <a:solidFill>
                   <a:schemeClr val="dk1"/>
                 </a:solidFill>
@@ -3915,7 +3857,7 @@
               </a:rPr>
               <a:t>Click to edit Master title style</a:t>
             </a:r>
-            <a:endParaRPr b="0" lang="en-US" sz="3200" strike="noStrike" u="none">
+            <a:endParaRPr b="0" lang="en-US" sz="6000" strike="noStrike" u="none">
               <a:solidFill>
                 <a:srgbClr val="000000"/>
               </a:solidFill>
@@ -3928,7 +3870,7 @@
       </p:sp>
       <p:sp>
         <p:nvSpPr>
-          <p:cNvPr id="16" name="PlaceHolder 2"/>
+          <p:cNvPr id="18" name="PlaceHolder 2"/>
           <p:cNvSpPr>
             <a:spLocks noGrp="1"/>
           </p:cNvSpPr>
@@ -3938,67 +3880,8 @@
         </p:nvSpPr>
         <p:spPr>
           <a:xfrm>
-            <a:off x="5183280" y="987480"/>
-            <a:ext cx="6166080" cy="4867560"/>
-          </a:xfrm>
-          <a:prstGeom prst="rect">
-            <a:avLst/>
-          </a:prstGeom>
-          <a:noFill/>
-          <a:ln w="0">
-            <a:noFill/>
-          </a:ln>
-        </p:spPr>
-        <p:txBody>
-          <a:bodyPr lIns="90000" rIns="90000" tIns="45000" bIns="45000" anchor="t">
-            <a:noAutofit/>
-          </a:bodyPr>
-          <a:p>
-            <a:pPr indent="0" defTabSz="914400">
-              <a:lnSpc>
-                <a:spcPct val="100000"/>
-              </a:lnSpc>
-              <a:buNone/>
-              <a:tabLst>
-                <a:tab algn="l" pos="0"/>
-              </a:tabLst>
-            </a:pPr>
-            <a:r>
-              <a:rPr b="0" lang="en-US" sz="3200" strike="noStrike" u="none">
-                <a:solidFill>
-                  <a:schemeClr val="dk1"/>
-                </a:solidFill>
-                <a:effectLst/>
-                <a:uFillTx/>
-                <a:latin typeface="Calibri"/>
-              </a:rPr>
-              <a:t>Click icon to add picture</a:t>
-            </a:r>
-            <a:endParaRPr b="0" lang="en-US" sz="3200" strike="noStrike" u="none">
-              <a:solidFill>
-                <a:srgbClr val="000000"/>
-              </a:solidFill>
-              <a:effectLst/>
-              <a:uFillTx/>
-              <a:latin typeface="Arial"/>
-            </a:endParaRPr>
-          </a:p>
-        </p:txBody>
-      </p:sp>
-      <p:sp>
-        <p:nvSpPr>
-          <p:cNvPr id="17" name="PlaceHolder 3"/>
-          <p:cNvSpPr>
-            <a:spLocks noGrp="1"/>
-          </p:cNvSpPr>
-          <p:nvPr>
-            <p:ph type="body"/>
-          </p:nvPr>
-        </p:nvSpPr>
-        <p:spPr>
-          <a:xfrm>
-            <a:off x="839880" y="2057400"/>
-            <a:ext cx="3926160" cy="3805560"/>
+            <a:off x="831960" y="4589640"/>
+            <a:ext cx="10508760" cy="1493280"/>
           </a:xfrm>
           <a:prstGeom prst="rect">
             <a:avLst/>
@@ -4026,9 +3909,11 @@
               </a:tabLst>
             </a:pPr>
             <a:r>
-              <a:rPr b="0" lang="en-US" sz="1600" strike="noStrike" u="none">
+              <a:rPr b="0" lang="en-US" sz="2400" strike="noStrike" u="none">
                 <a:solidFill>
-                  <a:schemeClr val="dk1"/>
+                  <a:schemeClr val="dk1">
+                    <a:tint val="75000"/>
+                  </a:schemeClr>
                 </a:solidFill>
                 <a:effectLst/>
                 <a:uFillTx/>
@@ -4036,7 +3921,7 @@
               </a:rPr>
               <a:t>Click to edit Master text styles</a:t>
             </a:r>
-            <a:endParaRPr b="0" lang="en-US" sz="1600" strike="noStrike" u="none">
+            <a:endParaRPr b="0" lang="en-US" sz="2400" strike="noStrike" u="none">
               <a:solidFill>
                 <a:srgbClr val="000000"/>
               </a:solidFill>
@@ -4049,7 +3934,7 @@
       </p:sp>
       <p:sp>
         <p:nvSpPr>
-          <p:cNvPr id="18" name="PlaceHolder 4"/>
+          <p:cNvPr id="19" name="PlaceHolder 3"/>
           <p:cNvSpPr>
             <a:spLocks noGrp="1"/>
           </p:cNvSpPr>
@@ -4060,7 +3945,7 @@
         <p:spPr>
           <a:xfrm>
             <a:off x="838080" y="6356520"/>
-            <a:ext cx="2737080" cy="358920"/>
+            <a:ext cx="2736360" cy="358200"/>
           </a:xfrm>
           <a:prstGeom prst="rect">
             <a:avLst/>
@@ -4116,7 +4001,7 @@
                 <a:uFillTx/>
                 <a:latin typeface="Calibri"/>
               </a:rPr>
-              <a:t>&lt;date/time&gt;</a:t>
+              <a:t> </a:t>
             </a:r>
             <a:endParaRPr b="0" lang="en-US" sz="1200" strike="noStrike" u="none">
               <a:solidFill>
@@ -4131,7 +4016,7 @@
       </p:sp>
       <p:sp>
         <p:nvSpPr>
-          <p:cNvPr id="19" name="PlaceHolder 5"/>
+          <p:cNvPr id="20" name="PlaceHolder 4"/>
           <p:cNvSpPr>
             <a:spLocks noGrp="1"/>
           </p:cNvSpPr>
@@ -4142,7 +4027,7 @@
         <p:spPr>
           <a:xfrm>
             <a:off x="4038480" y="6356520"/>
-            <a:ext cx="4108680" cy="358920"/>
+            <a:ext cx="4107960" cy="358200"/>
           </a:xfrm>
           <a:prstGeom prst="rect">
             <a:avLst/>
@@ -4194,7 +4079,7 @@
                 <a:uFillTx/>
                 <a:latin typeface="Times New Roman"/>
               </a:rPr>
-              <a:t>&lt;footer&gt;</a:t>
+              <a:t> </a:t>
             </a:r>
             <a:endParaRPr b="0" lang="en-US" sz="1400" strike="noStrike" u="none">
               <a:solidFill>
@@ -4209,7 +4094,7 @@
       </p:sp>
       <p:sp>
         <p:nvSpPr>
-          <p:cNvPr id="20" name="PlaceHolder 6"/>
+          <p:cNvPr id="21" name="PlaceHolder 5"/>
           <p:cNvSpPr>
             <a:spLocks noGrp="1"/>
           </p:cNvSpPr>
@@ -4220,7 +4105,7 @@
         <p:spPr>
           <a:xfrm>
             <a:off x="8610480" y="6356520"/>
-            <a:ext cx="2737080" cy="358920"/>
+            <a:ext cx="2736360" cy="358200"/>
           </a:xfrm>
           <a:prstGeom prst="rect">
             <a:avLst/>
@@ -4265,7 +4150,7 @@
                 <a:tab algn="l" pos="0"/>
               </a:tabLst>
             </a:pPr>
-            <a:fld id="{0C929839-D7D8-43BE-B707-D6A15BEB2323}" type="slidenum">
+            <a:fld id="{FF929170-B36A-4788-A360-598E71EA58AB}" type="slidenum">
               <a:rPr b="0" lang="en-US" sz="1200" strike="noStrike" u="none">
                 <a:solidFill>
                   <a:schemeClr val="dk1">
@@ -4276,7 +4161,7 @@
                 <a:uFillTx/>
                 <a:latin typeface="Calibri"/>
               </a:rPr>
-              <a:t>&lt;number&gt;</a:t>
+              <a:t>14</a:t>
             </a:fld>
             <a:endParaRPr b="0" lang="en-US" sz="1200" strike="noStrike" u="none">
               <a:solidFill>
@@ -4295,8 +4180,8 @@
 </file>
 
 <file path=ppt/slideLayouts/slideLayout5.xml><?xml version="1.0" encoding="utf-8"?>
-<p:sldLayout xmlns:a="http://schemas.openxmlformats.org/drawingml/2006/main" xmlns:p="http://schemas.openxmlformats.org/presentationml/2006/main" xmlns:r="http://schemas.openxmlformats.org/officeDocument/2006/relationships" xmlns:p14="http://schemas.microsoft.com/office/powerpoint/2010/main" xmlns:p15="http://schemas.microsoft.com/office/powerpoint/2012/main" xmlns:mc="http://schemas.openxmlformats.org/markup-compatibility/2006" type="title" preserve="1">
-  <p:cSld name="Title Slide">
+<p:sldLayout xmlns:a="http://schemas.openxmlformats.org/drawingml/2006/main" xmlns:p="http://schemas.openxmlformats.org/presentationml/2006/main" xmlns:r="http://schemas.openxmlformats.org/officeDocument/2006/relationships" xmlns:p14="http://schemas.microsoft.com/office/powerpoint/2010/main" xmlns:p15="http://schemas.microsoft.com/office/powerpoint/2012/main" xmlns:mc="http://schemas.openxmlformats.org/markup-compatibility/2006" type="twoObj" preserve="1">
+  <p:cSld name="Two Content">
     <p:bg>
       <p:bgPr>
         <a:solidFill>
@@ -4320,7 +4205,7 @@
       </p:grpSpPr>
       <p:sp>
         <p:nvSpPr>
-          <p:cNvPr id="21" name="PlaceHolder 1"/>
+          <p:cNvPr id="22" name="PlaceHolder 1"/>
           <p:cNvSpPr>
             <a:spLocks noGrp="1"/>
           </p:cNvSpPr>
@@ -4330,8 +4215,8 @@
         </p:nvSpPr>
         <p:spPr>
           <a:xfrm>
-            <a:off x="1523880" y="1122480"/>
-            <a:ext cx="9137880" cy="2381400"/>
+            <a:off x="838080" y="365040"/>
+            <a:ext cx="10508760" cy="1318680"/>
           </a:xfrm>
           <a:prstGeom prst="rect">
             <a:avLst/>
@@ -4342,11 +4227,11 @@
           </a:ln>
         </p:spPr>
         <p:txBody>
-          <a:bodyPr lIns="91440" rIns="91440" tIns="45720" bIns="45720" anchor="b">
+          <a:bodyPr lIns="91440" rIns="91440" tIns="45720" bIns="45720" anchor="ctr">
             <a:noAutofit/>
           </a:bodyPr>
           <a:p>
-            <a:pPr indent="0" algn="ctr" defTabSz="914400">
+            <a:pPr indent="0" defTabSz="914400">
               <a:lnSpc>
                 <a:spcPct val="90000"/>
               </a:lnSpc>
@@ -4356,7 +4241,7 @@
               </a:tabLst>
             </a:pPr>
             <a:r>
-              <a:rPr b="0" lang="en-US" sz="6000" strike="noStrike" u="none">
+              <a:rPr b="0" lang="en-US" sz="4400" strike="noStrike" u="none">
                 <a:solidFill>
                   <a:schemeClr val="dk1"/>
                 </a:solidFill>
@@ -4366,7 +4251,7 @@
               </a:rPr>
               <a:t>Click to edit Master title style</a:t>
             </a:r>
-            <a:endParaRPr b="0" lang="en-US" sz="6000" strike="noStrike" u="none">
+            <a:endParaRPr b="0" lang="en-US" sz="4400" strike="noStrike" u="none">
               <a:solidFill>
                 <a:srgbClr val="000000"/>
               </a:solidFill>
@@ -4379,7 +4264,405 @@
       </p:sp>
       <p:sp>
         <p:nvSpPr>
-          <p:cNvPr id="22" name="PlaceHolder 2"/>
+          <p:cNvPr id="23" name="PlaceHolder 2"/>
+          <p:cNvSpPr>
+            <a:spLocks noGrp="1"/>
+          </p:cNvSpPr>
+          <p:nvPr>
+            <p:ph type="body"/>
+          </p:nvPr>
+        </p:nvSpPr>
+        <p:spPr>
+          <a:xfrm>
+            <a:off x="838080" y="1825560"/>
+            <a:ext cx="5174640" cy="4344480"/>
+          </a:xfrm>
+          <a:prstGeom prst="rect">
+            <a:avLst/>
+          </a:prstGeom>
+          <a:noFill/>
+          <a:ln w="0">
+            <a:noFill/>
+          </a:ln>
+        </p:spPr>
+        <p:txBody>
+          <a:bodyPr lIns="91440" rIns="91440" tIns="45720" bIns="45720" anchor="t">
+            <a:noAutofit/>
+          </a:bodyPr>
+          <a:p>
+            <a:pPr marL="228600" indent="-228600" defTabSz="914400">
+              <a:lnSpc>
+                <a:spcPct val="90000"/>
+              </a:lnSpc>
+              <a:spcBef>
+                <a:spcPts val="1001"/>
+              </a:spcBef>
+              <a:buClr>
+                <a:srgbClr val="000000"/>
+              </a:buClr>
+              <a:buFont typeface="Arial"/>
+              <a:buChar char="•"/>
+            </a:pPr>
+            <a:r>
+              <a:rPr b="0" lang="en-US" sz="2800" strike="noStrike" u="none">
+                <a:solidFill>
+                  <a:schemeClr val="dk1"/>
+                </a:solidFill>
+                <a:effectLst/>
+                <a:uFillTx/>
+                <a:latin typeface="Calibri"/>
+              </a:rPr>
+              <a:t>Click to edit Master text styles</a:t>
+            </a:r>
+            <a:endParaRPr b="0" lang="en-US" sz="2800" strike="noStrike" u="none">
+              <a:solidFill>
+                <a:srgbClr val="000000"/>
+              </a:solidFill>
+              <a:effectLst/>
+              <a:uFillTx/>
+              <a:latin typeface="Arial"/>
+            </a:endParaRPr>
+          </a:p>
+          <a:p>
+            <a:pPr lvl="1" marL="685800" indent="-228600" defTabSz="914400">
+              <a:lnSpc>
+                <a:spcPct val="90000"/>
+              </a:lnSpc>
+              <a:spcBef>
+                <a:spcPts val="499"/>
+              </a:spcBef>
+              <a:buClr>
+                <a:srgbClr val="000000"/>
+              </a:buClr>
+              <a:buFont typeface="Arial"/>
+              <a:buChar char="•"/>
+            </a:pPr>
+            <a:r>
+              <a:rPr b="0" lang="en-US" sz="2400" strike="noStrike" u="none">
+                <a:solidFill>
+                  <a:schemeClr val="dk1"/>
+                </a:solidFill>
+                <a:effectLst/>
+                <a:uFillTx/>
+                <a:latin typeface="Calibri"/>
+              </a:rPr>
+              <a:t>Second level</a:t>
+            </a:r>
+            <a:endParaRPr b="0" lang="en-US" sz="2400" strike="noStrike" u="none">
+              <a:solidFill>
+                <a:srgbClr val="000000"/>
+              </a:solidFill>
+              <a:effectLst/>
+              <a:uFillTx/>
+              <a:latin typeface="Arial"/>
+            </a:endParaRPr>
+          </a:p>
+          <a:p>
+            <a:pPr lvl="2" marL="1143000" indent="-228600" defTabSz="914400">
+              <a:lnSpc>
+                <a:spcPct val="90000"/>
+              </a:lnSpc>
+              <a:spcBef>
+                <a:spcPts val="499"/>
+              </a:spcBef>
+              <a:buClr>
+                <a:srgbClr val="000000"/>
+              </a:buClr>
+              <a:buFont typeface="Arial"/>
+              <a:buChar char="•"/>
+            </a:pPr>
+            <a:r>
+              <a:rPr b="0" lang="en-US" sz="2000" strike="noStrike" u="none">
+                <a:solidFill>
+                  <a:schemeClr val="dk1"/>
+                </a:solidFill>
+                <a:effectLst/>
+                <a:uFillTx/>
+                <a:latin typeface="Calibri"/>
+              </a:rPr>
+              <a:t>Third level</a:t>
+            </a:r>
+            <a:endParaRPr b="0" lang="en-US" sz="2000" strike="noStrike" u="none">
+              <a:solidFill>
+                <a:srgbClr val="000000"/>
+              </a:solidFill>
+              <a:effectLst/>
+              <a:uFillTx/>
+              <a:latin typeface="Arial"/>
+            </a:endParaRPr>
+          </a:p>
+          <a:p>
+            <a:pPr lvl="3" marL="1600200" indent="-228600" defTabSz="914400">
+              <a:lnSpc>
+                <a:spcPct val="90000"/>
+              </a:lnSpc>
+              <a:spcBef>
+                <a:spcPts val="499"/>
+              </a:spcBef>
+              <a:buClr>
+                <a:srgbClr val="000000"/>
+              </a:buClr>
+              <a:buFont typeface="Arial"/>
+              <a:buChar char="•"/>
+            </a:pPr>
+            <a:r>
+              <a:rPr b="0" lang="en-US" sz="1800" strike="noStrike" u="none">
+                <a:solidFill>
+                  <a:schemeClr val="dk1"/>
+                </a:solidFill>
+                <a:effectLst/>
+                <a:uFillTx/>
+                <a:latin typeface="Calibri"/>
+              </a:rPr>
+              <a:t>Fourth level</a:t>
+            </a:r>
+            <a:endParaRPr b="0" lang="en-US" sz="1800" strike="noStrike" u="none">
+              <a:solidFill>
+                <a:srgbClr val="000000"/>
+              </a:solidFill>
+              <a:effectLst/>
+              <a:uFillTx/>
+              <a:latin typeface="Arial"/>
+            </a:endParaRPr>
+          </a:p>
+          <a:p>
+            <a:pPr lvl="4" marL="2057400" indent="-228600" defTabSz="914400">
+              <a:lnSpc>
+                <a:spcPct val="90000"/>
+              </a:lnSpc>
+              <a:spcBef>
+                <a:spcPts val="499"/>
+              </a:spcBef>
+              <a:buClr>
+                <a:srgbClr val="000000"/>
+              </a:buClr>
+              <a:buFont typeface="Arial"/>
+              <a:buChar char="•"/>
+            </a:pPr>
+            <a:r>
+              <a:rPr b="0" lang="en-US" sz="1800" strike="noStrike" u="none">
+                <a:solidFill>
+                  <a:schemeClr val="dk1"/>
+                </a:solidFill>
+                <a:effectLst/>
+                <a:uFillTx/>
+                <a:latin typeface="Calibri"/>
+              </a:rPr>
+              <a:t>Fifth level</a:t>
+            </a:r>
+            <a:endParaRPr b="0" lang="en-US" sz="1800" strike="noStrike" u="none">
+              <a:solidFill>
+                <a:srgbClr val="000000"/>
+              </a:solidFill>
+              <a:effectLst/>
+              <a:uFillTx/>
+              <a:latin typeface="Arial"/>
+            </a:endParaRPr>
+          </a:p>
+        </p:txBody>
+      </p:sp>
+      <p:sp>
+        <p:nvSpPr>
+          <p:cNvPr id="24" name="PlaceHolder 3"/>
+          <p:cNvSpPr>
+            <a:spLocks noGrp="1"/>
+          </p:cNvSpPr>
+          <p:nvPr>
+            <p:ph type="body"/>
+          </p:nvPr>
+        </p:nvSpPr>
+        <p:spPr>
+          <a:xfrm>
+            <a:off x="6172200" y="1825560"/>
+            <a:ext cx="5174640" cy="4344480"/>
+          </a:xfrm>
+          <a:prstGeom prst="rect">
+            <a:avLst/>
+          </a:prstGeom>
+          <a:noFill/>
+          <a:ln w="0">
+            <a:noFill/>
+          </a:ln>
+        </p:spPr>
+        <p:txBody>
+          <a:bodyPr lIns="91440" rIns="91440" tIns="45720" bIns="45720" anchor="t">
+            <a:noAutofit/>
+          </a:bodyPr>
+          <a:p>
+            <a:pPr marL="228600" indent="-228600" defTabSz="914400">
+              <a:lnSpc>
+                <a:spcPct val="90000"/>
+              </a:lnSpc>
+              <a:spcBef>
+                <a:spcPts val="1001"/>
+              </a:spcBef>
+              <a:buClr>
+                <a:srgbClr val="000000"/>
+              </a:buClr>
+              <a:buFont typeface="Arial"/>
+              <a:buChar char="•"/>
+            </a:pPr>
+            <a:r>
+              <a:rPr b="0" lang="en-US" sz="2800" strike="noStrike" u="none">
+                <a:solidFill>
+                  <a:schemeClr val="dk1"/>
+                </a:solidFill>
+                <a:effectLst/>
+                <a:uFillTx/>
+                <a:latin typeface="Calibri"/>
+              </a:rPr>
+              <a:t>Click to edit Master text styles</a:t>
+            </a:r>
+            <a:endParaRPr b="0" lang="en-US" sz="2800" strike="noStrike" u="none">
+              <a:solidFill>
+                <a:srgbClr val="000000"/>
+              </a:solidFill>
+              <a:effectLst/>
+              <a:uFillTx/>
+              <a:latin typeface="Arial"/>
+            </a:endParaRPr>
+          </a:p>
+          <a:p>
+            <a:pPr lvl="1" marL="685800" indent="-228600" defTabSz="914400">
+              <a:lnSpc>
+                <a:spcPct val="90000"/>
+              </a:lnSpc>
+              <a:spcBef>
+                <a:spcPts val="499"/>
+              </a:spcBef>
+              <a:buClr>
+                <a:srgbClr val="000000"/>
+              </a:buClr>
+              <a:buFont typeface="Arial"/>
+              <a:buChar char="•"/>
+            </a:pPr>
+            <a:r>
+              <a:rPr b="0" lang="en-US" sz="2400" strike="noStrike" u="none">
+                <a:solidFill>
+                  <a:schemeClr val="dk1"/>
+                </a:solidFill>
+                <a:effectLst/>
+                <a:uFillTx/>
+                <a:latin typeface="Calibri"/>
+              </a:rPr>
+              <a:t>Second level</a:t>
+            </a:r>
+            <a:endParaRPr b="0" lang="en-US" sz="2400" strike="noStrike" u="none">
+              <a:solidFill>
+                <a:srgbClr val="000000"/>
+              </a:solidFill>
+              <a:effectLst/>
+              <a:uFillTx/>
+              <a:latin typeface="Arial"/>
+            </a:endParaRPr>
+          </a:p>
+          <a:p>
+            <a:pPr lvl="2" marL="1143000" indent="-228600" defTabSz="914400">
+              <a:lnSpc>
+                <a:spcPct val="90000"/>
+              </a:lnSpc>
+              <a:spcBef>
+                <a:spcPts val="499"/>
+              </a:spcBef>
+              <a:buClr>
+                <a:srgbClr val="000000"/>
+              </a:buClr>
+              <a:buFont typeface="Arial"/>
+              <a:buChar char="•"/>
+            </a:pPr>
+            <a:r>
+              <a:rPr b="0" lang="en-US" sz="2000" strike="noStrike" u="none">
+                <a:solidFill>
+                  <a:schemeClr val="dk1"/>
+                </a:solidFill>
+                <a:effectLst/>
+                <a:uFillTx/>
+                <a:latin typeface="Calibri"/>
+              </a:rPr>
+              <a:t>Third level</a:t>
+            </a:r>
+            <a:endParaRPr b="0" lang="en-US" sz="2000" strike="noStrike" u="none">
+              <a:solidFill>
+                <a:srgbClr val="000000"/>
+              </a:solidFill>
+              <a:effectLst/>
+              <a:uFillTx/>
+              <a:latin typeface="Arial"/>
+            </a:endParaRPr>
+          </a:p>
+          <a:p>
+            <a:pPr lvl="3" marL="1600200" indent="-228600" defTabSz="914400">
+              <a:lnSpc>
+                <a:spcPct val="90000"/>
+              </a:lnSpc>
+              <a:spcBef>
+                <a:spcPts val="499"/>
+              </a:spcBef>
+              <a:buClr>
+                <a:srgbClr val="000000"/>
+              </a:buClr>
+              <a:buFont typeface="Arial"/>
+              <a:buChar char="•"/>
+            </a:pPr>
+            <a:r>
+              <a:rPr b="0" lang="en-US" sz="1800" strike="noStrike" u="none">
+                <a:solidFill>
+                  <a:schemeClr val="dk1"/>
+                </a:solidFill>
+                <a:effectLst/>
+                <a:uFillTx/>
+                <a:latin typeface="Calibri"/>
+              </a:rPr>
+              <a:t>Fourth level</a:t>
+            </a:r>
+            <a:endParaRPr b="0" lang="en-US" sz="1800" strike="noStrike" u="none">
+              <a:solidFill>
+                <a:srgbClr val="000000"/>
+              </a:solidFill>
+              <a:effectLst/>
+              <a:uFillTx/>
+              <a:latin typeface="Arial"/>
+            </a:endParaRPr>
+          </a:p>
+          <a:p>
+            <a:pPr lvl="4" marL="2057400" indent="-228600" defTabSz="914400">
+              <a:lnSpc>
+                <a:spcPct val="90000"/>
+              </a:lnSpc>
+              <a:spcBef>
+                <a:spcPts val="499"/>
+              </a:spcBef>
+              <a:buClr>
+                <a:srgbClr val="000000"/>
+              </a:buClr>
+              <a:buFont typeface="Arial"/>
+              <a:buChar char="•"/>
+            </a:pPr>
+            <a:r>
+              <a:rPr b="0" lang="en-US" sz="1800" strike="noStrike" u="none">
+                <a:solidFill>
+                  <a:schemeClr val="dk1"/>
+                </a:solidFill>
+                <a:effectLst/>
+                <a:uFillTx/>
+                <a:latin typeface="Calibri"/>
+              </a:rPr>
+              <a:t>Fifth level</a:t>
+            </a:r>
+            <a:endParaRPr b="0" lang="en-US" sz="1800" strike="noStrike" u="none">
+              <a:solidFill>
+                <a:srgbClr val="000000"/>
+              </a:solidFill>
+              <a:effectLst/>
+              <a:uFillTx/>
+              <a:latin typeface="Arial"/>
+            </a:endParaRPr>
+          </a:p>
+        </p:txBody>
+      </p:sp>
+      <p:sp>
+        <p:nvSpPr>
+          <p:cNvPr id="25" name="PlaceHolder 4"/>
           <p:cNvSpPr>
             <a:spLocks noGrp="1"/>
           </p:cNvSpPr>
@@ -4390,7 +4673,7 @@
         <p:spPr>
           <a:xfrm>
             <a:off x="838080" y="6356520"/>
-            <a:ext cx="2737080" cy="358920"/>
+            <a:ext cx="2736360" cy="358200"/>
           </a:xfrm>
           <a:prstGeom prst="rect">
             <a:avLst/>
@@ -4446,7 +4729,7 @@
                 <a:uFillTx/>
                 <a:latin typeface="Calibri"/>
               </a:rPr>
-              <a:t>&lt;date/time&gt;</a:t>
+              <a:t> </a:t>
             </a:r>
             <a:endParaRPr b="0" lang="en-US" sz="1200" strike="noStrike" u="none">
               <a:solidFill>
@@ -4461,7 +4744,7 @@
       </p:sp>
       <p:sp>
         <p:nvSpPr>
-          <p:cNvPr id="23" name="PlaceHolder 3"/>
+          <p:cNvPr id="26" name="PlaceHolder 5"/>
           <p:cNvSpPr>
             <a:spLocks noGrp="1"/>
           </p:cNvSpPr>
@@ -4472,7 +4755,7 @@
         <p:spPr>
           <a:xfrm>
             <a:off x="4038480" y="6356520"/>
-            <a:ext cx="4108680" cy="358920"/>
+            <a:ext cx="4107960" cy="358200"/>
           </a:xfrm>
           <a:prstGeom prst="rect">
             <a:avLst/>
@@ -4524,7 +4807,7 @@
                 <a:uFillTx/>
                 <a:latin typeface="Times New Roman"/>
               </a:rPr>
-              <a:t>&lt;footer&gt;</a:t>
+              <a:t> </a:t>
             </a:r>
             <a:endParaRPr b="0" lang="en-US" sz="1400" strike="noStrike" u="none">
               <a:solidFill>
@@ -4539,7 +4822,7 @@
       </p:sp>
       <p:sp>
         <p:nvSpPr>
-          <p:cNvPr id="24" name="PlaceHolder 4"/>
+          <p:cNvPr id="27" name="PlaceHolder 6"/>
           <p:cNvSpPr>
             <a:spLocks noGrp="1"/>
           </p:cNvSpPr>
@@ -4550,7 +4833,7 @@
         <p:spPr>
           <a:xfrm>
             <a:off x="8610480" y="6356520"/>
-            <a:ext cx="2737080" cy="358920"/>
+            <a:ext cx="2736360" cy="358200"/>
           </a:xfrm>
           <a:prstGeom prst="rect">
             <a:avLst/>
@@ -4595,7 +4878,7 @@
                 <a:tab algn="l" pos="0"/>
               </a:tabLst>
             </a:pPr>
-            <a:fld id="{868DE7DE-F305-4331-BB42-FE6628565AAC}" type="slidenum">
+            <a:fld id="{EC13B179-7168-415F-A356-E72D4BDC3277}" type="slidenum">
               <a:rPr b="0" lang="en-US" sz="1200" strike="noStrike" u="none">
                 <a:solidFill>
                   <a:schemeClr val="dk1">
@@ -4606,7 +4889,7 @@
                 <a:uFillTx/>
                 <a:latin typeface="Calibri"/>
               </a:rPr>
-              <a:t>&lt;number&gt;</a:t>
+              <a:t>14</a:t>
             </a:fld>
             <a:endParaRPr b="0" lang="en-US" sz="1200" strike="noStrike" u="none">
               <a:solidFill>
@@ -4615,280 +4898,6 @@
               <a:effectLst/>
               <a:uFillTx/>
               <a:latin typeface="Times New Roman"/>
-            </a:endParaRPr>
-          </a:p>
-        </p:txBody>
-      </p:sp>
-      <p:sp>
-        <p:nvSpPr>
-          <p:cNvPr id="25" name="PlaceHolder 5"/>
-          <p:cNvSpPr>
-            <a:spLocks noGrp="1"/>
-          </p:cNvSpPr>
-          <p:nvPr>
-            <p:ph type="body"/>
-          </p:nvPr>
-        </p:nvSpPr>
-        <p:spPr>
-          <a:xfrm>
-            <a:off x="609480" y="1604520"/>
-            <a:ext cx="10966680" cy="3971520"/>
-          </a:xfrm>
-          <a:prstGeom prst="rect">
-            <a:avLst/>
-          </a:prstGeom>
-          <a:noFill/>
-          <a:ln w="0">
-            <a:noFill/>
-          </a:ln>
-        </p:spPr>
-        <p:txBody>
-          <a:bodyPr lIns="0" rIns="0" tIns="0" bIns="0" anchor="t">
-            <a:normAutofit/>
-          </a:bodyPr>
-          <a:p>
-            <a:pPr marL="432000" indent="-324000">
-              <a:lnSpc>
-                <a:spcPct val="90000"/>
-              </a:lnSpc>
-              <a:spcBef>
-                <a:spcPts val="1417"/>
-              </a:spcBef>
-              <a:buClr>
-                <a:srgbClr val="000000"/>
-              </a:buClr>
-              <a:buSzPct val="45000"/>
-              <a:buFont typeface="Wingdings" charset="2"/>
-              <a:buChar char=""/>
-            </a:pPr>
-            <a:r>
-              <a:rPr b="0" lang="en-US" sz="2800" strike="noStrike" u="none">
-                <a:solidFill>
-                  <a:schemeClr val="dk1"/>
-                </a:solidFill>
-                <a:effectLst/>
-                <a:uFillTx/>
-                <a:latin typeface="Calibri"/>
-              </a:rPr>
-              <a:t>Click to edit the outline text format</a:t>
-            </a:r>
-            <a:endParaRPr b="0" lang="en-US" sz="2800" strike="noStrike" u="none">
-              <a:solidFill>
-                <a:srgbClr val="000000"/>
-              </a:solidFill>
-              <a:effectLst/>
-              <a:uFillTx/>
-              <a:latin typeface="Arial"/>
-            </a:endParaRPr>
-          </a:p>
-          <a:p>
-            <a:pPr lvl="1" marL="864000" indent="-324000">
-              <a:lnSpc>
-                <a:spcPct val="90000"/>
-              </a:lnSpc>
-              <a:spcBef>
-                <a:spcPts val="1134"/>
-              </a:spcBef>
-              <a:buClr>
-                <a:srgbClr val="000000"/>
-              </a:buClr>
-              <a:buSzPct val="75000"/>
-              <a:buFont typeface="Symbol" charset="2"/>
-              <a:buChar char=""/>
-            </a:pPr>
-            <a:r>
-              <a:rPr b="0" lang="en-US" sz="2000" strike="noStrike" u="none">
-                <a:solidFill>
-                  <a:schemeClr val="dk1"/>
-                </a:solidFill>
-                <a:effectLst/>
-                <a:uFillTx/>
-                <a:latin typeface="Calibri"/>
-              </a:rPr>
-              <a:t>Second Outline Level</a:t>
-            </a:r>
-            <a:endParaRPr b="0" lang="en-US" sz="2000" strike="noStrike" u="none">
-              <a:solidFill>
-                <a:srgbClr val="000000"/>
-              </a:solidFill>
-              <a:effectLst/>
-              <a:uFillTx/>
-              <a:latin typeface="Arial"/>
-            </a:endParaRPr>
-          </a:p>
-          <a:p>
-            <a:pPr lvl="2" marL="1296000" indent="-288000">
-              <a:lnSpc>
-                <a:spcPct val="90000"/>
-              </a:lnSpc>
-              <a:spcBef>
-                <a:spcPts val="850"/>
-              </a:spcBef>
-              <a:buClr>
-                <a:srgbClr val="000000"/>
-              </a:buClr>
-              <a:buSzPct val="45000"/>
-              <a:buFont typeface="Wingdings" charset="2"/>
-              <a:buChar char=""/>
-            </a:pPr>
-            <a:r>
-              <a:rPr b="0" lang="en-US" sz="1800" strike="noStrike" u="none">
-                <a:solidFill>
-                  <a:schemeClr val="dk1"/>
-                </a:solidFill>
-                <a:effectLst/>
-                <a:uFillTx/>
-                <a:latin typeface="Calibri"/>
-              </a:rPr>
-              <a:t>Third Outline Level</a:t>
-            </a:r>
-            <a:endParaRPr b="0" lang="en-US" sz="1800" strike="noStrike" u="none">
-              <a:solidFill>
-                <a:srgbClr val="000000"/>
-              </a:solidFill>
-              <a:effectLst/>
-              <a:uFillTx/>
-              <a:latin typeface="Arial"/>
-            </a:endParaRPr>
-          </a:p>
-          <a:p>
-            <a:pPr lvl="3" marL="1728000" indent="-216000">
-              <a:lnSpc>
-                <a:spcPct val="90000"/>
-              </a:lnSpc>
-              <a:spcBef>
-                <a:spcPts val="567"/>
-              </a:spcBef>
-              <a:buClr>
-                <a:srgbClr val="000000"/>
-              </a:buClr>
-              <a:buSzPct val="75000"/>
-              <a:buFont typeface="Symbol" charset="2"/>
-              <a:buChar char=""/>
-            </a:pPr>
-            <a:r>
-              <a:rPr b="0" lang="en-US" sz="1800" strike="noStrike" u="none">
-                <a:solidFill>
-                  <a:schemeClr val="dk1"/>
-                </a:solidFill>
-                <a:effectLst/>
-                <a:uFillTx/>
-                <a:latin typeface="Calibri"/>
-              </a:rPr>
-              <a:t>Fourth Outline Level</a:t>
-            </a:r>
-            <a:endParaRPr b="0" lang="en-US" sz="1800" strike="noStrike" u="none">
-              <a:solidFill>
-                <a:srgbClr val="000000"/>
-              </a:solidFill>
-              <a:effectLst/>
-              <a:uFillTx/>
-              <a:latin typeface="Arial"/>
-            </a:endParaRPr>
-          </a:p>
-          <a:p>
-            <a:pPr lvl="4" marL="2160000" indent="-216000">
-              <a:lnSpc>
-                <a:spcPct val="90000"/>
-              </a:lnSpc>
-              <a:spcBef>
-                <a:spcPts val="283"/>
-              </a:spcBef>
-              <a:buClr>
-                <a:srgbClr val="000000"/>
-              </a:buClr>
-              <a:buSzPct val="45000"/>
-              <a:buFont typeface="Wingdings" charset="2"/>
-              <a:buChar char=""/>
-            </a:pPr>
-            <a:r>
-              <a:rPr b="0" lang="en-US" sz="2000" strike="noStrike" u="none">
-                <a:solidFill>
-                  <a:schemeClr val="dk1"/>
-                </a:solidFill>
-                <a:effectLst/>
-                <a:uFillTx/>
-                <a:latin typeface="Calibri"/>
-              </a:rPr>
-              <a:t>Fifth Outline Level</a:t>
-            </a:r>
-            <a:endParaRPr b="0" lang="en-US" sz="2000" strike="noStrike" u="none">
-              <a:solidFill>
-                <a:srgbClr val="000000"/>
-              </a:solidFill>
-              <a:effectLst/>
-              <a:uFillTx/>
-              <a:latin typeface="Arial"/>
-            </a:endParaRPr>
-          </a:p>
-          <a:p>
-            <a:pPr lvl="5" marL="2592000" indent="-216000">
-              <a:lnSpc>
-                <a:spcPct val="90000"/>
-              </a:lnSpc>
-              <a:spcBef>
-                <a:spcPts val="283"/>
-              </a:spcBef>
-              <a:buClr>
-                <a:srgbClr val="000000"/>
-              </a:buClr>
-              <a:buSzPct val="45000"/>
-              <a:buFont typeface="Wingdings" charset="2"/>
-              <a:buChar char=""/>
-            </a:pPr>
-            <a:r>
-              <a:rPr b="0" lang="en-US" sz="2000" strike="noStrike" u="none">
-                <a:solidFill>
-                  <a:schemeClr val="dk1"/>
-                </a:solidFill>
-                <a:effectLst/>
-                <a:uFillTx/>
-                <a:latin typeface="Calibri"/>
-              </a:rPr>
-              <a:t>Sixth Outline Level</a:t>
-            </a:r>
-            <a:endParaRPr b="0" lang="en-US" sz="2000" strike="noStrike" u="none">
-              <a:solidFill>
-                <a:srgbClr val="000000"/>
-              </a:solidFill>
-              <a:effectLst/>
-              <a:uFillTx/>
-              <a:latin typeface="Arial"/>
-            </a:endParaRPr>
-          </a:p>
-          <a:p>
-            <a:pPr lvl="6" marL="3024000" indent="-216000">
-              <a:lnSpc>
-                <a:spcPct val="90000"/>
-              </a:lnSpc>
-              <a:spcBef>
-                <a:spcPts val="283"/>
-              </a:spcBef>
-              <a:buClr>
-                <a:srgbClr val="000000"/>
-              </a:buClr>
-              <a:buSzPct val="45000"/>
-              <a:buFont typeface="Wingdings" charset="2"/>
-              <a:buChar char=""/>
-            </a:pPr>
-            <a:r>
-              <a:rPr b="0" lang="en-US" sz="2000" strike="noStrike" u="none">
-                <a:solidFill>
-                  <a:schemeClr val="dk1"/>
-                </a:solidFill>
-                <a:effectLst/>
-                <a:uFillTx/>
-                <a:latin typeface="Calibri"/>
-              </a:rPr>
-              <a:t>Seventh Outline Level</a:t>
-            </a:r>
-            <a:endParaRPr b="0" lang="en-US" sz="2000" strike="noStrike" u="none">
-              <a:solidFill>
-                <a:srgbClr val="000000"/>
-              </a:solidFill>
-              <a:effectLst/>
-              <a:uFillTx/>
-              <a:latin typeface="Arial"/>
             </a:endParaRPr>
           </a:p>
         </p:txBody>
@@ -4899,8 +4908,8 @@
 </file>
 
 <file path=ppt/slideLayouts/slideLayout6.xml><?xml version="1.0" encoding="utf-8"?>
-<p:sldLayout xmlns:a="http://schemas.openxmlformats.org/drawingml/2006/main" xmlns:p="http://schemas.openxmlformats.org/presentationml/2006/main" xmlns:r="http://schemas.openxmlformats.org/officeDocument/2006/relationships" xmlns:p14="http://schemas.microsoft.com/office/powerpoint/2010/main" xmlns:p15="http://schemas.microsoft.com/office/powerpoint/2012/main" xmlns:mc="http://schemas.openxmlformats.org/markup-compatibility/2006" type="vertTx" preserve="1">
-  <p:cSld name="Title and Vertical Text">
+<p:sldLayout xmlns:a="http://schemas.openxmlformats.org/drawingml/2006/main" xmlns:p="http://schemas.openxmlformats.org/presentationml/2006/main" xmlns:r="http://schemas.openxmlformats.org/officeDocument/2006/relationships" xmlns:p14="http://schemas.microsoft.com/office/powerpoint/2010/main" xmlns:p15="http://schemas.microsoft.com/office/powerpoint/2012/main" xmlns:mc="http://schemas.openxmlformats.org/markup-compatibility/2006" type="blank" preserve="1">
+  <p:cSld name="Comparison">
     <p:bg>
       <p:bgPr>
         <a:solidFill>
@@ -4924,7 +4933,7 @@
       </p:grpSpPr>
       <p:sp>
         <p:nvSpPr>
-          <p:cNvPr id="26" name="PlaceHolder 1"/>
+          <p:cNvPr id="28" name="PlaceHolder 1"/>
           <p:cNvSpPr>
             <a:spLocks noGrp="1"/>
           </p:cNvSpPr>
@@ -4934,8 +4943,8 @@
         </p:nvSpPr>
         <p:spPr>
           <a:xfrm>
-            <a:off x="838080" y="365040"/>
-            <a:ext cx="10509480" cy="1319400"/>
+            <a:off x="839880" y="365040"/>
+            <a:ext cx="10508760" cy="1318680"/>
           </a:xfrm>
           <a:prstGeom prst="rect">
             <a:avLst/>
@@ -4983,7 +4992,7 @@
       </p:sp>
       <p:sp>
         <p:nvSpPr>
-          <p:cNvPr id="27" name="PlaceHolder 2"/>
+          <p:cNvPr id="29" name="PlaceHolder 2"/>
           <p:cNvSpPr>
             <a:spLocks noGrp="1"/>
           </p:cNvSpPr>
@@ -4993,8 +5002,8 @@
         </p:nvSpPr>
         <p:spPr>
           <a:xfrm>
-            <a:off x="838080" y="1825560"/>
-            <a:ext cx="10509480" cy="4345200"/>
+            <a:off x="839880" y="1681200"/>
+            <a:ext cx="5150880" cy="817200"/>
           </a:xfrm>
           <a:prstGeom prst="rect">
             <a:avLst/>
@@ -5005,7 +5014,69 @@
           </a:ln>
         </p:spPr>
         <p:txBody>
-          <a:bodyPr lIns="91440" rIns="91440" tIns="45720" bIns="45720" anchor="t" vert="eaVert">
+          <a:bodyPr lIns="91440" rIns="91440" tIns="45720" bIns="45720" anchor="b">
+            <a:noAutofit/>
+          </a:bodyPr>
+          <a:p>
+            <a:pPr indent="0" defTabSz="914400">
+              <a:lnSpc>
+                <a:spcPct val="90000"/>
+              </a:lnSpc>
+              <a:spcBef>
+                <a:spcPts val="1001"/>
+              </a:spcBef>
+              <a:buNone/>
+              <a:tabLst>
+                <a:tab algn="l" pos="0"/>
+              </a:tabLst>
+            </a:pPr>
+            <a:r>
+              <a:rPr b="1" lang="en-US" sz="2400" strike="noStrike" u="none">
+                <a:solidFill>
+                  <a:schemeClr val="dk1"/>
+                </a:solidFill>
+                <a:effectLst/>
+                <a:uFillTx/>
+                <a:latin typeface="Calibri"/>
+              </a:rPr>
+              <a:t>Click to edit Master text styles</a:t>
+            </a:r>
+            <a:endParaRPr b="0" lang="en-US" sz="2400" strike="noStrike" u="none">
+              <a:solidFill>
+                <a:srgbClr val="000000"/>
+              </a:solidFill>
+              <a:effectLst/>
+              <a:uFillTx/>
+              <a:latin typeface="Arial"/>
+            </a:endParaRPr>
+          </a:p>
+        </p:txBody>
+      </p:sp>
+      <p:sp>
+        <p:nvSpPr>
+          <p:cNvPr id="30" name="PlaceHolder 3"/>
+          <p:cNvSpPr>
+            <a:spLocks noGrp="1"/>
+          </p:cNvSpPr>
+          <p:nvPr>
+            <p:ph type="body"/>
+          </p:nvPr>
+        </p:nvSpPr>
+        <p:spPr>
+          <a:xfrm>
+            <a:off x="839880" y="2505240"/>
+            <a:ext cx="5150880" cy="3677760"/>
+          </a:xfrm>
+          <a:prstGeom prst="rect">
+            <a:avLst/>
+          </a:prstGeom>
+          <a:noFill/>
+          <a:ln w="0">
+            <a:noFill/>
+          </a:ln>
+        </p:spPr>
+        <p:txBody>
+          <a:bodyPr lIns="91440" rIns="91440" tIns="45720" bIns="45720" anchor="t">
             <a:noAutofit/>
           </a:bodyPr>
           <a:p>
@@ -5182,7 +5253,268 @@
       </p:sp>
       <p:sp>
         <p:nvSpPr>
-          <p:cNvPr id="28" name="PlaceHolder 3"/>
+          <p:cNvPr id="31" name="PlaceHolder 4"/>
+          <p:cNvSpPr>
+            <a:spLocks noGrp="1"/>
+          </p:cNvSpPr>
+          <p:nvPr>
+            <p:ph type="body"/>
+          </p:nvPr>
+        </p:nvSpPr>
+        <p:spPr>
+          <a:xfrm>
+            <a:off x="6172200" y="1681200"/>
+            <a:ext cx="5176440" cy="817200"/>
+          </a:xfrm>
+          <a:prstGeom prst="rect">
+            <a:avLst/>
+          </a:prstGeom>
+          <a:noFill/>
+          <a:ln w="0">
+            <a:noFill/>
+          </a:ln>
+        </p:spPr>
+        <p:txBody>
+          <a:bodyPr lIns="91440" rIns="91440" tIns="45720" bIns="45720" anchor="b">
+            <a:noAutofit/>
+          </a:bodyPr>
+          <a:p>
+            <a:pPr indent="0" defTabSz="914400">
+              <a:lnSpc>
+                <a:spcPct val="90000"/>
+              </a:lnSpc>
+              <a:spcBef>
+                <a:spcPts val="1001"/>
+              </a:spcBef>
+              <a:buNone/>
+              <a:tabLst>
+                <a:tab algn="l" pos="0"/>
+              </a:tabLst>
+            </a:pPr>
+            <a:r>
+              <a:rPr b="1" lang="en-US" sz="2400" strike="noStrike" u="none">
+                <a:solidFill>
+                  <a:schemeClr val="dk1"/>
+                </a:solidFill>
+                <a:effectLst/>
+                <a:uFillTx/>
+                <a:latin typeface="Calibri"/>
+              </a:rPr>
+              <a:t>Click to edit Master text styles</a:t>
+            </a:r>
+            <a:endParaRPr b="0" lang="en-US" sz="2400" strike="noStrike" u="none">
+              <a:solidFill>
+                <a:srgbClr val="000000"/>
+              </a:solidFill>
+              <a:effectLst/>
+              <a:uFillTx/>
+              <a:latin typeface="Arial"/>
+            </a:endParaRPr>
+          </a:p>
+        </p:txBody>
+      </p:sp>
+      <p:sp>
+        <p:nvSpPr>
+          <p:cNvPr id="32" name="PlaceHolder 5"/>
+          <p:cNvSpPr>
+            <a:spLocks noGrp="1"/>
+          </p:cNvSpPr>
+          <p:nvPr>
+            <p:ph type="body"/>
+          </p:nvPr>
+        </p:nvSpPr>
+        <p:spPr>
+          <a:xfrm>
+            <a:off x="6172200" y="2505240"/>
+            <a:ext cx="5176440" cy="3677760"/>
+          </a:xfrm>
+          <a:prstGeom prst="rect">
+            <a:avLst/>
+          </a:prstGeom>
+          <a:noFill/>
+          <a:ln w="0">
+            <a:noFill/>
+          </a:ln>
+        </p:spPr>
+        <p:txBody>
+          <a:bodyPr lIns="91440" rIns="91440" tIns="45720" bIns="45720" anchor="t">
+            <a:noAutofit/>
+          </a:bodyPr>
+          <a:p>
+            <a:pPr marL="228600" indent="-228600" defTabSz="914400">
+              <a:lnSpc>
+                <a:spcPct val="90000"/>
+              </a:lnSpc>
+              <a:spcBef>
+                <a:spcPts val="1001"/>
+              </a:spcBef>
+              <a:buClr>
+                <a:srgbClr val="000000"/>
+              </a:buClr>
+              <a:buFont typeface="Arial"/>
+              <a:buChar char="•"/>
+            </a:pPr>
+            <a:r>
+              <a:rPr b="0" lang="en-US" sz="2800" strike="noStrike" u="none">
+                <a:solidFill>
+                  <a:schemeClr val="dk1"/>
+                </a:solidFill>
+                <a:effectLst/>
+                <a:uFillTx/>
+                <a:latin typeface="Calibri"/>
+              </a:rPr>
+              <a:t>Click to edit Master text styles</a:t>
+            </a:r>
+            <a:endParaRPr b="0" lang="en-US" sz="2800" strike="noStrike" u="none">
+              <a:solidFill>
+                <a:srgbClr val="000000"/>
+              </a:solidFill>
+              <a:effectLst/>
+              <a:uFillTx/>
+              <a:latin typeface="Arial"/>
+            </a:endParaRPr>
+          </a:p>
+          <a:p>
+            <a:pPr lvl="1" marL="685800" indent="-228600" defTabSz="914400">
+              <a:lnSpc>
+                <a:spcPct val="90000"/>
+              </a:lnSpc>
+              <a:spcBef>
+                <a:spcPts val="499"/>
+              </a:spcBef>
+              <a:buClr>
+                <a:srgbClr val="000000"/>
+              </a:buClr>
+              <a:buFont typeface="Arial"/>
+              <a:buChar char="•"/>
+            </a:pPr>
+            <a:r>
+              <a:rPr b="0" lang="en-US" sz="2400" strike="noStrike" u="none">
+                <a:solidFill>
+                  <a:schemeClr val="dk1"/>
+                </a:solidFill>
+                <a:effectLst/>
+                <a:uFillTx/>
+                <a:latin typeface="Calibri"/>
+              </a:rPr>
+              <a:t>Second level</a:t>
+            </a:r>
+            <a:endParaRPr b="0" lang="en-US" sz="2400" strike="noStrike" u="none">
+              <a:solidFill>
+                <a:srgbClr val="000000"/>
+              </a:solidFill>
+              <a:effectLst/>
+              <a:uFillTx/>
+              <a:latin typeface="Arial"/>
+            </a:endParaRPr>
+          </a:p>
+          <a:p>
+            <a:pPr lvl="2" marL="1143000" indent="-228600" defTabSz="914400">
+              <a:lnSpc>
+                <a:spcPct val="90000"/>
+              </a:lnSpc>
+              <a:spcBef>
+                <a:spcPts val="499"/>
+              </a:spcBef>
+              <a:buClr>
+                <a:srgbClr val="000000"/>
+              </a:buClr>
+              <a:buFont typeface="Arial"/>
+              <a:buChar char="•"/>
+            </a:pPr>
+            <a:r>
+              <a:rPr b="0" lang="en-US" sz="2000" strike="noStrike" u="none">
+                <a:solidFill>
+                  <a:schemeClr val="dk1"/>
+                </a:solidFill>
+                <a:effectLst/>
+                <a:uFillTx/>
+                <a:latin typeface="Calibri"/>
+              </a:rPr>
+              <a:t>Third level</a:t>
+            </a:r>
+            <a:endParaRPr b="0" lang="en-US" sz="2000" strike="noStrike" u="none">
+              <a:solidFill>
+                <a:srgbClr val="000000"/>
+              </a:solidFill>
+              <a:effectLst/>
+              <a:uFillTx/>
+              <a:latin typeface="Arial"/>
+            </a:endParaRPr>
+          </a:p>
+          <a:p>
+            <a:pPr lvl="3" marL="1600200" indent="-228600" defTabSz="914400">
+              <a:lnSpc>
+                <a:spcPct val="90000"/>
+              </a:lnSpc>
+              <a:spcBef>
+                <a:spcPts val="499"/>
+              </a:spcBef>
+              <a:buClr>
+                <a:srgbClr val="000000"/>
+              </a:buClr>
+              <a:buFont typeface="Arial"/>
+              <a:buChar char="•"/>
+            </a:pPr>
+            <a:r>
+              <a:rPr b="0" lang="en-US" sz="1800" strike="noStrike" u="none">
+                <a:solidFill>
+                  <a:schemeClr val="dk1"/>
+                </a:solidFill>
+                <a:effectLst/>
+                <a:uFillTx/>
+                <a:latin typeface="Calibri"/>
+              </a:rPr>
+              <a:t>Fourth level</a:t>
+            </a:r>
+            <a:endParaRPr b="0" lang="en-US" sz="1800" strike="noStrike" u="none">
+              <a:solidFill>
+                <a:srgbClr val="000000"/>
+              </a:solidFill>
+              <a:effectLst/>
+              <a:uFillTx/>
+              <a:latin typeface="Arial"/>
+            </a:endParaRPr>
+          </a:p>
+          <a:p>
+            <a:pPr lvl="4" marL="2057400" indent="-228600" defTabSz="914400">
+              <a:lnSpc>
+                <a:spcPct val="90000"/>
+              </a:lnSpc>
+              <a:spcBef>
+                <a:spcPts val="499"/>
+              </a:spcBef>
+              <a:buClr>
+                <a:srgbClr val="000000"/>
+              </a:buClr>
+              <a:buFont typeface="Arial"/>
+              <a:buChar char="•"/>
+            </a:pPr>
+            <a:r>
+              <a:rPr b="0" lang="en-US" sz="1800" strike="noStrike" u="none">
+                <a:solidFill>
+                  <a:schemeClr val="dk1"/>
+                </a:solidFill>
+                <a:effectLst/>
+                <a:uFillTx/>
+                <a:latin typeface="Calibri"/>
+              </a:rPr>
+              <a:t>Fifth level</a:t>
+            </a:r>
+            <a:endParaRPr b="0" lang="en-US" sz="1800" strike="noStrike" u="none">
+              <a:solidFill>
+                <a:srgbClr val="000000"/>
+              </a:solidFill>
+              <a:effectLst/>
+              <a:uFillTx/>
+              <a:latin typeface="Arial"/>
+            </a:endParaRPr>
+          </a:p>
+        </p:txBody>
+      </p:sp>
+      <p:sp>
+        <p:nvSpPr>
+          <p:cNvPr id="33" name="PlaceHolder 6"/>
           <p:cNvSpPr>
             <a:spLocks noGrp="1"/>
           </p:cNvSpPr>
@@ -5193,7 +5525,7 @@
         <p:spPr>
           <a:xfrm>
             <a:off x="838080" y="6356520"/>
-            <a:ext cx="2737080" cy="358920"/>
+            <a:ext cx="2736360" cy="358200"/>
           </a:xfrm>
           <a:prstGeom prst="rect">
             <a:avLst/>
@@ -5249,7 +5581,7 @@
                 <a:uFillTx/>
                 <a:latin typeface="Calibri"/>
               </a:rPr>
-              <a:t>&lt;date/time&gt;</a:t>
+              <a:t> </a:t>
             </a:r>
             <a:endParaRPr b="0" lang="en-US" sz="1200" strike="noStrike" u="none">
               <a:solidFill>
@@ -5264,7 +5596,7 @@
       </p:sp>
       <p:sp>
         <p:nvSpPr>
-          <p:cNvPr id="29" name="PlaceHolder 4"/>
+          <p:cNvPr id="34" name="PlaceHolder 7"/>
           <p:cNvSpPr>
             <a:spLocks noGrp="1"/>
           </p:cNvSpPr>
@@ -5275,7 +5607,7 @@
         <p:spPr>
           <a:xfrm>
             <a:off x="4038480" y="6356520"/>
-            <a:ext cx="4108680" cy="358920"/>
+            <a:ext cx="4107960" cy="358200"/>
           </a:xfrm>
           <a:prstGeom prst="rect">
             <a:avLst/>
@@ -5327,7 +5659,7 @@
                 <a:uFillTx/>
                 <a:latin typeface="Times New Roman"/>
               </a:rPr>
-              <a:t>&lt;footer&gt;</a:t>
+              <a:t> </a:t>
             </a:r>
             <a:endParaRPr b="0" lang="en-US" sz="1400" strike="noStrike" u="none">
               <a:solidFill>
@@ -5342,7 +5674,7 @@
       </p:sp>
       <p:sp>
         <p:nvSpPr>
-          <p:cNvPr id="30" name="PlaceHolder 5"/>
+          <p:cNvPr id="35" name="PlaceHolder 8"/>
           <p:cNvSpPr>
             <a:spLocks noGrp="1"/>
           </p:cNvSpPr>
@@ -5353,7 +5685,7 @@
         <p:spPr>
           <a:xfrm>
             <a:off x="8610480" y="6356520"/>
-            <a:ext cx="2737080" cy="358920"/>
+            <a:ext cx="2736360" cy="358200"/>
           </a:xfrm>
           <a:prstGeom prst="rect">
             <a:avLst/>
@@ -5398,7 +5730,7 @@
                 <a:tab algn="l" pos="0"/>
               </a:tabLst>
             </a:pPr>
-            <a:fld id="{EBBC40B6-2F04-4DDC-8D0D-422A73DC5490}" type="slidenum">
+            <a:fld id="{F23D9767-1444-44AC-B241-193A5BDEBD90}" type="slidenum">
               <a:rPr b="0" lang="en-US" sz="1200" strike="noStrike" u="none">
                 <a:solidFill>
                   <a:schemeClr val="dk1">
@@ -5409,7 +5741,7 @@
                 <a:uFillTx/>
                 <a:latin typeface="Calibri"/>
               </a:rPr>
-              <a:t>&lt;number&gt;</a:t>
+              <a:t>14</a:t>
             </a:fld>
             <a:endParaRPr b="0" lang="en-US" sz="1200" strike="noStrike" u="none">
               <a:solidFill>
@@ -5428,8 +5760,8 @@
 </file>
 
 <file path=ppt/slideLayouts/slideLayout7.xml><?xml version="1.0" encoding="utf-8"?>
-<p:sldLayout xmlns:a="http://schemas.openxmlformats.org/drawingml/2006/main" xmlns:p="http://schemas.openxmlformats.org/presentationml/2006/main" xmlns:r="http://schemas.openxmlformats.org/officeDocument/2006/relationships" xmlns:p14="http://schemas.microsoft.com/office/powerpoint/2010/main" xmlns:p15="http://schemas.microsoft.com/office/powerpoint/2012/main" xmlns:mc="http://schemas.openxmlformats.org/markup-compatibility/2006" type="vertTitleAndTx" preserve="1">
-  <p:cSld name="Vertical Title and Text">
+<p:sldLayout xmlns:a="http://schemas.openxmlformats.org/drawingml/2006/main" xmlns:p="http://schemas.openxmlformats.org/presentationml/2006/main" xmlns:r="http://schemas.openxmlformats.org/officeDocument/2006/relationships" xmlns:p14="http://schemas.microsoft.com/office/powerpoint/2010/main" xmlns:p15="http://schemas.microsoft.com/office/powerpoint/2012/main" xmlns:mc="http://schemas.openxmlformats.org/markup-compatibility/2006" type="titleOnly" preserve="1">
+  <p:cSld name="Title Only">
     <p:bg>
       <p:bgPr>
         <a:solidFill>
@@ -5453,7 +5785,7 @@
       </p:grpSpPr>
       <p:sp>
         <p:nvSpPr>
-          <p:cNvPr id="31" name="PlaceHolder 1"/>
+          <p:cNvPr id="36" name="PlaceHolder 1"/>
           <p:cNvSpPr>
             <a:spLocks noGrp="1"/>
           </p:cNvSpPr>
@@ -5463,8 +5795,8 @@
         </p:nvSpPr>
         <p:spPr>
           <a:xfrm>
-            <a:off x="8724960" y="365040"/>
-            <a:ext cx="2622960" cy="5805720"/>
+            <a:off x="838080" y="365040"/>
+            <a:ext cx="10508760" cy="1318680"/>
           </a:xfrm>
           <a:prstGeom prst="rect">
             <a:avLst/>
@@ -5475,7 +5807,7 @@
           </a:ln>
         </p:spPr>
         <p:txBody>
-          <a:bodyPr lIns="91440" rIns="91440" tIns="45720" bIns="45720" anchor="ctr" vert="eaVert">
+          <a:bodyPr lIns="91440" rIns="91440" tIns="45720" bIns="45720" anchor="ctr">
             <a:noAutofit/>
           </a:bodyPr>
           <a:p>
@@ -5512,206 +5844,7 @@
       </p:sp>
       <p:sp>
         <p:nvSpPr>
-          <p:cNvPr id="32" name="PlaceHolder 2"/>
-          <p:cNvSpPr>
-            <a:spLocks noGrp="1"/>
-          </p:cNvSpPr>
-          <p:nvPr>
-            <p:ph type="body"/>
-          </p:nvPr>
-        </p:nvSpPr>
-        <p:spPr>
-          <a:xfrm>
-            <a:off x="838080" y="365040"/>
-            <a:ext cx="7728120" cy="5805720"/>
-          </a:xfrm>
-          <a:prstGeom prst="rect">
-            <a:avLst/>
-          </a:prstGeom>
-          <a:noFill/>
-          <a:ln w="0">
-            <a:noFill/>
-          </a:ln>
-        </p:spPr>
-        <p:txBody>
-          <a:bodyPr lIns="91440" rIns="91440" tIns="45720" bIns="45720" anchor="t" vert="eaVert">
-            <a:noAutofit/>
-          </a:bodyPr>
-          <a:p>
-            <a:pPr marL="228600" indent="-228600" defTabSz="914400">
-              <a:lnSpc>
-                <a:spcPct val="90000"/>
-              </a:lnSpc>
-              <a:spcBef>
-                <a:spcPts val="1001"/>
-              </a:spcBef>
-              <a:buClr>
-                <a:srgbClr val="000000"/>
-              </a:buClr>
-              <a:buFont typeface="Arial"/>
-              <a:buChar char="•"/>
-            </a:pPr>
-            <a:r>
-              <a:rPr b="0" lang="en-US" sz="2800" strike="noStrike" u="none">
-                <a:solidFill>
-                  <a:schemeClr val="dk1"/>
-                </a:solidFill>
-                <a:effectLst/>
-                <a:uFillTx/>
-                <a:latin typeface="Calibri"/>
-              </a:rPr>
-              <a:t>Click to edit Master text styles</a:t>
-            </a:r>
-            <a:endParaRPr b="0" lang="en-US" sz="2800" strike="noStrike" u="none">
-              <a:solidFill>
-                <a:srgbClr val="000000"/>
-              </a:solidFill>
-              <a:effectLst/>
-              <a:uFillTx/>
-              <a:latin typeface="Arial"/>
-            </a:endParaRPr>
-          </a:p>
-          <a:p>
-            <a:pPr lvl="1" marL="685800" indent="-228600" defTabSz="914400">
-              <a:lnSpc>
-                <a:spcPct val="90000"/>
-              </a:lnSpc>
-              <a:spcBef>
-                <a:spcPts val="499"/>
-              </a:spcBef>
-              <a:buClr>
-                <a:srgbClr val="000000"/>
-              </a:buClr>
-              <a:buFont typeface="Arial"/>
-              <a:buChar char="•"/>
-            </a:pPr>
-            <a:r>
-              <a:rPr b="0" lang="en-US" sz="2400" strike="noStrike" u="none">
-                <a:solidFill>
-                  <a:schemeClr val="dk1"/>
-                </a:solidFill>
-                <a:effectLst/>
-                <a:uFillTx/>
-                <a:latin typeface="Calibri"/>
-              </a:rPr>
-              <a:t>Second level</a:t>
-            </a:r>
-            <a:endParaRPr b="0" lang="en-US" sz="2400" strike="noStrike" u="none">
-              <a:solidFill>
-                <a:srgbClr val="000000"/>
-              </a:solidFill>
-              <a:effectLst/>
-              <a:uFillTx/>
-              <a:latin typeface="Arial"/>
-            </a:endParaRPr>
-          </a:p>
-          <a:p>
-            <a:pPr lvl="2" marL="1143000" indent="-228600" defTabSz="914400">
-              <a:lnSpc>
-                <a:spcPct val="90000"/>
-              </a:lnSpc>
-              <a:spcBef>
-                <a:spcPts val="499"/>
-              </a:spcBef>
-              <a:buClr>
-                <a:srgbClr val="000000"/>
-              </a:buClr>
-              <a:buFont typeface="Arial"/>
-              <a:buChar char="•"/>
-            </a:pPr>
-            <a:r>
-              <a:rPr b="0" lang="en-US" sz="2000" strike="noStrike" u="none">
-                <a:solidFill>
-                  <a:schemeClr val="dk1"/>
-                </a:solidFill>
-                <a:effectLst/>
-                <a:uFillTx/>
-                <a:latin typeface="Calibri"/>
-              </a:rPr>
-              <a:t>Third level</a:t>
-            </a:r>
-            <a:endParaRPr b="0" lang="en-US" sz="2000" strike="noStrike" u="none">
-              <a:solidFill>
-                <a:srgbClr val="000000"/>
-              </a:solidFill>
-              <a:effectLst/>
-              <a:uFillTx/>
-              <a:latin typeface="Arial"/>
-            </a:endParaRPr>
-          </a:p>
-          <a:p>
-            <a:pPr lvl="3" marL="1600200" indent="-228600" defTabSz="914400">
-              <a:lnSpc>
-                <a:spcPct val="90000"/>
-              </a:lnSpc>
-              <a:spcBef>
-                <a:spcPts val="499"/>
-              </a:spcBef>
-              <a:buClr>
-                <a:srgbClr val="000000"/>
-              </a:buClr>
-              <a:buFont typeface="Arial"/>
-              <a:buChar char="•"/>
-            </a:pPr>
-            <a:r>
-              <a:rPr b="0" lang="en-US" sz="1800" strike="noStrike" u="none">
-                <a:solidFill>
-                  <a:schemeClr val="dk1"/>
-                </a:solidFill>
-                <a:effectLst/>
-                <a:uFillTx/>
-                <a:latin typeface="Calibri"/>
-              </a:rPr>
-              <a:t>Fourth level</a:t>
-            </a:r>
-            <a:endParaRPr b="0" lang="en-US" sz="1800" strike="noStrike" u="none">
-              <a:solidFill>
-                <a:srgbClr val="000000"/>
-              </a:solidFill>
-              <a:effectLst/>
-              <a:uFillTx/>
-              <a:latin typeface="Arial"/>
-            </a:endParaRPr>
-          </a:p>
-          <a:p>
-            <a:pPr lvl="4" marL="2057400" indent="-228600" defTabSz="914400">
-              <a:lnSpc>
-                <a:spcPct val="90000"/>
-              </a:lnSpc>
-              <a:spcBef>
-                <a:spcPts val="499"/>
-              </a:spcBef>
-              <a:buClr>
-                <a:srgbClr val="000000"/>
-              </a:buClr>
-              <a:buFont typeface="Arial"/>
-              <a:buChar char="•"/>
-            </a:pPr>
-            <a:r>
-              <a:rPr b="0" lang="en-US" sz="1800" strike="noStrike" u="none">
-                <a:solidFill>
-                  <a:schemeClr val="dk1"/>
-                </a:solidFill>
-                <a:effectLst/>
-                <a:uFillTx/>
-                <a:latin typeface="Calibri"/>
-              </a:rPr>
-              <a:t>Fifth level</a:t>
-            </a:r>
-            <a:endParaRPr b="0" lang="en-US" sz="1800" strike="noStrike" u="none">
-              <a:solidFill>
-                <a:srgbClr val="000000"/>
-              </a:solidFill>
-              <a:effectLst/>
-              <a:uFillTx/>
-              <a:latin typeface="Arial"/>
-            </a:endParaRPr>
-          </a:p>
-        </p:txBody>
-      </p:sp>
-      <p:sp>
-        <p:nvSpPr>
-          <p:cNvPr id="33" name="PlaceHolder 3"/>
+          <p:cNvPr id="37" name="PlaceHolder 2"/>
           <p:cNvSpPr>
             <a:spLocks noGrp="1"/>
           </p:cNvSpPr>
@@ -5722,7 +5855,7 @@
         <p:spPr>
           <a:xfrm>
             <a:off x="838080" y="6356520"/>
-            <a:ext cx="2737080" cy="358920"/>
+            <a:ext cx="2736360" cy="358200"/>
           </a:xfrm>
           <a:prstGeom prst="rect">
             <a:avLst/>
@@ -5778,7 +5911,7 @@
                 <a:uFillTx/>
                 <a:latin typeface="Calibri"/>
               </a:rPr>
-              <a:t>&lt;date/time&gt;</a:t>
+              <a:t> </a:t>
             </a:r>
             <a:endParaRPr b="0" lang="en-US" sz="1200" strike="noStrike" u="none">
               <a:solidFill>
@@ -5793,7 +5926,7 @@
       </p:sp>
       <p:sp>
         <p:nvSpPr>
-          <p:cNvPr id="34" name="PlaceHolder 4"/>
+          <p:cNvPr id="38" name="PlaceHolder 3"/>
           <p:cNvSpPr>
             <a:spLocks noGrp="1"/>
           </p:cNvSpPr>
@@ -5804,7 +5937,7 @@
         <p:spPr>
           <a:xfrm>
             <a:off x="4038480" y="6356520"/>
-            <a:ext cx="4108680" cy="358920"/>
+            <a:ext cx="4107960" cy="358200"/>
           </a:xfrm>
           <a:prstGeom prst="rect">
             <a:avLst/>
@@ -5856,7 +5989,7 @@
                 <a:uFillTx/>
                 <a:latin typeface="Times New Roman"/>
               </a:rPr>
-              <a:t>&lt;footer&gt;</a:t>
+              <a:t> </a:t>
             </a:r>
             <a:endParaRPr b="0" lang="en-US" sz="1400" strike="noStrike" u="none">
               <a:solidFill>
@@ -5871,7 +6004,7 @@
       </p:sp>
       <p:sp>
         <p:nvSpPr>
-          <p:cNvPr id="35" name="PlaceHolder 5"/>
+          <p:cNvPr id="39" name="PlaceHolder 4"/>
           <p:cNvSpPr>
             <a:spLocks noGrp="1"/>
           </p:cNvSpPr>
@@ -5882,7 +6015,7 @@
         <p:spPr>
           <a:xfrm>
             <a:off x="8610480" y="6356520"/>
-            <a:ext cx="2737080" cy="358920"/>
+            <a:ext cx="2736360" cy="358200"/>
           </a:xfrm>
           <a:prstGeom prst="rect">
             <a:avLst/>
@@ -5927,7 +6060,7 @@
                 <a:tab algn="l" pos="0"/>
               </a:tabLst>
             </a:pPr>
-            <a:fld id="{71852B1D-7A87-4B2A-A408-8D995B016B54}" type="slidenum">
+            <a:fld id="{5798122D-4392-49FB-8F53-0BF9233FC59B}" type="slidenum">
               <a:rPr b="0" lang="en-US" sz="1200" strike="noStrike" u="none">
                 <a:solidFill>
                   <a:schemeClr val="dk1">
@@ -5938,7 +6071,7 @@
                 <a:uFillTx/>
                 <a:latin typeface="Calibri"/>
               </a:rPr>
-              <a:t>&lt;number&gt;</a:t>
+              <a:t>14</a:t>
             </a:fld>
             <a:endParaRPr b="0" lang="en-US" sz="1200" strike="noStrike" u="none">
               <a:solidFill>
@@ -5957,8 +6090,8 @@
 </file>
 
 <file path=ppt/slideLayouts/slideLayout8.xml><?xml version="1.0" encoding="utf-8"?>
-<p:sldLayout xmlns:a="http://schemas.openxmlformats.org/drawingml/2006/main" xmlns:p="http://schemas.openxmlformats.org/presentationml/2006/main" xmlns:r="http://schemas.openxmlformats.org/officeDocument/2006/relationships" xmlns:p14="http://schemas.microsoft.com/office/powerpoint/2010/main" xmlns:p15="http://schemas.microsoft.com/office/powerpoint/2012/main" xmlns:mc="http://schemas.openxmlformats.org/markup-compatibility/2006" type="obj" preserve="1">
-  <p:cSld name="Title and Content">
+<p:sldLayout xmlns:a="http://schemas.openxmlformats.org/drawingml/2006/main" xmlns:p="http://schemas.openxmlformats.org/presentationml/2006/main" xmlns:r="http://schemas.openxmlformats.org/officeDocument/2006/relationships" xmlns:p14="http://schemas.microsoft.com/office/powerpoint/2010/main" xmlns:p15="http://schemas.microsoft.com/office/powerpoint/2012/main" xmlns:mc="http://schemas.openxmlformats.org/markup-compatibility/2006" type="blank" preserve="1">
+  <p:cSld name="Blank">
     <p:bg>
       <p:bgPr>
         <a:solidFill>
@@ -5982,265 +6115,7 @@
       </p:grpSpPr>
       <p:sp>
         <p:nvSpPr>
-          <p:cNvPr id="36" name="PlaceHolder 1"/>
-          <p:cNvSpPr>
-            <a:spLocks noGrp="1"/>
-          </p:cNvSpPr>
-          <p:nvPr>
-            <p:ph type="title"/>
-          </p:nvPr>
-        </p:nvSpPr>
-        <p:spPr>
-          <a:xfrm>
-            <a:off x="838080" y="365040"/>
-            <a:ext cx="10509480" cy="1319400"/>
-          </a:xfrm>
-          <a:prstGeom prst="rect">
-            <a:avLst/>
-          </a:prstGeom>
-          <a:noFill/>
-          <a:ln w="0">
-            <a:noFill/>
-          </a:ln>
-        </p:spPr>
-        <p:txBody>
-          <a:bodyPr lIns="91440" rIns="91440" tIns="45720" bIns="45720" anchor="ctr">
-            <a:noAutofit/>
-          </a:bodyPr>
-          <a:p>
-            <a:pPr indent="0" defTabSz="914400">
-              <a:lnSpc>
-                <a:spcPct val="90000"/>
-              </a:lnSpc>
-              <a:buNone/>
-              <a:tabLst>
-                <a:tab algn="l" pos="0"/>
-              </a:tabLst>
-            </a:pPr>
-            <a:r>
-              <a:rPr b="0" lang="en-US" sz="4400" strike="noStrike" u="none">
-                <a:solidFill>
-                  <a:schemeClr val="dk1"/>
-                </a:solidFill>
-                <a:effectLst/>
-                <a:uFillTx/>
-                <a:latin typeface="Calibri Light"/>
-              </a:rPr>
-              <a:t>Click to edit Master title style</a:t>
-            </a:r>
-            <a:endParaRPr b="0" lang="en-US" sz="4400" strike="noStrike" u="none">
-              <a:solidFill>
-                <a:srgbClr val="000000"/>
-              </a:solidFill>
-              <a:effectLst/>
-              <a:uFillTx/>
-              <a:latin typeface="Arial"/>
-            </a:endParaRPr>
-          </a:p>
-        </p:txBody>
-      </p:sp>
-      <p:sp>
-        <p:nvSpPr>
-          <p:cNvPr id="37" name="PlaceHolder 2"/>
-          <p:cNvSpPr>
-            <a:spLocks noGrp="1"/>
-          </p:cNvSpPr>
-          <p:nvPr>
-            <p:ph type="body"/>
-          </p:nvPr>
-        </p:nvSpPr>
-        <p:spPr>
-          <a:xfrm>
-            <a:off x="838080" y="1825560"/>
-            <a:ext cx="10509480" cy="4345200"/>
-          </a:xfrm>
-          <a:prstGeom prst="rect">
-            <a:avLst/>
-          </a:prstGeom>
-          <a:noFill/>
-          <a:ln w="0">
-            <a:noFill/>
-          </a:ln>
-        </p:spPr>
-        <p:txBody>
-          <a:bodyPr lIns="91440" rIns="91440" tIns="45720" bIns="45720" anchor="t">
-            <a:noAutofit/>
-          </a:bodyPr>
-          <a:p>
-            <a:pPr marL="228600" indent="-228600" defTabSz="914400">
-              <a:lnSpc>
-                <a:spcPct val="90000"/>
-              </a:lnSpc>
-              <a:spcBef>
-                <a:spcPts val="1001"/>
-              </a:spcBef>
-              <a:buClr>
-                <a:srgbClr val="000000"/>
-              </a:buClr>
-              <a:buFont typeface="Arial"/>
-              <a:buChar char="•"/>
-            </a:pPr>
-            <a:r>
-              <a:rPr b="0" lang="en-US" sz="2800" strike="noStrike" u="none">
-                <a:solidFill>
-                  <a:schemeClr val="dk1"/>
-                </a:solidFill>
-                <a:effectLst/>
-                <a:uFillTx/>
-                <a:latin typeface="Calibri"/>
-              </a:rPr>
-              <a:t>Click to edit Master text styles</a:t>
-            </a:r>
-            <a:endParaRPr b="0" lang="en-US" sz="2800" strike="noStrike" u="none">
-              <a:solidFill>
-                <a:srgbClr val="000000"/>
-              </a:solidFill>
-              <a:effectLst/>
-              <a:uFillTx/>
-              <a:latin typeface="Arial"/>
-            </a:endParaRPr>
-          </a:p>
-          <a:p>
-            <a:pPr lvl="1" marL="685800" indent="-228600" defTabSz="914400">
-              <a:lnSpc>
-                <a:spcPct val="90000"/>
-              </a:lnSpc>
-              <a:spcBef>
-                <a:spcPts val="499"/>
-              </a:spcBef>
-              <a:buClr>
-                <a:srgbClr val="000000"/>
-              </a:buClr>
-              <a:buFont typeface="Arial"/>
-              <a:buChar char="•"/>
-            </a:pPr>
-            <a:r>
-              <a:rPr b="0" lang="en-US" sz="2400" strike="noStrike" u="none">
-                <a:solidFill>
-                  <a:schemeClr val="dk1"/>
-                </a:solidFill>
-                <a:effectLst/>
-                <a:uFillTx/>
-                <a:latin typeface="Calibri"/>
-              </a:rPr>
-              <a:t>Second level</a:t>
-            </a:r>
-            <a:endParaRPr b="0" lang="en-US" sz="2400" strike="noStrike" u="none">
-              <a:solidFill>
-                <a:srgbClr val="000000"/>
-              </a:solidFill>
-              <a:effectLst/>
-              <a:uFillTx/>
-              <a:latin typeface="Arial"/>
-            </a:endParaRPr>
-          </a:p>
-          <a:p>
-            <a:pPr lvl="2" marL="1143000" indent="-228600" defTabSz="914400">
-              <a:lnSpc>
-                <a:spcPct val="90000"/>
-              </a:lnSpc>
-              <a:spcBef>
-                <a:spcPts val="499"/>
-              </a:spcBef>
-              <a:buClr>
-                <a:srgbClr val="000000"/>
-              </a:buClr>
-              <a:buFont typeface="Arial"/>
-              <a:buChar char="•"/>
-            </a:pPr>
-            <a:r>
-              <a:rPr b="0" lang="en-US" sz="2000" strike="noStrike" u="none">
-                <a:solidFill>
-                  <a:schemeClr val="dk1"/>
-                </a:solidFill>
-                <a:effectLst/>
-                <a:uFillTx/>
-                <a:latin typeface="Calibri"/>
-              </a:rPr>
-              <a:t>Third level</a:t>
-            </a:r>
-            <a:endParaRPr b="0" lang="en-US" sz="2000" strike="noStrike" u="none">
-              <a:solidFill>
-                <a:srgbClr val="000000"/>
-              </a:solidFill>
-              <a:effectLst/>
-              <a:uFillTx/>
-              <a:latin typeface="Arial"/>
-            </a:endParaRPr>
-          </a:p>
-          <a:p>
-            <a:pPr lvl="3" marL="1600200" indent="-228600" defTabSz="914400">
-              <a:lnSpc>
-                <a:spcPct val="90000"/>
-              </a:lnSpc>
-              <a:spcBef>
-                <a:spcPts val="499"/>
-              </a:spcBef>
-              <a:buClr>
-                <a:srgbClr val="000000"/>
-              </a:buClr>
-              <a:buFont typeface="Arial"/>
-              <a:buChar char="•"/>
-            </a:pPr>
-            <a:r>
-              <a:rPr b="0" lang="en-US" sz="1800" strike="noStrike" u="none">
-                <a:solidFill>
-                  <a:schemeClr val="dk1"/>
-                </a:solidFill>
-                <a:effectLst/>
-                <a:uFillTx/>
-                <a:latin typeface="Calibri"/>
-              </a:rPr>
-              <a:t>Fourth level</a:t>
-            </a:r>
-            <a:endParaRPr b="0" lang="en-US" sz="1800" strike="noStrike" u="none">
-              <a:solidFill>
-                <a:srgbClr val="000000"/>
-              </a:solidFill>
-              <a:effectLst/>
-              <a:uFillTx/>
-              <a:latin typeface="Arial"/>
-            </a:endParaRPr>
-          </a:p>
-          <a:p>
-            <a:pPr lvl="4" marL="2057400" indent="-228600" defTabSz="914400">
-              <a:lnSpc>
-                <a:spcPct val="90000"/>
-              </a:lnSpc>
-              <a:spcBef>
-                <a:spcPts val="499"/>
-              </a:spcBef>
-              <a:buClr>
-                <a:srgbClr val="000000"/>
-              </a:buClr>
-              <a:buFont typeface="Arial"/>
-              <a:buChar char="•"/>
-            </a:pPr>
-            <a:r>
-              <a:rPr b="0" lang="en-US" sz="1800" strike="noStrike" u="none">
-                <a:solidFill>
-                  <a:schemeClr val="dk1"/>
-                </a:solidFill>
-                <a:effectLst/>
-                <a:uFillTx/>
-                <a:latin typeface="Calibri"/>
-              </a:rPr>
-              <a:t>Fifth level</a:t>
-            </a:r>
-            <a:endParaRPr b="0" lang="en-US" sz="1800" strike="noStrike" u="none">
-              <a:solidFill>
-                <a:srgbClr val="000000"/>
-              </a:solidFill>
-              <a:effectLst/>
-              <a:uFillTx/>
-              <a:latin typeface="Arial"/>
-            </a:endParaRPr>
-          </a:p>
-        </p:txBody>
-      </p:sp>
-      <p:sp>
-        <p:nvSpPr>
-          <p:cNvPr id="38" name="PlaceHolder 3"/>
+          <p:cNvPr id="40" name="PlaceHolder 1"/>
           <p:cNvSpPr>
             <a:spLocks noGrp="1"/>
           </p:cNvSpPr>
@@ -6251,7 +6126,7 @@
         <p:spPr>
           <a:xfrm>
             <a:off x="838080" y="6356520"/>
-            <a:ext cx="2737080" cy="358920"/>
+            <a:ext cx="2736360" cy="358200"/>
           </a:xfrm>
           <a:prstGeom prst="rect">
             <a:avLst/>
@@ -6307,7 +6182,7 @@
                 <a:uFillTx/>
                 <a:latin typeface="Calibri"/>
               </a:rPr>
-              <a:t>&lt;date/time&gt;</a:t>
+              <a:t> </a:t>
             </a:r>
             <a:endParaRPr b="0" lang="en-US" sz="1200" strike="noStrike" u="none">
               <a:solidFill>
@@ -6322,7 +6197,7 @@
       </p:sp>
       <p:sp>
         <p:nvSpPr>
-          <p:cNvPr id="39" name="PlaceHolder 4"/>
+          <p:cNvPr id="41" name="PlaceHolder 2"/>
           <p:cNvSpPr>
             <a:spLocks noGrp="1"/>
           </p:cNvSpPr>
@@ -6333,7 +6208,7 @@
         <p:spPr>
           <a:xfrm>
             <a:off x="4038480" y="6356520"/>
-            <a:ext cx="4108680" cy="358920"/>
+            <a:ext cx="4107960" cy="358200"/>
           </a:xfrm>
           <a:prstGeom prst="rect">
             <a:avLst/>
@@ -6385,7 +6260,7 @@
                 <a:uFillTx/>
                 <a:latin typeface="Times New Roman"/>
               </a:rPr>
-              <a:t>&lt;footer&gt;</a:t>
+              <a:t> </a:t>
             </a:r>
             <a:endParaRPr b="0" lang="en-US" sz="1400" strike="noStrike" u="none">
               <a:solidFill>
@@ -6400,7 +6275,7 @@
       </p:sp>
       <p:sp>
         <p:nvSpPr>
-          <p:cNvPr id="40" name="PlaceHolder 5"/>
+          <p:cNvPr id="42" name="PlaceHolder 3"/>
           <p:cNvSpPr>
             <a:spLocks noGrp="1"/>
           </p:cNvSpPr>
@@ -6411,7 +6286,7 @@
         <p:spPr>
           <a:xfrm>
             <a:off x="8610480" y="6356520"/>
-            <a:ext cx="2737080" cy="358920"/>
+            <a:ext cx="2736360" cy="358200"/>
           </a:xfrm>
           <a:prstGeom prst="rect">
             <a:avLst/>
@@ -6456,7 +6331,7 @@
                 <a:tab algn="l" pos="0"/>
               </a:tabLst>
             </a:pPr>
-            <a:fld id="{094F97A0-A47F-4A4B-8AB4-A3ED0725B73F}" type="slidenum">
+            <a:fld id="{FA81E1F2-57B4-41EE-B7B5-56B2FF7482DF}" type="slidenum">
               <a:rPr b="0" lang="en-US" sz="1200" strike="noStrike" u="none">
                 <a:solidFill>
                   <a:schemeClr val="dk1">
@@ -6467,7 +6342,7 @@
                 <a:uFillTx/>
                 <a:latin typeface="Calibri"/>
               </a:rPr>
-              <a:t>&lt;number&gt;</a:t>
+              <a:t>14</a:t>
             </a:fld>
             <a:endParaRPr b="0" lang="en-US" sz="1200" strike="noStrike" u="none">
               <a:solidFill>
@@ -6487,7 +6362,7 @@
 
 <file path=ppt/slideLayouts/slideLayout9.xml><?xml version="1.0" encoding="utf-8"?>
 <p:sldLayout xmlns:a="http://schemas.openxmlformats.org/drawingml/2006/main" xmlns:p="http://schemas.openxmlformats.org/presentationml/2006/main" xmlns:r="http://schemas.openxmlformats.org/officeDocument/2006/relationships" xmlns:p14="http://schemas.microsoft.com/office/powerpoint/2010/main" xmlns:p15="http://schemas.microsoft.com/office/powerpoint/2012/main" xmlns:mc="http://schemas.openxmlformats.org/markup-compatibility/2006" type="blank" preserve="1">
-  <p:cSld name="Section Header">
+  <p:cSld name="Content with Caption">
     <p:bg>
       <p:bgPr>
         <a:solidFill>
@@ -6511,7 +6386,7 @@
       </p:grpSpPr>
       <p:sp>
         <p:nvSpPr>
-          <p:cNvPr id="41" name="PlaceHolder 1"/>
+          <p:cNvPr id="43" name="PlaceHolder 1"/>
           <p:cNvSpPr>
             <a:spLocks noGrp="1"/>
           </p:cNvSpPr>
@@ -6521,8 +6396,8 @@
         </p:nvSpPr>
         <p:spPr>
           <a:xfrm>
-            <a:off x="831960" y="1709640"/>
-            <a:ext cx="10509480" cy="2846520"/>
+            <a:off x="839880" y="457200"/>
+            <a:ext cx="3925440" cy="1593360"/>
           </a:xfrm>
           <a:prstGeom prst="rect">
             <a:avLst/>
@@ -6547,7 +6422,7 @@
               </a:tabLst>
             </a:pPr>
             <a:r>
-              <a:rPr b="0" lang="en-US" sz="6000" strike="noStrike" u="none">
+              <a:rPr b="0" lang="en-US" sz="3200" strike="noStrike" u="none">
                 <a:solidFill>
                   <a:schemeClr val="dk1"/>
                 </a:solidFill>
@@ -6557,7 +6432,7 @@
               </a:rPr>
               <a:t>Click to edit Master title style</a:t>
             </a:r>
-            <a:endParaRPr b="0" lang="en-US" sz="6000" strike="noStrike" u="none">
+            <a:endParaRPr b="0" lang="en-US" sz="3200" strike="noStrike" u="none">
               <a:solidFill>
                 <a:srgbClr val="000000"/>
               </a:solidFill>
@@ -6570,7 +6445,7 @@
       </p:sp>
       <p:sp>
         <p:nvSpPr>
-          <p:cNvPr id="42" name="PlaceHolder 2"/>
+          <p:cNvPr id="44" name="PlaceHolder 2"/>
           <p:cNvSpPr>
             <a:spLocks noGrp="1"/>
           </p:cNvSpPr>
@@ -6580,8 +6455,207 @@
         </p:nvSpPr>
         <p:spPr>
           <a:xfrm>
-            <a:off x="831960" y="4589640"/>
-            <a:ext cx="10509480" cy="1494000"/>
+            <a:off x="5183280" y="987480"/>
+            <a:ext cx="6165360" cy="4866840"/>
+          </a:xfrm>
+          <a:prstGeom prst="rect">
+            <a:avLst/>
+          </a:prstGeom>
+          <a:noFill/>
+          <a:ln w="0">
+            <a:noFill/>
+          </a:ln>
+        </p:spPr>
+        <p:txBody>
+          <a:bodyPr lIns="91440" rIns="91440" tIns="45720" bIns="45720" anchor="t">
+            <a:noAutofit/>
+          </a:bodyPr>
+          <a:p>
+            <a:pPr marL="228600" indent="-228600" defTabSz="914400">
+              <a:lnSpc>
+                <a:spcPct val="90000"/>
+              </a:lnSpc>
+              <a:spcBef>
+                <a:spcPts val="1001"/>
+              </a:spcBef>
+              <a:buClr>
+                <a:srgbClr val="000000"/>
+              </a:buClr>
+              <a:buFont typeface="Arial"/>
+              <a:buChar char="•"/>
+            </a:pPr>
+            <a:r>
+              <a:rPr b="0" lang="en-US" sz="3200" strike="noStrike" u="none">
+                <a:solidFill>
+                  <a:schemeClr val="dk1"/>
+                </a:solidFill>
+                <a:effectLst/>
+                <a:uFillTx/>
+                <a:latin typeface="Calibri"/>
+              </a:rPr>
+              <a:t>Click to edit Master text styles</a:t>
+            </a:r>
+            <a:endParaRPr b="0" lang="en-US" sz="3200" strike="noStrike" u="none">
+              <a:solidFill>
+                <a:srgbClr val="000000"/>
+              </a:solidFill>
+              <a:effectLst/>
+              <a:uFillTx/>
+              <a:latin typeface="Arial"/>
+            </a:endParaRPr>
+          </a:p>
+          <a:p>
+            <a:pPr lvl="1" marL="685800" indent="-228600" defTabSz="914400">
+              <a:lnSpc>
+                <a:spcPct val="90000"/>
+              </a:lnSpc>
+              <a:spcBef>
+                <a:spcPts val="499"/>
+              </a:spcBef>
+              <a:buClr>
+                <a:srgbClr val="000000"/>
+              </a:buClr>
+              <a:buFont typeface="Arial"/>
+              <a:buChar char="•"/>
+            </a:pPr>
+            <a:r>
+              <a:rPr b="0" lang="en-US" sz="2800" strike="noStrike" u="none">
+                <a:solidFill>
+                  <a:schemeClr val="dk1"/>
+                </a:solidFill>
+                <a:effectLst/>
+                <a:uFillTx/>
+                <a:latin typeface="Calibri"/>
+              </a:rPr>
+              <a:t>Second level</a:t>
+            </a:r>
+            <a:endParaRPr b="0" lang="en-US" sz="2800" strike="noStrike" u="none">
+              <a:solidFill>
+                <a:srgbClr val="000000"/>
+              </a:solidFill>
+              <a:effectLst/>
+              <a:uFillTx/>
+              <a:latin typeface="Arial"/>
+            </a:endParaRPr>
+          </a:p>
+          <a:p>
+            <a:pPr lvl="2" marL="1143000" indent="-228600" defTabSz="914400">
+              <a:lnSpc>
+                <a:spcPct val="90000"/>
+              </a:lnSpc>
+              <a:spcBef>
+                <a:spcPts val="499"/>
+              </a:spcBef>
+              <a:buClr>
+                <a:srgbClr val="000000"/>
+              </a:buClr>
+              <a:buFont typeface="Arial"/>
+              <a:buChar char="•"/>
+            </a:pPr>
+            <a:r>
+              <a:rPr b="0" lang="en-US" sz="2400" strike="noStrike" u="none">
+                <a:solidFill>
+                  <a:schemeClr val="dk1"/>
+                </a:solidFill>
+                <a:effectLst/>
+                <a:uFillTx/>
+                <a:latin typeface="Calibri"/>
+              </a:rPr>
+              <a:t>Third level</a:t>
+            </a:r>
+            <a:endParaRPr b="0" lang="en-US" sz="2400" strike="noStrike" u="none">
+              <a:solidFill>
+                <a:srgbClr val="000000"/>
+              </a:solidFill>
+              <a:effectLst/>
+              <a:uFillTx/>
+              <a:latin typeface="Arial"/>
+            </a:endParaRPr>
+          </a:p>
+          <a:p>
+            <a:pPr lvl="3" marL="1600200" indent="-228600" defTabSz="914400">
+              <a:lnSpc>
+                <a:spcPct val="90000"/>
+              </a:lnSpc>
+              <a:spcBef>
+                <a:spcPts val="499"/>
+              </a:spcBef>
+              <a:buClr>
+                <a:srgbClr val="000000"/>
+              </a:buClr>
+              <a:buFont typeface="Arial"/>
+              <a:buChar char="•"/>
+            </a:pPr>
+            <a:r>
+              <a:rPr b="0" lang="en-US" sz="2000" strike="noStrike" u="none">
+                <a:solidFill>
+                  <a:schemeClr val="dk1"/>
+                </a:solidFill>
+                <a:effectLst/>
+                <a:uFillTx/>
+                <a:latin typeface="Calibri"/>
+              </a:rPr>
+              <a:t>Fourth level</a:t>
+            </a:r>
+            <a:endParaRPr b="0" lang="en-US" sz="2000" strike="noStrike" u="none">
+              <a:solidFill>
+                <a:srgbClr val="000000"/>
+              </a:solidFill>
+              <a:effectLst/>
+              <a:uFillTx/>
+              <a:latin typeface="Arial"/>
+            </a:endParaRPr>
+          </a:p>
+          <a:p>
+            <a:pPr lvl="4" marL="2057400" indent="-228600" defTabSz="914400">
+              <a:lnSpc>
+                <a:spcPct val="90000"/>
+              </a:lnSpc>
+              <a:spcBef>
+                <a:spcPts val="499"/>
+              </a:spcBef>
+              <a:buClr>
+                <a:srgbClr val="000000"/>
+              </a:buClr>
+              <a:buFont typeface="Arial"/>
+              <a:buChar char="•"/>
+            </a:pPr>
+            <a:r>
+              <a:rPr b="0" lang="en-US" sz="2000" strike="noStrike" u="none">
+                <a:solidFill>
+                  <a:schemeClr val="dk1"/>
+                </a:solidFill>
+                <a:effectLst/>
+                <a:uFillTx/>
+                <a:latin typeface="Calibri"/>
+              </a:rPr>
+              <a:t>Fifth level</a:t>
+            </a:r>
+            <a:endParaRPr b="0" lang="en-US" sz="2000" strike="noStrike" u="none">
+              <a:solidFill>
+                <a:srgbClr val="000000"/>
+              </a:solidFill>
+              <a:effectLst/>
+              <a:uFillTx/>
+              <a:latin typeface="Arial"/>
+            </a:endParaRPr>
+          </a:p>
+        </p:txBody>
+      </p:sp>
+      <p:sp>
+        <p:nvSpPr>
+          <p:cNvPr id="45" name="PlaceHolder 3"/>
+          <p:cNvSpPr>
+            <a:spLocks noGrp="1"/>
+          </p:cNvSpPr>
+          <p:nvPr>
+            <p:ph type="body"/>
+          </p:nvPr>
+        </p:nvSpPr>
+        <p:spPr>
+          <a:xfrm>
+            <a:off x="839880" y="2057400"/>
+            <a:ext cx="3925440" cy="3804840"/>
           </a:xfrm>
           <a:prstGeom prst="rect">
             <a:avLst/>
@@ -6609,11 +6683,9 @@
               </a:tabLst>
             </a:pPr>
             <a:r>
-              <a:rPr b="0" lang="en-US" sz="2400" strike="noStrike" u="none">
+              <a:rPr b="0" lang="en-US" sz="1600" strike="noStrike" u="none">
                 <a:solidFill>
-                  <a:schemeClr val="dk1">
-                    <a:tint val="75000"/>
-                  </a:schemeClr>
+                  <a:schemeClr val="dk1"/>
                 </a:solidFill>
                 <a:effectLst/>
                 <a:uFillTx/>
@@ -6621,7 +6693,7 @@
               </a:rPr>
               <a:t>Click to edit Master text styles</a:t>
             </a:r>
-            <a:endParaRPr b="0" lang="en-US" sz="2400" strike="noStrike" u="none">
+            <a:endParaRPr b="0" lang="en-US" sz="1600" strike="noStrike" u="none">
               <a:solidFill>
                 <a:srgbClr val="000000"/>
               </a:solidFill>
@@ -6634,7 +6706,7 @@
       </p:sp>
       <p:sp>
         <p:nvSpPr>
-          <p:cNvPr id="43" name="PlaceHolder 3"/>
+          <p:cNvPr id="46" name="PlaceHolder 4"/>
           <p:cNvSpPr>
             <a:spLocks noGrp="1"/>
           </p:cNvSpPr>
@@ -6645,7 +6717,7 @@
         <p:spPr>
           <a:xfrm>
             <a:off x="838080" y="6356520"/>
-            <a:ext cx="2737080" cy="358920"/>
+            <a:ext cx="2736360" cy="358200"/>
           </a:xfrm>
           <a:prstGeom prst="rect">
             <a:avLst/>
@@ -6701,7 +6773,7 @@
                 <a:uFillTx/>
                 <a:latin typeface="Calibri"/>
               </a:rPr>
-              <a:t>&lt;date/time&gt;</a:t>
+              <a:t> </a:t>
             </a:r>
             <a:endParaRPr b="0" lang="en-US" sz="1200" strike="noStrike" u="none">
               <a:solidFill>
@@ -6716,7 +6788,7 @@
       </p:sp>
       <p:sp>
         <p:nvSpPr>
-          <p:cNvPr id="44" name="PlaceHolder 4"/>
+          <p:cNvPr id="47" name="PlaceHolder 5"/>
           <p:cNvSpPr>
             <a:spLocks noGrp="1"/>
           </p:cNvSpPr>
@@ -6727,7 +6799,7 @@
         <p:spPr>
           <a:xfrm>
             <a:off x="4038480" y="6356520"/>
-            <a:ext cx="4108680" cy="358920"/>
+            <a:ext cx="4107960" cy="358200"/>
           </a:xfrm>
           <a:prstGeom prst="rect">
             <a:avLst/>
@@ -6779,7 +6851,7 @@
                 <a:uFillTx/>
                 <a:latin typeface="Times New Roman"/>
               </a:rPr>
-              <a:t>&lt;footer&gt;</a:t>
+              <a:t> </a:t>
             </a:r>
             <a:endParaRPr b="0" lang="en-US" sz="1400" strike="noStrike" u="none">
               <a:solidFill>
@@ -6794,7 +6866,7 @@
       </p:sp>
       <p:sp>
         <p:nvSpPr>
-          <p:cNvPr id="45" name="PlaceHolder 5"/>
+          <p:cNvPr id="48" name="PlaceHolder 6"/>
           <p:cNvSpPr>
             <a:spLocks noGrp="1"/>
           </p:cNvSpPr>
@@ -6805,7 +6877,7 @@
         <p:spPr>
           <a:xfrm>
             <a:off x="8610480" y="6356520"/>
-            <a:ext cx="2737080" cy="358920"/>
+            <a:ext cx="2736360" cy="358200"/>
           </a:xfrm>
           <a:prstGeom prst="rect">
             <a:avLst/>
@@ -6850,7 +6922,7 @@
                 <a:tab algn="l" pos="0"/>
               </a:tabLst>
             </a:pPr>
-            <a:fld id="{39E1102C-B05D-4900-A952-5E2D7696FD53}" type="slidenum">
+            <a:fld id="{1C540CF7-47D2-41DC-BA2A-8646AB71CD34}" type="slidenum">
               <a:rPr b="0" lang="en-US" sz="1200" strike="noStrike" u="none">
                 <a:solidFill>
                   <a:schemeClr val="dk1">
@@ -6861,7 +6933,7 @@
                 <a:uFillTx/>
                 <a:latin typeface="Calibri"/>
               </a:rPr>
-              <a:t>&lt;number&gt;</a:t>
+              <a:t>14</a:t>
             </a:fld>
             <a:endParaRPr b="0" lang="en-US" sz="1200" strike="noStrike" u="none">
               <a:solidFill>
@@ -6945,7 +7017,7 @@
         <p:spPr>
           <a:xfrm>
             <a:off x="1523880" y="1143000"/>
-            <a:ext cx="9137880" cy="2283840"/>
+            <a:ext cx="9137160" cy="2283120"/>
           </a:xfrm>
           <a:prstGeom prst="rect">
             <a:avLst/>
@@ -7005,7 +7077,7 @@
         <p:spPr>
           <a:xfrm>
             <a:off x="1523880" y="4221360"/>
-            <a:ext cx="9137880" cy="1491480"/>
+            <a:ext cx="9137160" cy="1490760"/>
           </a:xfrm>
           <a:prstGeom prst="rect">
             <a:avLst/>
@@ -7136,7 +7208,7 @@
         <p:spPr>
           <a:xfrm>
             <a:off x="10199160" y="282240"/>
-            <a:ext cx="1794240" cy="594000"/>
+            <a:ext cx="1793520" cy="593280"/>
           </a:xfrm>
           <a:prstGeom prst="rect">
             <a:avLst/>
@@ -7199,7 +7271,7 @@
         <p:spPr>
           <a:xfrm>
             <a:off x="0" y="4680"/>
-            <a:ext cx="12182760" cy="6851880"/>
+            <a:ext cx="12182040" cy="6851160"/>
           </a:xfrm>
           <a:prstGeom prst="rect">
             <a:avLst/>
@@ -7256,7 +7328,7 @@
         <p:spPr>
           <a:xfrm>
             <a:off x="572400" y="238680"/>
-            <a:ext cx="11012400" cy="1127160"/>
+            <a:ext cx="11011680" cy="1126440"/>
           </a:xfrm>
           <a:prstGeom prst="rect">
             <a:avLst/>
@@ -7317,15 +7389,15 @@
         <p:spPr>
           <a:xfrm>
             <a:off x="572400" y="1681560"/>
-            <a:ext cx="10966680" cy="12240"/>
+            <a:ext cx="10965960" cy="11520"/>
           </a:xfrm>
           <a:custGeom>
             <a:avLst/>
             <a:gdLst>
-              <a:gd name="textAreaLeft" fmla="*/ 0 w 10966680"/>
-              <a:gd name="textAreaRight" fmla="*/ 10972800 w 10966680"/>
-              <a:gd name="textAreaTop" fmla="*/ 0 h 12240"/>
-              <a:gd name="textAreaBottom" fmla="*/ 18360 h 12240"/>
+              <a:gd name="textAreaLeft" fmla="*/ 0 w 10965960"/>
+              <a:gd name="textAreaRight" fmla="*/ 10972800 w 10965960"/>
+              <a:gd name="textAreaTop" fmla="*/ 0 h 11520"/>
+              <a:gd name="textAreaBottom" fmla="*/ 18360 h 11520"/>
               <a:gd name="GluePoint1X" fmla="*/ 0 w 10972800"/>
               <a:gd name="GluePoint1Y" fmla="*/ 0 h 18288"/>
               <a:gd name="GluePoint2X" fmla="*/ 356616 w 10972800"/>
@@ -7968,7 +8040,7 @@
         <p:spPr>
           <a:xfrm>
             <a:off x="10199520" y="282600"/>
-            <a:ext cx="1794240" cy="594000"/>
+            <a:ext cx="1793520" cy="593280"/>
           </a:xfrm>
           <a:prstGeom prst="rect">
             <a:avLst/>
@@ -7988,7 +8060,7 @@
         <p:spPr>
           <a:xfrm>
             <a:off x="6401520" y="1828800"/>
-            <a:ext cx="5255640" cy="4341960"/>
+            <a:ext cx="5254920" cy="4341240"/>
           </a:xfrm>
           <a:prstGeom prst="rect">
             <a:avLst/>
@@ -8185,7 +8257,7 @@
         <p:spPr>
           <a:xfrm>
             <a:off x="549360" y="2017440"/>
-            <a:ext cx="5621040" cy="4152960"/>
+            <a:ext cx="5620320" cy="4152240"/>
           </a:xfrm>
           <a:prstGeom prst="rect">
             <a:avLst/>
@@ -8248,7 +8320,7 @@
         <p:spPr>
           <a:xfrm>
             <a:off x="0" y="4680"/>
-            <a:ext cx="12182760" cy="6851880"/>
+            <a:ext cx="12182040" cy="6851160"/>
           </a:xfrm>
           <a:prstGeom prst="rect">
             <a:avLst/>
@@ -8305,7 +8377,7 @@
         <p:spPr>
           <a:xfrm>
             <a:off x="572400" y="238680"/>
-            <a:ext cx="11012400" cy="1127160"/>
+            <a:ext cx="11011680" cy="1126440"/>
           </a:xfrm>
           <a:prstGeom prst="rect">
             <a:avLst/>
@@ -8366,15 +8438,15 @@
         <p:spPr>
           <a:xfrm>
             <a:off x="572400" y="1681560"/>
-            <a:ext cx="10966680" cy="12240"/>
+            <a:ext cx="10965960" cy="11520"/>
           </a:xfrm>
           <a:custGeom>
             <a:avLst/>
             <a:gdLst>
-              <a:gd name="textAreaLeft" fmla="*/ 0 w 10966680"/>
-              <a:gd name="textAreaRight" fmla="*/ 10972800 w 10966680"/>
-              <a:gd name="textAreaTop" fmla="*/ 0 h 12240"/>
-              <a:gd name="textAreaBottom" fmla="*/ 18360 h 12240"/>
+              <a:gd name="textAreaLeft" fmla="*/ 0 w 10965960"/>
+              <a:gd name="textAreaRight" fmla="*/ 10972800 w 10965960"/>
+              <a:gd name="textAreaTop" fmla="*/ 0 h 11520"/>
+              <a:gd name="textAreaBottom" fmla="*/ 18360 h 11520"/>
               <a:gd name="GluePoint1X" fmla="*/ 0 w 10972800"/>
               <a:gd name="GluePoint1Y" fmla="*/ 0 h 18288"/>
               <a:gd name="GluePoint2X" fmla="*/ 356616 w 10972800"/>
@@ -9017,7 +9089,7 @@
         <p:spPr>
           <a:xfrm>
             <a:off x="10199520" y="282600"/>
-            <a:ext cx="1794240" cy="594000"/>
+            <a:ext cx="1793520" cy="593280"/>
           </a:xfrm>
           <a:prstGeom prst="rect">
             <a:avLst/>
@@ -9037,7 +9109,7 @@
         <p:spPr>
           <a:xfrm>
             <a:off x="457920" y="1970640"/>
-            <a:ext cx="5484240" cy="4341960"/>
+            <a:ext cx="5483520" cy="4341240"/>
           </a:xfrm>
           <a:prstGeom prst="rect">
             <a:avLst/>
@@ -9276,7 +9348,7 @@
         <p:spPr>
           <a:xfrm>
             <a:off x="5942880" y="2591640"/>
-            <a:ext cx="5617800" cy="2436840"/>
+            <a:ext cx="5617080" cy="2436120"/>
           </a:xfrm>
           <a:prstGeom prst="rect">
             <a:avLst/>
@@ -9339,7 +9411,7 @@
         <p:spPr>
           <a:xfrm>
             <a:off x="0" y="4680"/>
-            <a:ext cx="12182760" cy="6851880"/>
+            <a:ext cx="12182040" cy="6851160"/>
           </a:xfrm>
           <a:prstGeom prst="rect">
             <a:avLst/>
@@ -9396,7 +9468,7 @@
         <p:spPr>
           <a:xfrm>
             <a:off x="572400" y="457200"/>
-            <a:ext cx="11012400" cy="1142280"/>
+            <a:ext cx="11011680" cy="1141560"/>
           </a:xfrm>
           <a:prstGeom prst="rect">
             <a:avLst/>
@@ -9457,15 +9529,15 @@
         <p:spPr>
           <a:xfrm>
             <a:off x="572400" y="1681560"/>
-            <a:ext cx="10966680" cy="12240"/>
+            <a:ext cx="10965960" cy="11520"/>
           </a:xfrm>
           <a:custGeom>
             <a:avLst/>
             <a:gdLst>
-              <a:gd name="textAreaLeft" fmla="*/ 0 w 10966680"/>
-              <a:gd name="textAreaRight" fmla="*/ 10972800 w 10966680"/>
-              <a:gd name="textAreaTop" fmla="*/ 0 h 12240"/>
-              <a:gd name="textAreaBottom" fmla="*/ 18360 h 12240"/>
+              <a:gd name="textAreaLeft" fmla="*/ 0 w 10965960"/>
+              <a:gd name="textAreaRight" fmla="*/ 10972800 w 10965960"/>
+              <a:gd name="textAreaTop" fmla="*/ 0 h 11520"/>
+              <a:gd name="textAreaBottom" fmla="*/ 18360 h 11520"/>
               <a:gd name="GluePoint1X" fmla="*/ 0 w 10972800"/>
               <a:gd name="GluePoint1Y" fmla="*/ 0 h 18288"/>
               <a:gd name="GluePoint2X" fmla="*/ 356616 w 10972800"/>
@@ -10108,7 +10180,7 @@
         <p:spPr>
           <a:xfrm>
             <a:off x="10199520" y="282600"/>
-            <a:ext cx="1794240" cy="594000"/>
+            <a:ext cx="1793520" cy="593280"/>
           </a:xfrm>
           <a:prstGeom prst="rect">
             <a:avLst/>
@@ -10128,7 +10200,7 @@
         <p:spPr>
           <a:xfrm>
             <a:off x="685800" y="2057400"/>
-            <a:ext cx="5028480" cy="3885480"/>
+            <a:ext cx="5027760" cy="4053600"/>
           </a:xfrm>
           <a:prstGeom prst="rect">
             <a:avLst/>
@@ -10201,7 +10273,7 @@
                 <a:uFillTx/>
                 <a:latin typeface="Arial"/>
               </a:rPr>
-              <a:t>Validation loss per epoch is still used, but accuracy is replaced with validation mean dice score, which quantifies the average overlap between the model’s predicted segmentation masks and the ground-truth (human-annotated) labels across all classes and validation samples.</a:t>
+              <a:t>Validation loss per epoch is still used, but accuracy is replaced with validation mean dice score, which quantifies the average overlap between the model’s predicted segmentation masks and the ground-truth (human-annotated) labels across all classes and validation samples (values range from 0 to 1).</a:t>
             </a:r>
             <a:endParaRPr b="0" lang="en-US" sz="2000" strike="noStrike" u="none">
               <a:solidFill>
@@ -10233,7 +10305,7 @@
                 <a:uFillTx/>
                 <a:latin typeface="Arial"/>
               </a:rPr>
-              <a:t>For this training run the average loss was 0.42 and mean Dice score 0.70</a:t>
+              <a:t>For this training run the average loss was 0.42 and mean Dice score 0.74</a:t>
             </a:r>
             <a:endParaRPr b="0" lang="en-US" sz="2000" strike="noStrike" u="none">
               <a:solidFill>
@@ -10258,8 +10330,8 @@
         </p:blipFill>
         <p:spPr>
           <a:xfrm>
-            <a:off x="5715000" y="2411280"/>
-            <a:ext cx="6171480" cy="3303000"/>
+            <a:off x="5486400" y="2388960"/>
+            <a:ext cx="6171840" cy="3325680"/>
           </a:xfrm>
           <a:prstGeom prst="rect">
             <a:avLst/>
@@ -10322,7 +10394,7 @@
         <p:spPr>
           <a:xfrm>
             <a:off x="0" y="4680"/>
-            <a:ext cx="12182760" cy="6851880"/>
+            <a:ext cx="12182040" cy="6851160"/>
           </a:xfrm>
           <a:prstGeom prst="rect">
             <a:avLst/>
@@ -10379,7 +10451,7 @@
         <p:spPr>
           <a:xfrm>
             <a:off x="572400" y="457200"/>
-            <a:ext cx="11012400" cy="1142280"/>
+            <a:ext cx="11011680" cy="1141560"/>
           </a:xfrm>
           <a:prstGeom prst="rect">
             <a:avLst/>
@@ -10440,15 +10512,15 @@
         <p:spPr>
           <a:xfrm>
             <a:off x="572400" y="1681560"/>
-            <a:ext cx="10966680" cy="12240"/>
+            <a:ext cx="10965960" cy="11520"/>
           </a:xfrm>
           <a:custGeom>
             <a:avLst/>
             <a:gdLst>
-              <a:gd name="textAreaLeft" fmla="*/ 0 w 10966680"/>
-              <a:gd name="textAreaRight" fmla="*/ 10972800 w 10966680"/>
-              <a:gd name="textAreaTop" fmla="*/ 0 h 12240"/>
-              <a:gd name="textAreaBottom" fmla="*/ 18360 h 12240"/>
+              <a:gd name="textAreaLeft" fmla="*/ 0 w 10965960"/>
+              <a:gd name="textAreaRight" fmla="*/ 10972800 w 10965960"/>
+              <a:gd name="textAreaTop" fmla="*/ 0 h 11520"/>
+              <a:gd name="textAreaBottom" fmla="*/ 18360 h 11520"/>
               <a:gd name="GluePoint1X" fmla="*/ 0 w 10972800"/>
               <a:gd name="GluePoint1Y" fmla="*/ 0 h 18288"/>
               <a:gd name="GluePoint2X" fmla="*/ 356616 w 10972800"/>
@@ -11091,7 +11163,7 @@
         <p:spPr>
           <a:xfrm>
             <a:off x="10199520" y="282600"/>
-            <a:ext cx="1794240" cy="594000"/>
+            <a:ext cx="1793520" cy="593280"/>
           </a:xfrm>
           <a:prstGeom prst="rect">
             <a:avLst/>
@@ -11111,7 +11183,7 @@
         <p:spPr>
           <a:xfrm>
             <a:off x="685800" y="2057400"/>
-            <a:ext cx="10972080" cy="939600"/>
+            <a:ext cx="10971360" cy="1309320"/>
           </a:xfrm>
           <a:prstGeom prst="rect">
             <a:avLst/>
@@ -11152,7 +11224,7 @@
                 <a:uFillTx/>
                 <a:latin typeface="Arial"/>
               </a:rPr>
-              <a:t>Further evaluation can be conducted by examining the Mean Dice Score for the labels of interest.  The plots below illustrate the model performs best when segmenting the whole tumor (WT) and worse on enhancing tumor (ET).</a:t>
+              <a:t>Further evaluation can be conducted by examining the Mean Dice Score for the labels of interest.  The plots below illustrate the model performs best when segmenting the whole tumor (WT) and worse on enhancing tumor (ET). The closer to 1.0 the Dice score gets to, the better the segmentation prediction is.</a:t>
             </a:r>
             <a:endParaRPr b="0" lang="en-US" sz="2000" strike="noStrike" u="none">
               <a:solidFill>
@@ -11177,8 +11249,8 @@
         </p:blipFill>
         <p:spPr>
           <a:xfrm>
-            <a:off x="685800" y="2971800"/>
-            <a:ext cx="10353960" cy="3450600"/>
+            <a:off x="1143000" y="3276720"/>
+            <a:ext cx="10058040" cy="3352320"/>
           </a:xfrm>
           <a:prstGeom prst="rect">
             <a:avLst/>
@@ -11241,7 +11313,7 @@
         <p:spPr>
           <a:xfrm>
             <a:off x="8640" y="5400"/>
-            <a:ext cx="12182760" cy="6851880"/>
+            <a:ext cx="12182040" cy="6851160"/>
           </a:xfrm>
           <a:prstGeom prst="rect">
             <a:avLst/>
@@ -11298,7 +11370,7 @@
         <p:spPr>
           <a:xfrm>
             <a:off x="572400" y="457200"/>
-            <a:ext cx="11012400" cy="1142280"/>
+            <a:ext cx="11011680" cy="1141560"/>
           </a:xfrm>
           <a:prstGeom prst="rect">
             <a:avLst/>
@@ -11359,15 +11431,15 @@
         <p:spPr>
           <a:xfrm>
             <a:off x="572400" y="1681560"/>
-            <a:ext cx="10966680" cy="12240"/>
+            <a:ext cx="10965960" cy="11520"/>
           </a:xfrm>
           <a:custGeom>
             <a:avLst/>
             <a:gdLst>
-              <a:gd name="textAreaLeft" fmla="*/ 0 w 10966680"/>
-              <a:gd name="textAreaRight" fmla="*/ 10972800 w 10966680"/>
-              <a:gd name="textAreaTop" fmla="*/ 0 h 12240"/>
-              <a:gd name="textAreaBottom" fmla="*/ 18360 h 12240"/>
+              <a:gd name="textAreaLeft" fmla="*/ 0 w 10965960"/>
+              <a:gd name="textAreaRight" fmla="*/ 10972800 w 10965960"/>
+              <a:gd name="textAreaTop" fmla="*/ 0 h 11520"/>
+              <a:gd name="textAreaBottom" fmla="*/ 18360 h 11520"/>
               <a:gd name="GluePoint1X" fmla="*/ 0 w 10972800"/>
               <a:gd name="GluePoint1Y" fmla="*/ 0 h 18288"/>
               <a:gd name="GluePoint2X" fmla="*/ 356616 w 10972800"/>
@@ -12010,7 +12082,7 @@
         <p:spPr>
           <a:xfrm>
             <a:off x="10199520" y="282600"/>
-            <a:ext cx="1794240" cy="594000"/>
+            <a:ext cx="1793520" cy="593280"/>
           </a:xfrm>
           <a:prstGeom prst="rect">
             <a:avLst/>
@@ -12030,7 +12102,7 @@
         <p:spPr>
           <a:xfrm>
             <a:off x="685800" y="1828800"/>
-            <a:ext cx="10972080" cy="939600"/>
+            <a:ext cx="10971360" cy="938880"/>
           </a:xfrm>
           <a:prstGeom prst="rect">
             <a:avLst/>
@@ -12138,33 +12210,9 @@
           </a:p>
         </p:txBody>
       </p:sp>
-      <p:pic>
-        <p:nvPicPr>
-          <p:cNvPr id="142" name="" descr=""/>
-          <p:cNvPicPr/>
-          <p:nvPr/>
-        </p:nvPicPr>
-        <p:blipFill>
-          <a:blip r:embed="rId2"/>
-          <a:stretch/>
-        </p:blipFill>
-        <p:spPr>
-          <a:xfrm>
-            <a:off x="1371600" y="4401000"/>
-            <a:ext cx="8914680" cy="2227680"/>
-          </a:xfrm>
-          <a:prstGeom prst="rect">
-            <a:avLst/>
-          </a:prstGeom>
-          <a:noFill/>
-          <a:ln w="0">
-            <a:noFill/>
-          </a:ln>
-        </p:spPr>
-      </p:pic>
       <p:graphicFrame>
         <p:nvGraphicFramePr>
-          <p:cNvPr id="143" name=""/>
+          <p:cNvPr id="142" name=""/>
           <p:cNvGraphicFramePr/>
           <p:nvPr/>
         </p:nvGraphicFramePr>
@@ -12383,7 +12431,7 @@
                           <a:uFillTx/>
                           <a:latin typeface="Arial"/>
                         </a:rPr>
-                        <a:t>0.61</a:t>
+                        <a:t>0.49</a:t>
                       </a:r>
                       <a:endParaRPr b="0" lang="en-US" sz="1500" strike="noStrike" u="none">
                         <a:solidFill>
@@ -12505,7 +12553,7 @@
                           <a:uFillTx/>
                           <a:latin typeface="Arial"/>
                         </a:rPr>
-                        <a:t>0.65</a:t>
+                        <a:t>0.62</a:t>
                       </a:r>
                       <a:endParaRPr b="0" lang="en-US" sz="1500" strike="noStrike" u="none">
                         <a:solidFill>
@@ -12627,7 +12675,7 @@
                           <a:uFillTx/>
                           <a:latin typeface="Arial"/>
                         </a:rPr>
-                        <a:t>0.77</a:t>
+                        <a:t>0.73</a:t>
                       </a:r>
                       <a:endParaRPr b="0" lang="en-US" sz="1500" strike="noStrike" u="none">
                         <a:solidFill>
@@ -12749,7 +12797,7 @@
                           <a:uFillTx/>
                           <a:latin typeface="Arial"/>
                         </a:rPr>
-                        <a:t>0.42</a:t>
+                        <a:t>0.12</a:t>
                       </a:r>
                       <a:endParaRPr b="0" lang="en-US" sz="1500" strike="noStrike" u="none">
                         <a:solidFill>
@@ -12794,6 +12842,30 @@
           </a:graphicData>
         </a:graphic>
       </p:graphicFrame>
+      <p:pic>
+        <p:nvPicPr>
+          <p:cNvPr id="143" name="" descr=""/>
+          <p:cNvPicPr/>
+          <p:nvPr/>
+        </p:nvPicPr>
+        <p:blipFill>
+          <a:blip r:embed="rId2"/>
+          <a:stretch/>
+        </p:blipFill>
+        <p:spPr>
+          <a:xfrm>
+            <a:off x="1067040" y="4572000"/>
+            <a:ext cx="9905760" cy="2153160"/>
+          </a:xfrm>
+          <a:prstGeom prst="rect">
+            <a:avLst/>
+          </a:prstGeom>
+          <a:noFill/>
+          <a:ln w="0">
+            <a:noFill/>
+          </a:ln>
+        </p:spPr>
+      </p:pic>
     </p:spTree>
   </p:cSld>
   <mc:AlternateContent>
@@ -12846,7 +12918,7 @@
         <p:spPr>
           <a:xfrm>
             <a:off x="8640" y="5400"/>
-            <a:ext cx="12182760" cy="6851880"/>
+            <a:ext cx="12182040" cy="6851160"/>
           </a:xfrm>
           <a:prstGeom prst="rect">
             <a:avLst/>
@@ -12903,7 +12975,7 @@
         <p:spPr>
           <a:xfrm>
             <a:off x="572400" y="457200"/>
-            <a:ext cx="11012400" cy="1142280"/>
+            <a:ext cx="11011680" cy="1141560"/>
           </a:xfrm>
           <a:prstGeom prst="rect">
             <a:avLst/>
@@ -12964,15 +13036,15 @@
         <p:spPr>
           <a:xfrm>
             <a:off x="572400" y="1681560"/>
-            <a:ext cx="10966680" cy="12240"/>
+            <a:ext cx="10965960" cy="11520"/>
           </a:xfrm>
           <a:custGeom>
             <a:avLst/>
             <a:gdLst>
-              <a:gd name="textAreaLeft" fmla="*/ 0 w 10966680"/>
-              <a:gd name="textAreaRight" fmla="*/ 10972800 w 10966680"/>
-              <a:gd name="textAreaTop" fmla="*/ 0 h 12240"/>
-              <a:gd name="textAreaBottom" fmla="*/ 18360 h 12240"/>
+              <a:gd name="textAreaLeft" fmla="*/ 0 w 10965960"/>
+              <a:gd name="textAreaRight" fmla="*/ 10972800 w 10965960"/>
+              <a:gd name="textAreaTop" fmla="*/ 0 h 11520"/>
+              <a:gd name="textAreaBottom" fmla="*/ 18360 h 11520"/>
               <a:gd name="GluePoint1X" fmla="*/ 0 w 10972800"/>
               <a:gd name="GluePoint1Y" fmla="*/ 0 h 18288"/>
               <a:gd name="GluePoint2X" fmla="*/ 356616 w 10972800"/>
@@ -13615,7 +13687,7 @@
         <p:spPr>
           <a:xfrm>
             <a:off x="10199520" y="282600"/>
-            <a:ext cx="1794240" cy="594000"/>
+            <a:ext cx="1793520" cy="593280"/>
           </a:xfrm>
           <a:prstGeom prst="rect">
             <a:avLst/>
@@ -13635,7 +13707,7 @@
         <p:spPr>
           <a:xfrm>
             <a:off x="685800" y="2057400"/>
-            <a:ext cx="10743480" cy="4464360"/>
+            <a:ext cx="10742760" cy="4463640"/>
           </a:xfrm>
           <a:prstGeom prst="rect">
             <a:avLst/>
@@ -13869,7 +13941,7 @@
         <p:spPr>
           <a:xfrm>
             <a:off x="0" y="4680"/>
-            <a:ext cx="12182760" cy="6851880"/>
+            <a:ext cx="12182040" cy="6851160"/>
           </a:xfrm>
           <a:prstGeom prst="rect">
             <a:avLst/>
@@ -13926,7 +13998,7 @@
         <p:spPr>
           <a:xfrm>
             <a:off x="572400" y="238680"/>
-            <a:ext cx="11012400" cy="1127160"/>
+            <a:ext cx="11011680" cy="1126440"/>
           </a:xfrm>
           <a:prstGeom prst="rect">
             <a:avLst/>
@@ -13987,15 +14059,15 @@
         <p:spPr>
           <a:xfrm>
             <a:off x="572400" y="1681560"/>
-            <a:ext cx="10966680" cy="12240"/>
+            <a:ext cx="10965960" cy="11520"/>
           </a:xfrm>
           <a:custGeom>
             <a:avLst/>
             <a:gdLst>
-              <a:gd name="textAreaLeft" fmla="*/ 0 w 10966680"/>
-              <a:gd name="textAreaRight" fmla="*/ 10972800 w 10966680"/>
-              <a:gd name="textAreaTop" fmla="*/ 0 h 12240"/>
-              <a:gd name="textAreaBottom" fmla="*/ 18360 h 12240"/>
+              <a:gd name="textAreaLeft" fmla="*/ 0 w 10965960"/>
+              <a:gd name="textAreaRight" fmla="*/ 10972800 w 10965960"/>
+              <a:gd name="textAreaTop" fmla="*/ 0 h 11520"/>
+              <a:gd name="textAreaBottom" fmla="*/ 18360 h 11520"/>
               <a:gd name="GluePoint1X" fmla="*/ 0 w 10972800"/>
               <a:gd name="GluePoint1Y" fmla="*/ 0 h 18288"/>
               <a:gd name="GluePoint2X" fmla="*/ 356616 w 10972800"/>
@@ -14638,7 +14710,7 @@
         <p:spPr>
           <a:xfrm>
             <a:off x="10199520" y="282600"/>
-            <a:ext cx="1794240" cy="594000"/>
+            <a:ext cx="1793520" cy="593280"/>
           </a:xfrm>
           <a:prstGeom prst="rect">
             <a:avLst/>
@@ -15205,7 +15277,7 @@
         <p:spPr>
           <a:xfrm>
             <a:off x="0" y="4680"/>
-            <a:ext cx="12182760" cy="6851880"/>
+            <a:ext cx="12182040" cy="6851160"/>
           </a:xfrm>
           <a:prstGeom prst="rect">
             <a:avLst/>
@@ -15262,7 +15334,7 @@
         <p:spPr>
           <a:xfrm>
             <a:off x="572400" y="238680"/>
-            <a:ext cx="11012400" cy="1127160"/>
+            <a:ext cx="11011680" cy="1126440"/>
           </a:xfrm>
           <a:prstGeom prst="rect">
             <a:avLst/>
@@ -15323,15 +15395,15 @@
         <p:spPr>
           <a:xfrm>
             <a:off x="572400" y="1681560"/>
-            <a:ext cx="10966680" cy="12240"/>
+            <a:ext cx="10965960" cy="11520"/>
           </a:xfrm>
           <a:custGeom>
             <a:avLst/>
             <a:gdLst>
-              <a:gd name="textAreaLeft" fmla="*/ 0 w 10966680"/>
-              <a:gd name="textAreaRight" fmla="*/ 10972800 w 10966680"/>
-              <a:gd name="textAreaTop" fmla="*/ 0 h 12240"/>
-              <a:gd name="textAreaBottom" fmla="*/ 18360 h 12240"/>
+              <a:gd name="textAreaLeft" fmla="*/ 0 w 10965960"/>
+              <a:gd name="textAreaRight" fmla="*/ 10972800 w 10965960"/>
+              <a:gd name="textAreaTop" fmla="*/ 0 h 11520"/>
+              <a:gd name="textAreaBottom" fmla="*/ 18360 h 11520"/>
               <a:gd name="GluePoint1X" fmla="*/ 0 w 10972800"/>
               <a:gd name="GluePoint1Y" fmla="*/ 0 h 18288"/>
               <a:gd name="GluePoint2X" fmla="*/ 356616 w 10972800"/>
@@ -15974,7 +16046,7 @@
         <p:spPr>
           <a:xfrm>
             <a:off x="10199520" y="282600"/>
-            <a:ext cx="1794240" cy="594000"/>
+            <a:ext cx="1793520" cy="593280"/>
           </a:xfrm>
           <a:prstGeom prst="rect">
             <a:avLst/>
@@ -15994,7 +16066,7 @@
         <p:spPr>
           <a:xfrm>
             <a:off x="5257800" y="2971800"/>
-            <a:ext cx="1370880" cy="1452240"/>
+            <a:ext cx="1370160" cy="1451520"/>
           </a:xfrm>
           <a:prstGeom prst="rect">
             <a:avLst/>
@@ -16092,7 +16164,7 @@
         <p:spPr>
           <a:xfrm>
             <a:off x="572400" y="238680"/>
-            <a:ext cx="11012400" cy="902160"/>
+            <a:ext cx="11011680" cy="901440"/>
           </a:xfrm>
           <a:prstGeom prst="rect">
             <a:avLst/>
@@ -16154,15 +16226,15 @@
         <p:spPr>
           <a:xfrm>
             <a:off x="572400" y="1681560"/>
-            <a:ext cx="10966680" cy="12240"/>
+            <a:ext cx="10965960" cy="11520"/>
           </a:xfrm>
           <a:custGeom>
             <a:avLst/>
             <a:gdLst>
-              <a:gd name="textAreaLeft" fmla="*/ 0 w 10966680"/>
-              <a:gd name="textAreaRight" fmla="*/ 10972800 w 10966680"/>
-              <a:gd name="textAreaTop" fmla="*/ 0 h 12240"/>
-              <a:gd name="textAreaBottom" fmla="*/ 18360 h 12240"/>
+              <a:gd name="textAreaLeft" fmla="*/ 0 w 10965960"/>
+              <a:gd name="textAreaRight" fmla="*/ 10972800 w 10965960"/>
+              <a:gd name="textAreaTop" fmla="*/ 0 h 11520"/>
+              <a:gd name="textAreaBottom" fmla="*/ 18360 h 11520"/>
               <a:gd name="GluePoint1X" fmla="*/ 0 w 10972800"/>
               <a:gd name="GluePoint1Y" fmla="*/ 0 h 18288"/>
               <a:gd name="GluePoint2X" fmla="*/ 356616 w 10972800"/>
@@ -16801,7 +16873,7 @@
         <p:spPr>
           <a:xfrm>
             <a:off x="914400" y="2057400"/>
-            <a:ext cx="10283040" cy="4113000"/>
+            <a:ext cx="10282320" cy="4113000"/>
           </a:xfrm>
           <a:prstGeom prst="rect">
             <a:avLst/>
@@ -16932,7 +17004,7 @@
         <p:spPr>
           <a:xfrm>
             <a:off x="10199520" y="282600"/>
-            <a:ext cx="1794240" cy="594000"/>
+            <a:ext cx="1793520" cy="593280"/>
           </a:xfrm>
           <a:prstGeom prst="rect">
             <a:avLst/>
@@ -16995,7 +17067,7 @@
         <p:spPr>
           <a:xfrm>
             <a:off x="156960" y="0"/>
-            <a:ext cx="12182760" cy="6851880"/>
+            <a:ext cx="12182040" cy="6851160"/>
           </a:xfrm>
           <a:prstGeom prst="rect">
             <a:avLst/>
@@ -17052,7 +17124,7 @@
         <p:spPr>
           <a:xfrm>
             <a:off x="572400" y="238680"/>
-            <a:ext cx="11012400" cy="1198080"/>
+            <a:ext cx="11011680" cy="1197360"/>
           </a:xfrm>
           <a:prstGeom prst="rect">
             <a:avLst/>
@@ -17114,15 +17186,15 @@
         <p:spPr>
           <a:xfrm>
             <a:off x="572400" y="1681560"/>
-            <a:ext cx="10966680" cy="12240"/>
+            <a:ext cx="10965960" cy="11520"/>
           </a:xfrm>
           <a:custGeom>
             <a:avLst/>
             <a:gdLst>
-              <a:gd name="textAreaLeft" fmla="*/ 0 w 10966680"/>
-              <a:gd name="textAreaRight" fmla="*/ 10972800 w 10966680"/>
-              <a:gd name="textAreaTop" fmla="*/ 0 h 12240"/>
-              <a:gd name="textAreaBottom" fmla="*/ 18360 h 12240"/>
+              <a:gd name="textAreaLeft" fmla="*/ 0 w 10965960"/>
+              <a:gd name="textAreaRight" fmla="*/ 10972800 w 10965960"/>
+              <a:gd name="textAreaTop" fmla="*/ 0 h 11520"/>
+              <a:gd name="textAreaBottom" fmla="*/ 18360 h 11520"/>
               <a:gd name="GluePoint1X" fmla="*/ 0 w 10972800"/>
               <a:gd name="GluePoint1Y" fmla="*/ 0 h 18288"/>
               <a:gd name="GluePoint2X" fmla="*/ 356616 w 10972800"/>
@@ -17765,7 +17837,7 @@
         <p:spPr>
           <a:xfrm>
             <a:off x="685800" y="1829520"/>
-            <a:ext cx="10853640" cy="2969280"/>
+            <a:ext cx="10852920" cy="2968560"/>
           </a:xfrm>
           <a:prstGeom prst="rect">
             <a:avLst/>
@@ -17980,7 +18052,7 @@
         <p:spPr>
           <a:xfrm>
             <a:off x="10199520" y="282600"/>
-            <a:ext cx="1794240" cy="594000"/>
+            <a:ext cx="1793520" cy="593280"/>
           </a:xfrm>
           <a:prstGeom prst="rect">
             <a:avLst/>
@@ -18043,7 +18115,7 @@
         <p:spPr>
           <a:xfrm>
             <a:off x="156960" y="0"/>
-            <a:ext cx="12182760" cy="6851880"/>
+            <a:ext cx="12182040" cy="6851160"/>
           </a:xfrm>
           <a:prstGeom prst="rect">
             <a:avLst/>
@@ -18100,7 +18172,7 @@
         <p:spPr>
           <a:xfrm>
             <a:off x="572400" y="238680"/>
-            <a:ext cx="11012400" cy="1198080"/>
+            <a:ext cx="11011680" cy="1197360"/>
           </a:xfrm>
           <a:prstGeom prst="rect">
             <a:avLst/>
@@ -18162,15 +18234,15 @@
         <p:spPr>
           <a:xfrm>
             <a:off x="572400" y="1681560"/>
-            <a:ext cx="10966680" cy="12240"/>
+            <a:ext cx="10965960" cy="11520"/>
           </a:xfrm>
           <a:custGeom>
             <a:avLst/>
             <a:gdLst>
-              <a:gd name="textAreaLeft" fmla="*/ 0 w 10966680"/>
-              <a:gd name="textAreaRight" fmla="*/ 10972800 w 10966680"/>
-              <a:gd name="textAreaTop" fmla="*/ 0 h 12240"/>
-              <a:gd name="textAreaBottom" fmla="*/ 18360 h 12240"/>
+              <a:gd name="textAreaLeft" fmla="*/ 0 w 10965960"/>
+              <a:gd name="textAreaRight" fmla="*/ 10972800 w 10965960"/>
+              <a:gd name="textAreaTop" fmla="*/ 0 h 11520"/>
+              <a:gd name="textAreaBottom" fmla="*/ 18360 h 11520"/>
               <a:gd name="GluePoint1X" fmla="*/ 0 w 10972800"/>
               <a:gd name="GluePoint1Y" fmla="*/ 0 h 18288"/>
               <a:gd name="GluePoint2X" fmla="*/ 356616 w 10972800"/>
@@ -18813,7 +18885,7 @@
         <p:spPr>
           <a:xfrm>
             <a:off x="685800" y="1829520"/>
-            <a:ext cx="10853640" cy="4111920"/>
+            <a:ext cx="10852920" cy="4111200"/>
           </a:xfrm>
           <a:prstGeom prst="rect">
             <a:avLst/>
@@ -18851,31 +18923,7 @@
                 <a:latin typeface="Arial"/>
                 <a:ea typeface="Calibri"/>
               </a:rPr>
-              <a:t>When segmentation is applied to a brain </a:t>
-            </a:r>
-            <a:r>
-              <a:rPr b="0" lang="en-US" sz="2400" strike="noStrike" u="none">
-                <a:solidFill>
-                  <a:schemeClr val="dk1"/>
-                </a:solidFill>
-                <a:effectLst/>
-                <a:uFillTx/>
-                <a:latin typeface="Arial"/>
-                <a:ea typeface="Calibri"/>
-              </a:rPr>
-              <a:t>tumor MR Image it identifies the boundaries </a:t>
-            </a:r>
-            <a:r>
-              <a:rPr b="0" lang="en-US" sz="2400" strike="noStrike" u="none">
-                <a:solidFill>
-                  <a:schemeClr val="dk1"/>
-                </a:solidFill>
-                <a:effectLst/>
-                <a:uFillTx/>
-                <a:latin typeface="Arial"/>
-                <a:ea typeface="Calibri"/>
-              </a:rPr>
-              <a:t>of the tumor regions within the brain scan</a:t>
+              <a:t>When segmentation is applied to a brain tumor MR Image it identifies the boundaries of the tumor regions within the brain scan</a:t>
             </a:r>
             <a:endParaRPr b="0" lang="en-US" sz="2400" strike="noStrike" u="none">
               <a:solidFill>
@@ -18910,19 +18958,7 @@
                 <a:latin typeface="Arial"/>
                 <a:ea typeface="Calibri"/>
               </a:rPr>
-              <a:t>These boundaries are divided into masks </a:t>
-            </a:r>
-            <a:r>
-              <a:rPr b="0" lang="en-US" sz="2400" strike="noStrike" u="none">
-                <a:solidFill>
-                  <a:schemeClr val="dk1"/>
-                </a:solidFill>
-                <a:effectLst/>
-                <a:uFillTx/>
-                <a:latin typeface="Arial"/>
-                <a:ea typeface="Calibri"/>
-              </a:rPr>
-              <a:t>and assigned a label</a:t>
+              <a:t>These boundaries are divided into masks and assigned a label</a:t>
             </a:r>
             <a:endParaRPr b="0" lang="en-US" sz="2400" strike="noStrike" u="none">
               <a:solidFill>
@@ -18958,19 +18994,7 @@
                 <a:latin typeface="Arial"/>
                 <a:ea typeface="Calibri"/>
               </a:rPr>
-              <a:t>Label 0 – normal brain tissue (non-</a:t>
-            </a:r>
-            <a:r>
-              <a:rPr b="0" lang="en-US" sz="2400" strike="noStrike" u="none">
-                <a:solidFill>
-                  <a:schemeClr val="dk1"/>
-                </a:solidFill>
-                <a:effectLst/>
-                <a:uFillTx/>
-                <a:latin typeface="Arial"/>
-                <a:ea typeface="Calibri"/>
-              </a:rPr>
-              <a:t>tumor/background)</a:t>
+              <a:t>Label 0 – normal brain tissue (non-tumor/background)</a:t>
             </a:r>
             <a:endParaRPr b="0" lang="en-US" sz="2400" strike="noStrike" u="none">
               <a:solidFill>
@@ -19006,19 +19030,7 @@
                 <a:latin typeface="Arial"/>
                 <a:ea typeface="Calibri"/>
               </a:rPr>
-              <a:t>Label 1 – necrotic/non-enhancing </a:t>
-            </a:r>
-            <a:r>
-              <a:rPr b="0" lang="en-US" sz="2400" strike="noStrike" u="none">
-                <a:solidFill>
-                  <a:schemeClr val="dk1"/>
-                </a:solidFill>
-                <a:effectLst/>
-                <a:uFillTx/>
-                <a:latin typeface="Arial"/>
-                <a:ea typeface="Calibri"/>
-              </a:rPr>
-              <a:t>tumor core (NCR/NET)</a:t>
+              <a:t>Label 1 – necrotic/non-enhancing tumor core (NCR/NET)</a:t>
             </a:r>
             <a:endParaRPr b="0" lang="en-US" sz="2400" strike="noStrike" u="none">
               <a:solidFill>
@@ -19090,19 +19102,7 @@
                 <a:latin typeface="Arial"/>
                 <a:ea typeface="Calibri"/>
               </a:rPr>
-              <a:t>Label 3 – is not used to avoid </a:t>
-            </a:r>
-            <a:r>
-              <a:rPr b="0" lang="en-US" sz="2400" strike="noStrike" u="none">
-                <a:solidFill>
-                  <a:schemeClr val="dk1"/>
-                </a:solidFill>
-                <a:effectLst/>
-                <a:uFillTx/>
-                <a:latin typeface="Arial"/>
-                <a:ea typeface="Calibri"/>
-              </a:rPr>
-              <a:t>confusion with binary encoders</a:t>
+              <a:t>Label 3 – is not used to avoid confusion with binary encoders</a:t>
             </a:r>
             <a:endParaRPr b="0" lang="en-US" sz="2400" strike="noStrike" u="none">
               <a:solidFill>
@@ -19164,7 +19164,7 @@
         <p:spPr>
           <a:xfrm>
             <a:off x="10199520" y="282600"/>
-            <a:ext cx="1794240" cy="594000"/>
+            <a:ext cx="1793520" cy="593280"/>
           </a:xfrm>
           <a:prstGeom prst="rect">
             <a:avLst/>
@@ -19227,7 +19227,7 @@
         <p:spPr>
           <a:xfrm>
             <a:off x="156960" y="0"/>
-            <a:ext cx="12182760" cy="6851880"/>
+            <a:ext cx="12182040" cy="6851160"/>
           </a:xfrm>
           <a:prstGeom prst="rect">
             <a:avLst/>
@@ -19284,7 +19284,7 @@
         <p:spPr>
           <a:xfrm>
             <a:off x="572400" y="238680"/>
-            <a:ext cx="11012400" cy="1198080"/>
+            <a:ext cx="11011680" cy="1197360"/>
           </a:xfrm>
           <a:prstGeom prst="rect">
             <a:avLst/>
@@ -19346,15 +19346,15 @@
         <p:spPr>
           <a:xfrm>
             <a:off x="572400" y="1681560"/>
-            <a:ext cx="10966680" cy="12240"/>
+            <a:ext cx="10965960" cy="11520"/>
           </a:xfrm>
           <a:custGeom>
             <a:avLst/>
             <a:gdLst>
-              <a:gd name="textAreaLeft" fmla="*/ 0 w 10966680"/>
-              <a:gd name="textAreaRight" fmla="*/ 10972800 w 10966680"/>
-              <a:gd name="textAreaTop" fmla="*/ 0 h 12240"/>
-              <a:gd name="textAreaBottom" fmla="*/ 18360 h 12240"/>
+              <a:gd name="textAreaLeft" fmla="*/ 0 w 10965960"/>
+              <a:gd name="textAreaRight" fmla="*/ 10972800 w 10965960"/>
+              <a:gd name="textAreaTop" fmla="*/ 0 h 11520"/>
+              <a:gd name="textAreaBottom" fmla="*/ 18360 h 11520"/>
               <a:gd name="GluePoint1X" fmla="*/ 0 w 10972800"/>
               <a:gd name="GluePoint1Y" fmla="*/ 0 h 18288"/>
               <a:gd name="GluePoint2X" fmla="*/ 356616 w 10972800"/>
@@ -19997,7 +19997,7 @@
         <p:spPr>
           <a:xfrm>
             <a:off x="685800" y="1829520"/>
-            <a:ext cx="10853640" cy="4111920"/>
+            <a:ext cx="10852920" cy="4111200"/>
           </a:xfrm>
           <a:prstGeom prst="rect">
             <a:avLst/>
@@ -20310,7 +20310,7 @@
         <p:spPr>
           <a:xfrm>
             <a:off x="10199520" y="282600"/>
-            <a:ext cx="1794240" cy="594000"/>
+            <a:ext cx="1793520" cy="593280"/>
           </a:xfrm>
           <a:prstGeom prst="rect">
             <a:avLst/>
@@ -20373,7 +20373,7 @@
         <p:spPr>
           <a:xfrm>
             <a:off x="3600" y="0"/>
-            <a:ext cx="12182760" cy="6851880"/>
+            <a:ext cx="12182040" cy="6851160"/>
           </a:xfrm>
           <a:prstGeom prst="rect">
             <a:avLst/>
@@ -20430,7 +20430,7 @@
         <p:spPr>
           <a:xfrm>
             <a:off x="572400" y="238680"/>
-            <a:ext cx="11012400" cy="1359720"/>
+            <a:ext cx="11011680" cy="1359000"/>
           </a:xfrm>
           <a:prstGeom prst="rect">
             <a:avLst/>
@@ -20491,15 +20491,15 @@
         <p:spPr>
           <a:xfrm>
             <a:off x="572400" y="1681560"/>
-            <a:ext cx="10966680" cy="12240"/>
+            <a:ext cx="10965960" cy="11520"/>
           </a:xfrm>
           <a:custGeom>
             <a:avLst/>
             <a:gdLst>
-              <a:gd name="textAreaLeft" fmla="*/ 0 w 10966680"/>
-              <a:gd name="textAreaRight" fmla="*/ 10972800 w 10966680"/>
-              <a:gd name="textAreaTop" fmla="*/ 0 h 12240"/>
-              <a:gd name="textAreaBottom" fmla="*/ 18360 h 12240"/>
+              <a:gd name="textAreaLeft" fmla="*/ 0 w 10965960"/>
+              <a:gd name="textAreaRight" fmla="*/ 10972800 w 10965960"/>
+              <a:gd name="textAreaTop" fmla="*/ 0 h 11520"/>
+              <a:gd name="textAreaBottom" fmla="*/ 18360 h 11520"/>
               <a:gd name="GluePoint1X" fmla="*/ 0 w 10972800"/>
               <a:gd name="GluePoint1Y" fmla="*/ 0 h 18288"/>
               <a:gd name="GluePoint2X" fmla="*/ 356616 w 10972800"/>
@@ -21142,7 +21142,7 @@
         <p:spPr>
           <a:xfrm>
             <a:off x="228600" y="2057400"/>
-            <a:ext cx="5486040" cy="4343040"/>
+            <a:ext cx="5485320" cy="4342320"/>
           </a:xfrm>
           <a:prstGeom prst="rect">
             <a:avLst/>
@@ -21381,7 +21381,7 @@
         <p:spPr>
           <a:xfrm>
             <a:off x="10199520" y="282600"/>
-            <a:ext cx="1794240" cy="594000"/>
+            <a:ext cx="1793520" cy="593280"/>
           </a:xfrm>
           <a:prstGeom prst="rect">
             <a:avLst/>
@@ -21405,7 +21405,7 @@
         <p:spPr>
           <a:xfrm>
             <a:off x="5715000" y="2514600"/>
-            <a:ext cx="6171840" cy="3149640"/>
+            <a:ext cx="6171120" cy="3148920"/>
           </a:xfrm>
           <a:prstGeom prst="rect">
             <a:avLst/>
@@ -21425,7 +21425,7 @@
         <p:spPr>
           <a:xfrm>
             <a:off x="6629400" y="5943600"/>
-            <a:ext cx="4114440" cy="456840"/>
+            <a:ext cx="4113720" cy="456120"/>
           </a:xfrm>
           <a:prstGeom prst="rect">
             <a:avLst/>
@@ -21525,7 +21525,7 @@
         <p:spPr>
           <a:xfrm>
             <a:off x="3600" y="0"/>
-            <a:ext cx="12182760" cy="6851880"/>
+            <a:ext cx="12182040" cy="6851160"/>
           </a:xfrm>
           <a:prstGeom prst="rect">
             <a:avLst/>
@@ -21582,7 +21582,7 @@
         <p:spPr>
           <a:xfrm>
             <a:off x="572400" y="238680"/>
-            <a:ext cx="11012400" cy="1359720"/>
+            <a:ext cx="11011680" cy="1359000"/>
           </a:xfrm>
           <a:prstGeom prst="rect">
             <a:avLst/>
@@ -21643,15 +21643,15 @@
         <p:spPr>
           <a:xfrm>
             <a:off x="572400" y="1681560"/>
-            <a:ext cx="10966680" cy="12240"/>
+            <a:ext cx="10965960" cy="11520"/>
           </a:xfrm>
           <a:custGeom>
             <a:avLst/>
             <a:gdLst>
-              <a:gd name="textAreaLeft" fmla="*/ 0 w 10966680"/>
-              <a:gd name="textAreaRight" fmla="*/ 10972800 w 10966680"/>
-              <a:gd name="textAreaTop" fmla="*/ 0 h 12240"/>
-              <a:gd name="textAreaBottom" fmla="*/ 18360 h 12240"/>
+              <a:gd name="textAreaLeft" fmla="*/ 0 w 10965960"/>
+              <a:gd name="textAreaRight" fmla="*/ 10972800 w 10965960"/>
+              <a:gd name="textAreaTop" fmla="*/ 0 h 11520"/>
+              <a:gd name="textAreaBottom" fmla="*/ 18360 h 11520"/>
               <a:gd name="GluePoint1X" fmla="*/ 0 w 10972800"/>
               <a:gd name="GluePoint1Y" fmla="*/ 0 h 18288"/>
               <a:gd name="GluePoint2X" fmla="*/ 356616 w 10972800"/>
@@ -22290,7 +22290,7 @@
         <p:spPr>
           <a:xfrm>
             <a:off x="685800" y="2057400"/>
-            <a:ext cx="10969560" cy="1918440"/>
+            <a:ext cx="10968840" cy="1918440"/>
           </a:xfrm>
           <a:prstGeom prst="rect">
             <a:avLst/>
@@ -22421,7 +22421,7 @@
         <p:spPr>
           <a:xfrm>
             <a:off x="1418760" y="4343400"/>
-            <a:ext cx="8835480" cy="1806840"/>
+            <a:ext cx="8834760" cy="1806120"/>
           </a:xfrm>
           <a:prstGeom prst="rect">
             <a:avLst/>
@@ -22445,7 +22445,7 @@
         <p:spPr>
           <a:xfrm>
             <a:off x="10199520" y="282600"/>
-            <a:ext cx="1794240" cy="594000"/>
+            <a:ext cx="1793520" cy="593280"/>
           </a:xfrm>
           <a:prstGeom prst="rect">
             <a:avLst/>
@@ -22508,7 +22508,7 @@
         <p:spPr>
           <a:xfrm>
             <a:off x="0" y="0"/>
-            <a:ext cx="12182760" cy="6851880"/>
+            <a:ext cx="12182040" cy="6851160"/>
           </a:xfrm>
           <a:prstGeom prst="rect">
             <a:avLst/>
@@ -22565,7 +22565,7 @@
         <p:spPr>
           <a:xfrm>
             <a:off x="572400" y="238680"/>
-            <a:ext cx="11012400" cy="1127160"/>
+            <a:ext cx="11011680" cy="1126440"/>
           </a:xfrm>
           <a:prstGeom prst="rect">
             <a:avLst/>
@@ -22626,15 +22626,15 @@
         <p:spPr>
           <a:xfrm>
             <a:off x="572400" y="1681560"/>
-            <a:ext cx="10966680" cy="12240"/>
+            <a:ext cx="10965960" cy="11520"/>
           </a:xfrm>
           <a:custGeom>
             <a:avLst/>
             <a:gdLst>
-              <a:gd name="textAreaLeft" fmla="*/ 0 w 10966680"/>
-              <a:gd name="textAreaRight" fmla="*/ 10972800 w 10966680"/>
-              <a:gd name="textAreaTop" fmla="*/ 0 h 12240"/>
-              <a:gd name="textAreaBottom" fmla="*/ 18360 h 12240"/>
+              <a:gd name="textAreaLeft" fmla="*/ 0 w 10965960"/>
+              <a:gd name="textAreaRight" fmla="*/ 10972800 w 10965960"/>
+              <a:gd name="textAreaTop" fmla="*/ 0 h 11520"/>
+              <a:gd name="textAreaBottom" fmla="*/ 18360 h 11520"/>
               <a:gd name="GluePoint1X" fmla="*/ 0 w 10972800"/>
               <a:gd name="GluePoint1Y" fmla="*/ 0 h 18288"/>
               <a:gd name="GluePoint2X" fmla="*/ 356616 w 10972800"/>
@@ -23273,7 +23273,7 @@
         <p:spPr>
           <a:xfrm>
             <a:off x="685800" y="2057400"/>
-            <a:ext cx="10969560" cy="821160"/>
+            <a:ext cx="10968840" cy="821160"/>
           </a:xfrm>
           <a:prstGeom prst="rect">
             <a:avLst/>
@@ -23966,7 +23966,7 @@
         <p:spPr>
           <a:xfrm>
             <a:off x="10199520" y="282600"/>
-            <a:ext cx="1794240" cy="594000"/>
+            <a:ext cx="1793520" cy="593280"/>
           </a:xfrm>
           <a:prstGeom prst="rect">
             <a:avLst/>
@@ -24029,7 +24029,7 @@
         <p:spPr>
           <a:xfrm>
             <a:off x="0" y="4320"/>
-            <a:ext cx="12182760" cy="6851880"/>
+            <a:ext cx="12182040" cy="6851160"/>
           </a:xfrm>
           <a:prstGeom prst="rect">
             <a:avLst/>
@@ -24086,7 +24086,7 @@
         <p:spPr>
           <a:xfrm>
             <a:off x="572400" y="238680"/>
-            <a:ext cx="11012400" cy="1359720"/>
+            <a:ext cx="11011680" cy="1359000"/>
           </a:xfrm>
           <a:prstGeom prst="rect">
             <a:avLst/>
@@ -24147,15 +24147,15 @@
         <p:spPr>
           <a:xfrm>
             <a:off x="572400" y="1681560"/>
-            <a:ext cx="10966680" cy="12240"/>
+            <a:ext cx="10965960" cy="11520"/>
           </a:xfrm>
           <a:custGeom>
             <a:avLst/>
             <a:gdLst>
-              <a:gd name="textAreaLeft" fmla="*/ 0 w 10966680"/>
-              <a:gd name="textAreaRight" fmla="*/ 10972800 w 10966680"/>
-              <a:gd name="textAreaTop" fmla="*/ 0 h 12240"/>
-              <a:gd name="textAreaBottom" fmla="*/ 18360 h 12240"/>
+              <a:gd name="textAreaLeft" fmla="*/ 0 w 10965960"/>
+              <a:gd name="textAreaRight" fmla="*/ 10972800 w 10965960"/>
+              <a:gd name="textAreaTop" fmla="*/ 0 h 11520"/>
+              <a:gd name="textAreaBottom" fmla="*/ 18360 h 11520"/>
               <a:gd name="GluePoint1X" fmla="*/ 0 w 10972800"/>
               <a:gd name="GluePoint1Y" fmla="*/ 0 h 18288"/>
               <a:gd name="GluePoint2X" fmla="*/ 356616 w 10972800"/>
@@ -24794,7 +24794,7 @@
         <p:spPr>
           <a:xfrm>
             <a:off x="685800" y="2057400"/>
-            <a:ext cx="10969560" cy="821160"/>
+            <a:ext cx="10968840" cy="821160"/>
           </a:xfrm>
           <a:prstGeom prst="rect">
             <a:avLst/>
@@ -24877,7 +24877,7 @@
         <p:spPr>
           <a:xfrm>
             <a:off x="371520" y="3200400"/>
-            <a:ext cx="11285280" cy="2284200"/>
+            <a:ext cx="11284560" cy="2283480"/>
           </a:xfrm>
           <a:prstGeom prst="rect">
             <a:avLst/>
@@ -24901,7 +24901,7 @@
         <p:spPr>
           <a:xfrm>
             <a:off x="10199520" y="282600"/>
-            <a:ext cx="1794240" cy="594000"/>
+            <a:ext cx="1793520" cy="593280"/>
           </a:xfrm>
           <a:prstGeom prst="rect">
             <a:avLst/>
